--- a/autonima_results_deck.pptx
+++ b/autonima_results_deck.pptx
@@ -605,7 +605,7 @@
           <a:p>
             <a:r>
               <a:rPr lang="en-US" dirty="0"/>
-              <a:t>Caveat to say out loud: R2 rewards sharing the expert map's sparse non-negative form. Ranked (top-k dice) NeuroVLM leads NeuroQuery only 1.2x rather than 3.2x, and both still trail the search baseline. Not like-for-like either -- these answer a much cheaper question.</a:t>
+              <a:t>This replaces an earlier comparison against all-analyses, which confounded choosing analyses with using fewer of them.</a:t>
             </a:r>
             <a:endParaRPr lang="en-US" dirty="0"/>
           </a:p>
@@ -693,7 +693,7 @@
           <a:p>
             <a:r>
               <a:rPr lang="en-US" dirty="0"/>
-              <a:t>This reframes the leakage objection into a finding about the danger of LLM screening: mis-specification is roughly seven times the size of the tuning effect.</a:t>
+              <a:t>Caveat to say out loud: R2 rewards sharing the expert map's sparse non-negative form. Ranked (top-k dice) NeuroVLM leads NeuroQuery only 1.2x rather than 3.2x, and both still trail the search baseline. Not like-for-like either -- these answer a much cheaper question.</a:t>
             </a:r>
             <a:endParaRPr lang="en-US" dirty="0"/>
           </a:p>
@@ -781,7 +781,7 @@
           <a:p>
             <a:r>
               <a:rPr lang="en-US" dirty="0"/>
-              <a:t>experiments/e2e_retest/. Only the full-text screening rate is a clean per-stage measurement; parsing and annotation ran on already-drifted inputs.</a:t>
+              <a:t>This reframes the leakage objection into a finding about the danger of LLM screening: mis-specification is roughly seven times the size of the tuning effect.</a:t>
             </a:r>
             <a:endParaRPr lang="en-US" dirty="0"/>
           </a:p>
@@ -869,7 +869,7 @@
           <a:p>
             <a:r>
               <a:rPr lang="en-US" dirty="0"/>
-              <a:t>The estimate missed because full texts in these projects are far longer than the corpus median it extrapolated from.</a:t>
+              <a:t>experiments/e2e_retest/. Only the full-text screening rate is a clean per-stage measurement; parsing and annotation ran on already-drifted inputs.</a:t>
             </a:r>
             <a:endParaRPr lang="en-US" dirty="0"/>
           </a:p>
@@ -957,7 +957,7 @@
           <a:p>
             <a:r>
               <a:rPr lang="en-US" dirty="0"/>
-              <a:t>Each of these is a scope decision recorded with its reasoning, not an omission. Say them before a reviewer finds them.</a:t>
+              <a:t>The estimate missed because full texts in these projects are far longer than the corpus median it extrapolated from.</a:t>
             </a:r>
             <a:endParaRPr lang="en-US" dirty="0"/>
           </a:p>
@@ -1837,7 +1837,7 @@
           <a:p>
             <a:r>
               <a:rPr lang="en-US" dirty="0"/>
-              <a:t>This replaces an earlier comparison against all-analyses, which confounded choosing analyses with using fewer of them.</a:t>
+              <a:t>Under dice, among columns whose maps are not empty at threshold, none actually lose - the weakest are ties. The five r2 losses are in Figure 4b.</a:t>
             </a:r>
             <a:endParaRPr lang="en-US" dirty="0"/>
           </a:p>
@@ -2579,54 +2579,15 @@
                 <a:ea typeface="Cambria" pitchFamily="34" charset="-122"/>
                 <a:cs typeface="Cambria" pitchFamily="34" charset="-120"/>
               </a:rPr>
-              <a:t>Could you skip the studyset and just ask a model?</a:t>
+              <a:t>The gain is analysis selection, not paper selection</a:t>
             </a:r>
             <a:endParaRPr lang="en-US" sz="3100" dirty="0"/>
-          </a:p>
-        </p:txBody>
-      </p:sp>
-      <p:sp>
-        <p:nvSpPr>
-          <p:cNvPr id="3" name="Text 1"/>
-          <p:cNvSpPr txBox="1"/>
-          <p:nvPr/>
-        </p:nvSpPr>
-        <p:spPr>
-          <a:xfrm>
-            <a:off x="566928" y="1060704"/>
-            <a:ext cx="11057839" cy="420624"/>
-          </a:xfrm>
-          <a:prstGeom prst="rect">
-            <a:avLst/>
-          </a:prstGeom>
-          <a:noFill/>
-          <a:ln/>
-        </p:spPr>
-        <p:txBody>
-          <a:bodyPr wrap="square" lIns="0" tIns="0" rIns="0" bIns="0" rtlCol="0" anchor="ctr"/>
-          <a:lstStyle/>
-          <a:p>
-            <a:pPr indent="0" marL="0">
-              <a:buNone/>
-            </a:pPr>
-            <a:r>
-              <a:rPr lang="en-US" sz="1500" dirty="0">
-                <a:solidFill>
-                  <a:srgbClr val="1C7293"/>
-                </a:solidFill>
-                <a:latin typeface="Calibri" pitchFamily="34" charset="0"/>
-                <a:ea typeface="Calibri" pitchFamily="34" charset="-122"/>
-                <a:cs typeface="Calibri" pitchFamily="34" charset="-120"/>
-              </a:rPr>
-              <a:t>Two text→map models, same queries, same scoring: NeuroQuery and NeuroVLM.</a:t>
-            </a:r>
-            <a:endParaRPr lang="en-US" sz="1500" dirty="0"/>
           </a:p>
         </p:txBody>
       </p:sp>
       <p:pic>
         <p:nvPicPr>
-          <p:cNvPr id="4" name="Image 0" descr="/home/zorro/repos/autonima-results/reports/nature_methods_figures/figureS4_text_to_map_baselines.png">    </p:cNvPr>
+          <p:cNvPr id="3" name="Image 0" descr="/home/zorro/repos/autonima-results/reports/deck_figures/figure5_gain_from_analysis_selection.png">    </p:cNvPr>
           <p:cNvPicPr>
             <a:picLocks noChangeAspect="1"/>
           </p:cNvPicPr>
@@ -2640,14 +2601,53 @@
         </p:blipFill>
         <p:spPr>
           <a:xfrm>
-            <a:off x="2078511" y="1691640"/>
-            <a:ext cx="8034673" cy="3200400"/>
+            <a:off x="4534757" y="1371600"/>
+            <a:ext cx="6621589" cy="4572000"/>
           </a:xfrm>
           <a:prstGeom prst="rect">
             <a:avLst/>
           </a:prstGeom>
         </p:spPr>
       </p:pic>
+      <p:sp>
+        <p:nvSpPr>
+          <p:cNvPr id="4" name="Text 1"/>
+          <p:cNvSpPr txBox="1"/>
+          <p:nvPr/>
+        </p:nvSpPr>
+        <p:spPr>
+          <a:xfrm>
+            <a:off x="566928" y="1536192"/>
+            <a:ext cx="3429000" cy="1051560"/>
+          </a:xfrm>
+          <a:prstGeom prst="rect">
+            <a:avLst/>
+          </a:prstGeom>
+          <a:noFill/>
+          <a:ln/>
+        </p:spPr>
+        <p:txBody>
+          <a:bodyPr wrap="square" lIns="0" tIns="0" rIns="0" bIns="0" rtlCol="0" anchor="ctr"/>
+          <a:lstStyle/>
+          <a:p>
+            <a:pPr indent="0" marL="0">
+              <a:buNone/>
+            </a:pPr>
+            <a:r>
+              <a:rPr lang="en-US" sz="1350" dirty="0">
+                <a:solidFill>
+                  <a:srgbClr val="0F2A3F"/>
+                </a:solidFill>
+                <a:latin typeface="Calibri" pitchFamily="34" charset="0"/>
+                <a:ea typeface="Calibri" pitchFamily="34" charset="-122"/>
+                <a:cs typeface="Calibri" pitchFamily="34" charset="-120"/>
+              </a:rPr>
+              <a:t>Hold the studies fixed. Draw 500 random subsets the same size as the annotated one. Does annotation beat chance?</a:t>
+            </a:r>
+            <a:endParaRPr lang="en-US" sz="1350" dirty="0"/>
+          </a:p>
+        </p:txBody>
+      </p:sp>
       <p:sp>
         <p:nvSpPr>
           <p:cNvPr id="5" name="Shape 2"/>
@@ -2656,12 +2656,12 @@
         </p:nvSpPr>
         <p:spPr>
           <a:xfrm>
-            <a:off x="566928" y="5029200"/>
-            <a:ext cx="2572436" cy="868680"/>
+            <a:off x="566928" y="2697480"/>
+            <a:ext cx="3246120" cy="1051560"/>
           </a:xfrm>
           <a:prstGeom prst="roundRect">
             <a:avLst>
-              <a:gd name="adj" fmla="val 8421"/>
+              <a:gd name="adj" fmla="val 6957"/>
             </a:avLst>
           </a:prstGeom>
           <a:solidFill>
@@ -2683,8 +2683,8 @@
         </p:nvSpPr>
         <p:spPr>
           <a:xfrm>
-            <a:off x="676656" y="5120640"/>
-            <a:ext cx="2352980" cy="475488"/>
+            <a:off x="676656" y="2788920"/>
+            <a:ext cx="3026664" cy="475488"/>
           </a:xfrm>
           <a:prstGeom prst="rect">
             <a:avLst/>
@@ -2700,17 +2700,17 @@
               <a:buNone/>
             </a:pPr>
             <a:r>
-              <a:rPr lang="en-US" sz="2400" b="1" dirty="0">
-                <a:solidFill>
-                  <a:srgbClr val="0A3D5C"/>
+              <a:rPr lang="en-US" sz="3000" b="1" dirty="0">
+                <a:solidFill>
+                  <a:srgbClr val="E69F00"/>
                 </a:solidFill>
                 <a:latin typeface="Cambria" pitchFamily="34" charset="0"/>
                 <a:ea typeface="Cambria" pitchFamily="34" charset="-122"/>
                 <a:cs typeface="Cambria" pitchFamily="34" charset="-120"/>
               </a:rPr>
-              <a:t>0.075</a:t>
-            </a:r>
-            <a:endParaRPr lang="en-US" sz="2400" dirty="0"/>
+              <a:t>+0.211</a:t>
+            </a:r>
+            <a:endParaRPr lang="en-US" sz="3000" dirty="0"/>
           </a:p>
         </p:txBody>
       </p:sp>
@@ -2722,8 +2722,8 @@
         </p:nvSpPr>
         <p:spPr>
           <a:xfrm>
-            <a:off x="676656" y="5577840"/>
-            <a:ext cx="2352980" cy="246888"/>
+            <a:off x="676656" y="3246120"/>
+            <a:ext cx="3026664" cy="429768"/>
           </a:xfrm>
           <a:prstGeom prst="rect">
             <a:avLst/>
@@ -2747,7 +2747,7 @@
                 <a:ea typeface="Calibri" pitchFamily="34" charset="-122"/>
                 <a:cs typeface="Calibri" pitchFamily="34" charset="-120"/>
               </a:rPr>
-              <a:t>NeuroQuery, mean R²</a:t>
+              <a:t>median ΔR² over a size-matched random selection</a:t>
             </a:r>
             <a:endParaRPr lang="en-US" sz="1100" dirty="0"/>
           </a:p>
@@ -2755,322 +2755,92 @@
       </p:sp>
       <p:sp>
         <p:nvSpPr>
-          <p:cNvPr id="8" name="Shape 5"/>
-          <p:cNvSpPr/>
-          <p:nvPr/>
-        </p:nvSpPr>
-        <p:spPr>
-          <a:xfrm>
-            <a:off x="3395396" y="5029200"/>
-            <a:ext cx="2572436" cy="868680"/>
-          </a:xfrm>
-          <a:prstGeom prst="roundRect">
-            <a:avLst>
-              <a:gd name="adj" fmla="val 8421"/>
-            </a:avLst>
-          </a:prstGeom>
-          <a:solidFill>
-            <a:srgbClr val="EEF3F7"/>
-          </a:solidFill>
-          <a:ln w="12700">
-            <a:solidFill>
-              <a:srgbClr val="EEF3F7"/>
-            </a:solidFill>
-            <a:prstDash val="solid"/>
-          </a:ln>
-        </p:spPr>
+          <p:cNvPr id="8" name="Text 5"/>
+          <p:cNvSpPr txBox="1"/>
+          <p:nvPr/>
+        </p:nvSpPr>
+        <p:spPr>
+          <a:xfrm>
+            <a:off x="566928" y="3931920"/>
+            <a:ext cx="3429000" cy="1828800"/>
+          </a:xfrm>
+          <a:prstGeom prst="rect">
+            <a:avLst/>
+          </a:prstGeom>
+          <a:noFill/>
+          <a:ln/>
+        </p:spPr>
+        <p:txBody>
+          <a:bodyPr wrap="square" lIns="0" tIns="0" rIns="0" bIns="0" rtlCol="0" anchor="t"/>
+          <a:lstStyle/>
+          <a:p>
+            <a:pPr marL="342900" indent="-342900">
+              <a:spcAft>
+                <a:spcPts val="800"/>
+              </a:spcAft>
+              <a:buSzPct val="100000"/>
+              <a:buChar char="•"/>
+            </a:pPr>
+            <a:r>
+              <a:rPr lang="en-US" sz="1200" dirty="0">
+                <a:solidFill>
+                  <a:srgbClr val="0F2A3F"/>
+                </a:solidFill>
+                <a:latin typeface="Calibri" pitchFamily="34" charset="0"/>
+                <a:ea typeface="Calibri" pitchFamily="34" charset="-122"/>
+                <a:cs typeface="Calibri" pitchFamily="34" charset="-120"/>
+              </a:rPr>
+              <a:t>29 of 32 contrasts clear their own null at P &lt; 0.05</a:t>
+            </a:r>
+            <a:endParaRPr lang="en-US" sz="1200" dirty="0"/>
+          </a:p>
+          <a:p>
+            <a:pPr marL="342900" indent="-342900">
+              <a:spcAft>
+                <a:spcPts val="800"/>
+              </a:spcAft>
+              <a:buSzPct val="100000"/>
+              <a:buChar char="•"/>
+            </a:pPr>
+            <a:r>
+              <a:rPr lang="en-US" sz="1200" dirty="0">
+                <a:solidFill>
+                  <a:srgbClr val="0F2A3F"/>
+                </a:solidFill>
+                <a:latin typeface="Calibri" pitchFamily="34" charset="0"/>
+                <a:ea typeface="Calibri" pitchFamily="34" charset="-122"/>
+                <a:cs typeface="Calibri" pitchFamily="34" charset="-120"/>
+              </a:rPr>
+              <a:t>24 sit outside all 500 draws</a:t>
+            </a:r>
+            <a:endParaRPr lang="en-US" sz="1200" dirty="0"/>
+          </a:p>
+          <a:p>
+            <a:pPr marL="342900" indent="-342900">
+              <a:spcAft>
+                <a:spcPts val="800"/>
+              </a:spcAft>
+              <a:buSzPct val="100000"/>
+              <a:buChar char="•"/>
+            </a:pPr>
+            <a:r>
+              <a:rPr lang="en-US" sz="1200" dirty="0">
+                <a:solidFill>
+                  <a:srgbClr val="0F2A3F"/>
+                </a:solidFill>
+                <a:latin typeface="Calibri" pitchFamily="34" charset="0"/>
+                <a:ea typeface="Calibri" pitchFamily="34" charset="-122"/>
+                <a:cs typeface="Calibri" pitchFamily="34" charset="-120"/>
+              </a:rPr>
+              <a:t>The 3 that fail all select 31–77% of their pool — little left to select</a:t>
+            </a:r>
+            <a:endParaRPr lang="en-US" sz="1200" dirty="0"/>
+          </a:p>
+        </p:txBody>
       </p:sp>
       <p:sp>
         <p:nvSpPr>
           <p:cNvPr id="9" name="Text 6"/>
-          <p:cNvSpPr txBox="1"/>
-          <p:nvPr/>
-        </p:nvSpPr>
-        <p:spPr>
-          <a:xfrm>
-            <a:off x="3505124" y="5120640"/>
-            <a:ext cx="2352980" cy="475488"/>
-          </a:xfrm>
-          <a:prstGeom prst="rect">
-            <a:avLst/>
-          </a:prstGeom>
-          <a:noFill/>
-          <a:ln/>
-        </p:spPr>
-        <p:txBody>
-          <a:bodyPr wrap="square" lIns="0" tIns="0" rIns="0" bIns="0" rtlCol="0" anchor="ctr"/>
-          <a:lstStyle/>
-          <a:p>
-            <a:pPr algn="ctr" indent="0" marL="0">
-              <a:buNone/>
-            </a:pPr>
-            <a:r>
-              <a:rPr lang="en-US" sz="2400" b="1" dirty="0">
-                <a:solidFill>
-                  <a:srgbClr val="0A3D5C"/>
-                </a:solidFill>
-                <a:latin typeface="Cambria" pitchFamily="34" charset="0"/>
-                <a:ea typeface="Cambria" pitchFamily="34" charset="-122"/>
-                <a:cs typeface="Cambria" pitchFamily="34" charset="-120"/>
-              </a:rPr>
-              <a:t>0.238</a:t>
-            </a:r>
-            <a:endParaRPr lang="en-US" sz="2400" dirty="0"/>
-          </a:p>
-        </p:txBody>
-      </p:sp>
-      <p:sp>
-        <p:nvSpPr>
-          <p:cNvPr id="10" name="Text 7"/>
-          <p:cNvSpPr txBox="1"/>
-          <p:nvPr/>
-        </p:nvSpPr>
-        <p:spPr>
-          <a:xfrm>
-            <a:off x="3505124" y="5577840"/>
-            <a:ext cx="2352980" cy="246888"/>
-          </a:xfrm>
-          <a:prstGeom prst="rect">
-            <a:avLst/>
-          </a:prstGeom>
-          <a:noFill/>
-          <a:ln/>
-        </p:spPr>
-        <p:txBody>
-          <a:bodyPr wrap="square" lIns="0" tIns="0" rIns="0" bIns="0" rtlCol="0" anchor="t"/>
-          <a:lstStyle/>
-          <a:p>
-            <a:pPr algn="ctr" indent="0" marL="0">
-              <a:buNone/>
-            </a:pPr>
-            <a:r>
-              <a:rPr lang="en-US" sz="1100" dirty="0">
-                <a:solidFill>
-                  <a:srgbClr val="5C7286"/>
-                </a:solidFill>
-                <a:latin typeface="Calibri" pitchFamily="34" charset="0"/>
-                <a:ea typeface="Calibri" pitchFamily="34" charset="-122"/>
-                <a:cs typeface="Calibri" pitchFamily="34" charset="-120"/>
-              </a:rPr>
-              <a:t>NeuroVLM, mean R²</a:t>
-            </a:r>
-            <a:endParaRPr lang="en-US" sz="1100" dirty="0"/>
-          </a:p>
-        </p:txBody>
-      </p:sp>
-      <p:sp>
-        <p:nvSpPr>
-          <p:cNvPr id="11" name="Shape 8"/>
-          <p:cNvSpPr/>
-          <p:nvPr/>
-        </p:nvSpPr>
-        <p:spPr>
-          <a:xfrm>
-            <a:off x="6223864" y="5029200"/>
-            <a:ext cx="2572436" cy="868680"/>
-          </a:xfrm>
-          <a:prstGeom prst="roundRect">
-            <a:avLst>
-              <a:gd name="adj" fmla="val 8421"/>
-            </a:avLst>
-          </a:prstGeom>
-          <a:solidFill>
-            <a:srgbClr val="EEF3F7"/>
-          </a:solidFill>
-          <a:ln w="12700">
-            <a:solidFill>
-              <a:srgbClr val="EEF3F7"/>
-            </a:solidFill>
-            <a:prstDash val="solid"/>
-          </a:ln>
-        </p:spPr>
-      </p:sp>
-      <p:sp>
-        <p:nvSpPr>
-          <p:cNvPr id="12" name="Text 9"/>
-          <p:cNvSpPr txBox="1"/>
-          <p:nvPr/>
-        </p:nvSpPr>
-        <p:spPr>
-          <a:xfrm>
-            <a:off x="6333592" y="5120640"/>
-            <a:ext cx="2352980" cy="475488"/>
-          </a:xfrm>
-          <a:prstGeom prst="rect">
-            <a:avLst/>
-          </a:prstGeom>
-          <a:noFill/>
-          <a:ln/>
-        </p:spPr>
-        <p:txBody>
-          <a:bodyPr wrap="square" lIns="0" tIns="0" rIns="0" bIns="0" rtlCol="0" anchor="ctr"/>
-          <a:lstStyle/>
-          <a:p>
-            <a:pPr algn="ctr" indent="0" marL="0">
-              <a:buNone/>
-            </a:pPr>
-            <a:r>
-              <a:rPr lang="en-US" sz="2400" b="1" dirty="0">
-                <a:solidFill>
-                  <a:srgbClr val="0A3D5C"/>
-                </a:solidFill>
-                <a:latin typeface="Cambria" pitchFamily="34" charset="0"/>
-                <a:ea typeface="Cambria" pitchFamily="34" charset="-122"/>
-                <a:cs typeface="Cambria" pitchFamily="34" charset="-120"/>
-              </a:rPr>
-              <a:t>0.476</a:t>
-            </a:r>
-            <a:endParaRPr lang="en-US" sz="2400" dirty="0"/>
-          </a:p>
-        </p:txBody>
-      </p:sp>
-      <p:sp>
-        <p:nvSpPr>
-          <p:cNvPr id="13" name="Text 10"/>
-          <p:cNvSpPr txBox="1"/>
-          <p:nvPr/>
-        </p:nvSpPr>
-        <p:spPr>
-          <a:xfrm>
-            <a:off x="6333592" y="5577840"/>
-            <a:ext cx="2352980" cy="246888"/>
-          </a:xfrm>
-          <a:prstGeom prst="rect">
-            <a:avLst/>
-          </a:prstGeom>
-          <a:noFill/>
-          <a:ln/>
-        </p:spPr>
-        <p:txBody>
-          <a:bodyPr wrap="square" lIns="0" tIns="0" rIns="0" bIns="0" rtlCol="0" anchor="t"/>
-          <a:lstStyle/>
-          <a:p>
-            <a:pPr algn="ctr" indent="0" marL="0">
-              <a:buNone/>
-            </a:pPr>
-            <a:r>
-              <a:rPr lang="en-US" sz="1100" dirty="0">
-                <a:solidFill>
-                  <a:srgbClr val="5C7286"/>
-                </a:solidFill>
-                <a:latin typeface="Calibri" pitchFamily="34" charset="0"/>
-                <a:ea typeface="Calibri" pitchFamily="34" charset="-122"/>
-                <a:cs typeface="Calibri" pitchFamily="34" charset="-120"/>
-              </a:rPr>
-              <a:t>best search baseline</a:t>
-            </a:r>
-            <a:endParaRPr lang="en-US" sz="1100" dirty="0"/>
-          </a:p>
-        </p:txBody>
-      </p:sp>
-      <p:sp>
-        <p:nvSpPr>
-          <p:cNvPr id="14" name="Shape 11"/>
-          <p:cNvSpPr/>
-          <p:nvPr/>
-        </p:nvSpPr>
-        <p:spPr>
-          <a:xfrm>
-            <a:off x="9052331" y="5029200"/>
-            <a:ext cx="2572436" cy="868680"/>
-          </a:xfrm>
-          <a:prstGeom prst="roundRect">
-            <a:avLst>
-              <a:gd name="adj" fmla="val 8421"/>
-            </a:avLst>
-          </a:prstGeom>
-          <a:solidFill>
-            <a:srgbClr val="EEF3F7"/>
-          </a:solidFill>
-          <a:ln w="12700">
-            <a:solidFill>
-              <a:srgbClr val="EEF3F7"/>
-            </a:solidFill>
-            <a:prstDash val="solid"/>
-          </a:ln>
-        </p:spPr>
-      </p:sp>
-      <p:sp>
-        <p:nvSpPr>
-          <p:cNvPr id="15" name="Text 12"/>
-          <p:cNvSpPr txBox="1"/>
-          <p:nvPr/>
-        </p:nvSpPr>
-        <p:spPr>
-          <a:xfrm>
-            <a:off x="9162059" y="5120640"/>
-            <a:ext cx="2352980" cy="475488"/>
-          </a:xfrm>
-          <a:prstGeom prst="rect">
-            <a:avLst/>
-          </a:prstGeom>
-          <a:noFill/>
-          <a:ln/>
-        </p:spPr>
-        <p:txBody>
-          <a:bodyPr wrap="square" lIns="0" tIns="0" rIns="0" bIns="0" rtlCol="0" anchor="ctr"/>
-          <a:lstStyle/>
-          <a:p>
-            <a:pPr algn="ctr" indent="0" marL="0">
-              <a:buNone/>
-            </a:pPr>
-            <a:r>
-              <a:rPr lang="en-US" sz="2400" b="1" dirty="0">
-                <a:solidFill>
-                  <a:srgbClr val="E69F00"/>
-                </a:solidFill>
-                <a:latin typeface="Cambria" pitchFamily="34" charset="0"/>
-                <a:ea typeface="Cambria" pitchFamily="34" charset="-122"/>
-                <a:cs typeface="Cambria" pitchFamily="34" charset="-120"/>
-              </a:rPr>
-              <a:t>0.574</a:t>
-            </a:r>
-            <a:endParaRPr lang="en-US" sz="2400" dirty="0"/>
-          </a:p>
-        </p:txBody>
-      </p:sp>
-      <p:sp>
-        <p:nvSpPr>
-          <p:cNvPr id="16" name="Text 13"/>
-          <p:cNvSpPr txBox="1"/>
-          <p:nvPr/>
-        </p:nvSpPr>
-        <p:spPr>
-          <a:xfrm>
-            <a:off x="9162059" y="5577840"/>
-            <a:ext cx="2352980" cy="246888"/>
-          </a:xfrm>
-          <a:prstGeom prst="rect">
-            <a:avLst/>
-          </a:prstGeom>
-          <a:noFill/>
-          <a:ln/>
-        </p:spPr>
-        <p:txBody>
-          <a:bodyPr wrap="square" lIns="0" tIns="0" rIns="0" bIns="0" rtlCol="0" anchor="t"/>
-          <a:lstStyle/>
-          <a:p>
-            <a:pPr algn="ctr" indent="0" marL="0">
-              <a:buNone/>
-            </a:pPr>
-            <a:r>
-              <a:rPr lang="en-US" sz="1100" dirty="0">
-                <a:solidFill>
-                  <a:srgbClr val="5C7286"/>
-                </a:solidFill>
-                <a:latin typeface="Calibri" pitchFamily="34" charset="0"/>
-                <a:ea typeface="Calibri" pitchFamily="34" charset="-122"/>
-                <a:cs typeface="Calibri" pitchFamily="34" charset="-120"/>
-              </a:rPr>
-              <a:t>full pipeline</a:t>
-            </a:r>
-            <a:endParaRPr lang="en-US" sz="1100" dirty="0"/>
-          </a:p>
-        </p:txBody>
-      </p:sp>
-      <p:sp>
-        <p:nvSpPr>
-          <p:cNvPr id="17" name="Text 14"/>
           <p:cNvSpPr txBox="1"/>
           <p:nvPr/>
         </p:nvSpPr>
@@ -3101,7 +2871,7 @@
                 <a:ea typeface="Calibri" pitchFamily="34" charset="-122"/>
                 <a:cs typeface="Calibri" pitchFamily="34" charset="-120"/>
               </a:rPr>
-              <a:t>Both peak on canonical terms (executive function, working memory) and collapse on condition contrasts (all three emotion-regulation columns ≈ 0.002–0.08). A term is not an analysis.</a:t>
+              <a:t>Grey bar = 5–95% of the null; dot = observed. Matching the subset size is what separates selecting well from merely selecting fewer.</a:t>
             </a:r>
             <a:endParaRPr lang="en-US" sz="1050" dirty="0"/>
           </a:p>
@@ -3165,15 +2935,54 @@
                 <a:ea typeface="Cambria" pitchFamily="34" charset="-122"/>
                 <a:cs typeface="Cambria" pitchFamily="34" charset="-120"/>
               </a:rPr>
-              <a:t>The real risk is mis-prompting, not overfitting</a:t>
+              <a:t>Could you skip the studyset and just ask a model?</a:t>
             </a:r>
             <a:endParaRPr lang="en-US" sz="3100" dirty="0"/>
+          </a:p>
+        </p:txBody>
+      </p:sp>
+      <p:sp>
+        <p:nvSpPr>
+          <p:cNvPr id="3" name="Text 1"/>
+          <p:cNvSpPr txBox="1"/>
+          <p:nvPr/>
+        </p:nvSpPr>
+        <p:spPr>
+          <a:xfrm>
+            <a:off x="566928" y="1060704"/>
+            <a:ext cx="11057839" cy="420624"/>
+          </a:xfrm>
+          <a:prstGeom prst="rect">
+            <a:avLst/>
+          </a:prstGeom>
+          <a:noFill/>
+          <a:ln/>
+        </p:spPr>
+        <p:txBody>
+          <a:bodyPr wrap="square" lIns="0" tIns="0" rIns="0" bIns="0" rtlCol="0" anchor="ctr"/>
+          <a:lstStyle/>
+          <a:p>
+            <a:pPr indent="0" marL="0">
+              <a:buNone/>
+            </a:pPr>
+            <a:r>
+              <a:rPr lang="en-US" sz="1500" dirty="0">
+                <a:solidFill>
+                  <a:srgbClr val="1C7293"/>
+                </a:solidFill>
+                <a:latin typeface="Calibri" pitchFamily="34" charset="0"/>
+                <a:ea typeface="Calibri" pitchFamily="34" charset="-122"/>
+                <a:cs typeface="Calibri" pitchFamily="34" charset="-120"/>
+              </a:rPr>
+              <a:t>Two text→map models, same queries, same scoring: NeuroQuery and NeuroVLM.</a:t>
+            </a:r>
+            <a:endParaRPr lang="en-US" sz="1500" dirty="0"/>
           </a:p>
         </p:txBody>
       </p:sp>
       <p:pic>
         <p:nvPicPr>
-          <p:cNvPr id="3" name="Image 0" descr="/home/zorro/repos/autonima-results/reports/nature_methods_figures/figureS2_tier_progression.png">    </p:cNvPr>
+          <p:cNvPr id="4" name="Image 0" descr="/home/zorro/repos/autonima-results/reports/deck_figures/figureS4_text_to_map_baselines.png">    </p:cNvPr>
           <p:cNvPicPr>
             <a:picLocks noChangeAspect="1"/>
           </p:cNvPicPr>
@@ -3187,53 +2996,14 @@
         </p:blipFill>
         <p:spPr>
           <a:xfrm>
-            <a:off x="566928" y="1856031"/>
-            <a:ext cx="4297680" cy="3603138"/>
+            <a:off x="2631258" y="1691640"/>
+            <a:ext cx="6929179" cy="3200400"/>
           </a:xfrm>
           <a:prstGeom prst="rect">
             <a:avLst/>
           </a:prstGeom>
         </p:spPr>
       </p:pic>
-      <p:sp>
-        <p:nvSpPr>
-          <p:cNvPr id="4" name="Text 1"/>
-          <p:cNvSpPr txBox="1"/>
-          <p:nvPr/>
-        </p:nvSpPr>
-        <p:spPr>
-          <a:xfrm>
-            <a:off x="5212080" y="1600200"/>
-            <a:ext cx="6400800" cy="411480"/>
-          </a:xfrm>
-          <a:prstGeom prst="rect">
-            <a:avLst/>
-          </a:prstGeom>
-          <a:noFill/>
-          <a:ln/>
-        </p:spPr>
-        <p:txBody>
-          <a:bodyPr wrap="square" lIns="0" tIns="0" rIns="0" bIns="0" rtlCol="0" anchor="ctr"/>
-          <a:lstStyle/>
-          <a:p>
-            <a:pPr indent="0" marL="0">
-              <a:buNone/>
-            </a:pPr>
-            <a:r>
-              <a:rPr lang="en-US" sz="1350" dirty="0">
-                <a:solidFill>
-                  <a:srgbClr val="0F2A3F"/>
-                </a:solidFill>
-                <a:latin typeface="Calibri" pitchFamily="34" charset="0"/>
-                <a:ea typeface="Calibri" pitchFamily="34" charset="-122"/>
-                <a:cs typeface="Calibri" pitchFamily="34" charset="-120"/>
-              </a:rPr>
-              <a:t>Runs are registered by how much of the benchmark shaped their criteria.</a:t>
-            </a:r>
-            <a:endParaRPr lang="en-US" sz="1350" dirty="0"/>
-          </a:p>
-        </p:txBody>
-      </p:sp>
       <p:sp>
         <p:nvSpPr>
           <p:cNvPr id="5" name="Shape 2"/>
@@ -3242,12 +3012,12 @@
         </p:nvSpPr>
         <p:spPr>
           <a:xfrm>
-            <a:off x="5212080" y="2148840"/>
-            <a:ext cx="3076956" cy="1417320"/>
+            <a:off x="566928" y="5029200"/>
+            <a:ext cx="2572436" cy="868680"/>
           </a:xfrm>
           <a:prstGeom prst="roundRect">
             <a:avLst>
-              <a:gd name="adj" fmla="val 5161"/>
+              <a:gd name="adj" fmla="val 8421"/>
             </a:avLst>
           </a:prstGeom>
           <a:solidFill>
@@ -3269,8 +3039,8 @@
         </p:nvSpPr>
         <p:spPr>
           <a:xfrm>
-            <a:off x="5321808" y="2240280"/>
-            <a:ext cx="2857500" cy="475488"/>
+            <a:off x="676656" y="5120640"/>
+            <a:ext cx="2352980" cy="475488"/>
           </a:xfrm>
           <a:prstGeom prst="rect">
             <a:avLst/>
@@ -3286,17 +3056,17 @@
               <a:buNone/>
             </a:pPr>
             <a:r>
-              <a:rPr lang="en-US" sz="2800" b="1" dirty="0">
-                <a:solidFill>
-                  <a:srgbClr val="E69F00"/>
+              <a:rPr lang="en-US" sz="2400" b="1" dirty="0">
+                <a:solidFill>
+                  <a:srgbClr val="0A3D5C"/>
                 </a:solidFill>
                 <a:latin typeface="Cambria" pitchFamily="34" charset="0"/>
                 <a:ea typeface="Cambria" pitchFamily="34" charset="-122"/>
                 <a:cs typeface="Cambria" pitchFamily="34" charset="-120"/>
               </a:rPr>
-              <a:t>+0.221</a:t>
-            </a:r>
-            <a:endParaRPr lang="en-US" sz="2800" dirty="0"/>
+              <a:t>0.075</a:t>
+            </a:r>
+            <a:endParaRPr lang="en-US" sz="2400" dirty="0"/>
           </a:p>
         </p:txBody>
       </p:sp>
@@ -3308,8 +3078,8 @@
         </p:nvSpPr>
         <p:spPr>
           <a:xfrm>
-            <a:off x="5321808" y="2697480"/>
-            <a:ext cx="2857500" cy="795528"/>
+            <a:off x="676656" y="5577840"/>
+            <a:ext cx="2352980" cy="246888"/>
           </a:xfrm>
           <a:prstGeom prst="rect">
             <a:avLst/>
@@ -3333,24 +3103,7 @@
                 <a:ea typeface="Calibri" pitchFamily="34" charset="-122"/>
                 <a:cs typeface="Calibri" pitchFamily="34" charset="-120"/>
               </a:rPr>
-              <a:t>verbatim → manual</a:t>
-            </a:r>
-            <a:endParaRPr lang="en-US" sz="1100" dirty="0"/>
-          </a:p>
-          <a:p>
-            <a:pPr algn="ctr" indent="0" marL="0">
-              <a:buNone/>
-            </a:pPr>
-            <a:r>
-              <a:rPr lang="en-US" sz="1100" dirty="0">
-                <a:solidFill>
-                  <a:srgbClr val="5C7286"/>
-                </a:solidFill>
-                <a:latin typeface="Calibri" pitchFamily="34" charset="0"/>
-                <a:ea typeface="Calibri" pitchFamily="34" charset="-122"/>
-                <a:cs typeface="Calibri" pitchFamily="34" charset="-120"/>
-              </a:rPr>
-              <a:t>fixing major oversights in mis-specified criteria</a:t>
+              <a:t>NeuroQuery, mean R²</a:t>
             </a:r>
             <a:endParaRPr lang="en-US" sz="1100" dirty="0"/>
           </a:p>
@@ -3364,12 +3117,12 @@
         </p:nvSpPr>
         <p:spPr>
           <a:xfrm>
-            <a:off x="8545068" y="2148840"/>
-            <a:ext cx="3076956" cy="1417320"/>
+            <a:off x="3395396" y="5029200"/>
+            <a:ext cx="2572436" cy="868680"/>
           </a:xfrm>
           <a:prstGeom prst="roundRect">
             <a:avLst>
-              <a:gd name="adj" fmla="val 5161"/>
+              <a:gd name="adj" fmla="val 8421"/>
             </a:avLst>
           </a:prstGeom>
           <a:solidFill>
@@ -3391,8 +3144,8 @@
         </p:nvSpPr>
         <p:spPr>
           <a:xfrm>
-            <a:off x="8654796" y="2240280"/>
-            <a:ext cx="2857500" cy="475488"/>
+            <a:off x="3505124" y="5120640"/>
+            <a:ext cx="2352980" cy="475488"/>
           </a:xfrm>
           <a:prstGeom prst="rect">
             <a:avLst/>
@@ -3408,7 +3161,7 @@
               <a:buNone/>
             </a:pPr>
             <a:r>
-              <a:rPr lang="en-US" sz="2800" b="1" dirty="0">
+              <a:rPr lang="en-US" sz="2400" b="1" dirty="0">
                 <a:solidFill>
                   <a:srgbClr val="0A3D5C"/>
                 </a:solidFill>
@@ -3416,9 +3169,9 @@
                 <a:ea typeface="Cambria" pitchFamily="34" charset="-122"/>
                 <a:cs typeface="Cambria" pitchFamily="34" charset="-120"/>
               </a:rPr>
-              <a:t>+0.031</a:t>
-            </a:r>
-            <a:endParaRPr lang="en-US" sz="2800" dirty="0"/>
+              <a:t>0.238</a:t>
+            </a:r>
+            <a:endParaRPr lang="en-US" sz="2400" dirty="0"/>
           </a:p>
         </p:txBody>
       </p:sp>
@@ -3430,8 +3183,8 @@
         </p:nvSpPr>
         <p:spPr>
           <a:xfrm>
-            <a:off x="8654796" y="2697480"/>
-            <a:ext cx="2857500" cy="795528"/>
+            <a:off x="3505124" y="5577840"/>
+            <a:ext cx="2352980" cy="246888"/>
           </a:xfrm>
           <a:prstGeom prst="rect">
             <a:avLst/>
@@ -3455,15 +3208,103 @@
                 <a:ea typeface="Calibri" pitchFamily="34" charset="-122"/>
                 <a:cs typeface="Calibri" pitchFamily="34" charset="-120"/>
               </a:rPr>
-              <a:t>manual → best</a:t>
+              <a:t>NeuroVLM, mean R²</a:t>
             </a:r>
             <a:endParaRPr lang="en-US" sz="1100" dirty="0"/>
           </a:p>
+        </p:txBody>
+      </p:sp>
+      <p:sp>
+        <p:nvSpPr>
+          <p:cNvPr id="11" name="Shape 8"/>
+          <p:cNvSpPr/>
+          <p:nvPr/>
+        </p:nvSpPr>
+        <p:spPr>
+          <a:xfrm>
+            <a:off x="6223864" y="5029200"/>
+            <a:ext cx="2572436" cy="868680"/>
+          </a:xfrm>
+          <a:prstGeom prst="roundRect">
+            <a:avLst>
+              <a:gd name="adj" fmla="val 8421"/>
+            </a:avLst>
+          </a:prstGeom>
+          <a:solidFill>
+            <a:srgbClr val="EEF3F7"/>
+          </a:solidFill>
+          <a:ln w="12700">
+            <a:solidFill>
+              <a:srgbClr val="EEF3F7"/>
+            </a:solidFill>
+            <a:prstDash val="solid"/>
+          </a:ln>
+        </p:spPr>
+      </p:sp>
+      <p:sp>
+        <p:nvSpPr>
+          <p:cNvPr id="12" name="Text 9"/>
+          <p:cNvSpPr txBox="1"/>
+          <p:nvPr/>
+        </p:nvSpPr>
+        <p:spPr>
+          <a:xfrm>
+            <a:off x="6333592" y="5120640"/>
+            <a:ext cx="2352980" cy="475488"/>
+          </a:xfrm>
+          <a:prstGeom prst="rect">
+            <a:avLst/>
+          </a:prstGeom>
+          <a:noFill/>
+          <a:ln/>
+        </p:spPr>
+        <p:txBody>
+          <a:bodyPr wrap="square" lIns="0" tIns="0" rIns="0" bIns="0" rtlCol="0" anchor="ctr"/>
+          <a:lstStyle/>
           <a:p>
             <a:pPr algn="ctr" indent="0" marL="0">
               <a:buNone/>
             </a:pPr>
             <a:r>
+              <a:rPr lang="en-US" sz="2400" b="1" dirty="0">
+                <a:solidFill>
+                  <a:srgbClr val="0A3D5C"/>
+                </a:solidFill>
+                <a:latin typeface="Cambria" pitchFamily="34" charset="0"/>
+                <a:ea typeface="Cambria" pitchFamily="34" charset="-122"/>
+                <a:cs typeface="Cambria" pitchFamily="34" charset="-120"/>
+              </a:rPr>
+              <a:t>0.476</a:t>
+            </a:r>
+            <a:endParaRPr lang="en-US" sz="2400" dirty="0"/>
+          </a:p>
+        </p:txBody>
+      </p:sp>
+      <p:sp>
+        <p:nvSpPr>
+          <p:cNvPr id="13" name="Text 10"/>
+          <p:cNvSpPr txBox="1"/>
+          <p:nvPr/>
+        </p:nvSpPr>
+        <p:spPr>
+          <a:xfrm>
+            <a:off x="6333592" y="5577840"/>
+            <a:ext cx="2352980" cy="246888"/>
+          </a:xfrm>
+          <a:prstGeom prst="rect">
+            <a:avLst/>
+          </a:prstGeom>
+          <a:noFill/>
+          <a:ln/>
+        </p:spPr>
+        <p:txBody>
+          <a:bodyPr wrap="square" lIns="0" tIns="0" rIns="0" bIns="0" rtlCol="0" anchor="t"/>
+          <a:lstStyle/>
+          <a:p>
+            <a:pPr algn="ctr" indent="0" marL="0">
+              <a:buNone/>
+            </a:pPr>
+            <a:r>
               <a:rPr lang="en-US" sz="1100" dirty="0">
                 <a:solidFill>
                   <a:srgbClr val="5C7286"/>
@@ -3472,7 +3313,7 @@
                 <a:ea typeface="Calibri" pitchFamily="34" charset="-122"/>
                 <a:cs typeface="Calibri" pitchFamily="34" charset="-120"/>
               </a:rPr>
-              <a:t>rewriting criteria against the error reports</a:t>
+              <a:t>best search baseline</a:t>
             </a:r>
             <a:endParaRPr lang="en-US" sz="1100" dirty="0"/>
           </a:p>
@@ -3480,14 +3321,80 @@
       </p:sp>
       <p:sp>
         <p:nvSpPr>
-          <p:cNvPr id="11" name="Text 8"/>
-          <p:cNvSpPr txBox="1"/>
-          <p:nvPr/>
-        </p:nvSpPr>
-        <p:spPr>
-          <a:xfrm>
-            <a:off x="5212080" y="3794760"/>
-            <a:ext cx="6409944" cy="1965960"/>
+          <p:cNvPr id="14" name="Shape 11"/>
+          <p:cNvSpPr/>
+          <p:nvPr/>
+        </p:nvSpPr>
+        <p:spPr>
+          <a:xfrm>
+            <a:off x="9052331" y="5029200"/>
+            <a:ext cx="2572436" cy="868680"/>
+          </a:xfrm>
+          <a:prstGeom prst="roundRect">
+            <a:avLst>
+              <a:gd name="adj" fmla="val 8421"/>
+            </a:avLst>
+          </a:prstGeom>
+          <a:solidFill>
+            <a:srgbClr val="EEF3F7"/>
+          </a:solidFill>
+          <a:ln w="12700">
+            <a:solidFill>
+              <a:srgbClr val="EEF3F7"/>
+            </a:solidFill>
+            <a:prstDash val="solid"/>
+          </a:ln>
+        </p:spPr>
+      </p:sp>
+      <p:sp>
+        <p:nvSpPr>
+          <p:cNvPr id="15" name="Text 12"/>
+          <p:cNvSpPr txBox="1"/>
+          <p:nvPr/>
+        </p:nvSpPr>
+        <p:spPr>
+          <a:xfrm>
+            <a:off x="9162059" y="5120640"/>
+            <a:ext cx="2352980" cy="475488"/>
+          </a:xfrm>
+          <a:prstGeom prst="rect">
+            <a:avLst/>
+          </a:prstGeom>
+          <a:noFill/>
+          <a:ln/>
+        </p:spPr>
+        <p:txBody>
+          <a:bodyPr wrap="square" lIns="0" tIns="0" rIns="0" bIns="0" rtlCol="0" anchor="ctr"/>
+          <a:lstStyle/>
+          <a:p>
+            <a:pPr algn="ctr" indent="0" marL="0">
+              <a:buNone/>
+            </a:pPr>
+            <a:r>
+              <a:rPr lang="en-US" sz="2400" b="1" dirty="0">
+                <a:solidFill>
+                  <a:srgbClr val="E69F00"/>
+                </a:solidFill>
+                <a:latin typeface="Cambria" pitchFamily="34" charset="0"/>
+                <a:ea typeface="Cambria" pitchFamily="34" charset="-122"/>
+                <a:cs typeface="Cambria" pitchFamily="34" charset="-120"/>
+              </a:rPr>
+              <a:t>0.574</a:t>
+            </a:r>
+            <a:endParaRPr lang="en-US" sz="2400" dirty="0"/>
+          </a:p>
+        </p:txBody>
+      </p:sp>
+      <p:sp>
+        <p:nvSpPr>
+          <p:cNvPr id="16" name="Text 13"/>
+          <p:cNvSpPr txBox="1"/>
+          <p:nvPr/>
+        </p:nvSpPr>
+        <p:spPr>
+          <a:xfrm>
+            <a:off x="9162059" y="5577840"/>
+            <a:ext cx="2352980" cy="246888"/>
           </a:xfrm>
           <a:prstGeom prst="rect">
             <a:avLst/>
@@ -3499,73 +3406,27 @@
           <a:bodyPr wrap="square" lIns="0" tIns="0" rIns="0" bIns="0" rtlCol="0" anchor="t"/>
           <a:lstStyle/>
           <a:p>
-            <a:pPr marL="342900" indent="-342900">
-              <a:spcAft>
-                <a:spcPts val="800"/>
-              </a:spcAft>
-              <a:buSzPct val="100000"/>
-              <a:buChar char="•"/>
-            </a:pPr>
-            <a:r>
-              <a:rPr lang="en-US" sz="1300" dirty="0">
-                <a:solidFill>
-                  <a:srgbClr val="0F2A3F"/>
-                </a:solidFill>
-                <a:latin typeface="Calibri" pitchFamily="34" charset="0"/>
-                <a:ea typeface="Calibri" pitchFamily="34" charset="-122"/>
-                <a:cs typeface="Calibri" pitchFamily="34" charset="-120"/>
-              </a:rPr>
-              <a:t>Almost the whole rise is the cost of getting criteria wrong — not the benefit of having seen the answers.</a:t>
-            </a:r>
-            <a:endParaRPr lang="en-US" sz="1300" dirty="0"/>
-          </a:p>
-          <a:p>
-            <a:pPr marL="342900" indent="-342900">
-              <a:spcAft>
-                <a:spcPts val="800"/>
-              </a:spcAft>
-              <a:buSzPct val="100000"/>
-              <a:buChar char="•"/>
-            </a:pPr>
-            <a:r>
-              <a:rPr lang="en-US" sz="1300" dirty="0">
-                <a:solidFill>
-                  <a:srgbClr val="0F2A3F"/>
-                </a:solidFill>
-                <a:latin typeface="Calibri" pitchFamily="34" charset="0"/>
-                <a:ea typeface="Calibri" pitchFamily="34" charset="-122"/>
-                <a:cs typeface="Calibri" pitchFamily="34" charset="-120"/>
-              </a:rPr>
-              <a:t>It happened to us: dementia's verbatim criteria scored 0.112 against 0.358 once fixed, and nothing in the output announced it.</a:t>
-            </a:r>
-            <a:endParaRPr lang="en-US" sz="1300" dirty="0"/>
-          </a:p>
-          <a:p>
-            <a:pPr marL="342900" indent="-342900">
-              <a:spcAft>
-                <a:spcPts val="800"/>
-              </a:spcAft>
-              <a:buSzPct val="100000"/>
-              <a:buChar char="•"/>
-            </a:pPr>
-            <a:r>
-              <a:rPr lang="en-US" sz="1300" dirty="0">
-                <a:solidFill>
-                  <a:srgbClr val="0F2A3F"/>
-                </a:solidFill>
-                <a:latin typeface="Calibri" pitchFamily="34" charset="0"/>
-                <a:ea typeface="Calibri" pitchFamily="34" charset="-122"/>
-                <a:cs typeface="Calibri" pitchFamily="34" charset="-120"/>
-              </a:rPr>
-              <a:t>Both n = 2 — an indication, not an estimate.</a:t>
-            </a:r>
-            <a:endParaRPr lang="en-US" sz="1300" dirty="0"/>
-          </a:p>
-        </p:txBody>
-      </p:sp>
-      <p:sp>
-        <p:nvSpPr>
-          <p:cNvPr id="12" name="Text 9"/>
+            <a:pPr algn="ctr" indent="0" marL="0">
+              <a:buNone/>
+            </a:pPr>
+            <a:r>
+              <a:rPr lang="en-US" sz="1100" dirty="0">
+                <a:solidFill>
+                  <a:srgbClr val="5C7286"/>
+                </a:solidFill>
+                <a:latin typeface="Calibri" pitchFamily="34" charset="0"/>
+                <a:ea typeface="Calibri" pitchFamily="34" charset="-122"/>
+                <a:cs typeface="Calibri" pitchFamily="34" charset="-120"/>
+              </a:rPr>
+              <a:t>full pipeline</a:t>
+            </a:r>
+            <a:endParaRPr lang="en-US" sz="1100" dirty="0"/>
+          </a:p>
+        </p:txBody>
+      </p:sp>
+      <p:sp>
+        <p:nvSpPr>
+          <p:cNvPr id="17" name="Text 14"/>
           <p:cNvSpPr txBox="1"/>
           <p:nvPr/>
         </p:nvSpPr>
@@ -3596,7 +3457,7 @@
                 <a:ea typeface="Calibri" pitchFamily="34" charset="-122"/>
                 <a:cs typeface="Calibri" pitchFamily="34" charset="-120"/>
               </a:rPr>
-              <a:t>Mean over the three projects with all three tiers: 0.378 → 0.525 → 0.530. Steep, then flat.</a:t>
+              <a:t>Both peak on canonical terms (executive function, working memory) and collapse on condition contrasts (all three emotion-regulation columns ≈ 0.002–0.08). A term is not an analysis.</a:t>
             </a:r>
             <a:endParaRPr lang="en-US" sz="1050" dirty="0"/>
           </a:p>
@@ -3613,6 +3474,501 @@
 <file path=ppt/slides/slide12.xml><?xml version="1.0" encoding="utf-8"?>
 <p:sld xmlns:a="http://schemas.openxmlformats.org/drawingml/2006/main" xmlns:r="http://schemas.openxmlformats.org/officeDocument/2006/relationships" xmlns:p="http://schemas.openxmlformats.org/presentationml/2006/main">
   <p:cSld name="Slide 12">
+    <p:spTree>
+      <p:nvGrpSpPr>
+        <p:cNvPr id="1" name=""/>
+        <p:cNvGrpSpPr/>
+        <p:nvPr/>
+      </p:nvGrpSpPr>
+      <p:grpSpPr>
+        <a:xfrm>
+          <a:off x="0" y="0"/>
+          <a:ext cx="0" cy="0"/>
+          <a:chOff x="0" y="0"/>
+          <a:chExt cx="0" cy="0"/>
+        </a:xfrm>
+      </p:grpSpPr>
+      <p:sp>
+        <p:nvSpPr>
+          <p:cNvPr id="2" name="Text 0"/>
+          <p:cNvSpPr txBox="1"/>
+          <p:nvPr/>
+        </p:nvSpPr>
+        <p:spPr>
+          <a:xfrm>
+            <a:off x="566928" y="310896"/>
+            <a:ext cx="11057839" cy="749808"/>
+          </a:xfrm>
+          <a:prstGeom prst="rect">
+            <a:avLst/>
+          </a:prstGeom>
+          <a:noFill/>
+          <a:ln/>
+        </p:spPr>
+        <p:txBody>
+          <a:bodyPr wrap="square" lIns="0" tIns="0" rIns="0" bIns="0" rtlCol="0" anchor="t"/>
+          <a:lstStyle/>
+          <a:p>
+            <a:pPr indent="0" marL="0">
+              <a:buNone/>
+            </a:pPr>
+            <a:r>
+              <a:rPr lang="en-US" sz="3100" b="1" dirty="0">
+                <a:solidFill>
+                  <a:srgbClr val="0F2A3F"/>
+                </a:solidFill>
+                <a:latin typeface="Cambria" pitchFamily="34" charset="0"/>
+                <a:ea typeface="Cambria" pitchFamily="34" charset="-122"/>
+                <a:cs typeface="Cambria" pitchFamily="34" charset="-120"/>
+              </a:rPr>
+              <a:t>The real risk is mis-prompting, not overfitting</a:t>
+            </a:r>
+            <a:endParaRPr lang="en-US" sz="3100" dirty="0"/>
+          </a:p>
+        </p:txBody>
+      </p:sp>
+      <p:pic>
+        <p:nvPicPr>
+          <p:cNvPr id="3" name="Image 0" descr="/home/zorro/repos/autonima-results/reports/deck_figures/figureS2_tier_progression.png">    </p:cNvPr>
+          <p:cNvPicPr>
+            <a:picLocks noChangeAspect="1"/>
+          </p:cNvPicPr>
+          <p:nvPr/>
+        </p:nvPicPr>
+        <p:blipFill>
+          <a:blip r:embed="rId1"/>
+          <a:stretch>
+            <a:fillRect/>
+          </a:stretch>
+        </p:blipFill>
+        <p:spPr>
+          <a:xfrm>
+            <a:off x="669368" y="1554480"/>
+            <a:ext cx="4092800" cy="4206240"/>
+          </a:xfrm>
+          <a:prstGeom prst="rect">
+            <a:avLst/>
+          </a:prstGeom>
+        </p:spPr>
+      </p:pic>
+      <p:sp>
+        <p:nvSpPr>
+          <p:cNvPr id="4" name="Text 1"/>
+          <p:cNvSpPr txBox="1"/>
+          <p:nvPr/>
+        </p:nvSpPr>
+        <p:spPr>
+          <a:xfrm>
+            <a:off x="5212080" y="1600200"/>
+            <a:ext cx="6400800" cy="411480"/>
+          </a:xfrm>
+          <a:prstGeom prst="rect">
+            <a:avLst/>
+          </a:prstGeom>
+          <a:noFill/>
+          <a:ln/>
+        </p:spPr>
+        <p:txBody>
+          <a:bodyPr wrap="square" lIns="0" tIns="0" rIns="0" bIns="0" rtlCol="0" anchor="ctr"/>
+          <a:lstStyle/>
+          <a:p>
+            <a:pPr indent="0" marL="0">
+              <a:buNone/>
+            </a:pPr>
+            <a:r>
+              <a:rPr lang="en-US" sz="1350" dirty="0">
+                <a:solidFill>
+                  <a:srgbClr val="0F2A3F"/>
+                </a:solidFill>
+                <a:latin typeface="Calibri" pitchFamily="34" charset="0"/>
+                <a:ea typeface="Calibri" pitchFamily="34" charset="-122"/>
+                <a:cs typeface="Calibri" pitchFamily="34" charset="-120"/>
+              </a:rPr>
+              <a:t>Runs are registered by how much of the benchmark shaped their criteria.</a:t>
+            </a:r>
+            <a:endParaRPr lang="en-US" sz="1350" dirty="0"/>
+          </a:p>
+        </p:txBody>
+      </p:sp>
+      <p:sp>
+        <p:nvSpPr>
+          <p:cNvPr id="5" name="Shape 2"/>
+          <p:cNvSpPr/>
+          <p:nvPr/>
+        </p:nvSpPr>
+        <p:spPr>
+          <a:xfrm>
+            <a:off x="5212080" y="2148840"/>
+            <a:ext cx="3076956" cy="1417320"/>
+          </a:xfrm>
+          <a:prstGeom prst="roundRect">
+            <a:avLst>
+              <a:gd name="adj" fmla="val 5161"/>
+            </a:avLst>
+          </a:prstGeom>
+          <a:solidFill>
+            <a:srgbClr val="EEF3F7"/>
+          </a:solidFill>
+          <a:ln w="12700">
+            <a:solidFill>
+              <a:srgbClr val="EEF3F7"/>
+            </a:solidFill>
+            <a:prstDash val="solid"/>
+          </a:ln>
+        </p:spPr>
+      </p:sp>
+      <p:sp>
+        <p:nvSpPr>
+          <p:cNvPr id="6" name="Text 3"/>
+          <p:cNvSpPr txBox="1"/>
+          <p:nvPr/>
+        </p:nvSpPr>
+        <p:spPr>
+          <a:xfrm>
+            <a:off x="5321808" y="2240280"/>
+            <a:ext cx="2857500" cy="475488"/>
+          </a:xfrm>
+          <a:prstGeom prst="rect">
+            <a:avLst/>
+          </a:prstGeom>
+          <a:noFill/>
+          <a:ln/>
+        </p:spPr>
+        <p:txBody>
+          <a:bodyPr wrap="square" lIns="0" tIns="0" rIns="0" bIns="0" rtlCol="0" anchor="ctr"/>
+          <a:lstStyle/>
+          <a:p>
+            <a:pPr algn="ctr" indent="0" marL="0">
+              <a:buNone/>
+            </a:pPr>
+            <a:r>
+              <a:rPr lang="en-US" sz="2800" b="1" dirty="0">
+                <a:solidFill>
+                  <a:srgbClr val="E69F00"/>
+                </a:solidFill>
+                <a:latin typeface="Cambria" pitchFamily="34" charset="0"/>
+                <a:ea typeface="Cambria" pitchFamily="34" charset="-122"/>
+                <a:cs typeface="Cambria" pitchFamily="34" charset="-120"/>
+              </a:rPr>
+              <a:t>+0.221</a:t>
+            </a:r>
+            <a:endParaRPr lang="en-US" sz="2800" dirty="0"/>
+          </a:p>
+        </p:txBody>
+      </p:sp>
+      <p:sp>
+        <p:nvSpPr>
+          <p:cNvPr id="7" name="Text 4"/>
+          <p:cNvSpPr txBox="1"/>
+          <p:nvPr/>
+        </p:nvSpPr>
+        <p:spPr>
+          <a:xfrm>
+            <a:off x="5321808" y="2697480"/>
+            <a:ext cx="2857500" cy="795528"/>
+          </a:xfrm>
+          <a:prstGeom prst="rect">
+            <a:avLst/>
+          </a:prstGeom>
+          <a:noFill/>
+          <a:ln/>
+        </p:spPr>
+        <p:txBody>
+          <a:bodyPr wrap="square" lIns="0" tIns="0" rIns="0" bIns="0" rtlCol="0" anchor="t"/>
+          <a:lstStyle/>
+          <a:p>
+            <a:pPr algn="ctr" indent="0" marL="0">
+              <a:buNone/>
+            </a:pPr>
+            <a:r>
+              <a:rPr lang="en-US" sz="1100" dirty="0">
+                <a:solidFill>
+                  <a:srgbClr val="5C7286"/>
+                </a:solidFill>
+                <a:latin typeface="Calibri" pitchFamily="34" charset="0"/>
+                <a:ea typeface="Calibri" pitchFamily="34" charset="-122"/>
+                <a:cs typeface="Calibri" pitchFamily="34" charset="-120"/>
+              </a:rPr>
+              <a:t>verbatim → manual</a:t>
+            </a:r>
+            <a:endParaRPr lang="en-US" sz="1100" dirty="0"/>
+          </a:p>
+          <a:p>
+            <a:pPr algn="ctr" indent="0" marL="0">
+              <a:buNone/>
+            </a:pPr>
+            <a:r>
+              <a:rPr lang="en-US" sz="1100" dirty="0">
+                <a:solidFill>
+                  <a:srgbClr val="5C7286"/>
+                </a:solidFill>
+                <a:latin typeface="Calibri" pitchFamily="34" charset="0"/>
+                <a:ea typeface="Calibri" pitchFamily="34" charset="-122"/>
+                <a:cs typeface="Calibri" pitchFamily="34" charset="-120"/>
+              </a:rPr>
+              <a:t>fixing major oversights in mis-specified criteria</a:t>
+            </a:r>
+            <a:endParaRPr lang="en-US" sz="1100" dirty="0"/>
+          </a:p>
+        </p:txBody>
+      </p:sp>
+      <p:sp>
+        <p:nvSpPr>
+          <p:cNvPr id="8" name="Shape 5"/>
+          <p:cNvSpPr/>
+          <p:nvPr/>
+        </p:nvSpPr>
+        <p:spPr>
+          <a:xfrm>
+            <a:off x="8545068" y="2148840"/>
+            <a:ext cx="3076956" cy="1417320"/>
+          </a:xfrm>
+          <a:prstGeom prst="roundRect">
+            <a:avLst>
+              <a:gd name="adj" fmla="val 5161"/>
+            </a:avLst>
+          </a:prstGeom>
+          <a:solidFill>
+            <a:srgbClr val="EEF3F7"/>
+          </a:solidFill>
+          <a:ln w="12700">
+            <a:solidFill>
+              <a:srgbClr val="EEF3F7"/>
+            </a:solidFill>
+            <a:prstDash val="solid"/>
+          </a:ln>
+        </p:spPr>
+      </p:sp>
+      <p:sp>
+        <p:nvSpPr>
+          <p:cNvPr id="9" name="Text 6"/>
+          <p:cNvSpPr txBox="1"/>
+          <p:nvPr/>
+        </p:nvSpPr>
+        <p:spPr>
+          <a:xfrm>
+            <a:off x="8654796" y="2240280"/>
+            <a:ext cx="2857500" cy="475488"/>
+          </a:xfrm>
+          <a:prstGeom prst="rect">
+            <a:avLst/>
+          </a:prstGeom>
+          <a:noFill/>
+          <a:ln/>
+        </p:spPr>
+        <p:txBody>
+          <a:bodyPr wrap="square" lIns="0" tIns="0" rIns="0" bIns="0" rtlCol="0" anchor="ctr"/>
+          <a:lstStyle/>
+          <a:p>
+            <a:pPr algn="ctr" indent="0" marL="0">
+              <a:buNone/>
+            </a:pPr>
+            <a:r>
+              <a:rPr lang="en-US" sz="2800" b="1" dirty="0">
+                <a:solidFill>
+                  <a:srgbClr val="0A3D5C"/>
+                </a:solidFill>
+                <a:latin typeface="Cambria" pitchFamily="34" charset="0"/>
+                <a:ea typeface="Cambria" pitchFamily="34" charset="-122"/>
+                <a:cs typeface="Cambria" pitchFamily="34" charset="-120"/>
+              </a:rPr>
+              <a:t>+0.031</a:t>
+            </a:r>
+            <a:endParaRPr lang="en-US" sz="2800" dirty="0"/>
+          </a:p>
+        </p:txBody>
+      </p:sp>
+      <p:sp>
+        <p:nvSpPr>
+          <p:cNvPr id="10" name="Text 7"/>
+          <p:cNvSpPr txBox="1"/>
+          <p:nvPr/>
+        </p:nvSpPr>
+        <p:spPr>
+          <a:xfrm>
+            <a:off x="8654796" y="2697480"/>
+            <a:ext cx="2857500" cy="795528"/>
+          </a:xfrm>
+          <a:prstGeom prst="rect">
+            <a:avLst/>
+          </a:prstGeom>
+          <a:noFill/>
+          <a:ln/>
+        </p:spPr>
+        <p:txBody>
+          <a:bodyPr wrap="square" lIns="0" tIns="0" rIns="0" bIns="0" rtlCol="0" anchor="t"/>
+          <a:lstStyle/>
+          <a:p>
+            <a:pPr algn="ctr" indent="0" marL="0">
+              <a:buNone/>
+            </a:pPr>
+            <a:r>
+              <a:rPr lang="en-US" sz="1100" dirty="0">
+                <a:solidFill>
+                  <a:srgbClr val="5C7286"/>
+                </a:solidFill>
+                <a:latin typeface="Calibri" pitchFamily="34" charset="0"/>
+                <a:ea typeface="Calibri" pitchFamily="34" charset="-122"/>
+                <a:cs typeface="Calibri" pitchFamily="34" charset="-120"/>
+              </a:rPr>
+              <a:t>manual → best</a:t>
+            </a:r>
+            <a:endParaRPr lang="en-US" sz="1100" dirty="0"/>
+          </a:p>
+          <a:p>
+            <a:pPr algn="ctr" indent="0" marL="0">
+              <a:buNone/>
+            </a:pPr>
+            <a:r>
+              <a:rPr lang="en-US" sz="1100" dirty="0">
+                <a:solidFill>
+                  <a:srgbClr val="5C7286"/>
+                </a:solidFill>
+                <a:latin typeface="Calibri" pitchFamily="34" charset="0"/>
+                <a:ea typeface="Calibri" pitchFamily="34" charset="-122"/>
+                <a:cs typeface="Calibri" pitchFamily="34" charset="-120"/>
+              </a:rPr>
+              <a:t>rewriting criteria against the error reports</a:t>
+            </a:r>
+            <a:endParaRPr lang="en-US" sz="1100" dirty="0"/>
+          </a:p>
+        </p:txBody>
+      </p:sp>
+      <p:sp>
+        <p:nvSpPr>
+          <p:cNvPr id="11" name="Text 8"/>
+          <p:cNvSpPr txBox="1"/>
+          <p:nvPr/>
+        </p:nvSpPr>
+        <p:spPr>
+          <a:xfrm>
+            <a:off x="5212080" y="3794760"/>
+            <a:ext cx="6409944" cy="1965960"/>
+          </a:xfrm>
+          <a:prstGeom prst="rect">
+            <a:avLst/>
+          </a:prstGeom>
+          <a:noFill/>
+          <a:ln/>
+        </p:spPr>
+        <p:txBody>
+          <a:bodyPr wrap="square" lIns="0" tIns="0" rIns="0" bIns="0" rtlCol="0" anchor="t"/>
+          <a:lstStyle/>
+          <a:p>
+            <a:pPr marL="342900" indent="-342900">
+              <a:spcAft>
+                <a:spcPts val="800"/>
+              </a:spcAft>
+              <a:buSzPct val="100000"/>
+              <a:buChar char="•"/>
+            </a:pPr>
+            <a:r>
+              <a:rPr lang="en-US" sz="1300" dirty="0">
+                <a:solidFill>
+                  <a:srgbClr val="0F2A3F"/>
+                </a:solidFill>
+                <a:latin typeface="Calibri" pitchFamily="34" charset="0"/>
+                <a:ea typeface="Calibri" pitchFamily="34" charset="-122"/>
+                <a:cs typeface="Calibri" pitchFamily="34" charset="-120"/>
+              </a:rPr>
+              <a:t>Almost the whole rise is the cost of getting criteria wrong — not the benefit of having seen the answers.</a:t>
+            </a:r>
+            <a:endParaRPr lang="en-US" sz="1300" dirty="0"/>
+          </a:p>
+          <a:p>
+            <a:pPr marL="342900" indent="-342900">
+              <a:spcAft>
+                <a:spcPts val="800"/>
+              </a:spcAft>
+              <a:buSzPct val="100000"/>
+              <a:buChar char="•"/>
+            </a:pPr>
+            <a:r>
+              <a:rPr lang="en-US" sz="1300" dirty="0">
+                <a:solidFill>
+                  <a:srgbClr val="0F2A3F"/>
+                </a:solidFill>
+                <a:latin typeface="Calibri" pitchFamily="34" charset="0"/>
+                <a:ea typeface="Calibri" pitchFamily="34" charset="-122"/>
+                <a:cs typeface="Calibri" pitchFamily="34" charset="-120"/>
+              </a:rPr>
+              <a:t>It happened to us: dementia's verbatim criteria scored 0.112 against 0.358 once fixed, and nothing in the output announced it.</a:t>
+            </a:r>
+            <a:endParaRPr lang="en-US" sz="1300" dirty="0"/>
+          </a:p>
+          <a:p>
+            <a:pPr marL="342900" indent="-342900">
+              <a:spcAft>
+                <a:spcPts val="800"/>
+              </a:spcAft>
+              <a:buSzPct val="100000"/>
+              <a:buChar char="•"/>
+            </a:pPr>
+            <a:r>
+              <a:rPr lang="en-US" sz="1300" dirty="0">
+                <a:solidFill>
+                  <a:srgbClr val="0F2A3F"/>
+                </a:solidFill>
+                <a:latin typeface="Calibri" pitchFamily="34" charset="0"/>
+                <a:ea typeface="Calibri" pitchFamily="34" charset="-122"/>
+                <a:cs typeface="Calibri" pitchFamily="34" charset="-120"/>
+              </a:rPr>
+              <a:t>Both n = 2 — an indication, not an estimate.</a:t>
+            </a:r>
+            <a:endParaRPr lang="en-US" sz="1300" dirty="0"/>
+          </a:p>
+        </p:txBody>
+      </p:sp>
+      <p:sp>
+        <p:nvSpPr>
+          <p:cNvPr id="12" name="Text 9"/>
+          <p:cNvSpPr txBox="1"/>
+          <p:nvPr/>
+        </p:nvSpPr>
+        <p:spPr>
+          <a:xfrm>
+            <a:off x="566928" y="6236208"/>
+            <a:ext cx="11057839" cy="310896"/>
+          </a:xfrm>
+          <a:prstGeom prst="rect">
+            <a:avLst/>
+          </a:prstGeom>
+          <a:noFill/>
+          <a:ln/>
+        </p:spPr>
+        <p:txBody>
+          <a:bodyPr wrap="square" lIns="0" tIns="0" rIns="0" bIns="0" rtlCol="0" anchor="ctr"/>
+          <a:lstStyle/>
+          <a:p>
+            <a:pPr indent="0" marL="0">
+              <a:buNone/>
+            </a:pPr>
+            <a:r>
+              <a:rPr lang="en-US" sz="1050" i="1" dirty="0">
+                <a:solidFill>
+                  <a:srgbClr val="5C7286"/>
+                </a:solidFill>
+                <a:latin typeface="Calibri" pitchFamily="34" charset="0"/>
+                <a:ea typeface="Calibri" pitchFamily="34" charset="-122"/>
+                <a:cs typeface="Calibri" pitchFamily="34" charset="-120"/>
+              </a:rPr>
+              <a:t>Mean over the three projects with all three tiers: 0.378 → 0.525 → 0.530. Steep, then flat.</a:t>
+            </a:r>
+            <a:endParaRPr lang="en-US" sz="1050" dirty="0"/>
+          </a:p>
+        </p:txBody>
+      </p:sp>
+    </p:spTree>
+  </p:cSld>
+  <p:clrMapOvr>
+    <a:masterClrMapping/>
+  </p:clrMapOvr>
+</p:sld>
+</file>
+
+<file path=ppt/slides/slide13.xml><?xml version="1.0" encoding="utf-8"?>
+<p:sld xmlns:a="http://schemas.openxmlformats.org/drawingml/2006/main" xmlns:r="http://schemas.openxmlformats.org/officeDocument/2006/relationships" xmlns:p="http://schemas.openxmlformats.org/presentationml/2006/main">
+  <p:cSld name="Slide 13">
     <p:bg>
       <p:bgPr>
         <a:solidFill>
@@ -4788,281 +5144,6 @@
                 <a:cs typeface="Calibri" pitchFamily="34" charset="-120"/>
               </a:rPr>
               <a:t>r² is stable across re-runs while dice is not — one re-run pushed a whole map below threshold. Three independent lines of evidence now favour r² as the primary metric.</a:t>
-            </a:r>
-            <a:endParaRPr lang="en-US" sz="1050" dirty="0"/>
-          </a:p>
-        </p:txBody>
-      </p:sp>
-    </p:spTree>
-  </p:cSld>
-  <p:clrMapOvr>
-    <a:masterClrMapping/>
-  </p:clrMapOvr>
-</p:sld>
-</file>
-
-<file path=ppt/slides/slide13.xml><?xml version="1.0" encoding="utf-8"?>
-<p:sld xmlns:a="http://schemas.openxmlformats.org/drawingml/2006/main" xmlns:r="http://schemas.openxmlformats.org/officeDocument/2006/relationships" xmlns:p="http://schemas.openxmlformats.org/presentationml/2006/main">
-  <p:cSld name="Slide 13">
-    <p:spTree>
-      <p:nvGrpSpPr>
-        <p:cNvPr id="1" name=""/>
-        <p:cNvGrpSpPr/>
-        <p:nvPr/>
-      </p:nvGrpSpPr>
-      <p:grpSpPr>
-        <a:xfrm>
-          <a:off x="0" y="0"/>
-          <a:ext cx="0" cy="0"/>
-          <a:chOff x="0" y="0"/>
-          <a:chExt cx="0" cy="0"/>
-        </a:xfrm>
-      </p:grpSpPr>
-      <p:sp>
-        <p:nvSpPr>
-          <p:cNvPr id="2" name="Text 0"/>
-          <p:cNvSpPr txBox="1"/>
-          <p:nvPr/>
-        </p:nvSpPr>
-        <p:spPr>
-          <a:xfrm>
-            <a:off x="566928" y="310896"/>
-            <a:ext cx="11057839" cy="749808"/>
-          </a:xfrm>
-          <a:prstGeom prst="rect">
-            <a:avLst/>
-          </a:prstGeom>
-          <a:noFill/>
-          <a:ln/>
-        </p:spPr>
-        <p:txBody>
-          <a:bodyPr wrap="square" lIns="0" tIns="0" rIns="0" bIns="0" rtlCol="0" anchor="t"/>
-          <a:lstStyle/>
-          <a:p>
-            <a:pPr indent="0" marL="0">
-              <a:buNone/>
-            </a:pPr>
-            <a:r>
-              <a:rPr lang="en-US" sz="3100" b="1" dirty="0">
-                <a:solidFill>
-                  <a:srgbClr val="0F2A3F"/>
-                </a:solidFill>
-                <a:latin typeface="Cambria" pitchFamily="34" charset="0"/>
-                <a:ea typeface="Cambria" pitchFamily="34" charset="-122"/>
-                <a:cs typeface="Cambria" pitchFamily="34" charset="-120"/>
-              </a:rPr>
-              <a:t>Cost is not the obstacle</a:t>
-            </a:r>
-            <a:endParaRPr lang="en-US" sz="3100" dirty="0"/>
-          </a:p>
-        </p:txBody>
-      </p:sp>
-      <p:sp>
-        <p:nvSpPr>
-          <p:cNvPr id="3" name="Text 1"/>
-          <p:cNvSpPr txBox="1"/>
-          <p:nvPr/>
-        </p:nvSpPr>
-        <p:spPr>
-          <a:xfrm>
-            <a:off x="566928" y="1060704"/>
-            <a:ext cx="11057839" cy="420624"/>
-          </a:xfrm>
-          <a:prstGeom prst="rect">
-            <a:avLst/>
-          </a:prstGeom>
-          <a:noFill/>
-          <a:ln/>
-        </p:spPr>
-        <p:txBody>
-          <a:bodyPr wrap="square" lIns="0" tIns="0" rIns="0" bIns="0" rtlCol="0" anchor="ctr"/>
-          <a:lstStyle/>
-          <a:p>
-            <a:pPr indent="0" marL="0">
-              <a:buNone/>
-            </a:pPr>
-            <a:r>
-              <a:rPr lang="en-US" sz="1500" dirty="0">
-                <a:solidFill>
-                  <a:srgbClr val="1C7293"/>
-                </a:solidFill>
-                <a:latin typeface="Calibri" pitchFamily="34" charset="0"/>
-                <a:ea typeface="Calibri" pitchFamily="34" charset="-122"/>
-                <a:cs typeface="Calibri" pitchFamily="34" charset="-120"/>
-              </a:rPr>
-              <a:t>Measured from per-stage token accounting, not estimated.</a:t>
-            </a:r>
-            <a:endParaRPr lang="en-US" sz="1500" dirty="0"/>
-          </a:p>
-        </p:txBody>
-      </p:sp>
-      <p:sp>
-        <p:nvSpPr>
-          <p:cNvPr id="4" name="Text 2"/>
-          <p:cNvSpPr txBox="1"/>
-          <p:nvPr/>
-        </p:nvSpPr>
-        <p:spPr>
-          <a:xfrm>
-            <a:off x="566928" y="1517904"/>
-            <a:ext cx="11057839" cy="384048"/>
-          </a:xfrm>
-          <a:prstGeom prst="rect">
-            <a:avLst/>
-          </a:prstGeom>
-          <a:noFill/>
-          <a:ln/>
-        </p:spPr>
-        <p:txBody>
-          <a:bodyPr wrap="square" lIns="0" tIns="0" rIns="0" bIns="0" rtlCol="0" anchor="ctr"/>
-          <a:lstStyle/>
-          <a:p>
-            <a:pPr indent="0" marL="0">
-              <a:buNone/>
-            </a:pPr>
-            <a:r>
-              <a:rPr lang="en-US" sz="1400" b="1" dirty="0">
-                <a:solidFill>
-                  <a:srgbClr val="E69F00"/>
-                </a:solidFill>
-                <a:latin typeface="Calibri" pitchFamily="34" charset="0"/>
-                <a:ea typeface="Calibri" pitchFamily="34" charset="-122"/>
-                <a:cs typeface="Calibri" pitchFamily="34" charset="-120"/>
-              </a:rPr>
-              <a:t>~$51</a:t>
-            </a:r>
-            <a:pPr indent="0" marL="0">
-              <a:buNone/>
-            </a:pPr>
-            <a:r>
-              <a:rPr lang="en-US" sz="1400" dirty="0">
-                <a:solidFill>
-                  <a:srgbClr val="0F2A3F"/>
-                </a:solidFill>
-                <a:latin typeface="Calibri" pitchFamily="34" charset="0"/>
-                <a:ea typeface="Calibri" pitchFamily="34" charset="-122"/>
-                <a:cs typeface="Calibri" pitchFamily="34" charset="-120"/>
-              </a:rPr>
-              <a:t> for three full projects end to end;  </a:t>
-            </a:r>
-            <a:pPr indent="0" marL="0">
-              <a:buNone/>
-            </a:pPr>
-            <a:r>
-              <a:rPr lang="en-US" sz="1400" b="1" dirty="0">
-                <a:solidFill>
-                  <a:srgbClr val="0A3D5C"/>
-                </a:solidFill>
-                <a:latin typeface="Calibri" pitchFamily="34" charset="0"/>
-                <a:ea typeface="Calibri" pitchFamily="34" charset="-122"/>
-                <a:cs typeface="Calibri" pitchFamily="34" charset="-120"/>
-              </a:rPr>
-              <a:t>$0.0023</a:t>
-            </a:r>
-            <a:pPr indent="0" marL="0">
-              <a:buNone/>
-            </a:pPr>
-            <a:r>
-              <a:rPr lang="en-US" sz="1400" dirty="0">
-                <a:solidFill>
-                  <a:srgbClr val="0F2A3F"/>
-                </a:solidFill>
-                <a:latin typeface="Calibri" pitchFamily="34" charset="0"/>
-                <a:ea typeface="Calibri" pitchFamily="34" charset="-122"/>
-                <a:cs typeface="Calibri" pitchFamily="34" charset="-120"/>
-              </a:rPr>
-              <a:t> per abstract screened, 88% of it output tokens.  The pre-hoc estimate was </a:t>
-            </a:r>
-            <a:pPr indent="0" marL="0">
-              <a:buNone/>
-            </a:pPr>
-            <a:r>
-              <a:rPr lang="en-US" sz="1400" b="1" dirty="0">
-                <a:solidFill>
-                  <a:srgbClr val="0A3D5C"/>
-                </a:solidFill>
-                <a:latin typeface="Calibri" pitchFamily="34" charset="0"/>
-                <a:ea typeface="Calibri" pitchFamily="34" charset="-122"/>
-                <a:cs typeface="Calibri" pitchFamily="34" charset="-120"/>
-              </a:rPr>
-              <a:t>1.8× under</a:t>
-            </a:r>
-            <a:pPr indent="0" marL="0">
-              <a:buNone/>
-            </a:pPr>
-            <a:r>
-              <a:rPr lang="en-US" sz="1400" dirty="0">
-                <a:solidFill>
-                  <a:srgbClr val="0F2A3F"/>
-                </a:solidFill>
-                <a:latin typeface="Calibri" pitchFamily="34" charset="0"/>
-                <a:ea typeface="Calibri" pitchFamily="34" charset="-122"/>
-                <a:cs typeface="Calibri" pitchFamily="34" charset="-120"/>
-              </a:rPr>
-              <a:t> — which is why the accounting exists.</a:t>
-            </a:r>
-            <a:endParaRPr lang="en-US" sz="1400" dirty="0"/>
-          </a:p>
-        </p:txBody>
-      </p:sp>
-      <p:pic>
-        <p:nvPicPr>
-          <p:cNvPr id="5" name="Image 0" descr="/home/zorro/repos/autonima-results/reports/nature_methods_figures/figureS1_measured_cost.png">    </p:cNvPr>
-          <p:cNvPicPr>
-            <a:picLocks noChangeAspect="1"/>
-          </p:cNvPicPr>
-          <p:nvPr/>
-        </p:nvPicPr>
-        <p:blipFill>
-          <a:blip r:embed="rId1"/>
-          <a:stretch>
-            <a:fillRect/>
-          </a:stretch>
-        </p:blipFill>
-        <p:spPr>
-          <a:xfrm>
-            <a:off x="566928" y="2049080"/>
-            <a:ext cx="11057839" cy="3674240"/>
-          </a:xfrm>
-          <a:prstGeom prst="rect">
-            <a:avLst/>
-          </a:prstGeom>
-        </p:spPr>
-      </p:pic>
-      <p:sp>
-        <p:nvSpPr>
-          <p:cNvPr id="6" name="Text 3"/>
-          <p:cNvSpPr txBox="1"/>
-          <p:nvPr/>
-        </p:nvSpPr>
-        <p:spPr>
-          <a:xfrm>
-            <a:off x="566928" y="6236208"/>
-            <a:ext cx="11057839" cy="310896"/>
-          </a:xfrm>
-          <a:prstGeom prst="rect">
-            <a:avLst/>
-          </a:prstGeom>
-          <a:noFill/>
-          <a:ln/>
-        </p:spPr>
-        <p:txBody>
-          <a:bodyPr wrap="square" lIns="0" tIns="0" rIns="0" bIns="0" rtlCol="0" anchor="ctr"/>
-          <a:lstStyle/>
-          <a:p>
-            <a:pPr indent="0" marL="0">
-              <a:buNone/>
-            </a:pPr>
-            <a:r>
-              <a:rPr lang="en-US" sz="1050" i="1" dirty="0">
-                <a:solidFill>
-                  <a:srgbClr val="5C7286"/>
-                </a:solidFill>
-                <a:latin typeface="Calibri" pitchFamily="34" charset="0"/>
-                <a:ea typeface="Calibri" pitchFamily="34" charset="-122"/>
-                <a:cs typeface="Calibri" pitchFamily="34" charset="-120"/>
-              </a:rPr>
-              <a:t>Tens of dollars and hours against months of person time — which for a methods audience is the point, not an aside.</a:t>
             </a:r>
             <a:endParaRPr lang="en-US" sz="1050" dirty="0"/>
           </a:p>
@@ -5126,7 +5207,7 @@
                 <a:ea typeface="Cambria" pitchFamily="34" charset="-122"/>
                 <a:cs typeface="Cambria" pitchFamily="34" charset="-120"/>
               </a:rPr>
-              <a:t>Decisions a reviewer will ask about</a:t>
+              <a:t>Cost is not the obstacle</a:t>
             </a:r>
             <a:endParaRPr lang="en-US" sz="3100" dirty="0"/>
           </a:p>
@@ -5134,30 +5215,42 @@
       </p:sp>
       <p:sp>
         <p:nvSpPr>
-          <p:cNvPr id="3" name="Shape 1"/>
-          <p:cNvSpPr/>
-          <p:nvPr/>
-        </p:nvSpPr>
-        <p:spPr>
-          <a:xfrm>
-            <a:off x="566928" y="1700784"/>
-            <a:ext cx="5330952" cy="1627632"/>
-          </a:xfrm>
-          <a:prstGeom prst="roundRect">
-            <a:avLst>
-              <a:gd name="adj" fmla="val 4494"/>
-            </a:avLst>
-          </a:prstGeom>
-          <a:solidFill>
-            <a:srgbClr val="EEF3F7"/>
-          </a:solidFill>
-          <a:ln w="12700">
-            <a:solidFill>
-              <a:srgbClr val="EEF3F7"/>
-            </a:solidFill>
-            <a:prstDash val="solid"/>
-          </a:ln>
-        </p:spPr>
+          <p:cNvPr id="3" name="Text 1"/>
+          <p:cNvSpPr txBox="1"/>
+          <p:nvPr/>
+        </p:nvSpPr>
+        <p:spPr>
+          <a:xfrm>
+            <a:off x="566928" y="1060704"/>
+            <a:ext cx="11057839" cy="420624"/>
+          </a:xfrm>
+          <a:prstGeom prst="rect">
+            <a:avLst/>
+          </a:prstGeom>
+          <a:noFill/>
+          <a:ln/>
+        </p:spPr>
+        <p:txBody>
+          <a:bodyPr wrap="square" lIns="0" tIns="0" rIns="0" bIns="0" rtlCol="0" anchor="ctr"/>
+          <a:lstStyle/>
+          <a:p>
+            <a:pPr indent="0" marL="0">
+              <a:buNone/>
+            </a:pPr>
+            <a:r>
+              <a:rPr lang="en-US" sz="1500" dirty="0">
+                <a:solidFill>
+                  <a:srgbClr val="1C7293"/>
+                </a:solidFill>
+                <a:latin typeface="Calibri" pitchFamily="34" charset="0"/>
+                <a:ea typeface="Calibri" pitchFamily="34" charset="-122"/>
+                <a:cs typeface="Calibri" pitchFamily="34" charset="-120"/>
+              </a:rPr>
+              <a:t>Measured from per-stage token accounting, not estimated.</a:t>
+            </a:r>
+            <a:endParaRPr lang="en-US" sz="1500" dirty="0"/>
+          </a:p>
+        </p:txBody>
       </p:sp>
       <p:sp>
         <p:nvSpPr>
@@ -5167,24 +5260,52 @@
         </p:nvSpPr>
         <p:spPr>
           <a:xfrm>
-            <a:off x="768096" y="1847088"/>
-            <a:ext cx="4937760" cy="384048"/>
-          </a:xfrm>
-          <a:prstGeom prst="rect">
-            <a:avLst/>
-          </a:prstGeom>
-          <a:noFill/>
-          <a:ln/>
-        </p:spPr>
-        <p:txBody>
-          <a:bodyPr wrap="square" lIns="0" tIns="0" rIns="0" bIns="0" rtlCol="0" anchor="ctr"/>
-          <a:lstStyle/>
-          <a:p>
-            <a:pPr indent="0" marL="0">
-              <a:buNone/>
-            </a:pPr>
-            <a:r>
-              <a:rPr lang="en-US" sz="1450" b="1" dirty="0">
+            <a:off x="566928" y="1517904"/>
+            <a:ext cx="11057839" cy="384048"/>
+          </a:xfrm>
+          <a:prstGeom prst="rect">
+            <a:avLst/>
+          </a:prstGeom>
+          <a:noFill/>
+          <a:ln/>
+        </p:spPr>
+        <p:txBody>
+          <a:bodyPr wrap="square" lIns="0" tIns="0" rIns="0" bIns="0" rtlCol="0" anchor="ctr"/>
+          <a:lstStyle/>
+          <a:p>
+            <a:pPr indent="0" marL="0">
+              <a:buNone/>
+            </a:pPr>
+            <a:r>
+              <a:rPr lang="en-US" sz="1400" b="1" dirty="0">
+                <a:solidFill>
+                  <a:srgbClr val="E69F00"/>
+                </a:solidFill>
+                <a:latin typeface="Calibri" pitchFamily="34" charset="0"/>
+                <a:ea typeface="Calibri" pitchFamily="34" charset="-122"/>
+                <a:cs typeface="Calibri" pitchFamily="34" charset="-120"/>
+              </a:rPr>
+              <a:t>~$51</a:t>
+            </a:r>
+            <a:pPr indent="0" marL="0">
+              <a:buNone/>
+            </a:pPr>
+            <a:r>
+              <a:rPr lang="en-US" sz="1400" dirty="0">
+                <a:solidFill>
+                  <a:srgbClr val="0F2A3F"/>
+                </a:solidFill>
+                <a:latin typeface="Calibri" pitchFamily="34" charset="0"/>
+                <a:ea typeface="Calibri" pitchFamily="34" charset="-122"/>
+                <a:cs typeface="Calibri" pitchFamily="34" charset="-120"/>
+              </a:rPr>
+              <a:t> for three full projects end to end;  </a:t>
+            </a:r>
+            <a:pPr indent="0" marL="0">
+              <a:buNone/>
+            </a:pPr>
+            <a:r>
+              <a:rPr lang="en-US" sz="1400" b="1" dirty="0">
                 <a:solidFill>
                   <a:srgbClr val="0A3D5C"/>
                 </a:solidFill>
@@ -5192,38 +5313,13 @@
                 <a:ea typeface="Calibri" pitchFamily="34" charset="-122"/>
                 <a:cs typeface="Calibri" pitchFamily="34" charset="-120"/>
               </a:rPr>
-              <a:t>Denominator is 32, not 35</a:t>
-            </a:r>
-            <a:endParaRPr lang="en-US" sz="1450" dirty="0"/>
-          </a:p>
-        </p:txBody>
-      </p:sp>
-      <p:sp>
-        <p:nvSpPr>
-          <p:cNvPr id="5" name="Text 3"/>
-          <p:cNvSpPr txBox="1"/>
-          <p:nvPr/>
-        </p:nvSpPr>
-        <p:spPr>
-          <a:xfrm>
-            <a:off x="768096" y="2212848"/>
-            <a:ext cx="4928616" cy="1042416"/>
-          </a:xfrm>
-          <a:prstGeom prst="rect">
-            <a:avLst/>
-          </a:prstGeom>
-          <a:noFill/>
-          <a:ln/>
-        </p:spPr>
-        <p:txBody>
-          <a:bodyPr wrap="square" lIns="0" tIns="0" rIns="0" bIns="0" rtlCol="0" anchor="t"/>
-          <a:lstStyle/>
-          <a:p>
-            <a:pPr indent="0" marL="0">
-              <a:buNone/>
-            </a:pPr>
-            <a:r>
-              <a:rPr lang="en-US" sz="1150" dirty="0">
+              <a:t>$0.0023</a:t>
+            </a:r>
+            <a:pPr indent="0" marL="0">
+              <a:buNone/>
+            </a:pPr>
+            <a:r>
+              <a:rPr lang="en-US" sz="1400" dirty="0">
                 <a:solidFill>
                   <a:srgbClr val="0F2A3F"/>
                 </a:solidFill>
@@ -5231,65 +5327,13 @@
                 <a:ea typeface="Calibri" pitchFamily="34" charset="-122"/>
                 <a:cs typeface="Calibri" pitchFamily="34" charset="-120"/>
               </a:rPr>
-              <a:t>Three substance-use contrasts dropped: the source paper reports no significant result for cannabis, opioids or stimulants, so there is nothing to recover. This lowered our headline from +0.110 — which is the best evidence it wasn't chosen to flatter.</a:t>
-            </a:r>
-            <a:endParaRPr lang="en-US" sz="1150" dirty="0"/>
-          </a:p>
-        </p:txBody>
-      </p:sp>
-      <p:sp>
-        <p:nvSpPr>
-          <p:cNvPr id="6" name="Shape 4"/>
-          <p:cNvSpPr/>
-          <p:nvPr/>
-        </p:nvSpPr>
-        <p:spPr>
-          <a:xfrm>
-            <a:off x="6291072" y="1700784"/>
-            <a:ext cx="5330952" cy="1627632"/>
-          </a:xfrm>
-          <a:prstGeom prst="roundRect">
-            <a:avLst>
-              <a:gd name="adj" fmla="val 4494"/>
-            </a:avLst>
-          </a:prstGeom>
-          <a:solidFill>
-            <a:srgbClr val="EEF3F7"/>
-          </a:solidFill>
-          <a:ln w="12700">
-            <a:solidFill>
-              <a:srgbClr val="EEF3F7"/>
-            </a:solidFill>
-            <a:prstDash val="solid"/>
-          </a:ln>
-        </p:spPr>
-      </p:sp>
-      <p:sp>
-        <p:nvSpPr>
-          <p:cNvPr id="7" name="Text 5"/>
-          <p:cNvSpPr txBox="1"/>
-          <p:nvPr/>
-        </p:nvSpPr>
-        <p:spPr>
-          <a:xfrm>
-            <a:off x="6492240" y="1847088"/>
-            <a:ext cx="4937760" cy="384048"/>
-          </a:xfrm>
-          <a:prstGeom prst="rect">
-            <a:avLst/>
-          </a:prstGeom>
-          <a:noFill/>
-          <a:ln/>
-        </p:spPr>
-        <p:txBody>
-          <a:bodyPr wrap="square" lIns="0" tIns="0" rIns="0" bIns="0" rtlCol="0" anchor="ctr"/>
-          <a:lstStyle/>
-          <a:p>
-            <a:pPr indent="0" marL="0">
-              <a:buNone/>
-            </a:pPr>
-            <a:r>
-              <a:rPr lang="en-US" sz="1450" b="1" dirty="0">
+              <a:t> per abstract screened, 88% of it output tokens.  The pre-hoc estimate was </a:t>
+            </a:r>
+            <a:pPr indent="0" marL="0">
+              <a:buNone/>
+            </a:pPr>
+            <a:r>
+              <a:rPr lang="en-US" sz="1400" b="1" dirty="0">
                 <a:solidFill>
                   <a:srgbClr val="0A3D5C"/>
                 </a:solidFill>
@@ -5297,38 +5341,13 @@
                 <a:ea typeface="Calibri" pitchFamily="34" charset="-122"/>
                 <a:cs typeface="Calibri" pitchFamily="34" charset="-120"/>
               </a:rPr>
-              <a:t>One metric rule, enforced in code</a:t>
-            </a:r>
-            <a:endParaRPr lang="en-US" sz="1450" dirty="0"/>
-          </a:p>
-        </p:txBody>
-      </p:sp>
-      <p:sp>
-        <p:nvSpPr>
-          <p:cNvPr id="8" name="Text 6"/>
-          <p:cNvSpPr txBox="1"/>
-          <p:nvPr/>
-        </p:nvSpPr>
-        <p:spPr>
-          <a:xfrm>
-            <a:off x="6492240" y="2212848"/>
-            <a:ext cx="4928616" cy="1042416"/>
-          </a:xfrm>
-          <a:prstGeom prst="rect">
-            <a:avLst/>
-          </a:prstGeom>
-          <a:noFill/>
-          <a:ln/>
-        </p:spPr>
-        <p:txBody>
-          <a:bodyPr wrap="square" lIns="0" tIns="0" rIns="0" bIns="0" rtlCol="0" anchor="t"/>
-          <a:lstStyle/>
-          <a:p>
-            <a:pPr indent="0" marL="0">
-              <a:buNone/>
-            </a:pPr>
-            <a:r>
-              <a:rPr lang="en-US" sz="1150" dirty="0">
+              <a:t>1.8× under</a:t>
+            </a:r>
+            <a:pPr indent="0" marL="0">
+              <a:buNone/>
+            </a:pPr>
+            <a:r>
+              <a:rPr lang="en-US" sz="1400" dirty="0">
                 <a:solidFill>
                   <a:srgbClr val="0F2A3F"/>
                 </a:solidFill>
@@ -5336,225 +5355,39 @@
                 <a:ea typeface="Calibri" pitchFamily="34" charset="-122"/>
                 <a:cs typeface="Calibri" pitchFamily="34" charset="-120"/>
               </a:rPr>
-              <a:t>r² compares unthresholded maps; dice compares FDR-corrected thresholded maps. Both comparison scripts previously had one half wrong. Fixing it moved 26 of 35 contrasts.</a:t>
-            </a:r>
-            <a:endParaRPr lang="en-US" sz="1150" dirty="0"/>
-          </a:p>
-        </p:txBody>
-      </p:sp>
-      <p:sp>
-        <p:nvSpPr>
-          <p:cNvPr id="9" name="Shape 7"/>
-          <p:cNvSpPr/>
-          <p:nvPr/>
-        </p:nvSpPr>
-        <p:spPr>
-          <a:xfrm>
-            <a:off x="566928" y="3547872"/>
-            <a:ext cx="5330952" cy="1627632"/>
-          </a:xfrm>
-          <a:prstGeom prst="roundRect">
-            <a:avLst>
-              <a:gd name="adj" fmla="val 4494"/>
-            </a:avLst>
-          </a:prstGeom>
-          <a:solidFill>
-            <a:srgbClr val="EEF3F7"/>
-          </a:solidFill>
-          <a:ln w="12700">
-            <a:solidFill>
-              <a:srgbClr val="EEF3F7"/>
-            </a:solidFill>
-            <a:prstDash val="solid"/>
-          </a:ln>
-        </p:spPr>
-      </p:sp>
-      <p:sp>
-        <p:nvSpPr>
-          <p:cNvPr id="10" name="Text 8"/>
-          <p:cNvSpPr txBox="1"/>
-          <p:nvPr/>
-        </p:nvSpPr>
-        <p:spPr>
-          <a:xfrm>
-            <a:off x="768096" y="3694176"/>
-            <a:ext cx="4937760" cy="384048"/>
-          </a:xfrm>
-          <a:prstGeom prst="rect">
-            <a:avLst/>
-          </a:prstGeom>
-          <a:noFill/>
-          <a:ln/>
-        </p:spPr>
-        <p:txBody>
-          <a:bodyPr wrap="square" lIns="0" tIns="0" rIns="0" bIns="0" rtlCol="0" anchor="ctr"/>
-          <a:lstStyle/>
-          <a:p>
-            <a:pPr indent="0" marL="0">
-              <a:buNone/>
-            </a:pPr>
-            <a:r>
-              <a:rPr lang="en-US" sz="1450" b="1" dirty="0">
-                <a:solidFill>
-                  <a:srgbClr val="0A3D5C"/>
-                </a:solidFill>
-                <a:latin typeface="Calibri" pitchFamily="34" charset="0"/>
-                <a:ea typeface="Calibri" pitchFamily="34" charset="-122"/>
-                <a:cs typeface="Calibri" pitchFamily="34" charset="-120"/>
-              </a:rPr>
-              <a:t>MKDA everywhere</a:t>
-            </a:r>
-            <a:endParaRPr lang="en-US" sz="1450" dirty="0"/>
-          </a:p>
-        </p:txBody>
-      </p:sp>
-      <p:sp>
-        <p:nvSpPr>
-          <p:cNvPr id="11" name="Text 9"/>
-          <p:cNvSpPr txBox="1"/>
-          <p:nvPr/>
-        </p:nvSpPr>
-        <p:spPr>
-          <a:xfrm>
-            <a:off x="768096" y="4059936"/>
-            <a:ext cx="4928616" cy="1042416"/>
-          </a:xfrm>
-          <a:prstGeom prst="rect">
-            <a:avLst/>
-          </a:prstGeom>
-          <a:noFill/>
-          <a:ln/>
-        </p:spPr>
-        <p:txBody>
-          <a:bodyPr wrap="square" lIns="0" tIns="0" rIns="0" bIns="0" rtlCol="0" anchor="t"/>
-          <a:lstStyle/>
-          <a:p>
-            <a:pPr indent="0" marL="0">
-              <a:buNone/>
-            </a:pPr>
-            <a:r>
-              <a:rPr lang="en-US" sz="1150" dirty="0">
-                <a:solidFill>
-                  <a:srgbClr val="0F2A3F"/>
-                </a:solidFill>
-                <a:latin typeface="Calibri" pitchFamily="34" charset="0"/>
-                <a:ea typeface="Calibri" pitchFamily="34" charset="-122"/>
-                <a:cs typeface="Calibri" pitchFamily="34" charset="-120"/>
-              </a:rPr>
-              <a:t>Five of the nine source papers used ALE. We re-analyse all nine with MKDA for internal comparability, and report the one case where that substitution erases a published result (nicotine).</a:t>
-            </a:r>
-            <a:endParaRPr lang="en-US" sz="1150" dirty="0"/>
-          </a:p>
-        </p:txBody>
-      </p:sp>
-      <p:sp>
-        <p:nvSpPr>
-          <p:cNvPr id="12" name="Shape 10"/>
-          <p:cNvSpPr/>
-          <p:nvPr/>
-        </p:nvSpPr>
-        <p:spPr>
-          <a:xfrm>
-            <a:off x="6291072" y="3547872"/>
-            <a:ext cx="5330952" cy="1627632"/>
-          </a:xfrm>
-          <a:prstGeom prst="roundRect">
-            <a:avLst>
-              <a:gd name="adj" fmla="val 4494"/>
-            </a:avLst>
-          </a:prstGeom>
-          <a:solidFill>
-            <a:srgbClr val="EEF3F7"/>
-          </a:solidFill>
-          <a:ln w="12700">
-            <a:solidFill>
-              <a:srgbClr val="EEF3F7"/>
-            </a:solidFill>
-            <a:prstDash val="solid"/>
-          </a:ln>
-        </p:spPr>
-      </p:sp>
-      <p:sp>
-        <p:nvSpPr>
-          <p:cNvPr id="13" name="Text 11"/>
-          <p:cNvSpPr txBox="1"/>
-          <p:nvPr/>
-        </p:nvSpPr>
-        <p:spPr>
-          <a:xfrm>
-            <a:off x="6492240" y="3694176"/>
-            <a:ext cx="4937760" cy="384048"/>
-          </a:xfrm>
-          <a:prstGeom prst="rect">
-            <a:avLst/>
-          </a:prstGeom>
-          <a:noFill/>
-          <a:ln/>
-        </p:spPr>
-        <p:txBody>
-          <a:bodyPr wrap="square" lIns="0" tIns="0" rIns="0" bIns="0" rtlCol="0" anchor="ctr"/>
-          <a:lstStyle/>
-          <a:p>
-            <a:pPr indent="0" marL="0">
-              <a:buNone/>
-            </a:pPr>
-            <a:r>
-              <a:rPr lang="en-US" sz="1450" b="1" dirty="0">
-                <a:solidFill>
-                  <a:srgbClr val="0A3D5C"/>
-                </a:solidFill>
-                <a:latin typeface="Calibri" pitchFamily="34" charset="0"/>
-                <a:ea typeface="Calibri" pitchFamily="34" charset="-122"/>
-                <a:cs typeface="Calibri" pitchFamily="34" charset="-120"/>
-              </a:rPr>
-              <a:t>Precision has no human ceiling</a:t>
-            </a:r>
-            <a:endParaRPr lang="en-US" sz="1450" dirty="0"/>
-          </a:p>
-        </p:txBody>
-      </p:sp>
-      <p:sp>
-        <p:nvSpPr>
-          <p:cNvPr id="14" name="Text 12"/>
-          <p:cNvSpPr txBox="1"/>
-          <p:nvPr/>
-        </p:nvSpPr>
-        <p:spPr>
-          <a:xfrm>
-            <a:off x="6492240" y="4059936"/>
-            <a:ext cx="4928616" cy="1042416"/>
-          </a:xfrm>
-          <a:prstGeom prst="rect">
-            <a:avLst/>
-          </a:prstGeom>
-          <a:noFill/>
-          <a:ln/>
-        </p:spPr>
-        <p:txBody>
-          <a:bodyPr wrap="square" lIns="0" tIns="0" rIns="0" bIns="0" rtlCol="0" anchor="t"/>
-          <a:lstStyle/>
-          <a:p>
-            <a:pPr indent="0" marL="0">
-              <a:buNone/>
-            </a:pPr>
-            <a:r>
-              <a:rPr lang="en-US" sz="1150" dirty="0">
-                <a:solidFill>
-                  <a:srgbClr val="0F2A3F"/>
-                </a:solidFill>
-                <a:latin typeface="Calibri" pitchFamily="34" charset="0"/>
-                <a:ea typeface="Calibri" pitchFamily="34" charset="-122"/>
-                <a:cs typeface="Calibri" pitchFamily="34" charset="-120"/>
-              </a:rPr>
-              <a:t>We score screening against one team's inclusion list as though it were truth. Human–human agreement on abstract screening runs κ ≈ 0.6–0.8, so our precision is a lower bound on agreement, not an accuracy estimate.</a:t>
-            </a:r>
-            <a:endParaRPr lang="en-US" sz="1150" dirty="0"/>
-          </a:p>
-        </p:txBody>
-      </p:sp>
-      <p:sp>
-        <p:nvSpPr>
-          <p:cNvPr id="15" name="Text 13"/>
+              <a:t> — which is why the accounting exists.</a:t>
+            </a:r>
+            <a:endParaRPr lang="en-US" sz="1400" dirty="0"/>
+          </a:p>
+        </p:txBody>
+      </p:sp>
+      <p:pic>
+        <p:nvPicPr>
+          <p:cNvPr id="5" name="Image 0" descr="/home/zorro/repos/autonima-results/reports/deck_figures/figureS1_measured_cost.png">    </p:cNvPr>
+          <p:cNvPicPr>
+            <a:picLocks noChangeAspect="1"/>
+          </p:cNvPicPr>
+          <p:nvPr/>
+        </p:nvPicPr>
+        <p:blipFill>
+          <a:blip r:embed="rId1"/>
+          <a:stretch>
+            <a:fillRect/>
+          </a:stretch>
+        </p:blipFill>
+        <p:spPr>
+          <a:xfrm>
+            <a:off x="1485877" y="2011680"/>
+            <a:ext cx="9219940" cy="3749040"/>
+          </a:xfrm>
+          <a:prstGeom prst="rect">
+            <a:avLst/>
+          </a:prstGeom>
+        </p:spPr>
+      </p:pic>
+      <p:sp>
+        <p:nvSpPr>
+          <p:cNvPr id="6" name="Text 3"/>
           <p:cNvSpPr txBox="1"/>
           <p:nvPr/>
         </p:nvSpPr>
@@ -5585,7 +5418,7 @@
                 <a:ea typeface="Calibri" pitchFamily="34" charset="-122"/>
                 <a:cs typeface="Calibri" pitchFamily="34" charset="-120"/>
               </a:rPr>
-              <a:t>Each is a scope decision recorded with its reasoning in the paper outline — not an omission.</a:t>
+              <a:t>Tens of dollars and hours against months of person time — which for a methods audience is the point, not an aside.</a:t>
             </a:r>
             <a:endParaRPr lang="en-US" sz="1050" dirty="0"/>
           </a:p>
@@ -8807,7 +8640,7 @@
       </p:sp>
       <p:pic>
         <p:nvPicPr>
-          <p:cNvPr id="4" name="Image 0" descr="/home/zorro/repos/autonima-results/reports/nature_methods_figures/figure2_gold_retention_and_precision.png">    </p:cNvPr>
+          <p:cNvPr id="4" name="Image 0" descr="/home/zorro/repos/autonima-results/reports/deck_figures/figure2_gold_retention_and_precision.png">    </p:cNvPr>
           <p:cNvPicPr>
             <a:picLocks noChangeAspect="1"/>
           </p:cNvPicPr>
@@ -8821,8 +8654,8 @@
         </p:blipFill>
         <p:spPr>
           <a:xfrm>
-            <a:off x="1473452" y="1627632"/>
-            <a:ext cx="9244792" cy="4160520"/>
+            <a:off x="1162825" y="1627632"/>
+            <a:ext cx="9866045" cy="4160520"/>
           </a:xfrm>
           <a:prstGeom prst="rect">
             <a:avLst/>
@@ -9054,7 +8887,7 @@
       </p:sp>
       <p:pic>
         <p:nvPicPr>
-          <p:cNvPr id="5" name="Image 0" descr="/home/zorro/repos/autonima-results/reports/nature_methods_figures/figureS3_pool_mismatch.png">    </p:cNvPr>
+          <p:cNvPr id="5" name="Image 0" descr="/home/zorro/repos/autonima-results/reports/deck_figures/figureS3_pool_mismatch.png">    </p:cNvPr>
           <p:cNvPicPr>
             <a:picLocks noChangeAspect="1"/>
           </p:cNvPicPr>
@@ -9068,8 +8901,8 @@
         </p:blipFill>
         <p:spPr>
           <a:xfrm>
-            <a:off x="1993316" y="1993392"/>
-            <a:ext cx="8205063" cy="3794760"/>
+            <a:off x="2711297" y="1993392"/>
+            <a:ext cx="6769102" cy="3794760"/>
           </a:xfrm>
           <a:prstGeom prst="rect">
             <a:avLst/>
@@ -9181,7 +9014,7 @@
       </p:sp>
       <p:pic>
         <p:nvPicPr>
-          <p:cNvPr id="3" name="Image 0" descr="/home/zorro/repos/autonima-results/reports/nature_methods_figures/figure3_recover_and_select_analyses.png">    </p:cNvPr>
+          <p:cNvPr id="3" name="Image 0" descr="/home/zorro/repos/autonima-results/reports/deck_figures/figure3_recover_and_select_analyses.png">    </p:cNvPr>
           <p:cNvPicPr>
             <a:picLocks noChangeAspect="1"/>
           </p:cNvPicPr>
@@ -9195,8 +9028,8 @@
         </p:blipFill>
         <p:spPr>
           <a:xfrm>
-            <a:off x="4160520" y="2091196"/>
-            <a:ext cx="7452360" cy="3087089"/>
+            <a:off x="4160520" y="1868712"/>
+            <a:ext cx="7452360" cy="3532056"/>
           </a:xfrm>
           <a:prstGeom prst="rect">
             <a:avLst/>
@@ -9893,7 +9726,7 @@
       </p:sp>
       <p:pic>
         <p:nvPicPr>
-          <p:cNvPr id="7" name="Image 0" descr="/home/zorro/repos/autonima-results/reports/nature_methods_figures/figure4_pipeline_vs_baseline.png">    </p:cNvPr>
+          <p:cNvPr id="7" name="Image 0" descr="/home/zorro/repos/autonima-results/reports/deck_figures/figure4_pipeline_vs_baseline.png">    </p:cNvPr>
           <p:cNvPicPr>
             <a:picLocks noChangeAspect="1"/>
           </p:cNvPicPr>
@@ -9907,8 +9740,8 @@
         </p:blipFill>
         <p:spPr>
           <a:xfrm>
-            <a:off x="3977640" y="1783851"/>
-            <a:ext cx="7635240" cy="3747497"/>
+            <a:off x="3977640" y="1887323"/>
+            <a:ext cx="7635240" cy="3540554"/>
           </a:xfrm>
           <a:prstGeom prst="rect">
             <a:avLst/>
@@ -10012,7 +9845,7 @@
                 <a:ea typeface="Cambria" pitchFamily="34" charset="-122"/>
                 <a:cs typeface="Cambria" pitchFamily="34" charset="-120"/>
               </a:rPr>
-              <a:t>What that looks like on a brain</a:t>
+              <a:t>End-to-end recovery of published meta-analytic maps</a:t>
             </a:r>
             <a:endParaRPr lang="en-US" sz="3100" dirty="0"/>
           </a:p>
@@ -10051,7 +9884,7 @@
                 <a:ea typeface="Calibri" pitchFamily="34" charset="-122"/>
                 <a:cs typeface="Calibri" pitchFamily="34" charset="-120"/>
               </a:rPr>
-              <a:t>Emotion regulation: three contrasts, expert above and pipeline below, against the one search-only map that cannot tell them apart.</a:t>
+              <a:t>Emotion regulation: three contrasts, expert above and pipeline below, against the single search-only map that cannot distinguish them.</a:t>
             </a:r>
             <a:endParaRPr lang="en-US" sz="1500" dirty="0"/>
           </a:p>
@@ -10059,7 +9892,7 @@
       </p:sp>
       <p:pic>
         <p:nvPicPr>
-          <p:cNvPr id="4" name="Image 0" descr="/home/zorro/repos/autonima-results/reports/nature_methods_figures/figure_er_surface_contrasts.png">    </p:cNvPr>
+          <p:cNvPr id="4" name="Image 0" descr="/home/zorro/repos/autonima-results/reports/deck_figures/figure_er_surface_contrasts.png">    </p:cNvPr>
           <p:cNvPicPr>
             <a:picLocks noChangeAspect="1"/>
           </p:cNvPicPr>
@@ -10073,8 +9906,8 @@
         </p:blipFill>
         <p:spPr>
           <a:xfrm>
-            <a:off x="1494704" y="1600200"/>
-            <a:ext cx="9202287" cy="3063240"/>
+            <a:off x="566928" y="1662521"/>
+            <a:ext cx="11057839" cy="3816422"/>
           </a:xfrm>
           <a:prstGeom prst="rect">
             <a:avLst/>
@@ -10083,322 +9916,74 @@
       </p:pic>
       <p:sp>
         <p:nvSpPr>
-          <p:cNvPr id="5" name="Shape 2"/>
-          <p:cNvSpPr/>
-          <p:nvPr/>
-        </p:nvSpPr>
-        <p:spPr>
-          <a:xfrm>
-            <a:off x="566928" y="4864608"/>
-            <a:ext cx="3515258" cy="868680"/>
-          </a:xfrm>
-          <a:prstGeom prst="roundRect">
-            <a:avLst>
-              <a:gd name="adj" fmla="val 8421"/>
-            </a:avLst>
-          </a:prstGeom>
-          <a:solidFill>
-            <a:srgbClr val="EEF3F7"/>
-          </a:solidFill>
-          <a:ln w="12700">
-            <a:solidFill>
-              <a:srgbClr val="EEF3F7"/>
-            </a:solidFill>
-            <a:prstDash val="solid"/>
-          </a:ln>
-        </p:spPr>
+          <p:cNvPr id="5" name="Text 2"/>
+          <p:cNvSpPr txBox="1"/>
+          <p:nvPr/>
+        </p:nvSpPr>
+        <p:spPr>
+          <a:xfrm>
+            <a:off x="566928" y="5632704"/>
+            <a:ext cx="11057839" cy="411480"/>
+          </a:xfrm>
+          <a:prstGeom prst="rect">
+            <a:avLst/>
+          </a:prstGeom>
+          <a:noFill/>
+          <a:ln/>
+        </p:spPr>
+        <p:txBody>
+          <a:bodyPr wrap="square" lIns="0" tIns="0" rIns="0" bIns="0" rtlCol="0" anchor="ctr"/>
+          <a:lstStyle/>
+          <a:p>
+            <a:pPr indent="0" marL="0">
+              <a:buNone/>
+            </a:pPr>
+            <a:r>
+              <a:rPr lang="en-US" sz="1350" dirty="0">
+                <a:solidFill>
+                  <a:srgbClr val="0F2A3F"/>
+                </a:solidFill>
+                <a:latin typeface="Calibri" pitchFamily="34" charset="0"/>
+                <a:ea typeface="Calibri" pitchFamily="34" charset="-122"/>
+                <a:cs typeface="Calibri" pitchFamily="34" charset="-120"/>
+              </a:rPr>
+              <a:t>The pipeline separates the three contrasts; the search-only arm returns </a:t>
+            </a:r>
+            <a:pPr indent="0" marL="0">
+              <a:buNone/>
+            </a:pPr>
+            <a:r>
+              <a:rPr lang="en-US" sz="1350" b="1" dirty="0">
+                <a:solidFill>
+                  <a:srgbClr val="0A3D5C"/>
+                </a:solidFill>
+                <a:latin typeface="Calibri" pitchFamily="34" charset="0"/>
+                <a:ea typeface="Calibri" pitchFamily="34" charset="-122"/>
+                <a:cs typeface="Calibri" pitchFamily="34" charset="-120"/>
+              </a:rPr>
+              <a:t>one map for all three</a:t>
+            </a:r>
+            <a:pPr indent="0" marL="0">
+              <a:buNone/>
+            </a:pPr>
+            <a:r>
+              <a:rPr lang="en-US" sz="1350" dirty="0">
+                <a:solidFill>
+                  <a:srgbClr val="0F2A3F"/>
+                </a:solidFill>
+                <a:latin typeface="Calibri" pitchFamily="34" charset="0"/>
+                <a:ea typeface="Calibri" pitchFamily="34" charset="-122"/>
+                <a:cs typeface="Calibri" pitchFamily="34" charset="-120"/>
+              </a:rPr>
+              <a:t>. Dice roughly doubles to quadruples against it.</a:t>
+            </a:r>
+            <a:endParaRPr lang="en-US" sz="1350" dirty="0"/>
+          </a:p>
+        </p:txBody>
       </p:sp>
       <p:sp>
         <p:nvSpPr>
           <p:cNvPr id="6" name="Text 3"/>
-          <p:cNvSpPr txBox="1"/>
-          <p:nvPr/>
-        </p:nvSpPr>
-        <p:spPr>
-          <a:xfrm>
-            <a:off x="676656" y="4956048"/>
-            <a:ext cx="3295802" cy="475488"/>
-          </a:xfrm>
-          <a:prstGeom prst="rect">
-            <a:avLst/>
-          </a:prstGeom>
-          <a:noFill/>
-          <a:ln/>
-        </p:spPr>
-        <p:txBody>
-          <a:bodyPr wrap="square" lIns="0" tIns="0" rIns="0" bIns="0" rtlCol="0" anchor="ctr"/>
-          <a:lstStyle/>
-          <a:p>
-            <a:pPr algn="ctr" indent="0" marL="0">
-              <a:buNone/>
-            </a:pPr>
-            <a:r>
-              <a:rPr lang="en-US" sz="2600" b="1" dirty="0">
-                <a:solidFill>
-                  <a:srgbClr val="0A3D5C"/>
-                </a:solidFill>
-                <a:latin typeface="Cambria" pitchFamily="34" charset="0"/>
-                <a:ea typeface="Cambria" pitchFamily="34" charset="-122"/>
-                <a:cs typeface="Cambria" pitchFamily="34" charset="-120"/>
-              </a:rPr>
-              <a:t>0.53 / 0.11</a:t>
-            </a:r>
-            <a:endParaRPr lang="en-US" sz="2600" dirty="0"/>
-          </a:p>
-        </p:txBody>
-      </p:sp>
-      <p:sp>
-        <p:nvSpPr>
-          <p:cNvPr id="7" name="Text 4"/>
-          <p:cNvSpPr txBox="1"/>
-          <p:nvPr/>
-        </p:nvSpPr>
-        <p:spPr>
-          <a:xfrm>
-            <a:off x="676656" y="5413248"/>
-            <a:ext cx="3295802" cy="246888"/>
-          </a:xfrm>
-          <a:prstGeom prst="rect">
-            <a:avLst/>
-          </a:prstGeom>
-          <a:noFill/>
-          <a:ln/>
-        </p:spPr>
-        <p:txBody>
-          <a:bodyPr wrap="square" lIns="0" tIns="0" rIns="0" bIns="0" rtlCol="0" anchor="t"/>
-          <a:lstStyle/>
-          <a:p>
-            <a:pPr algn="ctr" indent="0" marL="0">
-              <a:buNone/>
-            </a:pPr>
-            <a:r>
-              <a:rPr lang="en-US" sz="1100" dirty="0">
-                <a:solidFill>
-                  <a:srgbClr val="5C7286"/>
-                </a:solidFill>
-                <a:latin typeface="Calibri" pitchFamily="34" charset="0"/>
-                <a:ea typeface="Calibri" pitchFamily="34" charset="-122"/>
-                <a:cs typeface="Calibri" pitchFamily="34" charset="-120"/>
-              </a:rPr>
-              <a:t>Increase — dice, pipeline vs baseline</a:t>
-            </a:r>
-            <a:endParaRPr lang="en-US" sz="1100" dirty="0"/>
-          </a:p>
-        </p:txBody>
-      </p:sp>
-      <p:sp>
-        <p:nvSpPr>
-          <p:cNvPr id="8" name="Shape 5"/>
-          <p:cNvSpPr/>
-          <p:nvPr/>
-        </p:nvSpPr>
-        <p:spPr>
-          <a:xfrm>
-            <a:off x="4338218" y="4864608"/>
-            <a:ext cx="3515258" cy="868680"/>
-          </a:xfrm>
-          <a:prstGeom prst="roundRect">
-            <a:avLst>
-              <a:gd name="adj" fmla="val 8421"/>
-            </a:avLst>
-          </a:prstGeom>
-          <a:solidFill>
-            <a:srgbClr val="EEF3F7"/>
-          </a:solidFill>
-          <a:ln w="12700">
-            <a:solidFill>
-              <a:srgbClr val="EEF3F7"/>
-            </a:solidFill>
-            <a:prstDash val="solid"/>
-          </a:ln>
-        </p:spPr>
-      </p:sp>
-      <p:sp>
-        <p:nvSpPr>
-          <p:cNvPr id="9" name="Text 6"/>
-          <p:cNvSpPr txBox="1"/>
-          <p:nvPr/>
-        </p:nvSpPr>
-        <p:spPr>
-          <a:xfrm>
-            <a:off x="4447946" y="4956048"/>
-            <a:ext cx="3295802" cy="475488"/>
-          </a:xfrm>
-          <a:prstGeom prst="rect">
-            <a:avLst/>
-          </a:prstGeom>
-          <a:noFill/>
-          <a:ln/>
-        </p:spPr>
-        <p:txBody>
-          <a:bodyPr wrap="square" lIns="0" tIns="0" rIns="0" bIns="0" rtlCol="0" anchor="ctr"/>
-          <a:lstStyle/>
-          <a:p>
-            <a:pPr algn="ctr" indent="0" marL="0">
-              <a:buNone/>
-            </a:pPr>
-            <a:r>
-              <a:rPr lang="en-US" sz="2600" b="1" dirty="0">
-                <a:solidFill>
-                  <a:srgbClr val="0A3D5C"/>
-                </a:solidFill>
-                <a:latin typeface="Cambria" pitchFamily="34" charset="0"/>
-                <a:ea typeface="Cambria" pitchFamily="34" charset="-122"/>
-                <a:cs typeface="Cambria" pitchFamily="34" charset="-120"/>
-              </a:rPr>
-              <a:t>0.49 / 0.20</a:t>
-            </a:r>
-            <a:endParaRPr lang="en-US" sz="2600" dirty="0"/>
-          </a:p>
-        </p:txBody>
-      </p:sp>
-      <p:sp>
-        <p:nvSpPr>
-          <p:cNvPr id="10" name="Text 7"/>
-          <p:cNvSpPr txBox="1"/>
-          <p:nvPr/>
-        </p:nvSpPr>
-        <p:spPr>
-          <a:xfrm>
-            <a:off x="4447946" y="5413248"/>
-            <a:ext cx="3295802" cy="246888"/>
-          </a:xfrm>
-          <a:prstGeom prst="rect">
-            <a:avLst/>
-          </a:prstGeom>
-          <a:noFill/>
-          <a:ln/>
-        </p:spPr>
-        <p:txBody>
-          <a:bodyPr wrap="square" lIns="0" tIns="0" rIns="0" bIns="0" rtlCol="0" anchor="t"/>
-          <a:lstStyle/>
-          <a:p>
-            <a:pPr algn="ctr" indent="0" marL="0">
-              <a:buNone/>
-            </a:pPr>
-            <a:r>
-              <a:rPr lang="en-US" sz="1100" dirty="0">
-                <a:solidFill>
-                  <a:srgbClr val="5C7286"/>
-                </a:solidFill>
-                <a:latin typeface="Calibri" pitchFamily="34" charset="0"/>
-                <a:ea typeface="Calibri" pitchFamily="34" charset="-122"/>
-                <a:cs typeface="Calibri" pitchFamily="34" charset="-120"/>
-              </a:rPr>
-              <a:t>Maintain — dice, pipeline vs baseline</a:t>
-            </a:r>
-            <a:endParaRPr lang="en-US" sz="1100" dirty="0"/>
-          </a:p>
-        </p:txBody>
-      </p:sp>
-      <p:sp>
-        <p:nvSpPr>
-          <p:cNvPr id="11" name="Shape 8"/>
-          <p:cNvSpPr/>
-          <p:nvPr/>
-        </p:nvSpPr>
-        <p:spPr>
-          <a:xfrm>
-            <a:off x="8109509" y="4864608"/>
-            <a:ext cx="3515258" cy="868680"/>
-          </a:xfrm>
-          <a:prstGeom prst="roundRect">
-            <a:avLst>
-              <a:gd name="adj" fmla="val 8421"/>
-            </a:avLst>
-          </a:prstGeom>
-          <a:solidFill>
-            <a:srgbClr val="EEF3F7"/>
-          </a:solidFill>
-          <a:ln w="12700">
-            <a:solidFill>
-              <a:srgbClr val="EEF3F7"/>
-            </a:solidFill>
-            <a:prstDash val="solid"/>
-          </a:ln>
-        </p:spPr>
-      </p:sp>
-      <p:sp>
-        <p:nvSpPr>
-          <p:cNvPr id="12" name="Text 9"/>
-          <p:cNvSpPr txBox="1"/>
-          <p:nvPr/>
-        </p:nvSpPr>
-        <p:spPr>
-          <a:xfrm>
-            <a:off x="8219237" y="4956048"/>
-            <a:ext cx="3295802" cy="475488"/>
-          </a:xfrm>
-          <a:prstGeom prst="rect">
-            <a:avLst/>
-          </a:prstGeom>
-          <a:noFill/>
-          <a:ln/>
-        </p:spPr>
-        <p:txBody>
-          <a:bodyPr wrap="square" lIns="0" tIns="0" rIns="0" bIns="0" rtlCol="0" anchor="ctr"/>
-          <a:lstStyle/>
-          <a:p>
-            <a:pPr algn="ctr" indent="0" marL="0">
-              <a:buNone/>
-            </a:pPr>
-            <a:r>
-              <a:rPr lang="en-US" sz="2600" b="1" dirty="0">
-                <a:solidFill>
-                  <a:srgbClr val="0A3D5C"/>
-                </a:solidFill>
-                <a:latin typeface="Cambria" pitchFamily="34" charset="0"/>
-                <a:ea typeface="Cambria" pitchFamily="34" charset="-122"/>
-                <a:cs typeface="Cambria" pitchFamily="34" charset="-120"/>
-              </a:rPr>
-              <a:t>0.72 / 0.44</a:t>
-            </a:r>
-            <a:endParaRPr lang="en-US" sz="2600" dirty="0"/>
-          </a:p>
-        </p:txBody>
-      </p:sp>
-      <p:sp>
-        <p:nvSpPr>
-          <p:cNvPr id="13" name="Text 10"/>
-          <p:cNvSpPr txBox="1"/>
-          <p:nvPr/>
-        </p:nvSpPr>
-        <p:spPr>
-          <a:xfrm>
-            <a:off x="8219237" y="5413248"/>
-            <a:ext cx="3295802" cy="246888"/>
-          </a:xfrm>
-          <a:prstGeom prst="rect">
-            <a:avLst/>
-          </a:prstGeom>
-          <a:noFill/>
-          <a:ln/>
-        </p:spPr>
-        <p:txBody>
-          <a:bodyPr wrap="square" lIns="0" tIns="0" rIns="0" bIns="0" rtlCol="0" anchor="t"/>
-          <a:lstStyle/>
-          <a:p>
-            <a:pPr algn="ctr" indent="0" marL="0">
-              <a:buNone/>
-            </a:pPr>
-            <a:r>
-              <a:rPr lang="en-US" sz="1100" dirty="0">
-                <a:solidFill>
-                  <a:srgbClr val="5C7286"/>
-                </a:solidFill>
-                <a:latin typeface="Calibri" pitchFamily="34" charset="0"/>
-                <a:ea typeface="Calibri" pitchFamily="34" charset="-122"/>
-                <a:cs typeface="Calibri" pitchFamily="34" charset="-120"/>
-              </a:rPr>
-              <a:t>Reappraisal — dice, pipeline vs baseline</a:t>
-            </a:r>
-            <a:endParaRPr lang="en-US" sz="1100" dirty="0"/>
-          </a:p>
-        </p:txBody>
-      </p:sp>
-      <p:sp>
-        <p:nvSpPr>
-          <p:cNvPr id="14" name="Text 11"/>
           <p:cNvSpPr txBox="1"/>
           <p:nvPr/>
         </p:nvSpPr>
@@ -10493,15 +10078,54 @@
                 <a:ea typeface="Cambria" pitchFamily="34" charset="-122"/>
                 <a:cs typeface="Cambria" pitchFamily="34" charset="-120"/>
               </a:rPr>
-              <a:t>The gain is analysis selection, not paper selection</a:t>
+              <a:t>Meta-analytic recovery across the benchmark range</a:t>
             </a:r>
             <a:endParaRPr lang="en-US" sz="3100" dirty="0"/>
+          </a:p>
+        </p:txBody>
+      </p:sp>
+      <p:sp>
+        <p:nvSpPr>
+          <p:cNvPr id="3" name="Text 1"/>
+          <p:cNvSpPr txBox="1"/>
+          <p:nvPr/>
+        </p:nvSpPr>
+        <p:spPr>
+          <a:xfrm>
+            <a:off x="566928" y="1060704"/>
+            <a:ext cx="11057839" cy="420624"/>
+          </a:xfrm>
+          <a:prstGeom prst="rect">
+            <a:avLst/>
+          </a:prstGeom>
+          <a:noFill/>
+          <a:ln/>
+        </p:spPr>
+        <p:txBody>
+          <a:bodyPr wrap="square" lIns="0" tIns="0" rIns="0" bIns="0" rtlCol="0" anchor="ctr"/>
+          <a:lstStyle/>
+          <a:p>
+            <a:pPr indent="0" marL="0">
+              <a:buNone/>
+            </a:pPr>
+            <a:r>
+              <a:rPr lang="en-US" sz="1500" dirty="0">
+                <a:solidFill>
+                  <a:srgbClr val="1C7293"/>
+                </a:solidFill>
+                <a:latin typeface="Calibri" pitchFamily="34" charset="0"/>
+                <a:ea typeface="Calibri" pitchFamily="34" charset="-122"/>
+                <a:cs typeface="Calibri" pitchFamily="34" charset="-120"/>
+              </a:rPr>
+              <a:t>The same three arms, from the largest margin outside emotion regulation down to two near-ties.</a:t>
+            </a:r>
+            <a:endParaRPr lang="en-US" sz="1500" dirty="0"/>
           </a:p>
         </p:txBody>
       </p:sp>
       <p:pic>
         <p:nvPicPr>
-          <p:cNvPr id="3" name="Image 0" descr="/home/zorro/repos/autonima-results/reports/nature_methods_figures/figure5_gain_from_analysis_selection.png">    </p:cNvPr>
+          <p:cNvPr id="4" name="Image 0" descr="/home/zorro/repos/autonima-results/reports/deck_figures/figure_brain_maps_range.png">    </p:cNvPr>
           <p:cNvPicPr>
             <a:picLocks noChangeAspect="1"/>
           </p:cNvPicPr>
@@ -10515,8 +10139,8 @@
         </p:blipFill>
         <p:spPr>
           <a:xfrm>
-            <a:off x="4194320" y="1371600"/>
-            <a:ext cx="7302465" cy="4572000"/>
+            <a:off x="1392279" y="1572768"/>
+            <a:ext cx="9407137" cy="3703320"/>
           </a:xfrm>
           <a:prstGeom prst="rect">
             <a:avLst/>
@@ -10525,30 +10149,44 @@
       </p:pic>
       <p:sp>
         <p:nvSpPr>
-          <p:cNvPr id="4" name="Text 1"/>
-          <p:cNvSpPr txBox="1"/>
-          <p:nvPr/>
-        </p:nvSpPr>
-        <p:spPr>
-          <a:xfrm>
-            <a:off x="566928" y="1536192"/>
-            <a:ext cx="3429000" cy="1051560"/>
-          </a:xfrm>
-          <a:prstGeom prst="rect">
-            <a:avLst/>
-          </a:prstGeom>
-          <a:noFill/>
-          <a:ln/>
-        </p:spPr>
-        <p:txBody>
-          <a:bodyPr wrap="square" lIns="0" tIns="0" rIns="0" bIns="0" rtlCol="0" anchor="ctr"/>
-          <a:lstStyle/>
-          <a:p>
-            <a:pPr indent="0" marL="0">
-              <a:buNone/>
-            </a:pPr>
-            <a:r>
-              <a:rPr lang="en-US" sz="1350" dirty="0">
+          <p:cNvPr id="5" name="Text 2"/>
+          <p:cNvSpPr txBox="1"/>
+          <p:nvPr/>
+        </p:nvSpPr>
+        <p:spPr>
+          <a:xfrm>
+            <a:off x="566928" y="5376672"/>
+            <a:ext cx="11057839" cy="658368"/>
+          </a:xfrm>
+          <a:prstGeom prst="rect">
+            <a:avLst/>
+          </a:prstGeom>
+          <a:noFill/>
+          <a:ln/>
+        </p:spPr>
+        <p:txBody>
+          <a:bodyPr wrap="square" lIns="0" tIns="0" rIns="0" bIns="0" rtlCol="0" anchor="t"/>
+          <a:lstStyle/>
+          <a:p>
+            <a:pPr indent="0" marL="0">
+              <a:buNone/>
+            </a:pPr>
+            <a:r>
+              <a:rPr lang="en-US" sz="1300" b="1" dirty="0">
+                <a:solidFill>
+                  <a:srgbClr val="0A3D5C"/>
+                </a:solidFill>
+                <a:latin typeface="Calibri" pitchFamily="34" charset="0"/>
+                <a:ea typeface="Calibri" pitchFamily="34" charset="-122"/>
+                <a:cs typeface="Calibri" pitchFamily="34" charset="-120"/>
+              </a:rPr>
+              <a:t>Verbal problem solving</a:t>
+            </a:r>
+            <a:pPr indent="0" marL="0">
+              <a:buNone/>
+            </a:pPr>
+            <a:r>
+              <a:rPr lang="en-US" sz="1300" dirty="0">
                 <a:solidFill>
                   <a:srgbClr val="0F2A3F"/>
                 </a:solidFill>
@@ -10556,205 +10194,71 @@
                 <a:ea typeface="Calibri" pitchFamily="34" charset="-122"/>
                 <a:cs typeface="Calibri" pitchFamily="34" charset="-120"/>
               </a:rPr>
-              <a:t>Hold the studies fixed. Draw 500 random subsets the same size as the annotated one. Does annotation beat chance?</a:t>
-            </a:r>
-            <a:endParaRPr lang="en-US" sz="1350" dirty="0"/>
-          </a:p>
-        </p:txBody>
-      </p:sp>
-      <p:sp>
-        <p:nvSpPr>
-          <p:cNvPr id="5" name="Shape 2"/>
-          <p:cNvSpPr/>
-          <p:nvPr/>
-        </p:nvSpPr>
-        <p:spPr>
-          <a:xfrm>
-            <a:off x="566928" y="2697480"/>
-            <a:ext cx="3246120" cy="1051560"/>
-          </a:xfrm>
-          <a:prstGeom prst="roundRect">
-            <a:avLst>
-              <a:gd name="adj" fmla="val 6957"/>
-            </a:avLst>
-          </a:prstGeom>
-          <a:solidFill>
-            <a:srgbClr val="EEF3F7"/>
-          </a:solidFill>
-          <a:ln w="12700">
-            <a:solidFill>
-              <a:srgbClr val="EEF3F7"/>
-            </a:solidFill>
-            <a:prstDash val="solid"/>
-          </a:ln>
-        </p:spPr>
+              <a:t> is the strongest non-ER case: the baseline is diffuse and bilateral, the pipeline resolves the expert's focal clusters. </a:t>
+            </a:r>
+            <a:pPr indent="0" marL="0">
+              <a:buNone/>
+            </a:pPr>
+            <a:r>
+              <a:rPr lang="en-US" sz="1300" b="1" dirty="0">
+                <a:solidFill>
+                  <a:srgbClr val="0A3D5C"/>
+                </a:solidFill>
+                <a:latin typeface="Calibri" pitchFamily="34" charset="0"/>
+                <a:ea typeface="Calibri" pitchFamily="34" charset="-122"/>
+                <a:cs typeface="Calibri" pitchFamily="34" charset="-120"/>
+              </a:rPr>
+              <a:t>Perceptual decision making</a:t>
+            </a:r>
+            <a:pPr indent="0" marL="0">
+              <a:buNone/>
+            </a:pPr>
+            <a:r>
+              <a:rPr lang="en-US" sz="1300" dirty="0">
+                <a:solidFill>
+                  <a:srgbClr val="0F2A3F"/>
+                </a:solidFill>
+                <a:latin typeface="Calibri" pitchFamily="34" charset="0"/>
+                <a:ea typeface="Calibri" pitchFamily="34" charset="-122"/>
+                <a:cs typeface="Calibri" pitchFamily="34" charset="-120"/>
+              </a:rPr>
+              <a:t> and </a:t>
+            </a:r>
+            <a:pPr indent="0" marL="0">
+              <a:buNone/>
+            </a:pPr>
+            <a:r>
+              <a:rPr lang="en-US" sz="1300" b="1" dirty="0">
+                <a:solidFill>
+                  <a:srgbClr val="0A3D5C"/>
+                </a:solidFill>
+                <a:latin typeface="Calibri" pitchFamily="34" charset="0"/>
+                <a:ea typeface="Calibri" pitchFamily="34" charset="-122"/>
+                <a:cs typeface="Calibri" pitchFamily="34" charset="-120"/>
+              </a:rPr>
+              <a:t>cognitive flexibility</a:t>
+            </a:r>
+            <a:pPr indent="0" marL="0">
+              <a:buNone/>
+            </a:pPr>
+            <a:r>
+              <a:rPr lang="en-US" sz="1300" dirty="0">
+                <a:solidFill>
+                  <a:srgbClr val="0F2A3F"/>
+                </a:solidFill>
+                <a:latin typeface="Calibri" pitchFamily="34" charset="0"/>
+                <a:ea typeface="Calibri" pitchFamily="34" charset="-122"/>
+                <a:cs typeface="Calibri" pitchFamily="34" charset="-120"/>
+              </a:rPr>
+              <a:t> are near-ties — the baseline already finds most of the pattern, so there is little left to add.</a:t>
+            </a:r>
+            <a:endParaRPr lang="en-US" sz="1300" dirty="0"/>
+          </a:p>
+        </p:txBody>
       </p:sp>
       <p:sp>
         <p:nvSpPr>
           <p:cNvPr id="6" name="Text 3"/>
-          <p:cNvSpPr txBox="1"/>
-          <p:nvPr/>
-        </p:nvSpPr>
-        <p:spPr>
-          <a:xfrm>
-            <a:off x="676656" y="2788920"/>
-            <a:ext cx="3026664" cy="475488"/>
-          </a:xfrm>
-          <a:prstGeom prst="rect">
-            <a:avLst/>
-          </a:prstGeom>
-          <a:noFill/>
-          <a:ln/>
-        </p:spPr>
-        <p:txBody>
-          <a:bodyPr wrap="square" lIns="0" tIns="0" rIns="0" bIns="0" rtlCol="0" anchor="ctr"/>
-          <a:lstStyle/>
-          <a:p>
-            <a:pPr algn="ctr" indent="0" marL="0">
-              <a:buNone/>
-            </a:pPr>
-            <a:r>
-              <a:rPr lang="en-US" sz="3000" b="1" dirty="0">
-                <a:solidFill>
-                  <a:srgbClr val="E69F00"/>
-                </a:solidFill>
-                <a:latin typeface="Cambria" pitchFamily="34" charset="0"/>
-                <a:ea typeface="Cambria" pitchFamily="34" charset="-122"/>
-                <a:cs typeface="Cambria" pitchFamily="34" charset="-120"/>
-              </a:rPr>
-              <a:t>+0.211</a:t>
-            </a:r>
-            <a:endParaRPr lang="en-US" sz="3000" dirty="0"/>
-          </a:p>
-        </p:txBody>
-      </p:sp>
-      <p:sp>
-        <p:nvSpPr>
-          <p:cNvPr id="7" name="Text 4"/>
-          <p:cNvSpPr txBox="1"/>
-          <p:nvPr/>
-        </p:nvSpPr>
-        <p:spPr>
-          <a:xfrm>
-            <a:off x="676656" y="3246120"/>
-            <a:ext cx="3026664" cy="429768"/>
-          </a:xfrm>
-          <a:prstGeom prst="rect">
-            <a:avLst/>
-          </a:prstGeom>
-          <a:noFill/>
-          <a:ln/>
-        </p:spPr>
-        <p:txBody>
-          <a:bodyPr wrap="square" lIns="0" tIns="0" rIns="0" bIns="0" rtlCol="0" anchor="t"/>
-          <a:lstStyle/>
-          <a:p>
-            <a:pPr algn="ctr" indent="0" marL="0">
-              <a:buNone/>
-            </a:pPr>
-            <a:r>
-              <a:rPr lang="en-US" sz="1100" dirty="0">
-                <a:solidFill>
-                  <a:srgbClr val="5C7286"/>
-                </a:solidFill>
-                <a:latin typeface="Calibri" pitchFamily="34" charset="0"/>
-                <a:ea typeface="Calibri" pitchFamily="34" charset="-122"/>
-                <a:cs typeface="Calibri" pitchFamily="34" charset="-120"/>
-              </a:rPr>
-              <a:t>median ΔR² over a size-matched random selection</a:t>
-            </a:r>
-            <a:endParaRPr lang="en-US" sz="1100" dirty="0"/>
-          </a:p>
-        </p:txBody>
-      </p:sp>
-      <p:sp>
-        <p:nvSpPr>
-          <p:cNvPr id="8" name="Text 5"/>
-          <p:cNvSpPr txBox="1"/>
-          <p:nvPr/>
-        </p:nvSpPr>
-        <p:spPr>
-          <a:xfrm>
-            <a:off x="566928" y="3931920"/>
-            <a:ext cx="3429000" cy="1828800"/>
-          </a:xfrm>
-          <a:prstGeom prst="rect">
-            <a:avLst/>
-          </a:prstGeom>
-          <a:noFill/>
-          <a:ln/>
-        </p:spPr>
-        <p:txBody>
-          <a:bodyPr wrap="square" lIns="0" tIns="0" rIns="0" bIns="0" rtlCol="0" anchor="t"/>
-          <a:lstStyle/>
-          <a:p>
-            <a:pPr marL="342900" indent="-342900">
-              <a:spcAft>
-                <a:spcPts val="800"/>
-              </a:spcAft>
-              <a:buSzPct val="100000"/>
-              <a:buChar char="•"/>
-            </a:pPr>
-            <a:r>
-              <a:rPr lang="en-US" sz="1200" dirty="0">
-                <a:solidFill>
-                  <a:srgbClr val="0F2A3F"/>
-                </a:solidFill>
-                <a:latin typeface="Calibri" pitchFamily="34" charset="0"/>
-                <a:ea typeface="Calibri" pitchFamily="34" charset="-122"/>
-                <a:cs typeface="Calibri" pitchFamily="34" charset="-120"/>
-              </a:rPr>
-              <a:t>29 of 32 contrasts clear their own null at P &lt; 0.05</a:t>
-            </a:r>
-            <a:endParaRPr lang="en-US" sz="1200" dirty="0"/>
-          </a:p>
-          <a:p>
-            <a:pPr marL="342900" indent="-342900">
-              <a:spcAft>
-                <a:spcPts val="800"/>
-              </a:spcAft>
-              <a:buSzPct val="100000"/>
-              <a:buChar char="•"/>
-            </a:pPr>
-            <a:r>
-              <a:rPr lang="en-US" sz="1200" dirty="0">
-                <a:solidFill>
-                  <a:srgbClr val="0F2A3F"/>
-                </a:solidFill>
-                <a:latin typeface="Calibri" pitchFamily="34" charset="0"/>
-                <a:ea typeface="Calibri" pitchFamily="34" charset="-122"/>
-                <a:cs typeface="Calibri" pitchFamily="34" charset="-120"/>
-              </a:rPr>
-              <a:t>24 sit outside all 500 draws</a:t>
-            </a:r>
-            <a:endParaRPr lang="en-US" sz="1200" dirty="0"/>
-          </a:p>
-          <a:p>
-            <a:pPr marL="342900" indent="-342900">
-              <a:spcAft>
-                <a:spcPts val="800"/>
-              </a:spcAft>
-              <a:buSzPct val="100000"/>
-              <a:buChar char="•"/>
-            </a:pPr>
-            <a:r>
-              <a:rPr lang="en-US" sz="1200" dirty="0">
-                <a:solidFill>
-                  <a:srgbClr val="0F2A3F"/>
-                </a:solidFill>
-                <a:latin typeface="Calibri" pitchFamily="34" charset="0"/>
-                <a:ea typeface="Calibri" pitchFamily="34" charset="-122"/>
-                <a:cs typeface="Calibri" pitchFamily="34" charset="-120"/>
-              </a:rPr>
-              <a:t>The 3 that fail all select 31–77% of their pool — little left to select</a:t>
-            </a:r>
-            <a:endParaRPr lang="en-US" sz="1200" dirty="0"/>
-          </a:p>
-        </p:txBody>
-      </p:sp>
-      <p:sp>
-        <p:nvSpPr>
-          <p:cNvPr id="9" name="Text 6"/>
           <p:cNvSpPr txBox="1"/>
           <p:nvPr/>
         </p:nvSpPr>
@@ -10785,7 +10289,7 @@
                 <a:ea typeface="Calibri" pitchFamily="34" charset="-122"/>
                 <a:cs typeface="Calibri" pitchFamily="34" charset="-120"/>
               </a:rPr>
-              <a:t>Grey bar = 5–95% of the null; dot = observed. Matching the subset size is what separates selecting well from merely selecting fewer.</a:t>
+              <a:t>Selected columns, not a ranking — chosen to span the range rather than to flatter it. Figures 4 and 5 carry the full distribution.</a:t>
             </a:r>
             <a:endParaRPr lang="en-US" sz="1050" dirty="0"/>
           </a:p>

--- a/autonima_results_deck.pptx
+++ b/autonima_results_deck.pptx
@@ -21,9 +21,10 @@
     <p:sldId id="269" r:id="rId15"/>
     <p:sldId id="270" r:id="rId16"/>
     <p:sldId id="271" r:id="rId17"/>
+    <p:sldId id="272" r:id="rId18"/>
   </p:sldIdLst>
   <p:notesMasterIdLst>
-    <p:notesMasterId r:id="rId18"/>
+    <p:notesMasterId r:id="rId19"/>
   </p:notesMasterIdLst>
   <p:sldSz cx="12192000" cy="6858000"/>
   <p:notesSz cx="6858000" cy="12192000"/>
@@ -693,7 +694,7 @@
           <a:p>
             <a:r>
               <a:rPr lang="en-US" dirty="0"/>
-              <a:t>Caveat to say out loud: R2 rewards sharing the expert map's sparse non-negative form. Ranked (top-k dice) NeuroVLM leads NeuroQuery only 1.2x rather than 3.2x, and both still trail the search baseline. Not like-for-like either -- these answer a much cheaper question.</a:t>
+              <a:t>Do not say paper selection is worthless. 31 of 32 baselines are targeted searches built per contrast, so the baseline selects papers by query where the pipeline selects them by LLM. The honest claim is that two ways of selecting papers come out even.</a:t>
             </a:r>
             <a:endParaRPr lang="en-US" dirty="0"/>
           </a:p>
@@ -781,7 +782,7 @@
           <a:p>
             <a:r>
               <a:rPr lang="en-US" dirty="0"/>
-              <a:t>This reframes the leakage objection into a finding about the danger of LLM screening: mis-specification is roughly seven times the size of the tuning effect.</a:t>
+              <a:t>Caveat to say out loud: R2 rewards sharing the expert map's sparse non-negative form. Ranked (top-k dice) NeuroVLM leads NeuroQuery only 1.2x rather than 3.2x, and both still trail the search baseline. Not like-for-like either -- these answer a much cheaper question.</a:t>
             </a:r>
             <a:endParaRPr lang="en-US" dirty="0"/>
           </a:p>
@@ -869,7 +870,7 @@
           <a:p>
             <a:r>
               <a:rPr lang="en-US" dirty="0"/>
-              <a:t>experiments/e2e_retest/. Only the full-text screening rate is a clean per-stage measurement; parsing and annotation ran on already-drifted inputs.</a:t>
+              <a:t>This reframes the leakage objection into a finding about the danger of LLM screening: mis-specification is roughly seven times the size of the tuning effect.</a:t>
             </a:r>
             <a:endParaRPr lang="en-US" dirty="0"/>
           </a:p>
@@ -957,7 +958,7 @@
           <a:p>
             <a:r>
               <a:rPr lang="en-US" dirty="0"/>
-              <a:t>The estimate missed because full texts in these projects are far longer than the corpus median it extrapolated from.</a:t>
+              <a:t>experiments/e2e_retest/. Only the full-text screening rate is a clean per-stage measurement; parsing and annotation ran on already-drifted inputs.</a:t>
             </a:r>
             <a:endParaRPr lang="en-US" dirty="0"/>
           </a:p>
@@ -1045,7 +1046,7 @@
           <a:p>
             <a:r>
               <a:rPr lang="en-US" dirty="0"/>
-              <a:t>The first item is the gate. The rest are finishable.</a:t>
+              <a:t>The estimate missed because full texts in these projects are far longer than the corpus median it extrapolated from.</a:t>
             </a:r>
             <a:endParaRPr lang="en-US" dirty="0"/>
           </a:p>
@@ -1133,7 +1134,7 @@
           <a:p>
             <a:r>
               <a:rPr lang="en-US" dirty="0"/>
-              <a:t>Close on the forward-looking case: it is the gate for submission.</a:t>
+              <a:t>The first item is the gate. The rest are finishable.</a:t>
             </a:r>
             <a:endParaRPr lang="en-US" dirty="0"/>
           </a:p>
@@ -1157,6 +1158,94 @@
             <a:fld id="{F7021451-1387-4CA6-816F-3879F97B5CBC}" type="slidenum">
               <a:rPr lang="en-US"/>
               <a:t>16</a:t>
+            </a:fld>
+            <a:endParaRPr lang="en-US"/>
+          </a:p>
+        </p:txBody>
+      </p:sp>
+    </p:spTree>
+    <p:extLst>
+      <p:ext uri="{BB962C8B-B14F-4D97-AF65-F5344CB8AC3E}">
+        <p14:creationId xmlns:p14="http://schemas.microsoft.com/office/powerpoint/2010/main" val="1024086991"/>
+      </p:ext>
+    </p:extLst>
+  </p:cSld>
+  <p:clrMapOvr>
+    <a:masterClrMapping/>
+  </p:clrMapOvr>
+</p:notes>
+</file>
+
+<file path=ppt/notesSlides/notesSlide17.xml><?xml version="1.0" encoding="utf-8"?>
+<p:notes xmlns:a="http://schemas.openxmlformats.org/drawingml/2006/main" xmlns:r="http://schemas.openxmlformats.org/officeDocument/2006/relationships" xmlns:p="http://schemas.openxmlformats.org/presentationml/2006/main">
+  <p:cSld>
+    <p:spTree>
+      <p:nvGrpSpPr>
+        <p:cNvPr id="1" name=""/>
+        <p:cNvGrpSpPr/>
+        <p:nvPr/>
+      </p:nvGrpSpPr>
+      <p:grpSpPr>
+        <a:xfrm>
+          <a:off x="0" y="0"/>
+          <a:ext cx="0" cy="0"/>
+          <a:chOff x="0" y="0"/>
+          <a:chExt cx="0" cy="0"/>
+        </a:xfrm>
+      </p:grpSpPr>
+      <p:sp>
+        <p:nvSpPr>
+          <p:cNvPr id="2" name="Slide Image Placeholder 1"/>
+          <p:cNvSpPr>
+            <a:spLocks noGrp="1" noRot="1" noChangeAspect="1"/>
+          </p:cNvSpPr>
+          <p:nvPr>
+            <p:ph type="sldImg"/>
+          </p:nvPr>
+        </p:nvSpPr>
+        <p:spPr/>
+      </p:sp>
+      <p:sp>
+        <p:nvSpPr>
+          <p:cNvPr id="3" name="Notes Placeholder 2"/>
+          <p:cNvSpPr>
+            <a:spLocks noGrp="1"/>
+          </p:cNvSpPr>
+          <p:nvPr>
+            <p:ph type="body" idx="1"/>
+          </p:nvPr>
+        </p:nvSpPr>
+        <p:spPr/>
+        <p:txBody>
+          <a:bodyPr/>
+          <a:lstStyle/>
+          <a:p>
+            <a:r>
+              <a:rPr lang="en-US" dirty="0"/>
+              <a:t>Close on the forward-looking case: it is the gate for submission.</a:t>
+            </a:r>
+            <a:endParaRPr lang="en-US" dirty="0"/>
+          </a:p>
+        </p:txBody>
+      </p:sp>
+      <p:sp>
+        <p:nvSpPr>
+          <p:cNvPr id="4" name="Slide Number Placeholder 3"/>
+          <p:cNvSpPr>
+            <a:spLocks noGrp="1"/>
+          </p:cNvSpPr>
+          <p:nvPr>
+            <p:ph type="sldNum" sz="quarter" idx="10"/>
+          </p:nvPr>
+        </p:nvSpPr>
+        <p:spPr/>
+        <p:txBody>
+          <a:bodyPr/>
+          <a:lstStyle/>
+          <a:p>
+            <a:fld id="{F7021451-1387-4CA6-816F-3879F97B5CBC}" type="slidenum">
+              <a:rPr lang="en-US"/>
+              <a:t>17</a:t>
             </a:fld>
             <a:endParaRPr lang="en-US"/>
           </a:p>
@@ -2935,7 +3024,7 @@
                 <a:ea typeface="Cambria" pitchFamily="34" charset="-122"/>
                 <a:cs typeface="Cambria" pitchFamily="34" charset="-120"/>
               </a:rPr>
-              <a:t>Could you skip the studyset and just ask a model?</a:t>
+              <a:t>Which selection step earns the advantage?</a:t>
             </a:r>
             <a:endParaRPr lang="en-US" sz="3100" dirty="0"/>
           </a:p>
@@ -2974,7 +3063,7 @@
                 <a:ea typeface="Calibri" pitchFamily="34" charset="-122"/>
                 <a:cs typeface="Calibri" pitchFamily="34" charset="-120"/>
               </a:rPr>
-              <a:t>Two text→map models, same queries, same scoring: NeuroQuery and NeuroVLM.</a:t>
+              <a:t>Insert a third map between the two: screening applied, but no annotation — papers chosen, analyses not.</a:t>
             </a:r>
             <a:endParaRPr lang="en-US" sz="1500" dirty="0"/>
           </a:p>
@@ -2982,7 +3071,7 @@
       </p:sp>
       <p:pic>
         <p:nvPicPr>
-          <p:cNvPr id="4" name="Image 0" descr="/home/zorro/repos/autonima-results/reports/deck_figures/figureS4_text_to_map_baselines.png">    </p:cNvPr>
+          <p:cNvPr id="4" name="Image 0" descr="/home/zorro/repos/autonima-results/reports/deck_figures/figureS5_selection_decomposition.png">    </p:cNvPr>
           <p:cNvPicPr>
             <a:picLocks noChangeAspect="1"/>
           </p:cNvPicPr>
@@ -2996,8 +3085,8 @@
         </p:blipFill>
         <p:spPr>
           <a:xfrm>
-            <a:off x="2631258" y="1691640"/>
-            <a:ext cx="6929179" cy="3200400"/>
+            <a:off x="3977640" y="1511793"/>
+            <a:ext cx="7635240" cy="4099589"/>
           </a:xfrm>
           <a:prstGeom prst="rect">
             <a:avLst/>
@@ -3012,12 +3101,12 @@
         </p:nvSpPr>
         <p:spPr>
           <a:xfrm>
-            <a:off x="566928" y="5029200"/>
-            <a:ext cx="2572436" cy="868680"/>
+            <a:off x="566928" y="1600200"/>
+            <a:ext cx="3200400" cy="1188720"/>
           </a:xfrm>
           <a:prstGeom prst="roundRect">
             <a:avLst>
-              <a:gd name="adj" fmla="val 8421"/>
+              <a:gd name="adj" fmla="val 6154"/>
             </a:avLst>
           </a:prstGeom>
           <a:solidFill>
@@ -3039,8 +3128,8 @@
         </p:nvSpPr>
         <p:spPr>
           <a:xfrm>
-            <a:off x="676656" y="5120640"/>
-            <a:ext cx="2352980" cy="475488"/>
+            <a:off x="676656" y="1691640"/>
+            <a:ext cx="2980944" cy="475488"/>
           </a:xfrm>
           <a:prstGeom prst="rect">
             <a:avLst/>
@@ -3056,7 +3145,7 @@
               <a:buNone/>
             </a:pPr>
             <a:r>
-              <a:rPr lang="en-US" sz="2400" b="1" dirty="0">
+              <a:rPr lang="en-US" sz="2600" b="1" dirty="0">
                 <a:solidFill>
                   <a:srgbClr val="0A3D5C"/>
                 </a:solidFill>
@@ -3064,9 +3153,9 @@
                 <a:ea typeface="Cambria" pitchFamily="34" charset="-122"/>
                 <a:cs typeface="Cambria" pitchFamily="34" charset="-120"/>
               </a:rPr>
-              <a:t>0.075</a:t>
-            </a:r>
-            <a:endParaRPr lang="en-US" sz="2400" dirty="0"/>
+              <a:t>−0.000</a:t>
+            </a:r>
+            <a:endParaRPr lang="en-US" sz="2600" dirty="0"/>
           </a:p>
         </p:txBody>
       </p:sp>
@@ -3078,8 +3167,8 @@
         </p:nvSpPr>
         <p:spPr>
           <a:xfrm>
-            <a:off x="676656" y="5577840"/>
-            <a:ext cx="2352980" cy="246888"/>
+            <a:off x="676656" y="2148840"/>
+            <a:ext cx="2980944" cy="566928"/>
           </a:xfrm>
           <a:prstGeom prst="rect">
             <a:avLst/>
@@ -3103,7 +3192,24 @@
                 <a:ea typeface="Calibri" pitchFamily="34" charset="-122"/>
                 <a:cs typeface="Calibri" pitchFamily="34" charset="-120"/>
               </a:rPr>
-              <a:t>NeuroQuery, mean R²</a:t>
+              <a:t>mean ΔR² from choosing papers</a:t>
+            </a:r>
+            <a:endParaRPr lang="en-US" sz="1100" dirty="0"/>
+          </a:p>
+          <a:p>
+            <a:pPr algn="ctr" indent="0" marL="0">
+              <a:buNone/>
+            </a:pPr>
+            <a:r>
+              <a:rPr lang="en-US" sz="1100" dirty="0">
+                <a:solidFill>
+                  <a:srgbClr val="5C7286"/>
+                </a:solidFill>
+                <a:latin typeface="Calibri" pitchFamily="34" charset="0"/>
+                <a:ea typeface="Calibri" pitchFamily="34" charset="-122"/>
+                <a:cs typeface="Calibri" pitchFamily="34" charset="-120"/>
+              </a:rPr>
+              <a:t>16 of 32 improve — a coin flip</a:t>
             </a:r>
             <a:endParaRPr lang="en-US" sz="1100" dirty="0"/>
           </a:p>
@@ -3117,12 +3223,12 @@
         </p:nvSpPr>
         <p:spPr>
           <a:xfrm>
-            <a:off x="3395396" y="5029200"/>
-            <a:ext cx="2572436" cy="868680"/>
+            <a:off x="566928" y="2971800"/>
+            <a:ext cx="3200400" cy="1188720"/>
           </a:xfrm>
           <a:prstGeom prst="roundRect">
             <a:avLst>
-              <a:gd name="adj" fmla="val 8421"/>
+              <a:gd name="adj" fmla="val 6154"/>
             </a:avLst>
           </a:prstGeom>
           <a:solidFill>
@@ -3144,8 +3250,8 @@
         </p:nvSpPr>
         <p:spPr>
           <a:xfrm>
-            <a:off x="3505124" y="5120640"/>
-            <a:ext cx="2352980" cy="475488"/>
+            <a:off x="676656" y="3063240"/>
+            <a:ext cx="2980944" cy="475488"/>
           </a:xfrm>
           <a:prstGeom prst="rect">
             <a:avLst/>
@@ -3161,17 +3267,17 @@
               <a:buNone/>
             </a:pPr>
             <a:r>
-              <a:rPr lang="en-US" sz="2400" b="1" dirty="0">
-                <a:solidFill>
-                  <a:srgbClr val="0A3D5C"/>
+              <a:rPr lang="en-US" sz="2600" b="1" dirty="0">
+                <a:solidFill>
+                  <a:srgbClr val="E69F00"/>
                 </a:solidFill>
                 <a:latin typeface="Cambria" pitchFamily="34" charset="0"/>
                 <a:ea typeface="Cambria" pitchFamily="34" charset="-122"/>
                 <a:cs typeface="Cambria" pitchFamily="34" charset="-120"/>
               </a:rPr>
-              <a:t>0.238</a:t>
-            </a:r>
-            <a:endParaRPr lang="en-US" sz="2400" dirty="0"/>
+              <a:t>+0.099</a:t>
+            </a:r>
+            <a:endParaRPr lang="en-US" sz="2600" dirty="0"/>
           </a:p>
         </p:txBody>
       </p:sp>
@@ -3183,8 +3289,8 @@
         </p:nvSpPr>
         <p:spPr>
           <a:xfrm>
-            <a:off x="3505124" y="5577840"/>
-            <a:ext cx="2352980" cy="246888"/>
+            <a:off x="676656" y="3520440"/>
+            <a:ext cx="2980944" cy="566928"/>
           </a:xfrm>
           <a:prstGeom prst="rect">
             <a:avLst/>
@@ -3208,225 +3314,71 @@
                 <a:ea typeface="Calibri" pitchFamily="34" charset="-122"/>
                 <a:cs typeface="Calibri" pitchFamily="34" charset="-120"/>
               </a:rPr>
-              <a:t>NeuroVLM, mean R²</a:t>
+              <a:t>mean ΔR² from choosing analyses</a:t>
             </a:r>
             <a:endParaRPr lang="en-US" sz="1100" dirty="0"/>
           </a:p>
-        </p:txBody>
-      </p:sp>
-      <p:sp>
-        <p:nvSpPr>
-          <p:cNvPr id="11" name="Shape 8"/>
-          <p:cNvSpPr/>
-          <p:nvPr/>
-        </p:nvSpPr>
-        <p:spPr>
-          <a:xfrm>
-            <a:off x="6223864" y="5029200"/>
-            <a:ext cx="2572436" cy="868680"/>
-          </a:xfrm>
-          <a:prstGeom prst="roundRect">
-            <a:avLst>
-              <a:gd name="adj" fmla="val 8421"/>
-            </a:avLst>
-          </a:prstGeom>
-          <a:solidFill>
-            <a:srgbClr val="EEF3F7"/>
-          </a:solidFill>
-          <a:ln w="12700">
-            <a:solidFill>
-              <a:srgbClr val="EEF3F7"/>
-            </a:solidFill>
-            <a:prstDash val="solid"/>
-          </a:ln>
-        </p:spPr>
+          <a:p>
+            <a:pPr algn="ctr" indent="0" marL="0">
+              <a:buNone/>
+            </a:pPr>
+            <a:r>
+              <a:rPr lang="en-US" sz="1100" dirty="0">
+                <a:solidFill>
+                  <a:srgbClr val="5C7286"/>
+                </a:solidFill>
+                <a:latin typeface="Calibri" pitchFamily="34" charset="0"/>
+                <a:ea typeface="Calibri" pitchFamily="34" charset="-122"/>
+                <a:cs typeface="Calibri" pitchFamily="34" charset="-120"/>
+              </a:rPr>
+              <a:t>28 of 32 improve</a:t>
+            </a:r>
+            <a:endParaRPr lang="en-US" sz="1100" dirty="0"/>
+          </a:p>
+        </p:txBody>
+      </p:sp>
+      <p:sp>
+        <p:nvSpPr>
+          <p:cNvPr id="11" name="Text 8"/>
+          <p:cNvSpPr txBox="1"/>
+          <p:nvPr/>
+        </p:nvSpPr>
+        <p:spPr>
+          <a:xfrm>
+            <a:off x="566928" y="4370832"/>
+            <a:ext cx="3200400" cy="1371600"/>
+          </a:xfrm>
+          <a:prstGeom prst="rect">
+            <a:avLst/>
+          </a:prstGeom>
+          <a:noFill/>
+          <a:ln/>
+        </p:spPr>
+        <p:txBody>
+          <a:bodyPr wrap="square" lIns="0" tIns="0" rIns="0" bIns="0" rtlCol="0" anchor="t"/>
+          <a:lstStyle/>
+          <a:p>
+            <a:pPr indent="0" marL="0">
+              <a:buNone/>
+            </a:pPr>
+            <a:r>
+              <a:rPr lang="en-US" sz="1200" dirty="0">
+                <a:solidFill>
+                  <a:srgbClr val="0F2A3F"/>
+                </a:solidFill>
+                <a:latin typeface="Calibri" pitchFamily="34" charset="0"/>
+                <a:ea typeface="Calibri" pitchFamily="34" charset="-122"/>
+                <a:cs typeface="Calibri" pitchFamily="34" charset="-120"/>
+              </a:rPr>
+              <a:t>Both arms already select papers — the baseline by a targeted query, the pipeline by LLM screening — and they tie. The whole advantage comes from the step a search cannot perform.</a:t>
+            </a:r>
+            <a:endParaRPr lang="en-US" sz="1200" dirty="0"/>
+          </a:p>
+        </p:txBody>
       </p:sp>
       <p:sp>
         <p:nvSpPr>
           <p:cNvPr id="12" name="Text 9"/>
-          <p:cNvSpPr txBox="1"/>
-          <p:nvPr/>
-        </p:nvSpPr>
-        <p:spPr>
-          <a:xfrm>
-            <a:off x="6333592" y="5120640"/>
-            <a:ext cx="2352980" cy="475488"/>
-          </a:xfrm>
-          <a:prstGeom prst="rect">
-            <a:avLst/>
-          </a:prstGeom>
-          <a:noFill/>
-          <a:ln/>
-        </p:spPr>
-        <p:txBody>
-          <a:bodyPr wrap="square" lIns="0" tIns="0" rIns="0" bIns="0" rtlCol="0" anchor="ctr"/>
-          <a:lstStyle/>
-          <a:p>
-            <a:pPr algn="ctr" indent="0" marL="0">
-              <a:buNone/>
-            </a:pPr>
-            <a:r>
-              <a:rPr lang="en-US" sz="2400" b="1" dirty="0">
-                <a:solidFill>
-                  <a:srgbClr val="0A3D5C"/>
-                </a:solidFill>
-                <a:latin typeface="Cambria" pitchFamily="34" charset="0"/>
-                <a:ea typeface="Cambria" pitchFamily="34" charset="-122"/>
-                <a:cs typeface="Cambria" pitchFamily="34" charset="-120"/>
-              </a:rPr>
-              <a:t>0.476</a:t>
-            </a:r>
-            <a:endParaRPr lang="en-US" sz="2400" dirty="0"/>
-          </a:p>
-        </p:txBody>
-      </p:sp>
-      <p:sp>
-        <p:nvSpPr>
-          <p:cNvPr id="13" name="Text 10"/>
-          <p:cNvSpPr txBox="1"/>
-          <p:nvPr/>
-        </p:nvSpPr>
-        <p:spPr>
-          <a:xfrm>
-            <a:off x="6333592" y="5577840"/>
-            <a:ext cx="2352980" cy="246888"/>
-          </a:xfrm>
-          <a:prstGeom prst="rect">
-            <a:avLst/>
-          </a:prstGeom>
-          <a:noFill/>
-          <a:ln/>
-        </p:spPr>
-        <p:txBody>
-          <a:bodyPr wrap="square" lIns="0" tIns="0" rIns="0" bIns="0" rtlCol="0" anchor="t"/>
-          <a:lstStyle/>
-          <a:p>
-            <a:pPr algn="ctr" indent="0" marL="0">
-              <a:buNone/>
-            </a:pPr>
-            <a:r>
-              <a:rPr lang="en-US" sz="1100" dirty="0">
-                <a:solidFill>
-                  <a:srgbClr val="5C7286"/>
-                </a:solidFill>
-                <a:latin typeface="Calibri" pitchFamily="34" charset="0"/>
-                <a:ea typeface="Calibri" pitchFamily="34" charset="-122"/>
-                <a:cs typeface="Calibri" pitchFamily="34" charset="-120"/>
-              </a:rPr>
-              <a:t>best search baseline</a:t>
-            </a:r>
-            <a:endParaRPr lang="en-US" sz="1100" dirty="0"/>
-          </a:p>
-        </p:txBody>
-      </p:sp>
-      <p:sp>
-        <p:nvSpPr>
-          <p:cNvPr id="14" name="Shape 11"/>
-          <p:cNvSpPr/>
-          <p:nvPr/>
-        </p:nvSpPr>
-        <p:spPr>
-          <a:xfrm>
-            <a:off x="9052331" y="5029200"/>
-            <a:ext cx="2572436" cy="868680"/>
-          </a:xfrm>
-          <a:prstGeom prst="roundRect">
-            <a:avLst>
-              <a:gd name="adj" fmla="val 8421"/>
-            </a:avLst>
-          </a:prstGeom>
-          <a:solidFill>
-            <a:srgbClr val="EEF3F7"/>
-          </a:solidFill>
-          <a:ln w="12700">
-            <a:solidFill>
-              <a:srgbClr val="EEF3F7"/>
-            </a:solidFill>
-            <a:prstDash val="solid"/>
-          </a:ln>
-        </p:spPr>
-      </p:sp>
-      <p:sp>
-        <p:nvSpPr>
-          <p:cNvPr id="15" name="Text 12"/>
-          <p:cNvSpPr txBox="1"/>
-          <p:nvPr/>
-        </p:nvSpPr>
-        <p:spPr>
-          <a:xfrm>
-            <a:off x="9162059" y="5120640"/>
-            <a:ext cx="2352980" cy="475488"/>
-          </a:xfrm>
-          <a:prstGeom prst="rect">
-            <a:avLst/>
-          </a:prstGeom>
-          <a:noFill/>
-          <a:ln/>
-        </p:spPr>
-        <p:txBody>
-          <a:bodyPr wrap="square" lIns="0" tIns="0" rIns="0" bIns="0" rtlCol="0" anchor="ctr"/>
-          <a:lstStyle/>
-          <a:p>
-            <a:pPr algn="ctr" indent="0" marL="0">
-              <a:buNone/>
-            </a:pPr>
-            <a:r>
-              <a:rPr lang="en-US" sz="2400" b="1" dirty="0">
-                <a:solidFill>
-                  <a:srgbClr val="E69F00"/>
-                </a:solidFill>
-                <a:latin typeface="Cambria" pitchFamily="34" charset="0"/>
-                <a:ea typeface="Cambria" pitchFamily="34" charset="-122"/>
-                <a:cs typeface="Cambria" pitchFamily="34" charset="-120"/>
-              </a:rPr>
-              <a:t>0.574</a:t>
-            </a:r>
-            <a:endParaRPr lang="en-US" sz="2400" dirty="0"/>
-          </a:p>
-        </p:txBody>
-      </p:sp>
-      <p:sp>
-        <p:nvSpPr>
-          <p:cNvPr id="16" name="Text 13"/>
-          <p:cNvSpPr txBox="1"/>
-          <p:nvPr/>
-        </p:nvSpPr>
-        <p:spPr>
-          <a:xfrm>
-            <a:off x="9162059" y="5577840"/>
-            <a:ext cx="2352980" cy="246888"/>
-          </a:xfrm>
-          <a:prstGeom prst="rect">
-            <a:avLst/>
-          </a:prstGeom>
-          <a:noFill/>
-          <a:ln/>
-        </p:spPr>
-        <p:txBody>
-          <a:bodyPr wrap="square" lIns="0" tIns="0" rIns="0" bIns="0" rtlCol="0" anchor="t"/>
-          <a:lstStyle/>
-          <a:p>
-            <a:pPr algn="ctr" indent="0" marL="0">
-              <a:buNone/>
-            </a:pPr>
-            <a:r>
-              <a:rPr lang="en-US" sz="1100" dirty="0">
-                <a:solidFill>
-                  <a:srgbClr val="5C7286"/>
-                </a:solidFill>
-                <a:latin typeface="Calibri" pitchFamily="34" charset="0"/>
-                <a:ea typeface="Calibri" pitchFamily="34" charset="-122"/>
-                <a:cs typeface="Calibri" pitchFamily="34" charset="-120"/>
-              </a:rPr>
-              <a:t>full pipeline</a:t>
-            </a:r>
-            <a:endParaRPr lang="en-US" sz="1100" dirty="0"/>
-          </a:p>
-        </p:txBody>
-      </p:sp>
-      <p:sp>
-        <p:nvSpPr>
-          <p:cNvPr id="17" name="Text 14"/>
           <p:cNvSpPr txBox="1"/>
           <p:nvPr/>
         </p:nvSpPr>
@@ -3457,7 +3409,7 @@
                 <a:ea typeface="Calibri" pitchFamily="34" charset="-122"/>
                 <a:cs typeface="Calibri" pitchFamily="34" charset="-120"/>
               </a:rPr>
-              <a:t>Both peak on canonical terms (executive function, working memory) and collapse on condition contrasts (all three emotion-regulation columns ≈ 0.002–0.08). A term is not an analysis.</a:t>
+              <a:t>Screening-only is the run's all_analyses column: one map per project, scored against each of its contrasts — which is what having no analysis selection actually means.</a:t>
             </a:r>
             <a:endParaRPr lang="en-US" sz="1050" dirty="0"/>
           </a:p>
@@ -3521,15 +3473,54 @@
                 <a:ea typeface="Cambria" pitchFamily="34" charset="-122"/>
                 <a:cs typeface="Cambria" pitchFamily="34" charset="-120"/>
               </a:rPr>
-              <a:t>The real risk is mis-prompting, not overfitting</a:t>
+              <a:t>Could you skip the studyset and just ask a model?</a:t>
             </a:r>
             <a:endParaRPr lang="en-US" sz="3100" dirty="0"/>
+          </a:p>
+        </p:txBody>
+      </p:sp>
+      <p:sp>
+        <p:nvSpPr>
+          <p:cNvPr id="3" name="Text 1"/>
+          <p:cNvSpPr txBox="1"/>
+          <p:nvPr/>
+        </p:nvSpPr>
+        <p:spPr>
+          <a:xfrm>
+            <a:off x="566928" y="1060704"/>
+            <a:ext cx="11057839" cy="420624"/>
+          </a:xfrm>
+          <a:prstGeom prst="rect">
+            <a:avLst/>
+          </a:prstGeom>
+          <a:noFill/>
+          <a:ln/>
+        </p:spPr>
+        <p:txBody>
+          <a:bodyPr wrap="square" lIns="0" tIns="0" rIns="0" bIns="0" rtlCol="0" anchor="ctr"/>
+          <a:lstStyle/>
+          <a:p>
+            <a:pPr indent="0" marL="0">
+              <a:buNone/>
+            </a:pPr>
+            <a:r>
+              <a:rPr lang="en-US" sz="1500" dirty="0">
+                <a:solidFill>
+                  <a:srgbClr val="1C7293"/>
+                </a:solidFill>
+                <a:latin typeface="Calibri" pitchFamily="34" charset="0"/>
+                <a:ea typeface="Calibri" pitchFamily="34" charset="-122"/>
+                <a:cs typeface="Calibri" pitchFamily="34" charset="-120"/>
+              </a:rPr>
+              <a:t>Two text→map models, same queries, same scoring: NeuroQuery and NeuroVLM.</a:t>
+            </a:r>
+            <a:endParaRPr lang="en-US" sz="1500" dirty="0"/>
           </a:p>
         </p:txBody>
       </p:sp>
       <p:pic>
         <p:nvPicPr>
-          <p:cNvPr id="3" name="Image 0" descr="/home/zorro/repos/autonima-results/reports/deck_figures/figureS2_tier_progression.png">    </p:cNvPr>
+          <p:cNvPr id="4" name="Image 0" descr="/home/zorro/repos/autonima-results/reports/deck_figures/figureS4_text_to_map_baselines.png">    </p:cNvPr>
           <p:cNvPicPr>
             <a:picLocks noChangeAspect="1"/>
           </p:cNvPicPr>
@@ -3543,53 +3534,14 @@
         </p:blipFill>
         <p:spPr>
           <a:xfrm>
-            <a:off x="669368" y="1554480"/>
-            <a:ext cx="4092800" cy="4206240"/>
+            <a:off x="2631258" y="1691640"/>
+            <a:ext cx="6929179" cy="3200400"/>
           </a:xfrm>
           <a:prstGeom prst="rect">
             <a:avLst/>
           </a:prstGeom>
         </p:spPr>
       </p:pic>
-      <p:sp>
-        <p:nvSpPr>
-          <p:cNvPr id="4" name="Text 1"/>
-          <p:cNvSpPr txBox="1"/>
-          <p:nvPr/>
-        </p:nvSpPr>
-        <p:spPr>
-          <a:xfrm>
-            <a:off x="5212080" y="1600200"/>
-            <a:ext cx="6400800" cy="411480"/>
-          </a:xfrm>
-          <a:prstGeom prst="rect">
-            <a:avLst/>
-          </a:prstGeom>
-          <a:noFill/>
-          <a:ln/>
-        </p:spPr>
-        <p:txBody>
-          <a:bodyPr wrap="square" lIns="0" tIns="0" rIns="0" bIns="0" rtlCol="0" anchor="ctr"/>
-          <a:lstStyle/>
-          <a:p>
-            <a:pPr indent="0" marL="0">
-              <a:buNone/>
-            </a:pPr>
-            <a:r>
-              <a:rPr lang="en-US" sz="1350" dirty="0">
-                <a:solidFill>
-                  <a:srgbClr val="0F2A3F"/>
-                </a:solidFill>
-                <a:latin typeface="Calibri" pitchFamily="34" charset="0"/>
-                <a:ea typeface="Calibri" pitchFamily="34" charset="-122"/>
-                <a:cs typeface="Calibri" pitchFamily="34" charset="-120"/>
-              </a:rPr>
-              <a:t>Runs are registered by how much of the benchmark shaped their criteria.</a:t>
-            </a:r>
-            <a:endParaRPr lang="en-US" sz="1350" dirty="0"/>
-          </a:p>
-        </p:txBody>
-      </p:sp>
       <p:sp>
         <p:nvSpPr>
           <p:cNvPr id="5" name="Shape 2"/>
@@ -3598,12 +3550,12 @@
         </p:nvSpPr>
         <p:spPr>
           <a:xfrm>
-            <a:off x="5212080" y="2148840"/>
-            <a:ext cx="3076956" cy="1417320"/>
+            <a:off x="566928" y="5029200"/>
+            <a:ext cx="2572436" cy="868680"/>
           </a:xfrm>
           <a:prstGeom prst="roundRect">
             <a:avLst>
-              <a:gd name="adj" fmla="val 5161"/>
+              <a:gd name="adj" fmla="val 8421"/>
             </a:avLst>
           </a:prstGeom>
           <a:solidFill>
@@ -3625,8 +3577,8 @@
         </p:nvSpPr>
         <p:spPr>
           <a:xfrm>
-            <a:off x="5321808" y="2240280"/>
-            <a:ext cx="2857500" cy="475488"/>
+            <a:off x="676656" y="5120640"/>
+            <a:ext cx="2352980" cy="475488"/>
           </a:xfrm>
           <a:prstGeom prst="rect">
             <a:avLst/>
@@ -3642,17 +3594,17 @@
               <a:buNone/>
             </a:pPr>
             <a:r>
-              <a:rPr lang="en-US" sz="2800" b="1" dirty="0">
-                <a:solidFill>
-                  <a:srgbClr val="E69F00"/>
+              <a:rPr lang="en-US" sz="2400" b="1" dirty="0">
+                <a:solidFill>
+                  <a:srgbClr val="0A3D5C"/>
                 </a:solidFill>
                 <a:latin typeface="Cambria" pitchFamily="34" charset="0"/>
                 <a:ea typeface="Cambria" pitchFamily="34" charset="-122"/>
                 <a:cs typeface="Cambria" pitchFamily="34" charset="-120"/>
               </a:rPr>
-              <a:t>+0.221</a:t>
-            </a:r>
-            <a:endParaRPr lang="en-US" sz="2800" dirty="0"/>
+              <a:t>0.075</a:t>
+            </a:r>
+            <a:endParaRPr lang="en-US" sz="2400" dirty="0"/>
           </a:p>
         </p:txBody>
       </p:sp>
@@ -3664,8 +3616,8 @@
         </p:nvSpPr>
         <p:spPr>
           <a:xfrm>
-            <a:off x="5321808" y="2697480"/>
-            <a:ext cx="2857500" cy="795528"/>
+            <a:off x="676656" y="5577840"/>
+            <a:ext cx="2352980" cy="246888"/>
           </a:xfrm>
           <a:prstGeom prst="rect">
             <a:avLst/>
@@ -3689,24 +3641,7 @@
                 <a:ea typeface="Calibri" pitchFamily="34" charset="-122"/>
                 <a:cs typeface="Calibri" pitchFamily="34" charset="-120"/>
               </a:rPr>
-              <a:t>verbatim → manual</a:t>
-            </a:r>
-            <a:endParaRPr lang="en-US" sz="1100" dirty="0"/>
-          </a:p>
-          <a:p>
-            <a:pPr algn="ctr" indent="0" marL="0">
-              <a:buNone/>
-            </a:pPr>
-            <a:r>
-              <a:rPr lang="en-US" sz="1100" dirty="0">
-                <a:solidFill>
-                  <a:srgbClr val="5C7286"/>
-                </a:solidFill>
-                <a:latin typeface="Calibri" pitchFamily="34" charset="0"/>
-                <a:ea typeface="Calibri" pitchFamily="34" charset="-122"/>
-                <a:cs typeface="Calibri" pitchFamily="34" charset="-120"/>
-              </a:rPr>
-              <a:t>fixing major oversights in mis-specified criteria</a:t>
+              <a:t>NeuroQuery, mean R²</a:t>
             </a:r>
             <a:endParaRPr lang="en-US" sz="1100" dirty="0"/>
           </a:p>
@@ -3720,12 +3655,12 @@
         </p:nvSpPr>
         <p:spPr>
           <a:xfrm>
-            <a:off x="8545068" y="2148840"/>
-            <a:ext cx="3076956" cy="1417320"/>
+            <a:off x="3395396" y="5029200"/>
+            <a:ext cx="2572436" cy="868680"/>
           </a:xfrm>
           <a:prstGeom prst="roundRect">
             <a:avLst>
-              <a:gd name="adj" fmla="val 5161"/>
+              <a:gd name="adj" fmla="val 8421"/>
             </a:avLst>
           </a:prstGeom>
           <a:solidFill>
@@ -3747,8 +3682,8 @@
         </p:nvSpPr>
         <p:spPr>
           <a:xfrm>
-            <a:off x="8654796" y="2240280"/>
-            <a:ext cx="2857500" cy="475488"/>
+            <a:off x="3505124" y="5120640"/>
+            <a:ext cx="2352980" cy="475488"/>
           </a:xfrm>
           <a:prstGeom prst="rect">
             <a:avLst/>
@@ -3764,7 +3699,7 @@
               <a:buNone/>
             </a:pPr>
             <a:r>
-              <a:rPr lang="en-US" sz="2800" b="1" dirty="0">
+              <a:rPr lang="en-US" sz="2400" b="1" dirty="0">
                 <a:solidFill>
                   <a:srgbClr val="0A3D5C"/>
                 </a:solidFill>
@@ -3772,9 +3707,9 @@
                 <a:ea typeface="Cambria" pitchFamily="34" charset="-122"/>
                 <a:cs typeface="Cambria" pitchFamily="34" charset="-120"/>
               </a:rPr>
-              <a:t>+0.031</a:t>
-            </a:r>
-            <a:endParaRPr lang="en-US" sz="2800" dirty="0"/>
+              <a:t>0.238</a:t>
+            </a:r>
+            <a:endParaRPr lang="en-US" sz="2400" dirty="0"/>
           </a:p>
         </p:txBody>
       </p:sp>
@@ -3786,8 +3721,8 @@
         </p:nvSpPr>
         <p:spPr>
           <a:xfrm>
-            <a:off x="8654796" y="2697480"/>
-            <a:ext cx="2857500" cy="795528"/>
+            <a:off x="3505124" y="5577840"/>
+            <a:ext cx="2352980" cy="246888"/>
           </a:xfrm>
           <a:prstGeom prst="rect">
             <a:avLst/>
@@ -3811,15 +3746,103 @@
                 <a:ea typeface="Calibri" pitchFamily="34" charset="-122"/>
                 <a:cs typeface="Calibri" pitchFamily="34" charset="-120"/>
               </a:rPr>
-              <a:t>manual → best</a:t>
+              <a:t>NeuroVLM, mean R²</a:t>
             </a:r>
             <a:endParaRPr lang="en-US" sz="1100" dirty="0"/>
           </a:p>
+        </p:txBody>
+      </p:sp>
+      <p:sp>
+        <p:nvSpPr>
+          <p:cNvPr id="11" name="Shape 8"/>
+          <p:cNvSpPr/>
+          <p:nvPr/>
+        </p:nvSpPr>
+        <p:spPr>
+          <a:xfrm>
+            <a:off x="6223864" y="5029200"/>
+            <a:ext cx="2572436" cy="868680"/>
+          </a:xfrm>
+          <a:prstGeom prst="roundRect">
+            <a:avLst>
+              <a:gd name="adj" fmla="val 8421"/>
+            </a:avLst>
+          </a:prstGeom>
+          <a:solidFill>
+            <a:srgbClr val="EEF3F7"/>
+          </a:solidFill>
+          <a:ln w="12700">
+            <a:solidFill>
+              <a:srgbClr val="EEF3F7"/>
+            </a:solidFill>
+            <a:prstDash val="solid"/>
+          </a:ln>
+        </p:spPr>
+      </p:sp>
+      <p:sp>
+        <p:nvSpPr>
+          <p:cNvPr id="12" name="Text 9"/>
+          <p:cNvSpPr txBox="1"/>
+          <p:nvPr/>
+        </p:nvSpPr>
+        <p:spPr>
+          <a:xfrm>
+            <a:off x="6333592" y="5120640"/>
+            <a:ext cx="2352980" cy="475488"/>
+          </a:xfrm>
+          <a:prstGeom prst="rect">
+            <a:avLst/>
+          </a:prstGeom>
+          <a:noFill/>
+          <a:ln/>
+        </p:spPr>
+        <p:txBody>
+          <a:bodyPr wrap="square" lIns="0" tIns="0" rIns="0" bIns="0" rtlCol="0" anchor="ctr"/>
+          <a:lstStyle/>
           <a:p>
             <a:pPr algn="ctr" indent="0" marL="0">
               <a:buNone/>
             </a:pPr>
             <a:r>
+              <a:rPr lang="en-US" sz="2400" b="1" dirty="0">
+                <a:solidFill>
+                  <a:srgbClr val="0A3D5C"/>
+                </a:solidFill>
+                <a:latin typeface="Cambria" pitchFamily="34" charset="0"/>
+                <a:ea typeface="Cambria" pitchFamily="34" charset="-122"/>
+                <a:cs typeface="Cambria" pitchFamily="34" charset="-120"/>
+              </a:rPr>
+              <a:t>0.476</a:t>
+            </a:r>
+            <a:endParaRPr lang="en-US" sz="2400" dirty="0"/>
+          </a:p>
+        </p:txBody>
+      </p:sp>
+      <p:sp>
+        <p:nvSpPr>
+          <p:cNvPr id="13" name="Text 10"/>
+          <p:cNvSpPr txBox="1"/>
+          <p:nvPr/>
+        </p:nvSpPr>
+        <p:spPr>
+          <a:xfrm>
+            <a:off x="6333592" y="5577840"/>
+            <a:ext cx="2352980" cy="246888"/>
+          </a:xfrm>
+          <a:prstGeom prst="rect">
+            <a:avLst/>
+          </a:prstGeom>
+          <a:noFill/>
+          <a:ln/>
+        </p:spPr>
+        <p:txBody>
+          <a:bodyPr wrap="square" lIns="0" tIns="0" rIns="0" bIns="0" rtlCol="0" anchor="t"/>
+          <a:lstStyle/>
+          <a:p>
+            <a:pPr algn="ctr" indent="0" marL="0">
+              <a:buNone/>
+            </a:pPr>
+            <a:r>
               <a:rPr lang="en-US" sz="1100" dirty="0">
                 <a:solidFill>
                   <a:srgbClr val="5C7286"/>
@@ -3828,7 +3851,7 @@
                 <a:ea typeface="Calibri" pitchFamily="34" charset="-122"/>
                 <a:cs typeface="Calibri" pitchFamily="34" charset="-120"/>
               </a:rPr>
-              <a:t>rewriting criteria against the error reports</a:t>
+              <a:t>best search baseline</a:t>
             </a:r>
             <a:endParaRPr lang="en-US" sz="1100" dirty="0"/>
           </a:p>
@@ -3836,14 +3859,80 @@
       </p:sp>
       <p:sp>
         <p:nvSpPr>
-          <p:cNvPr id="11" name="Text 8"/>
-          <p:cNvSpPr txBox="1"/>
-          <p:nvPr/>
-        </p:nvSpPr>
-        <p:spPr>
-          <a:xfrm>
-            <a:off x="5212080" y="3794760"/>
-            <a:ext cx="6409944" cy="1965960"/>
+          <p:cNvPr id="14" name="Shape 11"/>
+          <p:cNvSpPr/>
+          <p:nvPr/>
+        </p:nvSpPr>
+        <p:spPr>
+          <a:xfrm>
+            <a:off x="9052331" y="5029200"/>
+            <a:ext cx="2572436" cy="868680"/>
+          </a:xfrm>
+          <a:prstGeom prst="roundRect">
+            <a:avLst>
+              <a:gd name="adj" fmla="val 8421"/>
+            </a:avLst>
+          </a:prstGeom>
+          <a:solidFill>
+            <a:srgbClr val="EEF3F7"/>
+          </a:solidFill>
+          <a:ln w="12700">
+            <a:solidFill>
+              <a:srgbClr val="EEF3F7"/>
+            </a:solidFill>
+            <a:prstDash val="solid"/>
+          </a:ln>
+        </p:spPr>
+      </p:sp>
+      <p:sp>
+        <p:nvSpPr>
+          <p:cNvPr id="15" name="Text 12"/>
+          <p:cNvSpPr txBox="1"/>
+          <p:nvPr/>
+        </p:nvSpPr>
+        <p:spPr>
+          <a:xfrm>
+            <a:off x="9162059" y="5120640"/>
+            <a:ext cx="2352980" cy="475488"/>
+          </a:xfrm>
+          <a:prstGeom prst="rect">
+            <a:avLst/>
+          </a:prstGeom>
+          <a:noFill/>
+          <a:ln/>
+        </p:spPr>
+        <p:txBody>
+          <a:bodyPr wrap="square" lIns="0" tIns="0" rIns="0" bIns="0" rtlCol="0" anchor="ctr"/>
+          <a:lstStyle/>
+          <a:p>
+            <a:pPr algn="ctr" indent="0" marL="0">
+              <a:buNone/>
+            </a:pPr>
+            <a:r>
+              <a:rPr lang="en-US" sz="2400" b="1" dirty="0">
+                <a:solidFill>
+                  <a:srgbClr val="E69F00"/>
+                </a:solidFill>
+                <a:latin typeface="Cambria" pitchFamily="34" charset="0"/>
+                <a:ea typeface="Cambria" pitchFamily="34" charset="-122"/>
+                <a:cs typeface="Cambria" pitchFamily="34" charset="-120"/>
+              </a:rPr>
+              <a:t>0.574</a:t>
+            </a:r>
+            <a:endParaRPr lang="en-US" sz="2400" dirty="0"/>
+          </a:p>
+        </p:txBody>
+      </p:sp>
+      <p:sp>
+        <p:nvSpPr>
+          <p:cNvPr id="16" name="Text 13"/>
+          <p:cNvSpPr txBox="1"/>
+          <p:nvPr/>
+        </p:nvSpPr>
+        <p:spPr>
+          <a:xfrm>
+            <a:off x="9162059" y="5577840"/>
+            <a:ext cx="2352980" cy="246888"/>
           </a:xfrm>
           <a:prstGeom prst="rect">
             <a:avLst/>
@@ -3855,73 +3944,27 @@
           <a:bodyPr wrap="square" lIns="0" tIns="0" rIns="0" bIns="0" rtlCol="0" anchor="t"/>
           <a:lstStyle/>
           <a:p>
-            <a:pPr marL="342900" indent="-342900">
-              <a:spcAft>
-                <a:spcPts val="800"/>
-              </a:spcAft>
-              <a:buSzPct val="100000"/>
-              <a:buChar char="•"/>
-            </a:pPr>
-            <a:r>
-              <a:rPr lang="en-US" sz="1300" dirty="0">
-                <a:solidFill>
-                  <a:srgbClr val="0F2A3F"/>
-                </a:solidFill>
-                <a:latin typeface="Calibri" pitchFamily="34" charset="0"/>
-                <a:ea typeface="Calibri" pitchFamily="34" charset="-122"/>
-                <a:cs typeface="Calibri" pitchFamily="34" charset="-120"/>
-              </a:rPr>
-              <a:t>Almost the whole rise is the cost of getting criteria wrong — not the benefit of having seen the answers.</a:t>
-            </a:r>
-            <a:endParaRPr lang="en-US" sz="1300" dirty="0"/>
-          </a:p>
-          <a:p>
-            <a:pPr marL="342900" indent="-342900">
-              <a:spcAft>
-                <a:spcPts val="800"/>
-              </a:spcAft>
-              <a:buSzPct val="100000"/>
-              <a:buChar char="•"/>
-            </a:pPr>
-            <a:r>
-              <a:rPr lang="en-US" sz="1300" dirty="0">
-                <a:solidFill>
-                  <a:srgbClr val="0F2A3F"/>
-                </a:solidFill>
-                <a:latin typeface="Calibri" pitchFamily="34" charset="0"/>
-                <a:ea typeface="Calibri" pitchFamily="34" charset="-122"/>
-                <a:cs typeface="Calibri" pitchFamily="34" charset="-120"/>
-              </a:rPr>
-              <a:t>It happened to us: dementia's verbatim criteria scored 0.112 against 0.358 once fixed, and nothing in the output announced it.</a:t>
-            </a:r>
-            <a:endParaRPr lang="en-US" sz="1300" dirty="0"/>
-          </a:p>
-          <a:p>
-            <a:pPr marL="342900" indent="-342900">
-              <a:spcAft>
-                <a:spcPts val="800"/>
-              </a:spcAft>
-              <a:buSzPct val="100000"/>
-              <a:buChar char="•"/>
-            </a:pPr>
-            <a:r>
-              <a:rPr lang="en-US" sz="1300" dirty="0">
-                <a:solidFill>
-                  <a:srgbClr val="0F2A3F"/>
-                </a:solidFill>
-                <a:latin typeface="Calibri" pitchFamily="34" charset="0"/>
-                <a:ea typeface="Calibri" pitchFamily="34" charset="-122"/>
-                <a:cs typeface="Calibri" pitchFamily="34" charset="-120"/>
-              </a:rPr>
-              <a:t>Both n = 2 — an indication, not an estimate.</a:t>
-            </a:r>
-            <a:endParaRPr lang="en-US" sz="1300" dirty="0"/>
-          </a:p>
-        </p:txBody>
-      </p:sp>
-      <p:sp>
-        <p:nvSpPr>
-          <p:cNvPr id="12" name="Text 9"/>
+            <a:pPr algn="ctr" indent="0" marL="0">
+              <a:buNone/>
+            </a:pPr>
+            <a:r>
+              <a:rPr lang="en-US" sz="1100" dirty="0">
+                <a:solidFill>
+                  <a:srgbClr val="5C7286"/>
+                </a:solidFill>
+                <a:latin typeface="Calibri" pitchFamily="34" charset="0"/>
+                <a:ea typeface="Calibri" pitchFamily="34" charset="-122"/>
+                <a:cs typeface="Calibri" pitchFamily="34" charset="-120"/>
+              </a:rPr>
+              <a:t>full pipeline</a:t>
+            </a:r>
+            <a:endParaRPr lang="en-US" sz="1100" dirty="0"/>
+          </a:p>
+        </p:txBody>
+      </p:sp>
+      <p:sp>
+        <p:nvSpPr>
+          <p:cNvPr id="17" name="Text 14"/>
           <p:cNvSpPr txBox="1"/>
           <p:nvPr/>
         </p:nvSpPr>
@@ -3952,7 +3995,7 @@
                 <a:ea typeface="Calibri" pitchFamily="34" charset="-122"/>
                 <a:cs typeface="Calibri" pitchFamily="34" charset="-120"/>
               </a:rPr>
-              <a:t>Mean over the three projects with all three tiers: 0.378 → 0.525 → 0.530. Steep, then flat.</a:t>
+              <a:t>Both peak on canonical terms (executive function, working memory) and collapse on condition contrasts (all three emotion-regulation columns ≈ 0.002–0.08). A term is not an analysis.</a:t>
             </a:r>
             <a:endParaRPr lang="en-US" sz="1050" dirty="0"/>
           </a:p>
@@ -3969,6 +4012,501 @@
 <file path=ppt/slides/slide13.xml><?xml version="1.0" encoding="utf-8"?>
 <p:sld xmlns:a="http://schemas.openxmlformats.org/drawingml/2006/main" xmlns:r="http://schemas.openxmlformats.org/officeDocument/2006/relationships" xmlns:p="http://schemas.openxmlformats.org/presentationml/2006/main">
   <p:cSld name="Slide 13">
+    <p:spTree>
+      <p:nvGrpSpPr>
+        <p:cNvPr id="1" name=""/>
+        <p:cNvGrpSpPr/>
+        <p:nvPr/>
+      </p:nvGrpSpPr>
+      <p:grpSpPr>
+        <a:xfrm>
+          <a:off x="0" y="0"/>
+          <a:ext cx="0" cy="0"/>
+          <a:chOff x="0" y="0"/>
+          <a:chExt cx="0" cy="0"/>
+        </a:xfrm>
+      </p:grpSpPr>
+      <p:sp>
+        <p:nvSpPr>
+          <p:cNvPr id="2" name="Text 0"/>
+          <p:cNvSpPr txBox="1"/>
+          <p:nvPr/>
+        </p:nvSpPr>
+        <p:spPr>
+          <a:xfrm>
+            <a:off x="566928" y="310896"/>
+            <a:ext cx="11057839" cy="749808"/>
+          </a:xfrm>
+          <a:prstGeom prst="rect">
+            <a:avLst/>
+          </a:prstGeom>
+          <a:noFill/>
+          <a:ln/>
+        </p:spPr>
+        <p:txBody>
+          <a:bodyPr wrap="square" lIns="0" tIns="0" rIns="0" bIns="0" rtlCol="0" anchor="t"/>
+          <a:lstStyle/>
+          <a:p>
+            <a:pPr indent="0" marL="0">
+              <a:buNone/>
+            </a:pPr>
+            <a:r>
+              <a:rPr lang="en-US" sz="3100" b="1" dirty="0">
+                <a:solidFill>
+                  <a:srgbClr val="0F2A3F"/>
+                </a:solidFill>
+                <a:latin typeface="Cambria" pitchFamily="34" charset="0"/>
+                <a:ea typeface="Cambria" pitchFamily="34" charset="-122"/>
+                <a:cs typeface="Cambria" pitchFamily="34" charset="-120"/>
+              </a:rPr>
+              <a:t>The real risk is mis-prompting, not overfitting</a:t>
+            </a:r>
+            <a:endParaRPr lang="en-US" sz="3100" dirty="0"/>
+          </a:p>
+        </p:txBody>
+      </p:sp>
+      <p:pic>
+        <p:nvPicPr>
+          <p:cNvPr id="3" name="Image 0" descr="/home/zorro/repos/autonima-results/reports/deck_figures/figureS2_tier_progression.png">    </p:cNvPr>
+          <p:cNvPicPr>
+            <a:picLocks noChangeAspect="1"/>
+          </p:cNvPicPr>
+          <p:nvPr/>
+        </p:nvPicPr>
+        <p:blipFill>
+          <a:blip r:embed="rId1"/>
+          <a:stretch>
+            <a:fillRect/>
+          </a:stretch>
+        </p:blipFill>
+        <p:spPr>
+          <a:xfrm>
+            <a:off x="669368" y="1554480"/>
+            <a:ext cx="4092800" cy="4206240"/>
+          </a:xfrm>
+          <a:prstGeom prst="rect">
+            <a:avLst/>
+          </a:prstGeom>
+        </p:spPr>
+      </p:pic>
+      <p:sp>
+        <p:nvSpPr>
+          <p:cNvPr id="4" name="Text 1"/>
+          <p:cNvSpPr txBox="1"/>
+          <p:nvPr/>
+        </p:nvSpPr>
+        <p:spPr>
+          <a:xfrm>
+            <a:off x="5212080" y="1600200"/>
+            <a:ext cx="6400800" cy="411480"/>
+          </a:xfrm>
+          <a:prstGeom prst="rect">
+            <a:avLst/>
+          </a:prstGeom>
+          <a:noFill/>
+          <a:ln/>
+        </p:spPr>
+        <p:txBody>
+          <a:bodyPr wrap="square" lIns="0" tIns="0" rIns="0" bIns="0" rtlCol="0" anchor="ctr"/>
+          <a:lstStyle/>
+          <a:p>
+            <a:pPr indent="0" marL="0">
+              <a:buNone/>
+            </a:pPr>
+            <a:r>
+              <a:rPr lang="en-US" sz="1350" dirty="0">
+                <a:solidFill>
+                  <a:srgbClr val="0F2A3F"/>
+                </a:solidFill>
+                <a:latin typeface="Calibri" pitchFamily="34" charset="0"/>
+                <a:ea typeface="Calibri" pitchFamily="34" charset="-122"/>
+                <a:cs typeface="Calibri" pitchFamily="34" charset="-120"/>
+              </a:rPr>
+              <a:t>Runs are registered by how much of the benchmark shaped their criteria.</a:t>
+            </a:r>
+            <a:endParaRPr lang="en-US" sz="1350" dirty="0"/>
+          </a:p>
+        </p:txBody>
+      </p:sp>
+      <p:sp>
+        <p:nvSpPr>
+          <p:cNvPr id="5" name="Shape 2"/>
+          <p:cNvSpPr/>
+          <p:nvPr/>
+        </p:nvSpPr>
+        <p:spPr>
+          <a:xfrm>
+            <a:off x="5212080" y="2148840"/>
+            <a:ext cx="3076956" cy="1417320"/>
+          </a:xfrm>
+          <a:prstGeom prst="roundRect">
+            <a:avLst>
+              <a:gd name="adj" fmla="val 5161"/>
+            </a:avLst>
+          </a:prstGeom>
+          <a:solidFill>
+            <a:srgbClr val="EEF3F7"/>
+          </a:solidFill>
+          <a:ln w="12700">
+            <a:solidFill>
+              <a:srgbClr val="EEF3F7"/>
+            </a:solidFill>
+            <a:prstDash val="solid"/>
+          </a:ln>
+        </p:spPr>
+      </p:sp>
+      <p:sp>
+        <p:nvSpPr>
+          <p:cNvPr id="6" name="Text 3"/>
+          <p:cNvSpPr txBox="1"/>
+          <p:nvPr/>
+        </p:nvSpPr>
+        <p:spPr>
+          <a:xfrm>
+            <a:off x="5321808" y="2240280"/>
+            <a:ext cx="2857500" cy="475488"/>
+          </a:xfrm>
+          <a:prstGeom prst="rect">
+            <a:avLst/>
+          </a:prstGeom>
+          <a:noFill/>
+          <a:ln/>
+        </p:spPr>
+        <p:txBody>
+          <a:bodyPr wrap="square" lIns="0" tIns="0" rIns="0" bIns="0" rtlCol="0" anchor="ctr"/>
+          <a:lstStyle/>
+          <a:p>
+            <a:pPr algn="ctr" indent="0" marL="0">
+              <a:buNone/>
+            </a:pPr>
+            <a:r>
+              <a:rPr lang="en-US" sz="2800" b="1" dirty="0">
+                <a:solidFill>
+                  <a:srgbClr val="E69F00"/>
+                </a:solidFill>
+                <a:latin typeface="Cambria" pitchFamily="34" charset="0"/>
+                <a:ea typeface="Cambria" pitchFamily="34" charset="-122"/>
+                <a:cs typeface="Cambria" pitchFamily="34" charset="-120"/>
+              </a:rPr>
+              <a:t>+0.221</a:t>
+            </a:r>
+            <a:endParaRPr lang="en-US" sz="2800" dirty="0"/>
+          </a:p>
+        </p:txBody>
+      </p:sp>
+      <p:sp>
+        <p:nvSpPr>
+          <p:cNvPr id="7" name="Text 4"/>
+          <p:cNvSpPr txBox="1"/>
+          <p:nvPr/>
+        </p:nvSpPr>
+        <p:spPr>
+          <a:xfrm>
+            <a:off x="5321808" y="2697480"/>
+            <a:ext cx="2857500" cy="795528"/>
+          </a:xfrm>
+          <a:prstGeom prst="rect">
+            <a:avLst/>
+          </a:prstGeom>
+          <a:noFill/>
+          <a:ln/>
+        </p:spPr>
+        <p:txBody>
+          <a:bodyPr wrap="square" lIns="0" tIns="0" rIns="0" bIns="0" rtlCol="0" anchor="t"/>
+          <a:lstStyle/>
+          <a:p>
+            <a:pPr algn="ctr" indent="0" marL="0">
+              <a:buNone/>
+            </a:pPr>
+            <a:r>
+              <a:rPr lang="en-US" sz="1100" dirty="0">
+                <a:solidFill>
+                  <a:srgbClr val="5C7286"/>
+                </a:solidFill>
+                <a:latin typeface="Calibri" pitchFamily="34" charset="0"/>
+                <a:ea typeface="Calibri" pitchFamily="34" charset="-122"/>
+                <a:cs typeface="Calibri" pitchFamily="34" charset="-120"/>
+              </a:rPr>
+              <a:t>verbatim → manual</a:t>
+            </a:r>
+            <a:endParaRPr lang="en-US" sz="1100" dirty="0"/>
+          </a:p>
+          <a:p>
+            <a:pPr algn="ctr" indent="0" marL="0">
+              <a:buNone/>
+            </a:pPr>
+            <a:r>
+              <a:rPr lang="en-US" sz="1100" dirty="0">
+                <a:solidFill>
+                  <a:srgbClr val="5C7286"/>
+                </a:solidFill>
+                <a:latin typeface="Calibri" pitchFamily="34" charset="0"/>
+                <a:ea typeface="Calibri" pitchFamily="34" charset="-122"/>
+                <a:cs typeface="Calibri" pitchFamily="34" charset="-120"/>
+              </a:rPr>
+              <a:t>fixing major oversights in mis-specified criteria</a:t>
+            </a:r>
+            <a:endParaRPr lang="en-US" sz="1100" dirty="0"/>
+          </a:p>
+        </p:txBody>
+      </p:sp>
+      <p:sp>
+        <p:nvSpPr>
+          <p:cNvPr id="8" name="Shape 5"/>
+          <p:cNvSpPr/>
+          <p:nvPr/>
+        </p:nvSpPr>
+        <p:spPr>
+          <a:xfrm>
+            <a:off x="8545068" y="2148840"/>
+            <a:ext cx="3076956" cy="1417320"/>
+          </a:xfrm>
+          <a:prstGeom prst="roundRect">
+            <a:avLst>
+              <a:gd name="adj" fmla="val 5161"/>
+            </a:avLst>
+          </a:prstGeom>
+          <a:solidFill>
+            <a:srgbClr val="EEF3F7"/>
+          </a:solidFill>
+          <a:ln w="12700">
+            <a:solidFill>
+              <a:srgbClr val="EEF3F7"/>
+            </a:solidFill>
+            <a:prstDash val="solid"/>
+          </a:ln>
+        </p:spPr>
+      </p:sp>
+      <p:sp>
+        <p:nvSpPr>
+          <p:cNvPr id="9" name="Text 6"/>
+          <p:cNvSpPr txBox="1"/>
+          <p:nvPr/>
+        </p:nvSpPr>
+        <p:spPr>
+          <a:xfrm>
+            <a:off x="8654796" y="2240280"/>
+            <a:ext cx="2857500" cy="475488"/>
+          </a:xfrm>
+          <a:prstGeom prst="rect">
+            <a:avLst/>
+          </a:prstGeom>
+          <a:noFill/>
+          <a:ln/>
+        </p:spPr>
+        <p:txBody>
+          <a:bodyPr wrap="square" lIns="0" tIns="0" rIns="0" bIns="0" rtlCol="0" anchor="ctr"/>
+          <a:lstStyle/>
+          <a:p>
+            <a:pPr algn="ctr" indent="0" marL="0">
+              <a:buNone/>
+            </a:pPr>
+            <a:r>
+              <a:rPr lang="en-US" sz="2800" b="1" dirty="0">
+                <a:solidFill>
+                  <a:srgbClr val="0A3D5C"/>
+                </a:solidFill>
+                <a:latin typeface="Cambria" pitchFamily="34" charset="0"/>
+                <a:ea typeface="Cambria" pitchFamily="34" charset="-122"/>
+                <a:cs typeface="Cambria" pitchFamily="34" charset="-120"/>
+              </a:rPr>
+              <a:t>+0.031</a:t>
+            </a:r>
+            <a:endParaRPr lang="en-US" sz="2800" dirty="0"/>
+          </a:p>
+        </p:txBody>
+      </p:sp>
+      <p:sp>
+        <p:nvSpPr>
+          <p:cNvPr id="10" name="Text 7"/>
+          <p:cNvSpPr txBox="1"/>
+          <p:nvPr/>
+        </p:nvSpPr>
+        <p:spPr>
+          <a:xfrm>
+            <a:off x="8654796" y="2697480"/>
+            <a:ext cx="2857500" cy="795528"/>
+          </a:xfrm>
+          <a:prstGeom prst="rect">
+            <a:avLst/>
+          </a:prstGeom>
+          <a:noFill/>
+          <a:ln/>
+        </p:spPr>
+        <p:txBody>
+          <a:bodyPr wrap="square" lIns="0" tIns="0" rIns="0" bIns="0" rtlCol="0" anchor="t"/>
+          <a:lstStyle/>
+          <a:p>
+            <a:pPr algn="ctr" indent="0" marL="0">
+              <a:buNone/>
+            </a:pPr>
+            <a:r>
+              <a:rPr lang="en-US" sz="1100" dirty="0">
+                <a:solidFill>
+                  <a:srgbClr val="5C7286"/>
+                </a:solidFill>
+                <a:latin typeface="Calibri" pitchFamily="34" charset="0"/>
+                <a:ea typeface="Calibri" pitchFamily="34" charset="-122"/>
+                <a:cs typeface="Calibri" pitchFamily="34" charset="-120"/>
+              </a:rPr>
+              <a:t>manual → best</a:t>
+            </a:r>
+            <a:endParaRPr lang="en-US" sz="1100" dirty="0"/>
+          </a:p>
+          <a:p>
+            <a:pPr algn="ctr" indent="0" marL="0">
+              <a:buNone/>
+            </a:pPr>
+            <a:r>
+              <a:rPr lang="en-US" sz="1100" dirty="0">
+                <a:solidFill>
+                  <a:srgbClr val="5C7286"/>
+                </a:solidFill>
+                <a:latin typeface="Calibri" pitchFamily="34" charset="0"/>
+                <a:ea typeface="Calibri" pitchFamily="34" charset="-122"/>
+                <a:cs typeface="Calibri" pitchFamily="34" charset="-120"/>
+              </a:rPr>
+              <a:t>rewriting criteria against the error reports</a:t>
+            </a:r>
+            <a:endParaRPr lang="en-US" sz="1100" dirty="0"/>
+          </a:p>
+        </p:txBody>
+      </p:sp>
+      <p:sp>
+        <p:nvSpPr>
+          <p:cNvPr id="11" name="Text 8"/>
+          <p:cNvSpPr txBox="1"/>
+          <p:nvPr/>
+        </p:nvSpPr>
+        <p:spPr>
+          <a:xfrm>
+            <a:off x="5212080" y="3794760"/>
+            <a:ext cx="6409944" cy="1965960"/>
+          </a:xfrm>
+          <a:prstGeom prst="rect">
+            <a:avLst/>
+          </a:prstGeom>
+          <a:noFill/>
+          <a:ln/>
+        </p:spPr>
+        <p:txBody>
+          <a:bodyPr wrap="square" lIns="0" tIns="0" rIns="0" bIns="0" rtlCol="0" anchor="t"/>
+          <a:lstStyle/>
+          <a:p>
+            <a:pPr marL="342900" indent="-342900">
+              <a:spcAft>
+                <a:spcPts val="800"/>
+              </a:spcAft>
+              <a:buSzPct val="100000"/>
+              <a:buChar char="•"/>
+            </a:pPr>
+            <a:r>
+              <a:rPr lang="en-US" sz="1300" dirty="0">
+                <a:solidFill>
+                  <a:srgbClr val="0F2A3F"/>
+                </a:solidFill>
+                <a:latin typeface="Calibri" pitchFamily="34" charset="0"/>
+                <a:ea typeface="Calibri" pitchFamily="34" charset="-122"/>
+                <a:cs typeface="Calibri" pitchFamily="34" charset="-120"/>
+              </a:rPr>
+              <a:t>Almost the whole rise is the cost of getting criteria wrong — not the benefit of having seen the answers.</a:t>
+            </a:r>
+            <a:endParaRPr lang="en-US" sz="1300" dirty="0"/>
+          </a:p>
+          <a:p>
+            <a:pPr marL="342900" indent="-342900">
+              <a:spcAft>
+                <a:spcPts val="800"/>
+              </a:spcAft>
+              <a:buSzPct val="100000"/>
+              <a:buChar char="•"/>
+            </a:pPr>
+            <a:r>
+              <a:rPr lang="en-US" sz="1300" dirty="0">
+                <a:solidFill>
+                  <a:srgbClr val="0F2A3F"/>
+                </a:solidFill>
+                <a:latin typeface="Calibri" pitchFamily="34" charset="0"/>
+                <a:ea typeface="Calibri" pitchFamily="34" charset="-122"/>
+                <a:cs typeface="Calibri" pitchFamily="34" charset="-120"/>
+              </a:rPr>
+              <a:t>It happened to us: dementia's verbatim criteria scored 0.112 against 0.358 once fixed, and nothing in the output announced it.</a:t>
+            </a:r>
+            <a:endParaRPr lang="en-US" sz="1300" dirty="0"/>
+          </a:p>
+          <a:p>
+            <a:pPr marL="342900" indent="-342900">
+              <a:spcAft>
+                <a:spcPts val="800"/>
+              </a:spcAft>
+              <a:buSzPct val="100000"/>
+              <a:buChar char="•"/>
+            </a:pPr>
+            <a:r>
+              <a:rPr lang="en-US" sz="1300" dirty="0">
+                <a:solidFill>
+                  <a:srgbClr val="0F2A3F"/>
+                </a:solidFill>
+                <a:latin typeface="Calibri" pitchFamily="34" charset="0"/>
+                <a:ea typeface="Calibri" pitchFamily="34" charset="-122"/>
+                <a:cs typeface="Calibri" pitchFamily="34" charset="-120"/>
+              </a:rPr>
+              <a:t>Both n = 2 — an indication, not an estimate.</a:t>
+            </a:r>
+            <a:endParaRPr lang="en-US" sz="1300" dirty="0"/>
+          </a:p>
+        </p:txBody>
+      </p:sp>
+      <p:sp>
+        <p:nvSpPr>
+          <p:cNvPr id="12" name="Text 9"/>
+          <p:cNvSpPr txBox="1"/>
+          <p:nvPr/>
+        </p:nvSpPr>
+        <p:spPr>
+          <a:xfrm>
+            <a:off x="566928" y="6236208"/>
+            <a:ext cx="11057839" cy="310896"/>
+          </a:xfrm>
+          <a:prstGeom prst="rect">
+            <a:avLst/>
+          </a:prstGeom>
+          <a:noFill/>
+          <a:ln/>
+        </p:spPr>
+        <p:txBody>
+          <a:bodyPr wrap="square" lIns="0" tIns="0" rIns="0" bIns="0" rtlCol="0" anchor="ctr"/>
+          <a:lstStyle/>
+          <a:p>
+            <a:pPr indent="0" marL="0">
+              <a:buNone/>
+            </a:pPr>
+            <a:r>
+              <a:rPr lang="en-US" sz="1050" i="1" dirty="0">
+                <a:solidFill>
+                  <a:srgbClr val="5C7286"/>
+                </a:solidFill>
+                <a:latin typeface="Calibri" pitchFamily="34" charset="0"/>
+                <a:ea typeface="Calibri" pitchFamily="34" charset="-122"/>
+                <a:cs typeface="Calibri" pitchFamily="34" charset="-120"/>
+              </a:rPr>
+              <a:t>Mean over the three projects with all three tiers: 0.378 → 0.525 → 0.530. Steep, then flat.</a:t>
+            </a:r>
+            <a:endParaRPr lang="en-US" sz="1050" dirty="0"/>
+          </a:p>
+        </p:txBody>
+      </p:sp>
+    </p:spTree>
+  </p:cSld>
+  <p:clrMapOvr>
+    <a:masterClrMapping/>
+  </p:clrMapOvr>
+</p:sld>
+</file>
+
+<file path=ppt/slides/slide14.xml><?xml version="1.0" encoding="utf-8"?>
+<p:sld xmlns:a="http://schemas.openxmlformats.org/drawingml/2006/main" xmlns:r="http://schemas.openxmlformats.org/officeDocument/2006/relationships" xmlns:p="http://schemas.openxmlformats.org/presentationml/2006/main">
+  <p:cSld name="Slide 14">
     <p:bg>
       <p:bgPr>
         <a:solidFill>
@@ -5144,281 +5682,6 @@
                 <a:cs typeface="Calibri" pitchFamily="34" charset="-120"/>
               </a:rPr>
               <a:t>r² is stable across re-runs while dice is not — one re-run pushed a whole map below threshold. Three independent lines of evidence now favour r² as the primary metric.</a:t>
-            </a:r>
-            <a:endParaRPr lang="en-US" sz="1050" dirty="0"/>
-          </a:p>
-        </p:txBody>
-      </p:sp>
-    </p:spTree>
-  </p:cSld>
-  <p:clrMapOvr>
-    <a:masterClrMapping/>
-  </p:clrMapOvr>
-</p:sld>
-</file>
-
-<file path=ppt/slides/slide14.xml><?xml version="1.0" encoding="utf-8"?>
-<p:sld xmlns:a="http://schemas.openxmlformats.org/drawingml/2006/main" xmlns:r="http://schemas.openxmlformats.org/officeDocument/2006/relationships" xmlns:p="http://schemas.openxmlformats.org/presentationml/2006/main">
-  <p:cSld name="Slide 14">
-    <p:spTree>
-      <p:nvGrpSpPr>
-        <p:cNvPr id="1" name=""/>
-        <p:cNvGrpSpPr/>
-        <p:nvPr/>
-      </p:nvGrpSpPr>
-      <p:grpSpPr>
-        <a:xfrm>
-          <a:off x="0" y="0"/>
-          <a:ext cx="0" cy="0"/>
-          <a:chOff x="0" y="0"/>
-          <a:chExt cx="0" cy="0"/>
-        </a:xfrm>
-      </p:grpSpPr>
-      <p:sp>
-        <p:nvSpPr>
-          <p:cNvPr id="2" name="Text 0"/>
-          <p:cNvSpPr txBox="1"/>
-          <p:nvPr/>
-        </p:nvSpPr>
-        <p:spPr>
-          <a:xfrm>
-            <a:off x="566928" y="310896"/>
-            <a:ext cx="11057839" cy="749808"/>
-          </a:xfrm>
-          <a:prstGeom prst="rect">
-            <a:avLst/>
-          </a:prstGeom>
-          <a:noFill/>
-          <a:ln/>
-        </p:spPr>
-        <p:txBody>
-          <a:bodyPr wrap="square" lIns="0" tIns="0" rIns="0" bIns="0" rtlCol="0" anchor="t"/>
-          <a:lstStyle/>
-          <a:p>
-            <a:pPr indent="0" marL="0">
-              <a:buNone/>
-            </a:pPr>
-            <a:r>
-              <a:rPr lang="en-US" sz="3100" b="1" dirty="0">
-                <a:solidFill>
-                  <a:srgbClr val="0F2A3F"/>
-                </a:solidFill>
-                <a:latin typeface="Cambria" pitchFamily="34" charset="0"/>
-                <a:ea typeface="Cambria" pitchFamily="34" charset="-122"/>
-                <a:cs typeface="Cambria" pitchFamily="34" charset="-120"/>
-              </a:rPr>
-              <a:t>Cost is not the obstacle</a:t>
-            </a:r>
-            <a:endParaRPr lang="en-US" sz="3100" dirty="0"/>
-          </a:p>
-        </p:txBody>
-      </p:sp>
-      <p:sp>
-        <p:nvSpPr>
-          <p:cNvPr id="3" name="Text 1"/>
-          <p:cNvSpPr txBox="1"/>
-          <p:nvPr/>
-        </p:nvSpPr>
-        <p:spPr>
-          <a:xfrm>
-            <a:off x="566928" y="1060704"/>
-            <a:ext cx="11057839" cy="420624"/>
-          </a:xfrm>
-          <a:prstGeom prst="rect">
-            <a:avLst/>
-          </a:prstGeom>
-          <a:noFill/>
-          <a:ln/>
-        </p:spPr>
-        <p:txBody>
-          <a:bodyPr wrap="square" lIns="0" tIns="0" rIns="0" bIns="0" rtlCol="0" anchor="ctr"/>
-          <a:lstStyle/>
-          <a:p>
-            <a:pPr indent="0" marL="0">
-              <a:buNone/>
-            </a:pPr>
-            <a:r>
-              <a:rPr lang="en-US" sz="1500" dirty="0">
-                <a:solidFill>
-                  <a:srgbClr val="1C7293"/>
-                </a:solidFill>
-                <a:latin typeface="Calibri" pitchFamily="34" charset="0"/>
-                <a:ea typeface="Calibri" pitchFamily="34" charset="-122"/>
-                <a:cs typeface="Calibri" pitchFamily="34" charset="-120"/>
-              </a:rPr>
-              <a:t>Measured from per-stage token accounting, not estimated.</a:t>
-            </a:r>
-            <a:endParaRPr lang="en-US" sz="1500" dirty="0"/>
-          </a:p>
-        </p:txBody>
-      </p:sp>
-      <p:sp>
-        <p:nvSpPr>
-          <p:cNvPr id="4" name="Text 2"/>
-          <p:cNvSpPr txBox="1"/>
-          <p:nvPr/>
-        </p:nvSpPr>
-        <p:spPr>
-          <a:xfrm>
-            <a:off x="566928" y="1517904"/>
-            <a:ext cx="11057839" cy="384048"/>
-          </a:xfrm>
-          <a:prstGeom prst="rect">
-            <a:avLst/>
-          </a:prstGeom>
-          <a:noFill/>
-          <a:ln/>
-        </p:spPr>
-        <p:txBody>
-          <a:bodyPr wrap="square" lIns="0" tIns="0" rIns="0" bIns="0" rtlCol="0" anchor="ctr"/>
-          <a:lstStyle/>
-          <a:p>
-            <a:pPr indent="0" marL="0">
-              <a:buNone/>
-            </a:pPr>
-            <a:r>
-              <a:rPr lang="en-US" sz="1400" b="1" dirty="0">
-                <a:solidFill>
-                  <a:srgbClr val="E69F00"/>
-                </a:solidFill>
-                <a:latin typeface="Calibri" pitchFamily="34" charset="0"/>
-                <a:ea typeface="Calibri" pitchFamily="34" charset="-122"/>
-                <a:cs typeface="Calibri" pitchFamily="34" charset="-120"/>
-              </a:rPr>
-              <a:t>~$51</a:t>
-            </a:r>
-            <a:pPr indent="0" marL="0">
-              <a:buNone/>
-            </a:pPr>
-            <a:r>
-              <a:rPr lang="en-US" sz="1400" dirty="0">
-                <a:solidFill>
-                  <a:srgbClr val="0F2A3F"/>
-                </a:solidFill>
-                <a:latin typeface="Calibri" pitchFamily="34" charset="0"/>
-                <a:ea typeface="Calibri" pitchFamily="34" charset="-122"/>
-                <a:cs typeface="Calibri" pitchFamily="34" charset="-120"/>
-              </a:rPr>
-              <a:t> for three full projects end to end;  </a:t>
-            </a:r>
-            <a:pPr indent="0" marL="0">
-              <a:buNone/>
-            </a:pPr>
-            <a:r>
-              <a:rPr lang="en-US" sz="1400" b="1" dirty="0">
-                <a:solidFill>
-                  <a:srgbClr val="0A3D5C"/>
-                </a:solidFill>
-                <a:latin typeface="Calibri" pitchFamily="34" charset="0"/>
-                <a:ea typeface="Calibri" pitchFamily="34" charset="-122"/>
-                <a:cs typeface="Calibri" pitchFamily="34" charset="-120"/>
-              </a:rPr>
-              <a:t>$0.0023</a:t>
-            </a:r>
-            <a:pPr indent="0" marL="0">
-              <a:buNone/>
-            </a:pPr>
-            <a:r>
-              <a:rPr lang="en-US" sz="1400" dirty="0">
-                <a:solidFill>
-                  <a:srgbClr val="0F2A3F"/>
-                </a:solidFill>
-                <a:latin typeface="Calibri" pitchFamily="34" charset="0"/>
-                <a:ea typeface="Calibri" pitchFamily="34" charset="-122"/>
-                <a:cs typeface="Calibri" pitchFamily="34" charset="-120"/>
-              </a:rPr>
-              <a:t> per abstract screened, 88% of it output tokens.  The pre-hoc estimate was </a:t>
-            </a:r>
-            <a:pPr indent="0" marL="0">
-              <a:buNone/>
-            </a:pPr>
-            <a:r>
-              <a:rPr lang="en-US" sz="1400" b="1" dirty="0">
-                <a:solidFill>
-                  <a:srgbClr val="0A3D5C"/>
-                </a:solidFill>
-                <a:latin typeface="Calibri" pitchFamily="34" charset="0"/>
-                <a:ea typeface="Calibri" pitchFamily="34" charset="-122"/>
-                <a:cs typeface="Calibri" pitchFamily="34" charset="-120"/>
-              </a:rPr>
-              <a:t>1.8× under</a:t>
-            </a:r>
-            <a:pPr indent="0" marL="0">
-              <a:buNone/>
-            </a:pPr>
-            <a:r>
-              <a:rPr lang="en-US" sz="1400" dirty="0">
-                <a:solidFill>
-                  <a:srgbClr val="0F2A3F"/>
-                </a:solidFill>
-                <a:latin typeface="Calibri" pitchFamily="34" charset="0"/>
-                <a:ea typeface="Calibri" pitchFamily="34" charset="-122"/>
-                <a:cs typeface="Calibri" pitchFamily="34" charset="-120"/>
-              </a:rPr>
-              <a:t> — which is why the accounting exists.</a:t>
-            </a:r>
-            <a:endParaRPr lang="en-US" sz="1400" dirty="0"/>
-          </a:p>
-        </p:txBody>
-      </p:sp>
-      <p:pic>
-        <p:nvPicPr>
-          <p:cNvPr id="5" name="Image 0" descr="/home/zorro/repos/autonima-results/reports/deck_figures/figureS1_measured_cost.png">    </p:cNvPr>
-          <p:cNvPicPr>
-            <a:picLocks noChangeAspect="1"/>
-          </p:cNvPicPr>
-          <p:nvPr/>
-        </p:nvPicPr>
-        <p:blipFill>
-          <a:blip r:embed="rId1"/>
-          <a:stretch>
-            <a:fillRect/>
-          </a:stretch>
-        </p:blipFill>
-        <p:spPr>
-          <a:xfrm>
-            <a:off x="1485877" y="2011680"/>
-            <a:ext cx="9219940" cy="3749040"/>
-          </a:xfrm>
-          <a:prstGeom prst="rect">
-            <a:avLst/>
-          </a:prstGeom>
-        </p:spPr>
-      </p:pic>
-      <p:sp>
-        <p:nvSpPr>
-          <p:cNvPr id="6" name="Text 3"/>
-          <p:cNvSpPr txBox="1"/>
-          <p:nvPr/>
-        </p:nvSpPr>
-        <p:spPr>
-          <a:xfrm>
-            <a:off x="566928" y="6236208"/>
-            <a:ext cx="11057839" cy="310896"/>
-          </a:xfrm>
-          <a:prstGeom prst="rect">
-            <a:avLst/>
-          </a:prstGeom>
-          <a:noFill/>
-          <a:ln/>
-        </p:spPr>
-        <p:txBody>
-          <a:bodyPr wrap="square" lIns="0" tIns="0" rIns="0" bIns="0" rtlCol="0" anchor="ctr"/>
-          <a:lstStyle/>
-          <a:p>
-            <a:pPr indent="0" marL="0">
-              <a:buNone/>
-            </a:pPr>
-            <a:r>
-              <a:rPr lang="en-US" sz="1050" i="1" dirty="0">
-                <a:solidFill>
-                  <a:srgbClr val="5C7286"/>
-                </a:solidFill>
-                <a:latin typeface="Calibri" pitchFamily="34" charset="0"/>
-                <a:ea typeface="Calibri" pitchFamily="34" charset="-122"/>
-                <a:cs typeface="Calibri" pitchFamily="34" charset="-120"/>
-              </a:rPr>
-              <a:t>Tens of dollars and hours against months of person time — which for a methods audience is the point, not an aside.</a:t>
             </a:r>
             <a:endParaRPr lang="en-US" sz="1050" dirty="0"/>
           </a:p>
@@ -5482,7 +5745,7 @@
                 <a:ea typeface="Cambria" pitchFamily="34" charset="-122"/>
                 <a:cs typeface="Cambria" pitchFamily="34" charset="-120"/>
               </a:rPr>
-              <a:t>What is still open</a:t>
+              <a:t>Cost is not the obstacle</a:t>
             </a:r>
             <a:endParaRPr lang="en-US" sz="3100" dirty="0"/>
           </a:p>
@@ -5490,30 +5753,42 @@
       </p:sp>
       <p:sp>
         <p:nvSpPr>
-          <p:cNvPr id="3" name="Shape 1"/>
-          <p:cNvSpPr/>
-          <p:nvPr/>
-        </p:nvSpPr>
-        <p:spPr>
-          <a:xfrm>
-            <a:off x="566928" y="1664208"/>
-            <a:ext cx="2148840" cy="512064"/>
-          </a:xfrm>
-          <a:prstGeom prst="roundRect">
-            <a:avLst>
-              <a:gd name="adj" fmla="val 14286"/>
-            </a:avLst>
-          </a:prstGeom>
-          <a:solidFill>
-            <a:srgbClr val="E69F00"/>
-          </a:solidFill>
-          <a:ln w="12700">
-            <a:solidFill>
-              <a:srgbClr val="E69F00"/>
-            </a:solidFill>
-            <a:prstDash val="solid"/>
-          </a:ln>
-        </p:spPr>
+          <p:cNvPr id="3" name="Text 1"/>
+          <p:cNvSpPr txBox="1"/>
+          <p:nvPr/>
+        </p:nvSpPr>
+        <p:spPr>
+          <a:xfrm>
+            <a:off x="566928" y="1060704"/>
+            <a:ext cx="11057839" cy="420624"/>
+          </a:xfrm>
+          <a:prstGeom prst="rect">
+            <a:avLst/>
+          </a:prstGeom>
+          <a:noFill/>
+          <a:ln/>
+        </p:spPr>
+        <p:txBody>
+          <a:bodyPr wrap="square" lIns="0" tIns="0" rIns="0" bIns="0" rtlCol="0" anchor="ctr"/>
+          <a:lstStyle/>
+          <a:p>
+            <a:pPr indent="0" marL="0">
+              <a:buNone/>
+            </a:pPr>
+            <a:r>
+              <a:rPr lang="en-US" sz="1500" dirty="0">
+                <a:solidFill>
+                  <a:srgbClr val="1C7293"/>
+                </a:solidFill>
+                <a:latin typeface="Calibri" pitchFamily="34" charset="0"/>
+                <a:ea typeface="Calibri" pitchFamily="34" charset="-122"/>
+                <a:cs typeface="Calibri" pitchFamily="34" charset="-120"/>
+              </a:rPr>
+              <a:t>Measured from per-stage token accounting, not estimated.</a:t>
+            </a:r>
+            <a:endParaRPr lang="en-US" sz="1500" dirty="0"/>
+          </a:p>
+        </p:txBody>
       </p:sp>
       <p:sp>
         <p:nvSpPr>
@@ -5523,63 +5798,38 @@
         </p:nvSpPr>
         <p:spPr>
           <a:xfrm>
-            <a:off x="566928" y="1664208"/>
-            <a:ext cx="2148840" cy="512064"/>
-          </a:xfrm>
-          <a:prstGeom prst="rect">
-            <a:avLst/>
-          </a:prstGeom>
-          <a:noFill/>
-          <a:ln/>
-        </p:spPr>
-        <p:txBody>
-          <a:bodyPr wrap="square" lIns="0" tIns="0" rIns="0" bIns="0" rtlCol="0" anchor="ctr"/>
-          <a:lstStyle/>
-          <a:p>
-            <a:pPr algn="ctr" indent="0" marL="0">
-              <a:buNone/>
-            </a:pPr>
-            <a:r>
-              <a:rPr lang="en-US" sz="1150" b="1" dirty="0">
-                <a:solidFill>
-                  <a:srgbClr val="FFFFFF"/>
-                </a:solidFill>
-                <a:latin typeface="Calibri" pitchFamily="34" charset="0"/>
-                <a:ea typeface="Calibri" pitchFamily="34" charset="-122"/>
-                <a:cs typeface="Calibri" pitchFamily="34" charset="-120"/>
-              </a:rPr>
-              <a:t>Gates submission</a:t>
-            </a:r>
-            <a:endParaRPr lang="en-US" sz="1150" dirty="0"/>
-          </a:p>
-        </p:txBody>
-      </p:sp>
-      <p:sp>
-        <p:nvSpPr>
-          <p:cNvPr id="5" name="Text 3"/>
-          <p:cNvSpPr txBox="1"/>
-          <p:nvPr/>
-        </p:nvSpPr>
-        <p:spPr>
-          <a:xfrm>
-            <a:off x="3108960" y="1609344"/>
-            <a:ext cx="8485632" cy="822960"/>
-          </a:xfrm>
-          <a:prstGeom prst="rect">
-            <a:avLst/>
-          </a:prstGeom>
-          <a:noFill/>
-          <a:ln/>
-        </p:spPr>
-        <p:txBody>
-          <a:bodyPr wrap="square" lIns="0" tIns="0" rIns="0" bIns="0" rtlCol="0" anchor="ctr"/>
-          <a:lstStyle/>
-          <a:p>
-            <a:pPr indent="0" marL="0">
-              <a:buNone/>
-            </a:pPr>
-            <a:r>
-              <a:rPr lang="en-US" sz="1300" dirty="0">
+            <a:off x="566928" y="1517904"/>
+            <a:ext cx="11057839" cy="384048"/>
+          </a:xfrm>
+          <a:prstGeom prst="rect">
+            <a:avLst/>
+          </a:prstGeom>
+          <a:noFill/>
+          <a:ln/>
+        </p:spPr>
+        <p:txBody>
+          <a:bodyPr wrap="square" lIns="0" tIns="0" rIns="0" bIns="0" rtlCol="0" anchor="ctr"/>
+          <a:lstStyle/>
+          <a:p>
+            <a:pPr indent="0" marL="0">
+              <a:buNone/>
+            </a:pPr>
+            <a:r>
+              <a:rPr lang="en-US" sz="1400" b="1" dirty="0">
+                <a:solidFill>
+                  <a:srgbClr val="E69F00"/>
+                </a:solidFill>
+                <a:latin typeface="Calibri" pitchFamily="34" charset="0"/>
+                <a:ea typeface="Calibri" pitchFamily="34" charset="-122"/>
+                <a:cs typeface="Calibri" pitchFamily="34" charset="-120"/>
+              </a:rPr>
+              <a:t>~$51</a:t>
+            </a:r>
+            <a:pPr indent="0" marL="0">
+              <a:buNone/>
+            </a:pPr>
+            <a:r>
+              <a:rPr lang="en-US" sz="1400" dirty="0">
                 <a:solidFill>
                   <a:srgbClr val="0F2A3F"/>
                 </a:solidFill>
@@ -5587,104 +5837,27 @@
                 <a:ea typeface="Calibri" pitchFamily="34" charset="-122"/>
                 <a:cs typeface="Calibri" pitchFamily="34" charset="-120"/>
               </a:rPr>
-              <a:t>A forward-looking case where the answer is not already published — the difference between demonstrating reproduction and demonstrating discovery.</a:t>
-            </a:r>
-            <a:endParaRPr lang="en-US" sz="1300" dirty="0"/>
-          </a:p>
-        </p:txBody>
-      </p:sp>
-      <p:sp>
-        <p:nvSpPr>
-          <p:cNvPr id="6" name="Shape 4"/>
-          <p:cNvSpPr/>
-          <p:nvPr/>
-        </p:nvSpPr>
-        <p:spPr>
-          <a:xfrm>
-            <a:off x="566928" y="2578608"/>
-            <a:ext cx="2148840" cy="512064"/>
-          </a:xfrm>
-          <a:prstGeom prst="roundRect">
-            <a:avLst>
-              <a:gd name="adj" fmla="val 14286"/>
-            </a:avLst>
-          </a:prstGeom>
-          <a:solidFill>
-            <a:srgbClr val="1C7293"/>
-          </a:solidFill>
-          <a:ln w="12700">
-            <a:solidFill>
-              <a:srgbClr val="1C7293"/>
-            </a:solidFill>
-            <a:prstDash val="solid"/>
-          </a:ln>
-        </p:spPr>
-      </p:sp>
-      <p:sp>
-        <p:nvSpPr>
-          <p:cNvPr id="7" name="Text 5"/>
-          <p:cNvSpPr txBox="1"/>
-          <p:nvPr/>
-        </p:nvSpPr>
-        <p:spPr>
-          <a:xfrm>
-            <a:off x="566928" y="2578608"/>
-            <a:ext cx="2148840" cy="512064"/>
-          </a:xfrm>
-          <a:prstGeom prst="rect">
-            <a:avLst/>
-          </a:prstGeom>
-          <a:noFill/>
-          <a:ln/>
-        </p:spPr>
-        <p:txBody>
-          <a:bodyPr wrap="square" lIns="0" tIns="0" rIns="0" bIns="0" rtlCol="0" anchor="ctr"/>
-          <a:lstStyle/>
-          <a:p>
-            <a:pPr algn="ctr" indent="0" marL="0">
-              <a:buNone/>
-            </a:pPr>
-            <a:r>
-              <a:rPr lang="en-US" sz="1150" b="1" dirty="0">
-                <a:solidFill>
-                  <a:srgbClr val="FFFFFF"/>
-                </a:solidFill>
-                <a:latin typeface="Calibri" pitchFamily="34" charset="0"/>
-                <a:ea typeface="Calibri" pitchFamily="34" charset="-122"/>
-                <a:cs typeface="Calibri" pitchFamily="34" charset="-120"/>
-              </a:rPr>
-              <a:t>Needs computing</a:t>
-            </a:r>
-            <a:endParaRPr lang="en-US" sz="1150" dirty="0"/>
-          </a:p>
-        </p:txBody>
-      </p:sp>
-      <p:sp>
-        <p:nvSpPr>
-          <p:cNvPr id="8" name="Text 6"/>
-          <p:cNvSpPr txBox="1"/>
-          <p:nvPr/>
-        </p:nvSpPr>
-        <p:spPr>
-          <a:xfrm>
-            <a:off x="3108960" y="2523744"/>
-            <a:ext cx="8485632" cy="822960"/>
-          </a:xfrm>
-          <a:prstGeom prst="rect">
-            <a:avLst/>
-          </a:prstGeom>
-          <a:noFill/>
-          <a:ln/>
-        </p:spPr>
-        <p:txBody>
-          <a:bodyPr wrap="square" lIns="0" tIns="0" rIns="0" bIns="0" rtlCol="0" anchor="ctr"/>
-          <a:lstStyle/>
-          <a:p>
-            <a:pPr indent="0" marL="0">
-              <a:buNone/>
-            </a:pPr>
-            <a:r>
-              <a:rPr lang="en-US" sz="1300" dirty="0">
+              <a:t> for three full projects end to end;  </a:t>
+            </a:r>
+            <a:pPr indent="0" marL="0">
+              <a:buNone/>
+            </a:pPr>
+            <a:r>
+              <a:rPr lang="en-US" sz="1400" b="1" dirty="0">
+                <a:solidFill>
+                  <a:srgbClr val="0A3D5C"/>
+                </a:solidFill>
+                <a:latin typeface="Calibri" pitchFamily="34" charset="0"/>
+                <a:ea typeface="Calibri" pitchFamily="34" charset="-122"/>
+                <a:cs typeface="Calibri" pitchFamily="34" charset="-120"/>
+              </a:rPr>
+              <a:t>$0.0023</a:t>
+            </a:r>
+            <a:pPr indent="0" marL="0">
+              <a:buNone/>
+            </a:pPr>
+            <a:r>
+              <a:rPr lang="en-US" sz="1400" dirty="0">
                 <a:solidFill>
                   <a:srgbClr val="0F2A3F"/>
                 </a:solidFill>
@@ -5692,104 +5865,27 @@
                 <a:ea typeface="Calibri" pitchFamily="34" charset="-122"/>
                 <a:cs typeface="Calibri" pitchFamily="34" charset="-120"/>
               </a:rPr>
-              <a:t>Margin over baseline by tier, not just absolute R². The baselines don't move with tier so it should track, but that is load-bearing enough to measure.</a:t>
-            </a:r>
-            <a:endParaRPr lang="en-US" sz="1300" dirty="0"/>
-          </a:p>
-        </p:txBody>
-      </p:sp>
-      <p:sp>
-        <p:nvSpPr>
-          <p:cNvPr id="9" name="Shape 7"/>
-          <p:cNvSpPr/>
-          <p:nvPr/>
-        </p:nvSpPr>
-        <p:spPr>
-          <a:xfrm>
-            <a:off x="566928" y="3493008"/>
-            <a:ext cx="2148840" cy="512064"/>
-          </a:xfrm>
-          <a:prstGeom prst="roundRect">
-            <a:avLst>
-              <a:gd name="adj" fmla="val 14286"/>
-            </a:avLst>
-          </a:prstGeom>
-          <a:solidFill>
-            <a:srgbClr val="1C7293"/>
-          </a:solidFill>
-          <a:ln w="12700">
-            <a:solidFill>
-              <a:srgbClr val="1C7293"/>
-            </a:solidFill>
-            <a:prstDash val="solid"/>
-          </a:ln>
-        </p:spPr>
-      </p:sp>
-      <p:sp>
-        <p:nvSpPr>
-          <p:cNvPr id="10" name="Text 8"/>
-          <p:cNvSpPr txBox="1"/>
-          <p:nvPr/>
-        </p:nvSpPr>
-        <p:spPr>
-          <a:xfrm>
-            <a:off x="566928" y="3493008"/>
-            <a:ext cx="2148840" cy="512064"/>
-          </a:xfrm>
-          <a:prstGeom prst="rect">
-            <a:avLst/>
-          </a:prstGeom>
-          <a:noFill/>
-          <a:ln/>
-        </p:spPr>
-        <p:txBody>
-          <a:bodyPr wrap="square" lIns="0" tIns="0" rIns="0" bIns="0" rtlCol="0" anchor="ctr"/>
-          <a:lstStyle/>
-          <a:p>
-            <a:pPr algn="ctr" indent="0" marL="0">
-              <a:buNone/>
-            </a:pPr>
-            <a:r>
-              <a:rPr lang="en-US" sz="1150" b="1" dirty="0">
-                <a:solidFill>
-                  <a:srgbClr val="FFFFFF"/>
-                </a:solidFill>
-                <a:latin typeface="Calibri" pitchFamily="34" charset="0"/>
-                <a:ea typeface="Calibri" pitchFamily="34" charset="-122"/>
-                <a:cs typeface="Calibri" pitchFamily="34" charset="-120"/>
-              </a:rPr>
-              <a:t>Needs a DOI</a:t>
-            </a:r>
-            <a:endParaRPr lang="en-US" sz="1150" dirty="0"/>
-          </a:p>
-        </p:txBody>
-      </p:sp>
-      <p:sp>
-        <p:nvSpPr>
-          <p:cNvPr id="11" name="Text 9"/>
-          <p:cNvSpPr txBox="1"/>
-          <p:nvPr/>
-        </p:nvSpPr>
-        <p:spPr>
-          <a:xfrm>
-            <a:off x="3108960" y="3438144"/>
-            <a:ext cx="8485632" cy="822960"/>
-          </a:xfrm>
-          <a:prstGeom prst="rect">
-            <a:avLst/>
-          </a:prstGeom>
-          <a:noFill/>
-          <a:ln/>
-        </p:spPr>
-        <p:txBody>
-          <a:bodyPr wrap="square" lIns="0" tIns="0" rIns="0" bIns="0" rtlCol="0" anchor="ctr"/>
-          <a:lstStyle/>
-          <a:p>
-            <a:pPr indent="0" marL="0">
-              <a:buNone/>
-            </a:pPr>
-            <a:r>
-              <a:rPr lang="en-US" sz="1300" dirty="0">
+              <a:t> per abstract screened, 88% of it output tokens.  The pre-hoc estimate was </a:t>
+            </a:r>
+            <a:pPr indent="0" marL="0">
+              <a:buNone/>
+            </a:pPr>
+            <a:r>
+              <a:rPr lang="en-US" sz="1400" b="1" dirty="0">
+                <a:solidFill>
+                  <a:srgbClr val="0A3D5C"/>
+                </a:solidFill>
+                <a:latin typeface="Calibri" pitchFamily="34" charset="0"/>
+                <a:ea typeface="Calibri" pitchFamily="34" charset="-122"/>
+                <a:cs typeface="Calibri" pitchFamily="34" charset="-120"/>
+              </a:rPr>
+              <a:t>1.8× under</a:t>
+            </a:r>
+            <a:pPr indent="0" marL="0">
+              <a:buNone/>
+            </a:pPr>
+            <a:r>
+              <a:rPr lang="en-US" sz="1400" dirty="0">
                 <a:solidFill>
                   <a:srgbClr val="0F2A3F"/>
                 </a:solidFill>
@@ -5797,225 +5893,39 @@
                 <a:ea typeface="Calibri" pitchFamily="34" charset="-122"/>
                 <a:cs typeface="Calibri" pitchFamily="34" charset="-120"/>
               </a:rPr>
-              <a:t>neurometabench must be citable before submission. "In a paper we haven't submitted" is not an answer to "where is this benchmark".</a:t>
-            </a:r>
-            <a:endParaRPr lang="en-US" sz="1300" dirty="0"/>
-          </a:p>
-        </p:txBody>
-      </p:sp>
-      <p:sp>
-        <p:nvSpPr>
-          <p:cNvPr id="12" name="Shape 10"/>
-          <p:cNvSpPr/>
-          <p:nvPr/>
-        </p:nvSpPr>
-        <p:spPr>
-          <a:xfrm>
-            <a:off x="566928" y="4407408"/>
-            <a:ext cx="2148840" cy="512064"/>
-          </a:xfrm>
-          <a:prstGeom prst="roundRect">
-            <a:avLst>
-              <a:gd name="adj" fmla="val 14286"/>
-            </a:avLst>
-          </a:prstGeom>
-          <a:solidFill>
-            <a:srgbClr val="1C7293"/>
-          </a:solidFill>
-          <a:ln w="12700">
-            <a:solidFill>
-              <a:srgbClr val="1C7293"/>
-            </a:solidFill>
-            <a:prstDash val="solid"/>
-          </a:ln>
-        </p:spPr>
-      </p:sp>
-      <p:sp>
-        <p:nvSpPr>
-          <p:cNvPr id="13" name="Text 11"/>
-          <p:cNvSpPr txBox="1"/>
-          <p:nvPr/>
-        </p:nvSpPr>
-        <p:spPr>
-          <a:xfrm>
-            <a:off x="566928" y="4407408"/>
-            <a:ext cx="2148840" cy="512064"/>
-          </a:xfrm>
-          <a:prstGeom prst="rect">
-            <a:avLst/>
-          </a:prstGeom>
-          <a:noFill/>
-          <a:ln/>
-        </p:spPr>
-        <p:txBody>
-          <a:bodyPr wrap="square" lIns="0" tIns="0" rIns="0" bIns="0" rtlCol="0" anchor="ctr"/>
-          <a:lstStyle/>
-          <a:p>
-            <a:pPr algn="ctr" indent="0" marL="0">
-              <a:buNone/>
-            </a:pPr>
-            <a:r>
-              <a:rPr lang="en-US" sz="1150" b="1" dirty="0">
-                <a:solidFill>
-                  <a:srgbClr val="FFFFFF"/>
-                </a:solidFill>
-                <a:latin typeface="Calibri" pitchFamily="34" charset="0"/>
-                <a:ea typeface="Calibri" pitchFamily="34" charset="-122"/>
-                <a:cs typeface="Calibri" pitchFamily="34" charset="-120"/>
-              </a:rPr>
-              <a:t>Worth doing</a:t>
-            </a:r>
-            <a:endParaRPr lang="en-US" sz="1150" dirty="0"/>
-          </a:p>
-        </p:txBody>
-      </p:sp>
-      <p:sp>
-        <p:nvSpPr>
-          <p:cNvPr id="14" name="Text 12"/>
-          <p:cNvSpPr txBox="1"/>
-          <p:nvPr/>
-        </p:nvSpPr>
-        <p:spPr>
-          <a:xfrm>
-            <a:off x="3108960" y="4352544"/>
-            <a:ext cx="8485632" cy="822960"/>
-          </a:xfrm>
-          <a:prstGeom prst="rect">
-            <a:avLst/>
-          </a:prstGeom>
-          <a:noFill/>
-          <a:ln/>
-        </p:spPr>
-        <p:txBody>
-          <a:bodyPr wrap="square" lIns="0" tIns="0" rIns="0" bIns="0" rtlCol="0" anchor="ctr"/>
-          <a:lstStyle/>
-          <a:p>
-            <a:pPr indent="0" marL="0">
-              <a:buNone/>
-            </a:pPr>
-            <a:r>
-              <a:rPr lang="en-US" sz="1300" dirty="0">
-                <a:solidFill>
-                  <a:srgbClr val="0F2A3F"/>
-                </a:solidFill>
-                <a:latin typeface="Calibri" pitchFamily="34" charset="0"/>
-                <a:ea typeface="Calibri" pitchFamily="34" charset="-122"/>
-                <a:cs typeface="Calibri" pitchFamily="34" charset="-120"/>
-              </a:rPr>
-              <a:t>Failure-mode taxonomy in the main text — separating supply failures from judgement failures. A methods audience adopts on the basis of how a tool fails.</a:t>
-            </a:r>
-            <a:endParaRPr lang="en-US" sz="1300" dirty="0"/>
-          </a:p>
-        </p:txBody>
-      </p:sp>
-      <p:sp>
-        <p:nvSpPr>
-          <p:cNvPr id="15" name="Shape 13"/>
-          <p:cNvSpPr/>
-          <p:nvPr/>
-        </p:nvSpPr>
-        <p:spPr>
-          <a:xfrm>
-            <a:off x="566928" y="5321808"/>
-            <a:ext cx="2148840" cy="512064"/>
-          </a:xfrm>
-          <a:prstGeom prst="roundRect">
-            <a:avLst>
-              <a:gd name="adj" fmla="val 14286"/>
-            </a:avLst>
-          </a:prstGeom>
-          <a:solidFill>
-            <a:srgbClr val="1C7293"/>
-          </a:solidFill>
-          <a:ln w="12700">
-            <a:solidFill>
-              <a:srgbClr val="1C7293"/>
-            </a:solidFill>
-            <a:prstDash val="solid"/>
-          </a:ln>
-        </p:spPr>
-      </p:sp>
-      <p:sp>
-        <p:nvSpPr>
-          <p:cNvPr id="16" name="Text 14"/>
-          <p:cNvSpPr txBox="1"/>
-          <p:nvPr/>
-        </p:nvSpPr>
-        <p:spPr>
-          <a:xfrm>
-            <a:off x="566928" y="5321808"/>
-            <a:ext cx="2148840" cy="512064"/>
-          </a:xfrm>
-          <a:prstGeom prst="rect">
-            <a:avLst/>
-          </a:prstGeom>
-          <a:noFill/>
-          <a:ln/>
-        </p:spPr>
-        <p:txBody>
-          <a:bodyPr wrap="square" lIns="0" tIns="0" rIns="0" bIns="0" rtlCol="0" anchor="ctr"/>
-          <a:lstStyle/>
-          <a:p>
-            <a:pPr algn="ctr" indent="0" marL="0">
-              <a:buNone/>
-            </a:pPr>
-            <a:r>
-              <a:rPr lang="en-US" sz="1150" b="1" dirty="0">
-                <a:solidFill>
-                  <a:srgbClr val="FFFFFF"/>
-                </a:solidFill>
-                <a:latin typeface="Calibri" pitchFamily="34" charset="0"/>
-                <a:ea typeface="Calibri" pitchFamily="34" charset="-122"/>
-                <a:cs typeface="Calibri" pitchFamily="34" charset="-120"/>
-              </a:rPr>
-              <a:t>Benchmark quality</a:t>
-            </a:r>
-            <a:endParaRPr lang="en-US" sz="1150" dirty="0"/>
-          </a:p>
-        </p:txBody>
-      </p:sp>
-      <p:sp>
-        <p:nvSpPr>
-          <p:cNvPr id="17" name="Text 15"/>
-          <p:cNvSpPr txBox="1"/>
-          <p:nvPr/>
-        </p:nvSpPr>
-        <p:spPr>
-          <a:xfrm>
-            <a:off x="3108960" y="5266944"/>
-            <a:ext cx="8485632" cy="822960"/>
-          </a:xfrm>
-          <a:prstGeom prst="rect">
-            <a:avLst/>
-          </a:prstGeom>
-          <a:noFill/>
-          <a:ln/>
-        </p:spPr>
-        <p:txBody>
-          <a:bodyPr wrap="square" lIns="0" tIns="0" rIns="0" bIns="0" rtlCol="0" anchor="ctr"/>
-          <a:lstStyle/>
-          <a:p>
-            <a:pPr indent="0" marL="0">
-              <a:buNone/>
-            </a:pPr>
-            <a:r>
-              <a:rPr lang="en-US" sz="1300" dirty="0">
-                <a:solidFill>
-                  <a:srgbClr val="0F2A3F"/>
-                </a:solidFill>
-                <a:latin typeface="Calibri" pitchFamily="34" charset="0"/>
-                <a:ea typeface="Calibri" pitchFamily="34" charset="-122"/>
-                <a:cs typeface="Calibri" pitchFamily="34" charset="-120"/>
-              </a:rPr>
-              <a:t>Two substance-use contrasts disagree with the source paper's own foci counts (153 vs 37, 109 vs 236). That is an extraction audit for the data paper.</a:t>
-            </a:r>
-            <a:endParaRPr lang="en-US" sz="1300" dirty="0"/>
-          </a:p>
-        </p:txBody>
-      </p:sp>
-      <p:sp>
-        <p:nvSpPr>
-          <p:cNvPr id="18" name="Text 16"/>
+              <a:t> — which is why the accounting exists.</a:t>
+            </a:r>
+            <a:endParaRPr lang="en-US" sz="1400" dirty="0"/>
+          </a:p>
+        </p:txBody>
+      </p:sp>
+      <p:pic>
+        <p:nvPicPr>
+          <p:cNvPr id="5" name="Image 0" descr="/home/zorro/repos/autonima-results/reports/deck_figures/figureS1_measured_cost.png">    </p:cNvPr>
+          <p:cNvPicPr>
+            <a:picLocks noChangeAspect="1"/>
+          </p:cNvPicPr>
+          <p:nvPr/>
+        </p:nvPicPr>
+        <p:blipFill>
+          <a:blip r:embed="rId1"/>
+          <a:stretch>
+            <a:fillRect/>
+          </a:stretch>
+        </p:blipFill>
+        <p:spPr>
+          <a:xfrm>
+            <a:off x="1485877" y="2011680"/>
+            <a:ext cx="9219940" cy="3749040"/>
+          </a:xfrm>
+          <a:prstGeom prst="rect">
+            <a:avLst/>
+          </a:prstGeom>
+        </p:spPr>
+      </p:pic>
+      <p:sp>
+        <p:nvSpPr>
+          <p:cNvPr id="6" name="Text 3"/>
           <p:cNvSpPr txBox="1"/>
           <p:nvPr/>
         </p:nvSpPr>
@@ -6046,7 +5956,7 @@
                 <a:ea typeface="Calibri" pitchFamily="34" charset="-122"/>
                 <a:cs typeface="Calibri" pitchFamily="34" charset="-120"/>
               </a:rPr>
-              <a:t>Everything above is tracked in NATURE_METHODS_SKELETON.md and PAPER_OUTLINE.md, with the reasoning attached.</a:t>
+              <a:t>Tens of dollars and hours against months of person time — which for a methods audience is the point, not an aside.</a:t>
             </a:r>
             <a:endParaRPr lang="en-US" sz="1050" dirty="0"/>
           </a:p>
@@ -6063,6 +5973,634 @@
 <file path=ppt/slides/slide16.xml><?xml version="1.0" encoding="utf-8"?>
 <p:sld xmlns:a="http://schemas.openxmlformats.org/drawingml/2006/main" xmlns:r="http://schemas.openxmlformats.org/officeDocument/2006/relationships" xmlns:p="http://schemas.openxmlformats.org/presentationml/2006/main">
   <p:cSld name="Slide 16">
+    <p:spTree>
+      <p:nvGrpSpPr>
+        <p:cNvPr id="1" name=""/>
+        <p:cNvGrpSpPr/>
+        <p:nvPr/>
+      </p:nvGrpSpPr>
+      <p:grpSpPr>
+        <a:xfrm>
+          <a:off x="0" y="0"/>
+          <a:ext cx="0" cy="0"/>
+          <a:chOff x="0" y="0"/>
+          <a:chExt cx="0" cy="0"/>
+        </a:xfrm>
+      </p:grpSpPr>
+      <p:sp>
+        <p:nvSpPr>
+          <p:cNvPr id="2" name="Text 0"/>
+          <p:cNvSpPr txBox="1"/>
+          <p:nvPr/>
+        </p:nvSpPr>
+        <p:spPr>
+          <a:xfrm>
+            <a:off x="566928" y="310896"/>
+            <a:ext cx="11057839" cy="749808"/>
+          </a:xfrm>
+          <a:prstGeom prst="rect">
+            <a:avLst/>
+          </a:prstGeom>
+          <a:noFill/>
+          <a:ln/>
+        </p:spPr>
+        <p:txBody>
+          <a:bodyPr wrap="square" lIns="0" tIns="0" rIns="0" bIns="0" rtlCol="0" anchor="t"/>
+          <a:lstStyle/>
+          <a:p>
+            <a:pPr indent="0" marL="0">
+              <a:buNone/>
+            </a:pPr>
+            <a:r>
+              <a:rPr lang="en-US" sz="3100" b="1" dirty="0">
+                <a:solidFill>
+                  <a:srgbClr val="0F2A3F"/>
+                </a:solidFill>
+                <a:latin typeface="Cambria" pitchFamily="34" charset="0"/>
+                <a:ea typeface="Cambria" pitchFamily="34" charset="-122"/>
+                <a:cs typeface="Cambria" pitchFamily="34" charset="-120"/>
+              </a:rPr>
+              <a:t>What is still open</a:t>
+            </a:r>
+            <a:endParaRPr lang="en-US" sz="3100" dirty="0"/>
+          </a:p>
+        </p:txBody>
+      </p:sp>
+      <p:sp>
+        <p:nvSpPr>
+          <p:cNvPr id="3" name="Shape 1"/>
+          <p:cNvSpPr/>
+          <p:nvPr/>
+        </p:nvSpPr>
+        <p:spPr>
+          <a:xfrm>
+            <a:off x="566928" y="1664208"/>
+            <a:ext cx="2148840" cy="512064"/>
+          </a:xfrm>
+          <a:prstGeom prst="roundRect">
+            <a:avLst>
+              <a:gd name="adj" fmla="val 14286"/>
+            </a:avLst>
+          </a:prstGeom>
+          <a:solidFill>
+            <a:srgbClr val="E69F00"/>
+          </a:solidFill>
+          <a:ln w="12700">
+            <a:solidFill>
+              <a:srgbClr val="E69F00"/>
+            </a:solidFill>
+            <a:prstDash val="solid"/>
+          </a:ln>
+        </p:spPr>
+      </p:sp>
+      <p:sp>
+        <p:nvSpPr>
+          <p:cNvPr id="4" name="Text 2"/>
+          <p:cNvSpPr txBox="1"/>
+          <p:nvPr/>
+        </p:nvSpPr>
+        <p:spPr>
+          <a:xfrm>
+            <a:off x="566928" y="1664208"/>
+            <a:ext cx="2148840" cy="512064"/>
+          </a:xfrm>
+          <a:prstGeom prst="rect">
+            <a:avLst/>
+          </a:prstGeom>
+          <a:noFill/>
+          <a:ln/>
+        </p:spPr>
+        <p:txBody>
+          <a:bodyPr wrap="square" lIns="0" tIns="0" rIns="0" bIns="0" rtlCol="0" anchor="ctr"/>
+          <a:lstStyle/>
+          <a:p>
+            <a:pPr algn="ctr" indent="0" marL="0">
+              <a:buNone/>
+            </a:pPr>
+            <a:r>
+              <a:rPr lang="en-US" sz="1150" b="1" dirty="0">
+                <a:solidFill>
+                  <a:srgbClr val="FFFFFF"/>
+                </a:solidFill>
+                <a:latin typeface="Calibri" pitchFamily="34" charset="0"/>
+                <a:ea typeface="Calibri" pitchFamily="34" charset="-122"/>
+                <a:cs typeface="Calibri" pitchFamily="34" charset="-120"/>
+              </a:rPr>
+              <a:t>Gates submission</a:t>
+            </a:r>
+            <a:endParaRPr lang="en-US" sz="1150" dirty="0"/>
+          </a:p>
+        </p:txBody>
+      </p:sp>
+      <p:sp>
+        <p:nvSpPr>
+          <p:cNvPr id="5" name="Text 3"/>
+          <p:cNvSpPr txBox="1"/>
+          <p:nvPr/>
+        </p:nvSpPr>
+        <p:spPr>
+          <a:xfrm>
+            <a:off x="3108960" y="1609344"/>
+            <a:ext cx="8485632" cy="822960"/>
+          </a:xfrm>
+          <a:prstGeom prst="rect">
+            <a:avLst/>
+          </a:prstGeom>
+          <a:noFill/>
+          <a:ln/>
+        </p:spPr>
+        <p:txBody>
+          <a:bodyPr wrap="square" lIns="0" tIns="0" rIns="0" bIns="0" rtlCol="0" anchor="ctr"/>
+          <a:lstStyle/>
+          <a:p>
+            <a:pPr indent="0" marL="0">
+              <a:buNone/>
+            </a:pPr>
+            <a:r>
+              <a:rPr lang="en-US" sz="1300" dirty="0">
+                <a:solidFill>
+                  <a:srgbClr val="0F2A3F"/>
+                </a:solidFill>
+                <a:latin typeface="Calibri" pitchFamily="34" charset="0"/>
+                <a:ea typeface="Calibri" pitchFamily="34" charset="-122"/>
+                <a:cs typeface="Calibri" pitchFamily="34" charset="-120"/>
+              </a:rPr>
+              <a:t>A forward-looking case where the answer is not already published — the difference between demonstrating reproduction and demonstrating discovery.</a:t>
+            </a:r>
+            <a:endParaRPr lang="en-US" sz="1300" dirty="0"/>
+          </a:p>
+        </p:txBody>
+      </p:sp>
+      <p:sp>
+        <p:nvSpPr>
+          <p:cNvPr id="6" name="Shape 4"/>
+          <p:cNvSpPr/>
+          <p:nvPr/>
+        </p:nvSpPr>
+        <p:spPr>
+          <a:xfrm>
+            <a:off x="566928" y="2578608"/>
+            <a:ext cx="2148840" cy="512064"/>
+          </a:xfrm>
+          <a:prstGeom prst="roundRect">
+            <a:avLst>
+              <a:gd name="adj" fmla="val 14286"/>
+            </a:avLst>
+          </a:prstGeom>
+          <a:solidFill>
+            <a:srgbClr val="1C7293"/>
+          </a:solidFill>
+          <a:ln w="12700">
+            <a:solidFill>
+              <a:srgbClr val="1C7293"/>
+            </a:solidFill>
+            <a:prstDash val="solid"/>
+          </a:ln>
+        </p:spPr>
+      </p:sp>
+      <p:sp>
+        <p:nvSpPr>
+          <p:cNvPr id="7" name="Text 5"/>
+          <p:cNvSpPr txBox="1"/>
+          <p:nvPr/>
+        </p:nvSpPr>
+        <p:spPr>
+          <a:xfrm>
+            <a:off x="566928" y="2578608"/>
+            <a:ext cx="2148840" cy="512064"/>
+          </a:xfrm>
+          <a:prstGeom prst="rect">
+            <a:avLst/>
+          </a:prstGeom>
+          <a:noFill/>
+          <a:ln/>
+        </p:spPr>
+        <p:txBody>
+          <a:bodyPr wrap="square" lIns="0" tIns="0" rIns="0" bIns="0" rtlCol="0" anchor="ctr"/>
+          <a:lstStyle/>
+          <a:p>
+            <a:pPr algn="ctr" indent="0" marL="0">
+              <a:buNone/>
+            </a:pPr>
+            <a:r>
+              <a:rPr lang="en-US" sz="1150" b="1" dirty="0">
+                <a:solidFill>
+                  <a:srgbClr val="FFFFFF"/>
+                </a:solidFill>
+                <a:latin typeface="Calibri" pitchFamily="34" charset="0"/>
+                <a:ea typeface="Calibri" pitchFamily="34" charset="-122"/>
+                <a:cs typeface="Calibri" pitchFamily="34" charset="-120"/>
+              </a:rPr>
+              <a:t>Needs computing</a:t>
+            </a:r>
+            <a:endParaRPr lang="en-US" sz="1150" dirty="0"/>
+          </a:p>
+        </p:txBody>
+      </p:sp>
+      <p:sp>
+        <p:nvSpPr>
+          <p:cNvPr id="8" name="Text 6"/>
+          <p:cNvSpPr txBox="1"/>
+          <p:nvPr/>
+        </p:nvSpPr>
+        <p:spPr>
+          <a:xfrm>
+            <a:off x="3108960" y="2523744"/>
+            <a:ext cx="8485632" cy="822960"/>
+          </a:xfrm>
+          <a:prstGeom prst="rect">
+            <a:avLst/>
+          </a:prstGeom>
+          <a:noFill/>
+          <a:ln/>
+        </p:spPr>
+        <p:txBody>
+          <a:bodyPr wrap="square" lIns="0" tIns="0" rIns="0" bIns="0" rtlCol="0" anchor="ctr"/>
+          <a:lstStyle/>
+          <a:p>
+            <a:pPr indent="0" marL="0">
+              <a:buNone/>
+            </a:pPr>
+            <a:r>
+              <a:rPr lang="en-US" sz="1300" dirty="0">
+                <a:solidFill>
+                  <a:srgbClr val="0F2A3F"/>
+                </a:solidFill>
+                <a:latin typeface="Calibri" pitchFamily="34" charset="0"/>
+                <a:ea typeface="Calibri" pitchFamily="34" charset="-122"/>
+                <a:cs typeface="Calibri" pitchFamily="34" charset="-120"/>
+              </a:rPr>
+              <a:t>Margin over baseline by tier, not just absolute R². The baselines don't move with tier so it should track, but that is load-bearing enough to measure.</a:t>
+            </a:r>
+            <a:endParaRPr lang="en-US" sz="1300" dirty="0"/>
+          </a:p>
+        </p:txBody>
+      </p:sp>
+      <p:sp>
+        <p:nvSpPr>
+          <p:cNvPr id="9" name="Shape 7"/>
+          <p:cNvSpPr/>
+          <p:nvPr/>
+        </p:nvSpPr>
+        <p:spPr>
+          <a:xfrm>
+            <a:off x="566928" y="3493008"/>
+            <a:ext cx="2148840" cy="512064"/>
+          </a:xfrm>
+          <a:prstGeom prst="roundRect">
+            <a:avLst>
+              <a:gd name="adj" fmla="val 14286"/>
+            </a:avLst>
+          </a:prstGeom>
+          <a:solidFill>
+            <a:srgbClr val="1C7293"/>
+          </a:solidFill>
+          <a:ln w="12700">
+            <a:solidFill>
+              <a:srgbClr val="1C7293"/>
+            </a:solidFill>
+            <a:prstDash val="solid"/>
+          </a:ln>
+        </p:spPr>
+      </p:sp>
+      <p:sp>
+        <p:nvSpPr>
+          <p:cNvPr id="10" name="Text 8"/>
+          <p:cNvSpPr txBox="1"/>
+          <p:nvPr/>
+        </p:nvSpPr>
+        <p:spPr>
+          <a:xfrm>
+            <a:off x="566928" y="3493008"/>
+            <a:ext cx="2148840" cy="512064"/>
+          </a:xfrm>
+          <a:prstGeom prst="rect">
+            <a:avLst/>
+          </a:prstGeom>
+          <a:noFill/>
+          <a:ln/>
+        </p:spPr>
+        <p:txBody>
+          <a:bodyPr wrap="square" lIns="0" tIns="0" rIns="0" bIns="0" rtlCol="0" anchor="ctr"/>
+          <a:lstStyle/>
+          <a:p>
+            <a:pPr algn="ctr" indent="0" marL="0">
+              <a:buNone/>
+            </a:pPr>
+            <a:r>
+              <a:rPr lang="en-US" sz="1150" b="1" dirty="0">
+                <a:solidFill>
+                  <a:srgbClr val="FFFFFF"/>
+                </a:solidFill>
+                <a:latin typeface="Calibri" pitchFamily="34" charset="0"/>
+                <a:ea typeface="Calibri" pitchFamily="34" charset="-122"/>
+                <a:cs typeface="Calibri" pitchFamily="34" charset="-120"/>
+              </a:rPr>
+              <a:t>Needs a DOI</a:t>
+            </a:r>
+            <a:endParaRPr lang="en-US" sz="1150" dirty="0"/>
+          </a:p>
+        </p:txBody>
+      </p:sp>
+      <p:sp>
+        <p:nvSpPr>
+          <p:cNvPr id="11" name="Text 9"/>
+          <p:cNvSpPr txBox="1"/>
+          <p:nvPr/>
+        </p:nvSpPr>
+        <p:spPr>
+          <a:xfrm>
+            <a:off x="3108960" y="3438144"/>
+            <a:ext cx="8485632" cy="822960"/>
+          </a:xfrm>
+          <a:prstGeom prst="rect">
+            <a:avLst/>
+          </a:prstGeom>
+          <a:noFill/>
+          <a:ln/>
+        </p:spPr>
+        <p:txBody>
+          <a:bodyPr wrap="square" lIns="0" tIns="0" rIns="0" bIns="0" rtlCol="0" anchor="ctr"/>
+          <a:lstStyle/>
+          <a:p>
+            <a:pPr indent="0" marL="0">
+              <a:buNone/>
+            </a:pPr>
+            <a:r>
+              <a:rPr lang="en-US" sz="1300" dirty="0">
+                <a:solidFill>
+                  <a:srgbClr val="0F2A3F"/>
+                </a:solidFill>
+                <a:latin typeface="Calibri" pitchFamily="34" charset="0"/>
+                <a:ea typeface="Calibri" pitchFamily="34" charset="-122"/>
+                <a:cs typeface="Calibri" pitchFamily="34" charset="-120"/>
+              </a:rPr>
+              <a:t>neurometabench must be citable before submission. "In a paper we haven't submitted" is not an answer to "where is this benchmark".</a:t>
+            </a:r>
+            <a:endParaRPr lang="en-US" sz="1300" dirty="0"/>
+          </a:p>
+        </p:txBody>
+      </p:sp>
+      <p:sp>
+        <p:nvSpPr>
+          <p:cNvPr id="12" name="Shape 10"/>
+          <p:cNvSpPr/>
+          <p:nvPr/>
+        </p:nvSpPr>
+        <p:spPr>
+          <a:xfrm>
+            <a:off x="566928" y="4407408"/>
+            <a:ext cx="2148840" cy="512064"/>
+          </a:xfrm>
+          <a:prstGeom prst="roundRect">
+            <a:avLst>
+              <a:gd name="adj" fmla="val 14286"/>
+            </a:avLst>
+          </a:prstGeom>
+          <a:solidFill>
+            <a:srgbClr val="1C7293"/>
+          </a:solidFill>
+          <a:ln w="12700">
+            <a:solidFill>
+              <a:srgbClr val="1C7293"/>
+            </a:solidFill>
+            <a:prstDash val="solid"/>
+          </a:ln>
+        </p:spPr>
+      </p:sp>
+      <p:sp>
+        <p:nvSpPr>
+          <p:cNvPr id="13" name="Text 11"/>
+          <p:cNvSpPr txBox="1"/>
+          <p:nvPr/>
+        </p:nvSpPr>
+        <p:spPr>
+          <a:xfrm>
+            <a:off x="566928" y="4407408"/>
+            <a:ext cx="2148840" cy="512064"/>
+          </a:xfrm>
+          <a:prstGeom prst="rect">
+            <a:avLst/>
+          </a:prstGeom>
+          <a:noFill/>
+          <a:ln/>
+        </p:spPr>
+        <p:txBody>
+          <a:bodyPr wrap="square" lIns="0" tIns="0" rIns="0" bIns="0" rtlCol="0" anchor="ctr"/>
+          <a:lstStyle/>
+          <a:p>
+            <a:pPr algn="ctr" indent="0" marL="0">
+              <a:buNone/>
+            </a:pPr>
+            <a:r>
+              <a:rPr lang="en-US" sz="1150" b="1" dirty="0">
+                <a:solidFill>
+                  <a:srgbClr val="FFFFFF"/>
+                </a:solidFill>
+                <a:latin typeface="Calibri" pitchFamily="34" charset="0"/>
+                <a:ea typeface="Calibri" pitchFamily="34" charset="-122"/>
+                <a:cs typeface="Calibri" pitchFamily="34" charset="-120"/>
+              </a:rPr>
+              <a:t>Worth doing</a:t>
+            </a:r>
+            <a:endParaRPr lang="en-US" sz="1150" dirty="0"/>
+          </a:p>
+        </p:txBody>
+      </p:sp>
+      <p:sp>
+        <p:nvSpPr>
+          <p:cNvPr id="14" name="Text 12"/>
+          <p:cNvSpPr txBox="1"/>
+          <p:nvPr/>
+        </p:nvSpPr>
+        <p:spPr>
+          <a:xfrm>
+            <a:off x="3108960" y="4352544"/>
+            <a:ext cx="8485632" cy="822960"/>
+          </a:xfrm>
+          <a:prstGeom prst="rect">
+            <a:avLst/>
+          </a:prstGeom>
+          <a:noFill/>
+          <a:ln/>
+        </p:spPr>
+        <p:txBody>
+          <a:bodyPr wrap="square" lIns="0" tIns="0" rIns="0" bIns="0" rtlCol="0" anchor="ctr"/>
+          <a:lstStyle/>
+          <a:p>
+            <a:pPr indent="0" marL="0">
+              <a:buNone/>
+            </a:pPr>
+            <a:r>
+              <a:rPr lang="en-US" sz="1300" dirty="0">
+                <a:solidFill>
+                  <a:srgbClr val="0F2A3F"/>
+                </a:solidFill>
+                <a:latin typeface="Calibri" pitchFamily="34" charset="0"/>
+                <a:ea typeface="Calibri" pitchFamily="34" charset="-122"/>
+                <a:cs typeface="Calibri" pitchFamily="34" charset="-120"/>
+              </a:rPr>
+              <a:t>Failure-mode taxonomy in the main text — separating supply failures from judgement failures. A methods audience adopts on the basis of how a tool fails.</a:t>
+            </a:r>
+            <a:endParaRPr lang="en-US" sz="1300" dirty="0"/>
+          </a:p>
+        </p:txBody>
+      </p:sp>
+      <p:sp>
+        <p:nvSpPr>
+          <p:cNvPr id="15" name="Shape 13"/>
+          <p:cNvSpPr/>
+          <p:nvPr/>
+        </p:nvSpPr>
+        <p:spPr>
+          <a:xfrm>
+            <a:off x="566928" y="5321808"/>
+            <a:ext cx="2148840" cy="512064"/>
+          </a:xfrm>
+          <a:prstGeom prst="roundRect">
+            <a:avLst>
+              <a:gd name="adj" fmla="val 14286"/>
+            </a:avLst>
+          </a:prstGeom>
+          <a:solidFill>
+            <a:srgbClr val="1C7293"/>
+          </a:solidFill>
+          <a:ln w="12700">
+            <a:solidFill>
+              <a:srgbClr val="1C7293"/>
+            </a:solidFill>
+            <a:prstDash val="solid"/>
+          </a:ln>
+        </p:spPr>
+      </p:sp>
+      <p:sp>
+        <p:nvSpPr>
+          <p:cNvPr id="16" name="Text 14"/>
+          <p:cNvSpPr txBox="1"/>
+          <p:nvPr/>
+        </p:nvSpPr>
+        <p:spPr>
+          <a:xfrm>
+            <a:off x="566928" y="5321808"/>
+            <a:ext cx="2148840" cy="512064"/>
+          </a:xfrm>
+          <a:prstGeom prst="rect">
+            <a:avLst/>
+          </a:prstGeom>
+          <a:noFill/>
+          <a:ln/>
+        </p:spPr>
+        <p:txBody>
+          <a:bodyPr wrap="square" lIns="0" tIns="0" rIns="0" bIns="0" rtlCol="0" anchor="ctr"/>
+          <a:lstStyle/>
+          <a:p>
+            <a:pPr algn="ctr" indent="0" marL="0">
+              <a:buNone/>
+            </a:pPr>
+            <a:r>
+              <a:rPr lang="en-US" sz="1150" b="1" dirty="0">
+                <a:solidFill>
+                  <a:srgbClr val="FFFFFF"/>
+                </a:solidFill>
+                <a:latin typeface="Calibri" pitchFamily="34" charset="0"/>
+                <a:ea typeface="Calibri" pitchFamily="34" charset="-122"/>
+                <a:cs typeface="Calibri" pitchFamily="34" charset="-120"/>
+              </a:rPr>
+              <a:t>Benchmark quality</a:t>
+            </a:r>
+            <a:endParaRPr lang="en-US" sz="1150" dirty="0"/>
+          </a:p>
+        </p:txBody>
+      </p:sp>
+      <p:sp>
+        <p:nvSpPr>
+          <p:cNvPr id="17" name="Text 15"/>
+          <p:cNvSpPr txBox="1"/>
+          <p:nvPr/>
+        </p:nvSpPr>
+        <p:spPr>
+          <a:xfrm>
+            <a:off x="3108960" y="5266944"/>
+            <a:ext cx="8485632" cy="822960"/>
+          </a:xfrm>
+          <a:prstGeom prst="rect">
+            <a:avLst/>
+          </a:prstGeom>
+          <a:noFill/>
+          <a:ln/>
+        </p:spPr>
+        <p:txBody>
+          <a:bodyPr wrap="square" lIns="0" tIns="0" rIns="0" bIns="0" rtlCol="0" anchor="ctr"/>
+          <a:lstStyle/>
+          <a:p>
+            <a:pPr indent="0" marL="0">
+              <a:buNone/>
+            </a:pPr>
+            <a:r>
+              <a:rPr lang="en-US" sz="1300" dirty="0">
+                <a:solidFill>
+                  <a:srgbClr val="0F2A3F"/>
+                </a:solidFill>
+                <a:latin typeface="Calibri" pitchFamily="34" charset="0"/>
+                <a:ea typeface="Calibri" pitchFamily="34" charset="-122"/>
+                <a:cs typeface="Calibri" pitchFamily="34" charset="-120"/>
+              </a:rPr>
+              <a:t>Two substance-use contrasts disagree with the source paper's own foci counts (153 vs 37, 109 vs 236). That is an extraction audit for the data paper.</a:t>
+            </a:r>
+            <a:endParaRPr lang="en-US" sz="1300" dirty="0"/>
+          </a:p>
+        </p:txBody>
+      </p:sp>
+      <p:sp>
+        <p:nvSpPr>
+          <p:cNvPr id="18" name="Text 16"/>
+          <p:cNvSpPr txBox="1"/>
+          <p:nvPr/>
+        </p:nvSpPr>
+        <p:spPr>
+          <a:xfrm>
+            <a:off x="566928" y="6236208"/>
+            <a:ext cx="11057839" cy="310896"/>
+          </a:xfrm>
+          <a:prstGeom prst="rect">
+            <a:avLst/>
+          </a:prstGeom>
+          <a:noFill/>
+          <a:ln/>
+        </p:spPr>
+        <p:txBody>
+          <a:bodyPr wrap="square" lIns="0" tIns="0" rIns="0" bIns="0" rtlCol="0" anchor="ctr"/>
+          <a:lstStyle/>
+          <a:p>
+            <a:pPr indent="0" marL="0">
+              <a:buNone/>
+            </a:pPr>
+            <a:r>
+              <a:rPr lang="en-US" sz="1050" i="1" dirty="0">
+                <a:solidFill>
+                  <a:srgbClr val="5C7286"/>
+                </a:solidFill>
+                <a:latin typeface="Calibri" pitchFamily="34" charset="0"/>
+                <a:ea typeface="Calibri" pitchFamily="34" charset="-122"/>
+                <a:cs typeface="Calibri" pitchFamily="34" charset="-120"/>
+              </a:rPr>
+              <a:t>Everything above is tracked in NATURE_METHODS_SKELETON.md and PAPER_OUTLINE.md, with the reasoning attached.</a:t>
+            </a:r>
+            <a:endParaRPr lang="en-US" sz="1050" dirty="0"/>
+          </a:p>
+        </p:txBody>
+      </p:sp>
+    </p:spTree>
+  </p:cSld>
+  <p:clrMapOvr>
+    <a:masterClrMapping/>
+  </p:clrMapOvr>
+</p:sld>
+</file>
+
+<file path=ppt/slides/slide17.xml><?xml version="1.0" encoding="utf-8"?>
+<p:sld xmlns:a="http://schemas.openxmlformats.org/drawingml/2006/main" xmlns:r="http://schemas.openxmlformats.org/officeDocument/2006/relationships" xmlns:p="http://schemas.openxmlformats.org/presentationml/2006/main">
+  <p:cSld name="Slide 17">
     <p:bg>
       <p:bgPr>
         <a:solidFill>
@@ -8654,8 +9192,8 @@
         </p:blipFill>
         <p:spPr>
           <a:xfrm>
-            <a:off x="1162825" y="1627632"/>
-            <a:ext cx="9866045" cy="4160520"/>
+            <a:off x="1821043" y="1627632"/>
+            <a:ext cx="8549608" cy="4160520"/>
           </a:xfrm>
           <a:prstGeom prst="rect">
             <a:avLst/>
@@ -8695,7 +9233,7 @@
                 <a:ea typeface="Calibri" pitchFamily="34" charset="-122"/>
                 <a:cs typeface="Calibri" pitchFamily="34" charset="-120"/>
               </a:rPr>
-              <a:t>Solid = search-driven pool; dotted = fixed pool; black = mean across projects. Retrieval is shown as its own stage — losing a full text is a supply problem, not a judgement.</a:t>
+              <a:t>One line per project, black = mean across all nine. Retrieval is shown as its own stage — losing a full text is a supply problem, not a judgement.</a:t>
             </a:r>
             <a:endParaRPr lang="en-US" sz="1050" dirty="0"/>
           </a:p>

--- a/autonima_results_deck.pptx
+++ b/autonima_results_deck.pptx
@@ -606,7 +606,7 @@
           <a:p>
             <a:r>
               <a:rPr lang="en-US" dirty="0"/>
-              <a:t>This replaces an earlier comparison against all-analyses, which confounded choosing analyses with using fewer of them.</a:t>
+              <a:t>Do not say paper selection is worthless. 31 of 32 baselines are targeted searches built per contrast, so the baseline selects papers by query where the pipeline selects them by LLM. The honest claim is that two ways of selecting papers come out even.</a:t>
             </a:r>
             <a:endParaRPr lang="en-US" dirty="0"/>
           </a:p>
@@ -694,7 +694,7 @@
           <a:p>
             <a:r>
               <a:rPr lang="en-US" dirty="0"/>
-              <a:t>Do not say paper selection is worthless. 31 of 32 baselines are targeted searches built per contrast, so the baseline selects papers by query where the pipeline selects them by LLM. The honest claim is that two ways of selecting papers come out even.</a:t>
+              <a:t>The two slides are independent evidence for the same claim: the decomposition rules out better papers, the null rules out any smaller subset. Neither subsumes the other.</a:t>
             </a:r>
             <a:endParaRPr lang="en-US" dirty="0"/>
           </a:p>
@@ -2674,9 +2674,48 @@
           </a:p>
         </p:txBody>
       </p:sp>
+      <p:sp>
+        <p:nvSpPr>
+          <p:cNvPr id="3" name="Text 1"/>
+          <p:cNvSpPr txBox="1"/>
+          <p:nvPr/>
+        </p:nvSpPr>
+        <p:spPr>
+          <a:xfrm>
+            <a:off x="566928" y="1060704"/>
+            <a:ext cx="11057839" cy="420624"/>
+          </a:xfrm>
+          <a:prstGeom prst="rect">
+            <a:avLst/>
+          </a:prstGeom>
+          <a:noFill/>
+          <a:ln/>
+        </p:spPr>
+        <p:txBody>
+          <a:bodyPr wrap="square" lIns="0" tIns="0" rIns="0" bIns="0" rtlCol="0" anchor="ctr"/>
+          <a:lstStyle/>
+          <a:p>
+            <a:pPr indent="0" marL="0">
+              <a:buNone/>
+            </a:pPr>
+            <a:r>
+              <a:rPr lang="en-US" sz="1500" dirty="0">
+                <a:solidFill>
+                  <a:srgbClr val="1C7293"/>
+                </a:solidFill>
+                <a:latin typeface="Calibri" pitchFamily="34" charset="0"/>
+                <a:ea typeface="Calibri" pitchFamily="34" charset="-122"/>
+                <a:cs typeface="Calibri" pitchFamily="34" charset="-120"/>
+              </a:rPr>
+              <a:t>Insert a third map between the baseline and the pipeline: screening applied, no annotation — papers chosen, analyses not.</a:t>
+            </a:r>
+            <a:endParaRPr lang="en-US" sz="1500" dirty="0"/>
+          </a:p>
+        </p:txBody>
+      </p:sp>
       <p:pic>
         <p:nvPicPr>
-          <p:cNvPr id="3" name="Image 0" descr="/home/zorro/repos/autonima-results/reports/deck_figures/figure5_gain_from_analysis_selection.png">    </p:cNvPr>
+          <p:cNvPr id="4" name="Image 0" descr="/home/zorro/repos/autonima-results/reports/deck_figures/figure5_selection_decomposition.png">    </p:cNvPr>
           <p:cNvPicPr>
             <a:picLocks noChangeAspect="1"/>
           </p:cNvPicPr>
@@ -2690,53 +2729,14 @@
         </p:blipFill>
         <p:spPr>
           <a:xfrm>
-            <a:off x="4534757" y="1371600"/>
-            <a:ext cx="6621589" cy="4572000"/>
+            <a:off x="3977640" y="1532198"/>
+            <a:ext cx="7644384" cy="4104499"/>
           </a:xfrm>
           <a:prstGeom prst="rect">
             <a:avLst/>
           </a:prstGeom>
         </p:spPr>
       </p:pic>
-      <p:sp>
-        <p:nvSpPr>
-          <p:cNvPr id="4" name="Text 1"/>
-          <p:cNvSpPr txBox="1"/>
-          <p:nvPr/>
-        </p:nvSpPr>
-        <p:spPr>
-          <a:xfrm>
-            <a:off x="566928" y="1536192"/>
-            <a:ext cx="3429000" cy="1051560"/>
-          </a:xfrm>
-          <a:prstGeom prst="rect">
-            <a:avLst/>
-          </a:prstGeom>
-          <a:noFill/>
-          <a:ln/>
-        </p:spPr>
-        <p:txBody>
-          <a:bodyPr wrap="square" lIns="0" tIns="0" rIns="0" bIns="0" rtlCol="0" anchor="ctr"/>
-          <a:lstStyle/>
-          <a:p>
-            <a:pPr indent="0" marL="0">
-              <a:buNone/>
-            </a:pPr>
-            <a:r>
-              <a:rPr lang="en-US" sz="1350" dirty="0">
-                <a:solidFill>
-                  <a:srgbClr val="0F2A3F"/>
-                </a:solidFill>
-                <a:latin typeface="Calibri" pitchFamily="34" charset="0"/>
-                <a:ea typeface="Calibri" pitchFamily="34" charset="-122"/>
-                <a:cs typeface="Calibri" pitchFamily="34" charset="-120"/>
-              </a:rPr>
-              <a:t>Hold the studies fixed. Draw 500 random subsets the same size as the annotated one. Does annotation beat chance?</a:t>
-            </a:r>
-            <a:endParaRPr lang="en-US" sz="1350" dirty="0"/>
-          </a:p>
-        </p:txBody>
-      </p:sp>
       <p:sp>
         <p:nvSpPr>
           <p:cNvPr id="5" name="Shape 2"/>
@@ -2745,12 +2745,12 @@
         </p:nvSpPr>
         <p:spPr>
           <a:xfrm>
-            <a:off x="566928" y="2697480"/>
-            <a:ext cx="3246120" cy="1051560"/>
+            <a:off x="566928" y="1627632"/>
+            <a:ext cx="3200400" cy="1188720"/>
           </a:xfrm>
           <a:prstGeom prst="roundRect">
             <a:avLst>
-              <a:gd name="adj" fmla="val 6957"/>
+              <a:gd name="adj" fmla="val 6154"/>
             </a:avLst>
           </a:prstGeom>
           <a:solidFill>
@@ -2772,8 +2772,8 @@
         </p:nvSpPr>
         <p:spPr>
           <a:xfrm>
-            <a:off x="676656" y="2788920"/>
-            <a:ext cx="3026664" cy="475488"/>
+            <a:off x="676656" y="1719072"/>
+            <a:ext cx="2980944" cy="475488"/>
           </a:xfrm>
           <a:prstGeom prst="rect">
             <a:avLst/>
@@ -2789,17 +2789,17 @@
               <a:buNone/>
             </a:pPr>
             <a:r>
-              <a:rPr lang="en-US" sz="3000" b="1" dirty="0">
-                <a:solidFill>
-                  <a:srgbClr val="E69F00"/>
+              <a:rPr lang="en-US" sz="2600" b="1" dirty="0">
+                <a:solidFill>
+                  <a:srgbClr val="0A3D5C"/>
                 </a:solidFill>
                 <a:latin typeface="Cambria" pitchFamily="34" charset="0"/>
                 <a:ea typeface="Cambria" pitchFamily="34" charset="-122"/>
                 <a:cs typeface="Cambria" pitchFamily="34" charset="-120"/>
               </a:rPr>
-              <a:t>+0.211</a:t>
-            </a:r>
-            <a:endParaRPr lang="en-US" sz="3000" dirty="0"/>
+              <a:t>−0.000</a:t>
+            </a:r>
+            <a:endParaRPr lang="en-US" sz="2600" dirty="0"/>
           </a:p>
         </p:txBody>
       </p:sp>
@@ -2811,8 +2811,8 @@
         </p:nvSpPr>
         <p:spPr>
           <a:xfrm>
-            <a:off x="676656" y="3246120"/>
-            <a:ext cx="3026664" cy="429768"/>
+            <a:off x="676656" y="2176272"/>
+            <a:ext cx="2980944" cy="566928"/>
           </a:xfrm>
           <a:prstGeom prst="rect">
             <a:avLst/>
@@ -2836,22 +2836,105 @@
                 <a:ea typeface="Calibri" pitchFamily="34" charset="-122"/>
                 <a:cs typeface="Calibri" pitchFamily="34" charset="-120"/>
               </a:rPr>
-              <a:t>median ΔR² over a size-matched random selection</a:t>
+              <a:t>mean ΔR² from choosing papers</a:t>
             </a:r>
             <a:endParaRPr lang="en-US" sz="1100" dirty="0"/>
           </a:p>
-        </p:txBody>
-      </p:sp>
-      <p:sp>
-        <p:nvSpPr>
-          <p:cNvPr id="8" name="Text 5"/>
-          <p:cNvSpPr txBox="1"/>
-          <p:nvPr/>
-        </p:nvSpPr>
-        <p:spPr>
-          <a:xfrm>
-            <a:off x="566928" y="3931920"/>
-            <a:ext cx="3429000" cy="1828800"/>
+          <a:p>
+            <a:pPr algn="ctr" indent="0" marL="0">
+              <a:buNone/>
+            </a:pPr>
+            <a:r>
+              <a:rPr lang="en-US" sz="1100" dirty="0">
+                <a:solidFill>
+                  <a:srgbClr val="5C7286"/>
+                </a:solidFill>
+                <a:latin typeface="Calibri" pitchFamily="34" charset="0"/>
+                <a:ea typeface="Calibri" pitchFamily="34" charset="-122"/>
+                <a:cs typeface="Calibri" pitchFamily="34" charset="-120"/>
+              </a:rPr>
+              <a:t>16 of 32 improve — a coin flip</a:t>
+            </a:r>
+            <a:endParaRPr lang="en-US" sz="1100" dirty="0"/>
+          </a:p>
+        </p:txBody>
+      </p:sp>
+      <p:sp>
+        <p:nvSpPr>
+          <p:cNvPr id="8" name="Shape 5"/>
+          <p:cNvSpPr/>
+          <p:nvPr/>
+        </p:nvSpPr>
+        <p:spPr>
+          <a:xfrm>
+            <a:off x="566928" y="2999232"/>
+            <a:ext cx="3200400" cy="1188720"/>
+          </a:xfrm>
+          <a:prstGeom prst="roundRect">
+            <a:avLst>
+              <a:gd name="adj" fmla="val 6154"/>
+            </a:avLst>
+          </a:prstGeom>
+          <a:solidFill>
+            <a:srgbClr val="EEF3F7"/>
+          </a:solidFill>
+          <a:ln w="12700">
+            <a:solidFill>
+              <a:srgbClr val="EEF3F7"/>
+            </a:solidFill>
+            <a:prstDash val="solid"/>
+          </a:ln>
+        </p:spPr>
+      </p:sp>
+      <p:sp>
+        <p:nvSpPr>
+          <p:cNvPr id="9" name="Text 6"/>
+          <p:cNvSpPr txBox="1"/>
+          <p:nvPr/>
+        </p:nvSpPr>
+        <p:spPr>
+          <a:xfrm>
+            <a:off x="676656" y="3090672"/>
+            <a:ext cx="2980944" cy="475488"/>
+          </a:xfrm>
+          <a:prstGeom prst="rect">
+            <a:avLst/>
+          </a:prstGeom>
+          <a:noFill/>
+          <a:ln/>
+        </p:spPr>
+        <p:txBody>
+          <a:bodyPr wrap="square" lIns="0" tIns="0" rIns="0" bIns="0" rtlCol="0" anchor="ctr"/>
+          <a:lstStyle/>
+          <a:p>
+            <a:pPr algn="ctr" indent="0" marL="0">
+              <a:buNone/>
+            </a:pPr>
+            <a:r>
+              <a:rPr lang="en-US" sz="2600" b="1" dirty="0">
+                <a:solidFill>
+                  <a:srgbClr val="E69F00"/>
+                </a:solidFill>
+                <a:latin typeface="Cambria" pitchFamily="34" charset="0"/>
+                <a:ea typeface="Cambria" pitchFamily="34" charset="-122"/>
+                <a:cs typeface="Cambria" pitchFamily="34" charset="-120"/>
+              </a:rPr>
+              <a:t>+0.099</a:t>
+            </a:r>
+            <a:endParaRPr lang="en-US" sz="2600" dirty="0"/>
+          </a:p>
+        </p:txBody>
+      </p:sp>
+      <p:sp>
+        <p:nvSpPr>
+          <p:cNvPr id="10" name="Text 7"/>
+          <p:cNvSpPr txBox="1"/>
+          <p:nvPr/>
+        </p:nvSpPr>
+        <p:spPr>
+          <a:xfrm>
+            <a:off x="676656" y="3547872"/>
+            <a:ext cx="2980944" cy="566928"/>
           </a:xfrm>
           <a:prstGeom prst="rect">
             <a:avLst/>
@@ -2863,12 +2946,64 @@
           <a:bodyPr wrap="square" lIns="0" tIns="0" rIns="0" bIns="0" rtlCol="0" anchor="t"/>
           <a:lstStyle/>
           <a:p>
-            <a:pPr marL="342900" indent="-342900">
-              <a:spcAft>
-                <a:spcPts val="800"/>
-              </a:spcAft>
-              <a:buSzPct val="100000"/>
-              <a:buChar char="•"/>
+            <a:pPr algn="ctr" indent="0" marL="0">
+              <a:buNone/>
+            </a:pPr>
+            <a:r>
+              <a:rPr lang="en-US" sz="1100" dirty="0">
+                <a:solidFill>
+                  <a:srgbClr val="5C7286"/>
+                </a:solidFill>
+                <a:latin typeface="Calibri" pitchFamily="34" charset="0"/>
+                <a:ea typeface="Calibri" pitchFamily="34" charset="-122"/>
+                <a:cs typeface="Calibri" pitchFamily="34" charset="-120"/>
+              </a:rPr>
+              <a:t>mean ΔR² from choosing analyses</a:t>
+            </a:r>
+            <a:endParaRPr lang="en-US" sz="1100" dirty="0"/>
+          </a:p>
+          <a:p>
+            <a:pPr algn="ctr" indent="0" marL="0">
+              <a:buNone/>
+            </a:pPr>
+            <a:r>
+              <a:rPr lang="en-US" sz="1100" dirty="0">
+                <a:solidFill>
+                  <a:srgbClr val="5C7286"/>
+                </a:solidFill>
+                <a:latin typeface="Calibri" pitchFamily="34" charset="0"/>
+                <a:ea typeface="Calibri" pitchFamily="34" charset="-122"/>
+                <a:cs typeface="Calibri" pitchFamily="34" charset="-120"/>
+              </a:rPr>
+              <a:t>28 of 32 improve</a:t>
+            </a:r>
+            <a:endParaRPr lang="en-US" sz="1100" dirty="0"/>
+          </a:p>
+        </p:txBody>
+      </p:sp>
+      <p:sp>
+        <p:nvSpPr>
+          <p:cNvPr id="11" name="Text 8"/>
+          <p:cNvSpPr txBox="1"/>
+          <p:nvPr/>
+        </p:nvSpPr>
+        <p:spPr>
+          <a:xfrm>
+            <a:off x="566928" y="4389120"/>
+            <a:ext cx="3200400" cy="1371600"/>
+          </a:xfrm>
+          <a:prstGeom prst="rect">
+            <a:avLst/>
+          </a:prstGeom>
+          <a:noFill/>
+          <a:ln/>
+        </p:spPr>
+        <p:txBody>
+          <a:bodyPr wrap="square" lIns="0" tIns="0" rIns="0" bIns="0" rtlCol="0" anchor="t"/>
+          <a:lstStyle/>
+          <a:p>
+            <a:pPr indent="0" marL="0">
+              <a:buNone/>
             </a:pPr>
             <a:r>
               <a:rPr lang="en-US" sz="1200" dirty="0">
@@ -2879,57 +3014,15 @@
                 <a:ea typeface="Calibri" pitchFamily="34" charset="-122"/>
                 <a:cs typeface="Calibri" pitchFamily="34" charset="-120"/>
               </a:rPr>
-              <a:t>29 of 32 contrasts clear their own null at P &lt; 0.05</a:t>
+              <a:t>Both arms already select papers — the baseline by a targeted query, the pipeline by LLM screening — and they tie. The whole advantage comes from the step a search cannot perform.</a:t>
             </a:r>
             <a:endParaRPr lang="en-US" sz="1200" dirty="0"/>
           </a:p>
-          <a:p>
-            <a:pPr marL="342900" indent="-342900">
-              <a:spcAft>
-                <a:spcPts val="800"/>
-              </a:spcAft>
-              <a:buSzPct val="100000"/>
-              <a:buChar char="•"/>
-            </a:pPr>
-            <a:r>
-              <a:rPr lang="en-US" sz="1200" dirty="0">
-                <a:solidFill>
-                  <a:srgbClr val="0F2A3F"/>
-                </a:solidFill>
-                <a:latin typeface="Calibri" pitchFamily="34" charset="0"/>
-                <a:ea typeface="Calibri" pitchFamily="34" charset="-122"/>
-                <a:cs typeface="Calibri" pitchFamily="34" charset="-120"/>
-              </a:rPr>
-              <a:t>24 sit outside all 500 draws</a:t>
-            </a:r>
-            <a:endParaRPr lang="en-US" sz="1200" dirty="0"/>
-          </a:p>
-          <a:p>
-            <a:pPr marL="342900" indent="-342900">
-              <a:spcAft>
-                <a:spcPts val="800"/>
-              </a:spcAft>
-              <a:buSzPct val="100000"/>
-              <a:buChar char="•"/>
-            </a:pPr>
-            <a:r>
-              <a:rPr lang="en-US" sz="1200" dirty="0">
-                <a:solidFill>
-                  <a:srgbClr val="0F2A3F"/>
-                </a:solidFill>
-                <a:latin typeface="Calibri" pitchFamily="34" charset="0"/>
-                <a:ea typeface="Calibri" pitchFamily="34" charset="-122"/>
-                <a:cs typeface="Calibri" pitchFamily="34" charset="-120"/>
-              </a:rPr>
-              <a:t>The 3 that fail all select 31–77% of their pool — little left to select</a:t>
-            </a:r>
-            <a:endParaRPr lang="en-US" sz="1200" dirty="0"/>
-          </a:p>
-        </p:txBody>
-      </p:sp>
-      <p:sp>
-        <p:nvSpPr>
-          <p:cNvPr id="9" name="Text 6"/>
+        </p:txBody>
+      </p:sp>
+      <p:sp>
+        <p:nvSpPr>
+          <p:cNvPr id="12" name="Text 9"/>
           <p:cNvSpPr txBox="1"/>
           <p:nvPr/>
         </p:nvSpPr>
@@ -2960,7 +3053,7 @@
                 <a:ea typeface="Calibri" pitchFamily="34" charset="-122"/>
                 <a:cs typeface="Calibri" pitchFamily="34" charset="-120"/>
               </a:rPr>
-              <a:t>Grey bar = 5–95% of the null; dot = observed. Matching the subset size is what separates selecting well from merely selecting fewer.</a:t>
+              <a:t>The two deltas sum to the Figure 4 margin exactly (+0.0985), which is the check that all three arms come from the same run.</a:t>
             </a:r>
             <a:endParaRPr lang="en-US" sz="1050" dirty="0"/>
           </a:p>
@@ -3024,7 +3117,7 @@
                 <a:ea typeface="Cambria" pitchFamily="34" charset="-122"/>
                 <a:cs typeface="Cambria" pitchFamily="34" charset="-120"/>
               </a:rPr>
-              <a:t>Which selection step earns the advantage?</a:t>
+              <a:t>And it beats chance, not just the baseline</a:t>
             </a:r>
             <a:endParaRPr lang="en-US" sz="3100" dirty="0"/>
           </a:p>
@@ -3063,7 +3156,7 @@
                 <a:ea typeface="Calibri" pitchFamily="34" charset="-122"/>
                 <a:cs typeface="Calibri" pitchFamily="34" charset="-120"/>
               </a:rPr>
-              <a:t>Insert a third map between the two: screening applied, but no annotation — papers chosen, analyses not.</a:t>
+              <a:t>Hold the studies fixed and draw 500 random subsets the same size as the annotated one.</a:t>
             </a:r>
             <a:endParaRPr lang="en-US" sz="1500" dirty="0"/>
           </a:p>
@@ -3071,7 +3164,7 @@
       </p:sp>
       <p:pic>
         <p:nvPicPr>
-          <p:cNvPr id="4" name="Image 0" descr="/home/zorro/repos/autonima-results/reports/deck_figures/figureS5_selection_decomposition.png">    </p:cNvPr>
+          <p:cNvPr id="4" name="Image 0" descr="/home/zorro/repos/autonima-results/reports/deck_figures/figureS5_size_matched_null.png">    </p:cNvPr>
           <p:cNvPicPr>
             <a:picLocks noChangeAspect="1"/>
           </p:cNvPicPr>
@@ -3085,8 +3178,8 @@
         </p:blipFill>
         <p:spPr>
           <a:xfrm>
-            <a:off x="3977640" y="1511793"/>
-            <a:ext cx="7635240" cy="4099589"/>
+            <a:off x="4249114" y="1417320"/>
+            <a:ext cx="7046572" cy="4389120"/>
           </a:xfrm>
           <a:prstGeom prst="rect">
             <a:avLst/>
@@ -3101,12 +3194,12 @@
         </p:nvSpPr>
         <p:spPr>
           <a:xfrm>
-            <a:off x="566928" y="1600200"/>
-            <a:ext cx="3200400" cy="1188720"/>
+            <a:off x="566928" y="1691640"/>
+            <a:ext cx="3154680" cy="1143000"/>
           </a:xfrm>
           <a:prstGeom prst="roundRect">
             <a:avLst>
-              <a:gd name="adj" fmla="val 6154"/>
+              <a:gd name="adj" fmla="val 6400"/>
             </a:avLst>
           </a:prstGeom>
           <a:solidFill>
@@ -3128,8 +3221,8 @@
         </p:nvSpPr>
         <p:spPr>
           <a:xfrm>
-            <a:off x="676656" y="1691640"/>
-            <a:ext cx="2980944" cy="475488"/>
+            <a:off x="676656" y="1783080"/>
+            <a:ext cx="2935224" cy="475488"/>
           </a:xfrm>
           <a:prstGeom prst="rect">
             <a:avLst/>
@@ -3145,17 +3238,17 @@
               <a:buNone/>
             </a:pPr>
             <a:r>
-              <a:rPr lang="en-US" sz="2600" b="1" dirty="0">
-                <a:solidFill>
-                  <a:srgbClr val="0A3D5C"/>
+              <a:rPr lang="en-US" sz="2800" b="1" dirty="0">
+                <a:solidFill>
+                  <a:srgbClr val="E69F00"/>
                 </a:solidFill>
                 <a:latin typeface="Cambria" pitchFamily="34" charset="0"/>
                 <a:ea typeface="Cambria" pitchFamily="34" charset="-122"/>
                 <a:cs typeface="Cambria" pitchFamily="34" charset="-120"/>
               </a:rPr>
-              <a:t>−0.000</a:t>
-            </a:r>
-            <a:endParaRPr lang="en-US" sz="2600" dirty="0"/>
+              <a:t>+0.211</a:t>
+            </a:r>
+            <a:endParaRPr lang="en-US" sz="2800" dirty="0"/>
           </a:p>
         </p:txBody>
       </p:sp>
@@ -3167,8 +3260,8 @@
         </p:nvSpPr>
         <p:spPr>
           <a:xfrm>
-            <a:off x="676656" y="2148840"/>
-            <a:ext cx="2980944" cy="566928"/>
+            <a:off x="676656" y="2240280"/>
+            <a:ext cx="2935224" cy="521208"/>
           </a:xfrm>
           <a:prstGeom prst="rect">
             <a:avLst/>
@@ -3192,55 +3285,96 @@
                 <a:ea typeface="Calibri" pitchFamily="34" charset="-122"/>
                 <a:cs typeface="Calibri" pitchFamily="34" charset="-120"/>
               </a:rPr>
-              <a:t>mean ΔR² from choosing papers</a:t>
+              <a:t>median ΔR² over a size-matched random selection</a:t>
             </a:r>
             <a:endParaRPr lang="en-US" sz="1100" dirty="0"/>
           </a:p>
-          <a:p>
-            <a:pPr algn="ctr" indent="0" marL="0">
-              <a:buNone/>
-            </a:pPr>
-            <a:r>
-              <a:rPr lang="en-US" sz="1100" dirty="0">
-                <a:solidFill>
-                  <a:srgbClr val="5C7286"/>
-                </a:solidFill>
-                <a:latin typeface="Calibri" pitchFamily="34" charset="0"/>
-                <a:ea typeface="Calibri" pitchFamily="34" charset="-122"/>
-                <a:cs typeface="Calibri" pitchFamily="34" charset="-120"/>
-              </a:rPr>
-              <a:t>16 of 32 improve — a coin flip</a:t>
-            </a:r>
-            <a:endParaRPr lang="en-US" sz="1100" dirty="0"/>
-          </a:p>
-        </p:txBody>
-      </p:sp>
-      <p:sp>
-        <p:nvSpPr>
-          <p:cNvPr id="8" name="Shape 5"/>
-          <p:cNvSpPr/>
-          <p:nvPr/>
-        </p:nvSpPr>
-        <p:spPr>
-          <a:xfrm>
-            <a:off x="566928" y="2971800"/>
-            <a:ext cx="3200400" cy="1188720"/>
-          </a:xfrm>
-          <a:prstGeom prst="roundRect">
-            <a:avLst>
-              <a:gd name="adj" fmla="val 6154"/>
-            </a:avLst>
-          </a:prstGeom>
-          <a:solidFill>
-            <a:srgbClr val="EEF3F7"/>
-          </a:solidFill>
-          <a:ln w="12700">
-            <a:solidFill>
-              <a:srgbClr val="EEF3F7"/>
-            </a:solidFill>
-            <a:prstDash val="solid"/>
-          </a:ln>
-        </p:spPr>
+        </p:txBody>
+      </p:sp>
+      <p:sp>
+        <p:nvSpPr>
+          <p:cNvPr id="8" name="Text 5"/>
+          <p:cNvSpPr txBox="1"/>
+          <p:nvPr/>
+        </p:nvSpPr>
+        <p:spPr>
+          <a:xfrm>
+            <a:off x="566928" y="3063240"/>
+            <a:ext cx="3154680" cy="1737360"/>
+          </a:xfrm>
+          <a:prstGeom prst="rect">
+            <a:avLst/>
+          </a:prstGeom>
+          <a:noFill/>
+          <a:ln/>
+        </p:spPr>
+        <p:txBody>
+          <a:bodyPr wrap="square" lIns="0" tIns="0" rIns="0" bIns="0" rtlCol="0" anchor="t"/>
+          <a:lstStyle/>
+          <a:p>
+            <a:pPr marL="342900" indent="-342900">
+              <a:spcAft>
+                <a:spcPts val="800"/>
+              </a:spcAft>
+              <a:buSzPct val="100000"/>
+              <a:buChar char="•"/>
+            </a:pPr>
+            <a:r>
+              <a:rPr lang="en-US" sz="1200" dirty="0">
+                <a:solidFill>
+                  <a:srgbClr val="0F2A3F"/>
+                </a:solidFill>
+                <a:latin typeface="Calibri" pitchFamily="34" charset="0"/>
+                <a:ea typeface="Calibri" pitchFamily="34" charset="-122"/>
+                <a:cs typeface="Calibri" pitchFamily="34" charset="-120"/>
+              </a:rPr>
+              <a:t>29 of 32 contrasts clear their own null at P &lt; 0.05</a:t>
+            </a:r>
+            <a:endParaRPr lang="en-US" sz="1200" dirty="0"/>
+          </a:p>
+          <a:p>
+            <a:pPr marL="342900" indent="-342900">
+              <a:spcAft>
+                <a:spcPts val="800"/>
+              </a:spcAft>
+              <a:buSzPct val="100000"/>
+              <a:buChar char="•"/>
+            </a:pPr>
+            <a:r>
+              <a:rPr lang="en-US" sz="1200" dirty="0">
+                <a:solidFill>
+                  <a:srgbClr val="0F2A3F"/>
+                </a:solidFill>
+                <a:latin typeface="Calibri" pitchFamily="34" charset="0"/>
+                <a:ea typeface="Calibri" pitchFamily="34" charset="-122"/>
+                <a:cs typeface="Calibri" pitchFamily="34" charset="-120"/>
+              </a:rPr>
+              <a:t>24 sit outside all 500 draws</a:t>
+            </a:r>
+            <a:endParaRPr lang="en-US" sz="1200" dirty="0"/>
+          </a:p>
+          <a:p>
+            <a:pPr marL="342900" indent="-342900">
+              <a:spcAft>
+                <a:spcPts val="800"/>
+              </a:spcAft>
+              <a:buSzPct val="100000"/>
+              <a:buChar char="•"/>
+            </a:pPr>
+            <a:r>
+              <a:rPr lang="en-US" sz="1200" dirty="0">
+                <a:solidFill>
+                  <a:srgbClr val="0F2A3F"/>
+                </a:solidFill>
+                <a:latin typeface="Calibri" pitchFamily="34" charset="0"/>
+                <a:ea typeface="Calibri" pitchFamily="34" charset="-122"/>
+                <a:cs typeface="Calibri" pitchFamily="34" charset="-120"/>
+              </a:rPr>
+              <a:t>The 3 that fail all select 31–77% of their pool — little left to select</a:t>
+            </a:r>
+            <a:endParaRPr lang="en-US" sz="1200" dirty="0"/>
+          </a:p>
+        </p:txBody>
       </p:sp>
       <p:sp>
         <p:nvSpPr>
@@ -3250,135 +3384,40 @@
         </p:nvSpPr>
         <p:spPr>
           <a:xfrm>
-            <a:off x="676656" y="3063240"/>
-            <a:ext cx="2980944" cy="475488"/>
-          </a:xfrm>
-          <a:prstGeom prst="rect">
-            <a:avLst/>
-          </a:prstGeom>
-          <a:noFill/>
-          <a:ln/>
-        </p:spPr>
-        <p:txBody>
-          <a:bodyPr wrap="square" lIns="0" tIns="0" rIns="0" bIns="0" rtlCol="0" anchor="ctr"/>
-          <a:lstStyle/>
-          <a:p>
-            <a:pPr algn="ctr" indent="0" marL="0">
-              <a:buNone/>
-            </a:pPr>
-            <a:r>
-              <a:rPr lang="en-US" sz="2600" b="1" dirty="0">
-                <a:solidFill>
-                  <a:srgbClr val="E69F00"/>
-                </a:solidFill>
-                <a:latin typeface="Cambria" pitchFamily="34" charset="0"/>
-                <a:ea typeface="Cambria" pitchFamily="34" charset="-122"/>
-                <a:cs typeface="Cambria" pitchFamily="34" charset="-120"/>
-              </a:rPr>
-              <a:t>+0.099</a:t>
-            </a:r>
-            <a:endParaRPr lang="en-US" sz="2600" dirty="0"/>
+            <a:off x="566928" y="4892040"/>
+            <a:ext cx="3154680" cy="914400"/>
+          </a:xfrm>
+          <a:prstGeom prst="rect">
+            <a:avLst/>
+          </a:prstGeom>
+          <a:noFill/>
+          <a:ln/>
+        </p:spPr>
+        <p:txBody>
+          <a:bodyPr wrap="square" lIns="0" tIns="0" rIns="0" bIns="0" rtlCol="0" anchor="t"/>
+          <a:lstStyle/>
+          <a:p>
+            <a:pPr indent="0" marL="0">
+              <a:buNone/>
+            </a:pPr>
+            <a:r>
+              <a:rPr lang="en-US" sz="1150" i="1" dirty="0">
+                <a:solidFill>
+                  <a:srgbClr val="1C7293"/>
+                </a:solidFill>
+                <a:latin typeface="Calibri" pitchFamily="34" charset="0"/>
+                <a:ea typeface="Calibri" pitchFamily="34" charset="-122"/>
+                <a:cs typeface="Calibri" pitchFamily="34" charset="-120"/>
+              </a:rPr>
+              <a:t>A different objection from the previous slide: not “better papers”, but “any smaller subset would have done”.</a:t>
+            </a:r>
+            <a:endParaRPr lang="en-US" sz="1150" dirty="0"/>
           </a:p>
         </p:txBody>
       </p:sp>
       <p:sp>
         <p:nvSpPr>
           <p:cNvPr id="10" name="Text 7"/>
-          <p:cNvSpPr txBox="1"/>
-          <p:nvPr/>
-        </p:nvSpPr>
-        <p:spPr>
-          <a:xfrm>
-            <a:off x="676656" y="3520440"/>
-            <a:ext cx="2980944" cy="566928"/>
-          </a:xfrm>
-          <a:prstGeom prst="rect">
-            <a:avLst/>
-          </a:prstGeom>
-          <a:noFill/>
-          <a:ln/>
-        </p:spPr>
-        <p:txBody>
-          <a:bodyPr wrap="square" lIns="0" tIns="0" rIns="0" bIns="0" rtlCol="0" anchor="t"/>
-          <a:lstStyle/>
-          <a:p>
-            <a:pPr algn="ctr" indent="0" marL="0">
-              <a:buNone/>
-            </a:pPr>
-            <a:r>
-              <a:rPr lang="en-US" sz="1100" dirty="0">
-                <a:solidFill>
-                  <a:srgbClr val="5C7286"/>
-                </a:solidFill>
-                <a:latin typeface="Calibri" pitchFamily="34" charset="0"/>
-                <a:ea typeface="Calibri" pitchFamily="34" charset="-122"/>
-                <a:cs typeface="Calibri" pitchFamily="34" charset="-120"/>
-              </a:rPr>
-              <a:t>mean ΔR² from choosing analyses</a:t>
-            </a:r>
-            <a:endParaRPr lang="en-US" sz="1100" dirty="0"/>
-          </a:p>
-          <a:p>
-            <a:pPr algn="ctr" indent="0" marL="0">
-              <a:buNone/>
-            </a:pPr>
-            <a:r>
-              <a:rPr lang="en-US" sz="1100" dirty="0">
-                <a:solidFill>
-                  <a:srgbClr val="5C7286"/>
-                </a:solidFill>
-                <a:latin typeface="Calibri" pitchFamily="34" charset="0"/>
-                <a:ea typeface="Calibri" pitchFamily="34" charset="-122"/>
-                <a:cs typeface="Calibri" pitchFamily="34" charset="-120"/>
-              </a:rPr>
-              <a:t>28 of 32 improve</a:t>
-            </a:r>
-            <a:endParaRPr lang="en-US" sz="1100" dirty="0"/>
-          </a:p>
-        </p:txBody>
-      </p:sp>
-      <p:sp>
-        <p:nvSpPr>
-          <p:cNvPr id="11" name="Text 8"/>
-          <p:cNvSpPr txBox="1"/>
-          <p:nvPr/>
-        </p:nvSpPr>
-        <p:spPr>
-          <a:xfrm>
-            <a:off x="566928" y="4370832"/>
-            <a:ext cx="3200400" cy="1371600"/>
-          </a:xfrm>
-          <a:prstGeom prst="rect">
-            <a:avLst/>
-          </a:prstGeom>
-          <a:noFill/>
-          <a:ln/>
-        </p:spPr>
-        <p:txBody>
-          <a:bodyPr wrap="square" lIns="0" tIns="0" rIns="0" bIns="0" rtlCol="0" anchor="t"/>
-          <a:lstStyle/>
-          <a:p>
-            <a:pPr indent="0" marL="0">
-              <a:buNone/>
-            </a:pPr>
-            <a:r>
-              <a:rPr lang="en-US" sz="1200" dirty="0">
-                <a:solidFill>
-                  <a:srgbClr val="0F2A3F"/>
-                </a:solidFill>
-                <a:latin typeface="Calibri" pitchFamily="34" charset="0"/>
-                <a:ea typeface="Calibri" pitchFamily="34" charset="-122"/>
-                <a:cs typeface="Calibri" pitchFamily="34" charset="-120"/>
-              </a:rPr>
-              <a:t>Both arms already select papers — the baseline by a targeted query, the pipeline by LLM screening — and they tie. The whole advantage comes from the step a search cannot perform.</a:t>
-            </a:r>
-            <a:endParaRPr lang="en-US" sz="1200" dirty="0"/>
-          </a:p>
-        </p:txBody>
-      </p:sp>
-      <p:sp>
-        <p:nvSpPr>
-          <p:cNvPr id="12" name="Text 9"/>
           <p:cNvSpPr txBox="1"/>
           <p:nvPr/>
         </p:nvSpPr>
@@ -3409,7 +3448,7 @@
                 <a:ea typeface="Calibri" pitchFamily="34" charset="-122"/>
                 <a:cs typeface="Calibri" pitchFamily="34" charset="-120"/>
               </a:rPr>
-              <a:t>Screening-only is the run's all_analyses column: one map per project, scored against each of its contrasts — which is what having no analysis selection actually means.</a:t>
+              <a:t>Grey bar = 5–95% of the null; dot = observed. Matching the subset size is what separates selecting well from merely selecting fewer.</a:t>
             </a:r>
             <a:endParaRPr lang="en-US" sz="1050" dirty="0"/>
           </a:p>

--- a/autonima_results_deck.pptx
+++ b/autonima_results_deck.pptx
@@ -1310,7 +1310,7 @@
           <a:p>
             <a:r>
               <a:rPr lang="en-US" dirty="0"/>
-              <a:t>Placeholder — Figure 1 is the schematic (pipeline stages, and the paper-vs-analysis distinction). Drop it in here.</a:t>
+              <a:t>The unit of evaluation is a contrast (a benchmark column), not a paper and not a project.</a:t>
             </a:r>
             <a:endParaRPr lang="en-US" dirty="0"/>
           </a:p>
@@ -1398,7 +1398,7 @@
           <a:p>
             <a:r>
               <a:rPr lang="en-US" dirty="0"/>
-              <a:t>The unit of evaluation is a contrast (a benchmark column), not a paper and not a project.</a:t>
+              <a:t>Two exceptions worth naming: executive function (74-&gt;39%) and problem solving (88-&gt;58%) lose most of their gold at retrieval and full-text screening, not at the abstract stage.</a:t>
             </a:r>
             <a:endParaRPr lang="en-US" dirty="0"/>
           </a:p>
@@ -1486,7 +1486,7 @@
           <a:p>
             <a:r>
               <a:rPr lang="en-US" dirty="0"/>
-              <a:t>Two exceptions worth naming: executive function (74-&gt;39%) and problem solving (88-&gt;58%) lose most of their gold at retrieval and full-text screening, not at the abstract stage.</a:t>
+              <a:t>The precision hypothesis holds: screening is often correctly saying yes to a paper that yields no usable coordinates, and the benchmark counts that as a false positive. But the stage mixes that with genuine parsing/annotation misses, so it cannot be captioned 'at little cost to recall'.</a:t>
             </a:r>
             <a:endParaRPr lang="en-US" dirty="0"/>
           </a:p>
@@ -2308,7 +2308,7 @@
         <p:spPr>
           <a:xfrm>
             <a:off x="566928" y="1600200"/>
-            <a:ext cx="8595360" cy="1920240"/>
+            <a:ext cx="10424160" cy="1920240"/>
           </a:xfrm>
           <a:prstGeom prst="rect">
             <a:avLst/>
@@ -2335,7 +2335,7 @@
                 <a:ea typeface="Cambria" pitchFamily="34" charset="-122"/>
                 <a:cs typeface="Cambria" pitchFamily="34" charset="-120"/>
               </a:rPr>
-              <a:t>Can an LLM pipeline reproduce</a:t>
+              <a:t>LLM harness of automated</a:t>
             </a:r>
             <a:endParaRPr lang="en-US" sz="4000" dirty="0"/>
           </a:p>
@@ -2355,7 +2355,7 @@
                 <a:ea typeface="Cambria" pitchFamily="34" charset="-122"/>
                 <a:cs typeface="Cambria" pitchFamily="34" charset="-120"/>
               </a:rPr>
-              <a:t>a published meta-analysis?</a:t>
+              <a:t>neuroimaging meta-analysis</a:t>
             </a:r>
             <a:endParaRPr lang="en-US" sz="4000" dirty="0"/>
           </a:p>
@@ -2459,154 +2459,6 @@
               <a:t>Alejandro de la Vega  ·  9 September 2026</a:t>
             </a:r>
             <a:endParaRPr lang="en-US" sz="1300" dirty="0"/>
-          </a:p>
-        </p:txBody>
-      </p:sp>
-      <p:sp>
-        <p:nvSpPr>
-          <p:cNvPr id="5" name="Shape 3"/>
-          <p:cNvSpPr/>
-          <p:nvPr/>
-        </p:nvSpPr>
-        <p:spPr>
-          <a:xfrm>
-            <a:off x="9601200" y="1737360"/>
-            <a:ext cx="2011680" cy="2011680"/>
-          </a:xfrm>
-          <a:prstGeom prst="roundRect">
-            <a:avLst>
-              <a:gd name="adj" fmla="val 6364"/>
-            </a:avLst>
-          </a:prstGeom>
-          <a:solidFill>
-            <a:srgbClr val="1C7293"/>
-          </a:solidFill>
-          <a:ln w="12700">
-            <a:solidFill>
-              <a:srgbClr val="1C7293"/>
-            </a:solidFill>
-            <a:prstDash val="solid"/>
-          </a:ln>
-        </p:spPr>
-      </p:sp>
-      <p:sp>
-        <p:nvSpPr>
-          <p:cNvPr id="6" name="Text 4"/>
-          <p:cNvSpPr txBox="1"/>
-          <p:nvPr/>
-        </p:nvSpPr>
-        <p:spPr>
-          <a:xfrm>
-            <a:off x="9601200" y="2057400"/>
-            <a:ext cx="2011680" cy="640080"/>
-          </a:xfrm>
-          <a:prstGeom prst="rect">
-            <a:avLst/>
-          </a:prstGeom>
-          <a:noFill/>
-          <a:ln/>
-        </p:spPr>
-        <p:txBody>
-          <a:bodyPr wrap="square" lIns="0" tIns="0" rIns="0" bIns="0" rtlCol="0" anchor="ctr"/>
-          <a:lstStyle/>
-          <a:p>
-            <a:pPr algn="ctr" indent="0" marL="0">
-              <a:buNone/>
-            </a:pPr>
-            <a:r>
-              <a:rPr lang="en-US" sz="3000" b="1" dirty="0">
-                <a:solidFill>
-                  <a:srgbClr val="FFFFFF"/>
-                </a:solidFill>
-                <a:latin typeface="Cambria" pitchFamily="34" charset="0"/>
-                <a:ea typeface="Cambria" pitchFamily="34" charset="-122"/>
-                <a:cs typeface="Cambria" pitchFamily="34" charset="-120"/>
-              </a:rPr>
-              <a:t>+0.099</a:t>
-            </a:r>
-            <a:endParaRPr lang="en-US" sz="3000" dirty="0"/>
-          </a:p>
-        </p:txBody>
-      </p:sp>
-      <p:sp>
-        <p:nvSpPr>
-          <p:cNvPr id="7" name="Text 5"/>
-          <p:cNvSpPr txBox="1"/>
-          <p:nvPr/>
-        </p:nvSpPr>
-        <p:spPr>
-          <a:xfrm>
-            <a:off x="9601200" y="2697480"/>
-            <a:ext cx="2011680" cy="914400"/>
-          </a:xfrm>
-          <a:prstGeom prst="rect">
-            <a:avLst/>
-          </a:prstGeom>
-          <a:noFill/>
-          <a:ln/>
-        </p:spPr>
-        <p:txBody>
-          <a:bodyPr wrap="square" lIns="0" tIns="0" rIns="0" bIns="0" rtlCol="0" anchor="ctr"/>
-          <a:lstStyle/>
-          <a:p>
-            <a:pPr algn="ctr" indent="0" marL="0">
-              <a:lnSpc>
-                <a:spcPts val="1500"/>
-              </a:lnSpc>
-              <a:buNone/>
-            </a:pPr>
-            <a:r>
-              <a:rPr lang="en-US" sz="1050" dirty="0">
-                <a:solidFill>
-                  <a:srgbClr val="D6E6F0"/>
-                </a:solidFill>
-                <a:latin typeface="Calibri" pitchFamily="34" charset="0"/>
-                <a:ea typeface="Calibri" pitchFamily="34" charset="-122"/>
-                <a:cs typeface="Calibri" pitchFamily="34" charset="-120"/>
-              </a:rPr>
-              <a:t>ΔR² over the best</a:t>
-            </a:r>
-            <a:endParaRPr lang="en-US" sz="1050" dirty="0"/>
-          </a:p>
-          <a:p>
-            <a:pPr algn="ctr" indent="0" marL="0">
-              <a:lnSpc>
-                <a:spcPts val="1500"/>
-              </a:lnSpc>
-              <a:buNone/>
-            </a:pPr>
-            <a:r>
-              <a:rPr lang="en-US" sz="1050" dirty="0">
-                <a:solidFill>
-                  <a:srgbClr val="D6E6F0"/>
-                </a:solidFill>
-                <a:latin typeface="Calibri" pitchFamily="34" charset="0"/>
-                <a:ea typeface="Calibri" pitchFamily="34" charset="-122"/>
-                <a:cs typeface="Calibri" pitchFamily="34" charset="-120"/>
-              </a:rPr>
-              <a:t>search-only baseline</a:t>
-            </a:r>
-            <a:endParaRPr lang="en-US" sz="1050" dirty="0"/>
-          </a:p>
-          <a:p>
-            <a:pPr algn="ctr" indent="0" marL="0">
-              <a:lnSpc>
-                <a:spcPts val="1500"/>
-              </a:lnSpc>
-              <a:buNone/>
-            </a:pPr>
-            <a:r>
-              <a:rPr lang="en-US" sz="1050" dirty="0">
-                <a:solidFill>
-                  <a:srgbClr val="D6E6F0"/>
-                </a:solidFill>
-                <a:latin typeface="Calibri" pitchFamily="34" charset="0"/>
-                <a:ea typeface="Calibri" pitchFamily="34" charset="-122"/>
-                <a:cs typeface="Calibri" pitchFamily="34" charset="-120"/>
-              </a:rPr>
-              <a:t>(28 of 32 contrasts)</a:t>
-            </a:r>
-            <a:endParaRPr lang="en-US" sz="1050" dirty="0"/>
           </a:p>
         </p:txBody>
       </p:sp>
@@ -7373,7 +7225,7 @@
                 <a:ea typeface="Cambria" pitchFamily="34" charset="-122"/>
                 <a:cs typeface="Cambria" pitchFamily="34" charset="-120"/>
               </a:rPr>
-              <a:t>The result unit lives below the paper</a:t>
+              <a:t>The pipeline and the benchmark</a:t>
             </a:r>
             <a:endParaRPr lang="en-US" sz="3100" dirty="0"/>
           </a:p>
@@ -7387,180 +7239,74 @@
         </p:nvSpPr>
         <p:spPr>
           <a:xfrm>
-            <a:off x="566928" y="1645920"/>
-            <a:ext cx="5257800" cy="3291840"/>
-          </a:xfrm>
-          <a:prstGeom prst="rect">
-            <a:avLst/>
-          </a:prstGeom>
-          <a:noFill/>
-          <a:ln/>
-        </p:spPr>
-        <p:txBody>
-          <a:bodyPr wrap="square" lIns="0" tIns="0" rIns="0" bIns="0" rtlCol="0" anchor="t"/>
-          <a:lstStyle/>
-          <a:p>
-            <a:pPr marL="342900" indent="-342900">
-              <a:spcAft>
-                <a:spcPts val="800"/>
-              </a:spcAft>
-              <a:buSzPct val="100000"/>
-              <a:buChar char="•"/>
+            <a:off x="566928" y="1060704"/>
+            <a:ext cx="11057839" cy="420624"/>
+          </a:xfrm>
+          <a:prstGeom prst="rect">
+            <a:avLst/>
+          </a:prstGeom>
+          <a:noFill/>
+          <a:ln/>
+        </p:spPr>
+        <p:txBody>
+          <a:bodyPr wrap="square" lIns="0" tIns="0" rIns="0" bIns="0" rtlCol="0" anchor="ctr"/>
+          <a:lstStyle/>
+          <a:p>
+            <a:pPr indent="0" marL="0">
+              <a:buNone/>
             </a:pPr>
             <a:r>
               <a:rPr lang="en-US" sz="1500" dirty="0">
                 <a:solidFill>
-                  <a:srgbClr val="0F2A3F"/>
-                </a:solidFill>
-                <a:latin typeface="Calibri" pitchFamily="34" charset="0"/>
-                <a:ea typeface="Calibri" pitchFamily="34" charset="-122"/>
-                <a:cs typeface="Calibri" pitchFamily="34" charset="-120"/>
-              </a:rPr>
-              <a:t>A meta-analysis pools contrasts, not papers. One paper contributes several — often only one of which is relevant.</a:t>
+                  <a:srgbClr val="1C7293"/>
+                </a:solidFill>
+                <a:latin typeface="Calibri" pitchFamily="34" charset="0"/>
+                <a:ea typeface="Calibri" pitchFamily="34" charset="-122"/>
+                <a:cs typeface="Calibri" pitchFamily="34" charset="-120"/>
+              </a:rPr>
+              <a:t>Six LLM stages end to end, scored against the published result of each meta-analysis.</a:t>
             </a:r>
             <a:endParaRPr lang="en-US" sz="1500" dirty="0"/>
           </a:p>
-          <a:p>
-            <a:pPr marL="342900" indent="-342900">
-              <a:spcAft>
-                <a:spcPts val="800"/>
-              </a:spcAft>
-              <a:buSzPct val="100000"/>
-              <a:buChar char="•"/>
-            </a:pPr>
-            <a:r>
-              <a:rPr lang="en-US" sz="1500" dirty="0">
-                <a:solidFill>
-                  <a:srgbClr val="0F2A3F"/>
-                </a:solidFill>
-                <a:latin typeface="Calibri" pitchFamily="34" charset="0"/>
-                <a:ea typeface="Calibri" pitchFamily="34" charset="-122"/>
-                <a:cs typeface="Calibri" pitchFamily="34" charset="-120"/>
-              </a:rPr>
-              <a:t>Screening at the paper level is therefore not enough: you must also choose among the analyses inside each paper.</a:t>
-            </a:r>
-            <a:endParaRPr lang="en-US" sz="1500" dirty="0"/>
-          </a:p>
-          <a:p>
-            <a:pPr marL="342900" indent="-342900">
-              <a:spcAft>
-                <a:spcPts val="800"/>
-              </a:spcAft>
-              <a:buSzPct val="100000"/>
-              <a:buChar char="•"/>
-            </a:pPr>
-            <a:r>
-              <a:rPr lang="en-US" sz="1500" dirty="0">
-                <a:solidFill>
-                  <a:srgbClr val="0F2A3F"/>
-                </a:solidFill>
-                <a:latin typeface="Calibri" pitchFamily="34" charset="0"/>
-                <a:ea typeface="Calibri" pitchFamily="34" charset="-122"/>
-                <a:cs typeface="Calibri" pitchFamily="34" charset="-120"/>
-              </a:rPr>
-              <a:t>That selection step is what no existing automated tool performs, and what this pipeline is built to test.</a:t>
-            </a:r>
-            <a:endParaRPr lang="en-US" sz="1500" dirty="0"/>
-          </a:p>
-          <a:p>
-            <a:pPr marL="342900" indent="-342900">
-              <a:spcAft>
-                <a:spcPts val="800"/>
-              </a:spcAft>
-              <a:buSzPct val="100000"/>
-              <a:buChar char="•"/>
-            </a:pPr>
-            <a:r>
-              <a:rPr lang="en-US" sz="1500" dirty="0">
-                <a:solidFill>
-                  <a:srgbClr val="0F2A3F"/>
-                </a:solidFill>
-                <a:latin typeface="Calibri" pitchFamily="34" charset="0"/>
-                <a:ea typeface="Calibri" pitchFamily="34" charset="-122"/>
-                <a:cs typeface="Calibri" pitchFamily="34" charset="-120"/>
-              </a:rPr>
-              <a:t>Nothing in the field measures it, because the reference results are locked in PDFs.</a:t>
-            </a:r>
-            <a:endParaRPr lang="en-US" sz="1500" dirty="0"/>
-          </a:p>
-        </p:txBody>
-      </p:sp>
-      <p:sp>
-        <p:nvSpPr>
-          <p:cNvPr id="4" name="Text 2"/>
-          <p:cNvSpPr txBox="1"/>
-          <p:nvPr/>
-        </p:nvSpPr>
-        <p:spPr>
-          <a:xfrm>
-            <a:off x="566928" y="4617720"/>
-            <a:ext cx="5257800" cy="457200"/>
-          </a:xfrm>
-          <a:prstGeom prst="rect">
-            <a:avLst/>
-          </a:prstGeom>
-          <a:noFill/>
-          <a:ln/>
-        </p:spPr>
-        <p:txBody>
-          <a:bodyPr wrap="square" lIns="0" tIns="0" rIns="0" bIns="0" rtlCol="0" anchor="ctr"/>
-          <a:lstStyle/>
-          <a:p>
-            <a:pPr indent="0" marL="0">
-              <a:buNone/>
-            </a:pPr>
-            <a:r>
-              <a:rPr lang="en-US" sz="1300" i="1" dirty="0">
-                <a:solidFill>
-                  <a:srgbClr val="1C7293"/>
-                </a:solidFill>
-                <a:latin typeface="Calibri" pitchFamily="34" charset="0"/>
-                <a:ea typeface="Calibri" pitchFamily="34" charset="-122"/>
-                <a:cs typeface="Calibri" pitchFamily="34" charset="-120"/>
-              </a:rPr>
-              <a:t>This is the claim the whole evaluation is organised around.</a:t>
-            </a:r>
-            <a:endParaRPr lang="en-US" sz="1300" dirty="0"/>
-          </a:p>
-        </p:txBody>
-      </p:sp>
-      <p:sp>
-        <p:nvSpPr>
-          <p:cNvPr id="5" name="Shape 3"/>
+        </p:txBody>
+      </p:sp>
+      <p:sp>
+        <p:nvSpPr>
+          <p:cNvPr id="4" name="Shape 2"/>
           <p:cNvSpPr/>
           <p:nvPr/>
         </p:nvSpPr>
         <p:spPr>
           <a:xfrm>
-            <a:off x="6263640" y="1645920"/>
-            <a:ext cx="5358384" cy="3840480"/>
+            <a:off x="566928" y="1737360"/>
+            <a:ext cx="566928" cy="566928"/>
           </a:xfrm>
           <a:prstGeom prst="roundRect">
             <a:avLst>
-              <a:gd name="adj" fmla="val 1429"/>
+              <a:gd name="adj" fmla="val 16129"/>
             </a:avLst>
           </a:prstGeom>
           <a:solidFill>
-            <a:srgbClr val="F7FAFC"/>
+            <a:srgbClr val="1C7293"/>
           </a:solidFill>
-          <a:ln w="22225">
+          <a:ln w="12700">
             <a:solidFill>
               <a:srgbClr val="1C7293"/>
             </a:solidFill>
-            <a:prstDash val="dash"/>
+            <a:prstDash val="solid"/>
           </a:ln>
         </p:spPr>
       </p:sp>
       <p:sp>
         <p:nvSpPr>
-          <p:cNvPr id="6" name="Text 4"/>
-          <p:cNvSpPr txBox="1"/>
-          <p:nvPr/>
-        </p:nvSpPr>
-        <p:spPr>
-          <a:xfrm>
-            <a:off x="6263640" y="3017520"/>
-            <a:ext cx="5358384" cy="411480"/>
+          <p:cNvPr id="5" name="Text 3"/>
+          <p:cNvSpPr txBox="1"/>
+          <p:nvPr/>
+        </p:nvSpPr>
+        <p:spPr>
+          <a:xfrm>
+            <a:off x="566928" y="1737360"/>
+            <a:ext cx="566928" cy="566928"/>
           </a:xfrm>
           <a:prstGeom prst="rect">
             <a:avLst/>
@@ -7576,17 +7322,56 @@
               <a:buNone/>
             </a:pPr>
             <a:r>
-              <a:rPr lang="en-US" sz="2000" b="1" spc="300" kern="0" dirty="0">
-                <a:solidFill>
-                  <a:srgbClr val="1C7293"/>
+              <a:rPr lang="en-US" sz="1800" b="1" dirty="0">
+                <a:solidFill>
+                  <a:srgbClr val="FFFFFF"/>
                 </a:solidFill>
                 <a:latin typeface="Cambria" pitchFamily="34" charset="0"/>
                 <a:ea typeface="Cambria" pitchFamily="34" charset="-122"/>
                 <a:cs typeface="Cambria" pitchFamily="34" charset="-120"/>
               </a:rPr>
-              <a:t>FIGURE 1</a:t>
-            </a:r>
-            <a:endParaRPr lang="en-US" sz="2000" dirty="0"/>
+              <a:t>1</a:t>
+            </a:r>
+            <a:endParaRPr lang="en-US" sz="1800" dirty="0"/>
+          </a:p>
+        </p:txBody>
+      </p:sp>
+      <p:sp>
+        <p:nvSpPr>
+          <p:cNvPr id="6" name="Text 4"/>
+          <p:cNvSpPr txBox="1"/>
+          <p:nvPr/>
+        </p:nvSpPr>
+        <p:spPr>
+          <a:xfrm>
+            <a:off x="1280160" y="1755648"/>
+            <a:ext cx="2834640" cy="292608"/>
+          </a:xfrm>
+          <a:prstGeom prst="rect">
+            <a:avLst/>
+          </a:prstGeom>
+          <a:noFill/>
+          <a:ln/>
+        </p:spPr>
+        <p:txBody>
+          <a:bodyPr wrap="square" lIns="0" tIns="0" rIns="0" bIns="0" rtlCol="0" anchor="ctr"/>
+          <a:lstStyle/>
+          <a:p>
+            <a:pPr indent="0" marL="0">
+              <a:buNone/>
+            </a:pPr>
+            <a:r>
+              <a:rPr lang="en-US" sz="1450" b="1" dirty="0">
+                <a:solidFill>
+                  <a:srgbClr val="0F2A3F"/>
+                </a:solidFill>
+                <a:latin typeface="Calibri" pitchFamily="34" charset="0"/>
+                <a:ea typeface="Calibri" pitchFamily="34" charset="-122"/>
+                <a:cs typeface="Calibri" pitchFamily="34" charset="-120"/>
+              </a:rPr>
+              <a:t>Search</a:t>
+            </a:r>
+            <a:endParaRPr lang="en-US" sz="1450" dirty="0"/>
           </a:p>
         </p:txBody>
       </p:sp>
@@ -7598,8 +7383,74 @@
         </p:nvSpPr>
         <p:spPr>
           <a:xfrm>
-            <a:off x="6263640" y="3474720"/>
-            <a:ext cx="5358384" cy="731520"/>
+            <a:off x="1280160" y="2039112"/>
+            <a:ext cx="2834640" cy="292608"/>
+          </a:xfrm>
+          <a:prstGeom prst="rect">
+            <a:avLst/>
+          </a:prstGeom>
+          <a:noFill/>
+          <a:ln/>
+        </p:spPr>
+        <p:txBody>
+          <a:bodyPr wrap="square" lIns="0" tIns="0" rIns="0" bIns="0" rtlCol="0" anchor="ctr"/>
+          <a:lstStyle/>
+          <a:p>
+            <a:pPr indent="0" marL="0">
+              <a:buNone/>
+            </a:pPr>
+            <a:r>
+              <a:rPr lang="en-US" sz="1150" dirty="0">
+                <a:solidFill>
+                  <a:srgbClr val="5C7286"/>
+                </a:solidFill>
+                <a:latin typeface="Calibri" pitchFamily="34" charset="0"/>
+                <a:ea typeface="Calibri" pitchFamily="34" charset="-122"/>
+                <a:cs typeface="Calibri" pitchFamily="34" charset="-120"/>
+              </a:rPr>
+              <a:t>PubMed query</a:t>
+            </a:r>
+            <a:endParaRPr lang="en-US" sz="1150" dirty="0"/>
+          </a:p>
+        </p:txBody>
+      </p:sp>
+      <p:sp>
+        <p:nvSpPr>
+          <p:cNvPr id="8" name="Shape 6"/>
+          <p:cNvSpPr/>
+          <p:nvPr/>
+        </p:nvSpPr>
+        <p:spPr>
+          <a:xfrm>
+            <a:off x="4251960" y="1737360"/>
+            <a:ext cx="566928" cy="566928"/>
+          </a:xfrm>
+          <a:prstGeom prst="roundRect">
+            <a:avLst>
+              <a:gd name="adj" fmla="val 16129"/>
+            </a:avLst>
+          </a:prstGeom>
+          <a:solidFill>
+            <a:srgbClr val="1C7293"/>
+          </a:solidFill>
+          <a:ln w="12700">
+            <a:solidFill>
+              <a:srgbClr val="1C7293"/>
+            </a:solidFill>
+            <a:prstDash val="solid"/>
+          </a:ln>
+        </p:spPr>
+      </p:sp>
+      <p:sp>
+        <p:nvSpPr>
+          <p:cNvPr id="9" name="Text 7"/>
+          <p:cNvSpPr txBox="1"/>
+          <p:nvPr/>
+        </p:nvSpPr>
+        <p:spPr>
+          <a:xfrm>
+            <a:off x="4251960" y="1737360"/>
+            <a:ext cx="566928" cy="566928"/>
           </a:xfrm>
           <a:prstGeom prst="rect">
             <a:avLst/>
@@ -7612,13 +7463,88 @@
           <a:lstStyle/>
           <a:p>
             <a:pPr algn="ctr" indent="0" marL="0">
-              <a:lnSpc>
-                <a:spcPts val="2000"/>
-              </a:lnSpc>
-              <a:buNone/>
-            </a:pPr>
-            <a:r>
-              <a:rPr lang="en-US" sz="1300" dirty="0">
+              <a:buNone/>
+            </a:pPr>
+            <a:r>
+              <a:rPr lang="en-US" sz="1800" b="1" dirty="0">
+                <a:solidFill>
+                  <a:srgbClr val="FFFFFF"/>
+                </a:solidFill>
+                <a:latin typeface="Cambria" pitchFamily="34" charset="0"/>
+                <a:ea typeface="Cambria" pitchFamily="34" charset="-122"/>
+                <a:cs typeface="Cambria" pitchFamily="34" charset="-120"/>
+              </a:rPr>
+              <a:t>2</a:t>
+            </a:r>
+            <a:endParaRPr lang="en-US" sz="1800" dirty="0"/>
+          </a:p>
+        </p:txBody>
+      </p:sp>
+      <p:sp>
+        <p:nvSpPr>
+          <p:cNvPr id="10" name="Text 8"/>
+          <p:cNvSpPr txBox="1"/>
+          <p:nvPr/>
+        </p:nvSpPr>
+        <p:spPr>
+          <a:xfrm>
+            <a:off x="4965192" y="1755648"/>
+            <a:ext cx="2834640" cy="292608"/>
+          </a:xfrm>
+          <a:prstGeom prst="rect">
+            <a:avLst/>
+          </a:prstGeom>
+          <a:noFill/>
+          <a:ln/>
+        </p:spPr>
+        <p:txBody>
+          <a:bodyPr wrap="square" lIns="0" tIns="0" rIns="0" bIns="0" rtlCol="0" anchor="ctr"/>
+          <a:lstStyle/>
+          <a:p>
+            <a:pPr indent="0" marL="0">
+              <a:buNone/>
+            </a:pPr>
+            <a:r>
+              <a:rPr lang="en-US" sz="1450" b="1" dirty="0">
+                <a:solidFill>
+                  <a:srgbClr val="0F2A3F"/>
+                </a:solidFill>
+                <a:latin typeface="Calibri" pitchFamily="34" charset="0"/>
+                <a:ea typeface="Calibri" pitchFamily="34" charset="-122"/>
+                <a:cs typeface="Calibri" pitchFamily="34" charset="-120"/>
+              </a:rPr>
+              <a:t>Abstract screen</a:t>
+            </a:r>
+            <a:endParaRPr lang="en-US" sz="1450" dirty="0"/>
+          </a:p>
+        </p:txBody>
+      </p:sp>
+      <p:sp>
+        <p:nvSpPr>
+          <p:cNvPr id="11" name="Text 9"/>
+          <p:cNvSpPr txBox="1"/>
+          <p:nvPr/>
+        </p:nvSpPr>
+        <p:spPr>
+          <a:xfrm>
+            <a:off x="4965192" y="2039112"/>
+            <a:ext cx="2834640" cy="292608"/>
+          </a:xfrm>
+          <a:prstGeom prst="rect">
+            <a:avLst/>
+          </a:prstGeom>
+          <a:noFill/>
+          <a:ln/>
+        </p:spPr>
+        <p:txBody>
+          <a:bodyPr wrap="square" lIns="0" tIns="0" rIns="0" bIns="0" rtlCol="0" anchor="ctr"/>
+          <a:lstStyle/>
+          <a:p>
+            <a:pPr indent="0" marL="0">
+              <a:buNone/>
+            </a:pPr>
+            <a:r>
+              <a:rPr lang="en-US" sz="1150" dirty="0">
                 <a:solidFill>
                   <a:srgbClr val="5C7286"/>
                 </a:solidFill>
@@ -7626,19 +7552,143 @@
                 <a:ea typeface="Calibri" pitchFamily="34" charset="-122"/>
                 <a:cs typeface="Calibri" pitchFamily="34" charset="-120"/>
               </a:rPr>
-              <a:t>pipeline + analysis-unit schematic</a:t>
-            </a:r>
-            <a:endParaRPr lang="en-US" sz="1300" dirty="0"/>
-          </a:p>
+              <a:t>LLM, criteria from the paper</a:t>
+            </a:r>
+            <a:endParaRPr lang="en-US" sz="1150" dirty="0"/>
+          </a:p>
+        </p:txBody>
+      </p:sp>
+      <p:sp>
+        <p:nvSpPr>
+          <p:cNvPr id="12" name="Shape 10"/>
+          <p:cNvSpPr/>
+          <p:nvPr/>
+        </p:nvSpPr>
+        <p:spPr>
+          <a:xfrm>
+            <a:off x="7936992" y="1737360"/>
+            <a:ext cx="566928" cy="566928"/>
+          </a:xfrm>
+          <a:prstGeom prst="roundRect">
+            <a:avLst>
+              <a:gd name="adj" fmla="val 16129"/>
+            </a:avLst>
+          </a:prstGeom>
+          <a:solidFill>
+            <a:srgbClr val="1C7293"/>
+          </a:solidFill>
+          <a:ln w="12700">
+            <a:solidFill>
+              <a:srgbClr val="1C7293"/>
+            </a:solidFill>
+            <a:prstDash val="solid"/>
+          </a:ln>
+        </p:spPr>
+      </p:sp>
+      <p:sp>
+        <p:nvSpPr>
+          <p:cNvPr id="13" name="Text 11"/>
+          <p:cNvSpPr txBox="1"/>
+          <p:nvPr/>
+        </p:nvSpPr>
+        <p:spPr>
+          <a:xfrm>
+            <a:off x="7936992" y="1737360"/>
+            <a:ext cx="566928" cy="566928"/>
+          </a:xfrm>
+          <a:prstGeom prst="rect">
+            <a:avLst/>
+          </a:prstGeom>
+          <a:noFill/>
+          <a:ln/>
+        </p:spPr>
+        <p:txBody>
+          <a:bodyPr wrap="square" lIns="0" tIns="0" rIns="0" bIns="0" rtlCol="0" anchor="ctr"/>
+          <a:lstStyle/>
           <a:p>
             <a:pPr algn="ctr" indent="0" marL="0">
-              <a:lnSpc>
-                <a:spcPts val="2000"/>
-              </a:lnSpc>
-              <a:buNone/>
-            </a:pPr>
-            <a:r>
-              <a:rPr lang="en-US" sz="1300" dirty="0">
+              <a:buNone/>
+            </a:pPr>
+            <a:r>
+              <a:rPr lang="en-US" sz="1800" b="1" dirty="0">
+                <a:solidFill>
+                  <a:srgbClr val="FFFFFF"/>
+                </a:solidFill>
+                <a:latin typeface="Cambria" pitchFamily="34" charset="0"/>
+                <a:ea typeface="Cambria" pitchFamily="34" charset="-122"/>
+                <a:cs typeface="Cambria" pitchFamily="34" charset="-120"/>
+              </a:rPr>
+              <a:t>3</a:t>
+            </a:r>
+            <a:endParaRPr lang="en-US" sz="1800" dirty="0"/>
+          </a:p>
+        </p:txBody>
+      </p:sp>
+      <p:sp>
+        <p:nvSpPr>
+          <p:cNvPr id="14" name="Text 12"/>
+          <p:cNvSpPr txBox="1"/>
+          <p:nvPr/>
+        </p:nvSpPr>
+        <p:spPr>
+          <a:xfrm>
+            <a:off x="8650224" y="1755648"/>
+            <a:ext cx="2834640" cy="292608"/>
+          </a:xfrm>
+          <a:prstGeom prst="rect">
+            <a:avLst/>
+          </a:prstGeom>
+          <a:noFill/>
+          <a:ln/>
+        </p:spPr>
+        <p:txBody>
+          <a:bodyPr wrap="square" lIns="0" tIns="0" rIns="0" bIns="0" rtlCol="0" anchor="ctr"/>
+          <a:lstStyle/>
+          <a:p>
+            <a:pPr indent="0" marL="0">
+              <a:buNone/>
+            </a:pPr>
+            <a:r>
+              <a:rPr lang="en-US" sz="1450" b="1" dirty="0">
+                <a:solidFill>
+                  <a:srgbClr val="0F2A3F"/>
+                </a:solidFill>
+                <a:latin typeface="Calibri" pitchFamily="34" charset="0"/>
+                <a:ea typeface="Calibri" pitchFamily="34" charset="-122"/>
+                <a:cs typeface="Calibri" pitchFamily="34" charset="-120"/>
+              </a:rPr>
+              <a:t>Retrieval</a:t>
+            </a:r>
+            <a:endParaRPr lang="en-US" sz="1450" dirty="0"/>
+          </a:p>
+        </p:txBody>
+      </p:sp>
+      <p:sp>
+        <p:nvSpPr>
+          <p:cNvPr id="15" name="Text 13"/>
+          <p:cNvSpPr txBox="1"/>
+          <p:nvPr/>
+        </p:nvSpPr>
+        <p:spPr>
+          <a:xfrm>
+            <a:off x="8650224" y="2039112"/>
+            <a:ext cx="2834640" cy="292608"/>
+          </a:xfrm>
+          <a:prstGeom prst="rect">
+            <a:avLst/>
+          </a:prstGeom>
+          <a:noFill/>
+          <a:ln/>
+        </p:spPr>
+        <p:txBody>
+          <a:bodyPr wrap="square" lIns="0" tIns="0" rIns="0" bIns="0" rtlCol="0" anchor="ctr"/>
+          <a:lstStyle/>
+          <a:p>
+            <a:pPr indent="0" marL="0">
+              <a:buNone/>
+            </a:pPr>
+            <a:r>
+              <a:rPr lang="en-US" sz="1150" dirty="0">
                 <a:solidFill>
                   <a:srgbClr val="5C7286"/>
                 </a:solidFill>
@@ -7646,9 +7696,934 @@
                 <a:ea typeface="Calibri" pitchFamily="34" charset="-122"/>
                 <a:cs typeface="Calibri" pitchFamily="34" charset="-120"/>
               </a:rPr>
-              <a:t>— to be added —</a:t>
-            </a:r>
-            <a:endParaRPr lang="en-US" sz="1300" dirty="0"/>
+              <a:t>full text via pubget</a:t>
+            </a:r>
+            <a:endParaRPr lang="en-US" sz="1150" dirty="0"/>
+          </a:p>
+        </p:txBody>
+      </p:sp>
+      <p:sp>
+        <p:nvSpPr>
+          <p:cNvPr id="16" name="Shape 14"/>
+          <p:cNvSpPr/>
+          <p:nvPr/>
+        </p:nvSpPr>
+        <p:spPr>
+          <a:xfrm>
+            <a:off x="566928" y="2926080"/>
+            <a:ext cx="566928" cy="566928"/>
+          </a:xfrm>
+          <a:prstGeom prst="roundRect">
+            <a:avLst>
+              <a:gd name="adj" fmla="val 16129"/>
+            </a:avLst>
+          </a:prstGeom>
+          <a:solidFill>
+            <a:srgbClr val="1C7293"/>
+          </a:solidFill>
+          <a:ln w="12700">
+            <a:solidFill>
+              <a:srgbClr val="1C7293"/>
+            </a:solidFill>
+            <a:prstDash val="solid"/>
+          </a:ln>
+        </p:spPr>
+      </p:sp>
+      <p:sp>
+        <p:nvSpPr>
+          <p:cNvPr id="17" name="Text 15"/>
+          <p:cNvSpPr txBox="1"/>
+          <p:nvPr/>
+        </p:nvSpPr>
+        <p:spPr>
+          <a:xfrm>
+            <a:off x="566928" y="2926080"/>
+            <a:ext cx="566928" cy="566928"/>
+          </a:xfrm>
+          <a:prstGeom prst="rect">
+            <a:avLst/>
+          </a:prstGeom>
+          <a:noFill/>
+          <a:ln/>
+        </p:spPr>
+        <p:txBody>
+          <a:bodyPr wrap="square" lIns="0" tIns="0" rIns="0" bIns="0" rtlCol="0" anchor="ctr"/>
+          <a:lstStyle/>
+          <a:p>
+            <a:pPr algn="ctr" indent="0" marL="0">
+              <a:buNone/>
+            </a:pPr>
+            <a:r>
+              <a:rPr lang="en-US" sz="1800" b="1" dirty="0">
+                <a:solidFill>
+                  <a:srgbClr val="FFFFFF"/>
+                </a:solidFill>
+                <a:latin typeface="Cambria" pitchFamily="34" charset="0"/>
+                <a:ea typeface="Cambria" pitchFamily="34" charset="-122"/>
+                <a:cs typeface="Cambria" pitchFamily="34" charset="-120"/>
+              </a:rPr>
+              <a:t>4</a:t>
+            </a:r>
+            <a:endParaRPr lang="en-US" sz="1800" dirty="0"/>
+          </a:p>
+        </p:txBody>
+      </p:sp>
+      <p:sp>
+        <p:nvSpPr>
+          <p:cNvPr id="18" name="Text 16"/>
+          <p:cNvSpPr txBox="1"/>
+          <p:nvPr/>
+        </p:nvSpPr>
+        <p:spPr>
+          <a:xfrm>
+            <a:off x="1280160" y="2944368"/>
+            <a:ext cx="2834640" cy="292608"/>
+          </a:xfrm>
+          <a:prstGeom prst="rect">
+            <a:avLst/>
+          </a:prstGeom>
+          <a:noFill/>
+          <a:ln/>
+        </p:spPr>
+        <p:txBody>
+          <a:bodyPr wrap="square" lIns="0" tIns="0" rIns="0" bIns="0" rtlCol="0" anchor="ctr"/>
+          <a:lstStyle/>
+          <a:p>
+            <a:pPr indent="0" marL="0">
+              <a:buNone/>
+            </a:pPr>
+            <a:r>
+              <a:rPr lang="en-US" sz="1450" b="1" dirty="0">
+                <a:solidFill>
+                  <a:srgbClr val="0F2A3F"/>
+                </a:solidFill>
+                <a:latin typeface="Calibri" pitchFamily="34" charset="0"/>
+                <a:ea typeface="Calibri" pitchFamily="34" charset="-122"/>
+                <a:cs typeface="Calibri" pitchFamily="34" charset="-120"/>
+              </a:rPr>
+              <a:t>Parsing</a:t>
+            </a:r>
+            <a:endParaRPr lang="en-US" sz="1450" dirty="0"/>
+          </a:p>
+        </p:txBody>
+      </p:sp>
+      <p:sp>
+        <p:nvSpPr>
+          <p:cNvPr id="19" name="Text 17"/>
+          <p:cNvSpPr txBox="1"/>
+          <p:nvPr/>
+        </p:nvSpPr>
+        <p:spPr>
+          <a:xfrm>
+            <a:off x="1280160" y="3227832"/>
+            <a:ext cx="2834640" cy="292608"/>
+          </a:xfrm>
+          <a:prstGeom prst="rect">
+            <a:avLst/>
+          </a:prstGeom>
+          <a:noFill/>
+          <a:ln/>
+        </p:spPr>
+        <p:txBody>
+          <a:bodyPr wrap="square" lIns="0" tIns="0" rIns="0" bIns="0" rtlCol="0" anchor="ctr"/>
+          <a:lstStyle/>
+          <a:p>
+            <a:pPr indent="0" marL="0">
+              <a:buNone/>
+            </a:pPr>
+            <a:r>
+              <a:rPr lang="en-US" sz="1150" dirty="0">
+                <a:solidFill>
+                  <a:srgbClr val="5C7286"/>
+                </a:solidFill>
+                <a:latin typeface="Calibri" pitchFamily="34" charset="0"/>
+                <a:ea typeface="Calibri" pitchFamily="34" charset="-122"/>
+                <a:cs typeface="Calibri" pitchFamily="34" charset="-120"/>
+              </a:rPr>
+              <a:t>coordinate tables → analyses</a:t>
+            </a:r>
+            <a:endParaRPr lang="en-US" sz="1150" dirty="0"/>
+          </a:p>
+        </p:txBody>
+      </p:sp>
+      <p:sp>
+        <p:nvSpPr>
+          <p:cNvPr id="20" name="Shape 18"/>
+          <p:cNvSpPr/>
+          <p:nvPr/>
+        </p:nvSpPr>
+        <p:spPr>
+          <a:xfrm>
+            <a:off x="4251960" y="2926080"/>
+            <a:ext cx="566928" cy="566928"/>
+          </a:xfrm>
+          <a:prstGeom prst="roundRect">
+            <a:avLst>
+              <a:gd name="adj" fmla="val 16129"/>
+            </a:avLst>
+          </a:prstGeom>
+          <a:solidFill>
+            <a:srgbClr val="1C7293"/>
+          </a:solidFill>
+          <a:ln w="12700">
+            <a:solidFill>
+              <a:srgbClr val="1C7293"/>
+            </a:solidFill>
+            <a:prstDash val="solid"/>
+          </a:ln>
+        </p:spPr>
+      </p:sp>
+      <p:sp>
+        <p:nvSpPr>
+          <p:cNvPr id="21" name="Text 19"/>
+          <p:cNvSpPr txBox="1"/>
+          <p:nvPr/>
+        </p:nvSpPr>
+        <p:spPr>
+          <a:xfrm>
+            <a:off x="4251960" y="2926080"/>
+            <a:ext cx="566928" cy="566928"/>
+          </a:xfrm>
+          <a:prstGeom prst="rect">
+            <a:avLst/>
+          </a:prstGeom>
+          <a:noFill/>
+          <a:ln/>
+        </p:spPr>
+        <p:txBody>
+          <a:bodyPr wrap="square" lIns="0" tIns="0" rIns="0" bIns="0" rtlCol="0" anchor="ctr"/>
+          <a:lstStyle/>
+          <a:p>
+            <a:pPr algn="ctr" indent="0" marL="0">
+              <a:buNone/>
+            </a:pPr>
+            <a:r>
+              <a:rPr lang="en-US" sz="1800" b="1" dirty="0">
+                <a:solidFill>
+                  <a:srgbClr val="FFFFFF"/>
+                </a:solidFill>
+                <a:latin typeface="Cambria" pitchFamily="34" charset="0"/>
+                <a:ea typeface="Cambria" pitchFamily="34" charset="-122"/>
+                <a:cs typeface="Cambria" pitchFamily="34" charset="-120"/>
+              </a:rPr>
+              <a:t>5</a:t>
+            </a:r>
+            <a:endParaRPr lang="en-US" sz="1800" dirty="0"/>
+          </a:p>
+        </p:txBody>
+      </p:sp>
+      <p:sp>
+        <p:nvSpPr>
+          <p:cNvPr id="22" name="Text 20"/>
+          <p:cNvSpPr txBox="1"/>
+          <p:nvPr/>
+        </p:nvSpPr>
+        <p:spPr>
+          <a:xfrm>
+            <a:off x="4965192" y="2944368"/>
+            <a:ext cx="2834640" cy="292608"/>
+          </a:xfrm>
+          <a:prstGeom prst="rect">
+            <a:avLst/>
+          </a:prstGeom>
+          <a:noFill/>
+          <a:ln/>
+        </p:spPr>
+        <p:txBody>
+          <a:bodyPr wrap="square" lIns="0" tIns="0" rIns="0" bIns="0" rtlCol="0" anchor="ctr"/>
+          <a:lstStyle/>
+          <a:p>
+            <a:pPr indent="0" marL="0">
+              <a:buNone/>
+            </a:pPr>
+            <a:r>
+              <a:rPr lang="en-US" sz="1450" b="1" dirty="0">
+                <a:solidFill>
+                  <a:srgbClr val="0F2A3F"/>
+                </a:solidFill>
+                <a:latin typeface="Calibri" pitchFamily="34" charset="0"/>
+                <a:ea typeface="Calibri" pitchFamily="34" charset="-122"/>
+                <a:cs typeface="Calibri" pitchFamily="34" charset="-120"/>
+              </a:rPr>
+              <a:t>Annotation</a:t>
+            </a:r>
+            <a:endParaRPr lang="en-US" sz="1450" dirty="0"/>
+          </a:p>
+        </p:txBody>
+      </p:sp>
+      <p:sp>
+        <p:nvSpPr>
+          <p:cNvPr id="23" name="Text 21"/>
+          <p:cNvSpPr txBox="1"/>
+          <p:nvPr/>
+        </p:nvSpPr>
+        <p:spPr>
+          <a:xfrm>
+            <a:off x="4965192" y="3227832"/>
+            <a:ext cx="2834640" cy="292608"/>
+          </a:xfrm>
+          <a:prstGeom prst="rect">
+            <a:avLst/>
+          </a:prstGeom>
+          <a:noFill/>
+          <a:ln/>
+        </p:spPr>
+        <p:txBody>
+          <a:bodyPr wrap="square" lIns="0" tIns="0" rIns="0" bIns="0" rtlCol="0" anchor="ctr"/>
+          <a:lstStyle/>
+          <a:p>
+            <a:pPr indent="0" marL="0">
+              <a:buNone/>
+            </a:pPr>
+            <a:r>
+              <a:rPr lang="en-US" sz="1150" dirty="0">
+                <a:solidFill>
+                  <a:srgbClr val="5C7286"/>
+                </a:solidFill>
+                <a:latin typeface="Calibri" pitchFamily="34" charset="0"/>
+                <a:ea typeface="Calibri" pitchFamily="34" charset="-122"/>
+                <a:cs typeface="Calibri" pitchFamily="34" charset="-120"/>
+              </a:rPr>
+              <a:t>assign analyses to contrasts</a:t>
+            </a:r>
+            <a:endParaRPr lang="en-US" sz="1150" dirty="0"/>
+          </a:p>
+        </p:txBody>
+      </p:sp>
+      <p:sp>
+        <p:nvSpPr>
+          <p:cNvPr id="24" name="Shape 22"/>
+          <p:cNvSpPr/>
+          <p:nvPr/>
+        </p:nvSpPr>
+        <p:spPr>
+          <a:xfrm>
+            <a:off x="7936992" y="2926080"/>
+            <a:ext cx="566928" cy="566928"/>
+          </a:xfrm>
+          <a:prstGeom prst="roundRect">
+            <a:avLst>
+              <a:gd name="adj" fmla="val 16129"/>
+            </a:avLst>
+          </a:prstGeom>
+          <a:solidFill>
+            <a:srgbClr val="1C7293"/>
+          </a:solidFill>
+          <a:ln w="12700">
+            <a:solidFill>
+              <a:srgbClr val="1C7293"/>
+            </a:solidFill>
+            <a:prstDash val="solid"/>
+          </a:ln>
+        </p:spPr>
+      </p:sp>
+      <p:sp>
+        <p:nvSpPr>
+          <p:cNvPr id="25" name="Text 23"/>
+          <p:cNvSpPr txBox="1"/>
+          <p:nvPr/>
+        </p:nvSpPr>
+        <p:spPr>
+          <a:xfrm>
+            <a:off x="7936992" y="2926080"/>
+            <a:ext cx="566928" cy="566928"/>
+          </a:xfrm>
+          <a:prstGeom prst="rect">
+            <a:avLst/>
+          </a:prstGeom>
+          <a:noFill/>
+          <a:ln/>
+        </p:spPr>
+        <p:txBody>
+          <a:bodyPr wrap="square" lIns="0" tIns="0" rIns="0" bIns="0" rtlCol="0" anchor="ctr"/>
+          <a:lstStyle/>
+          <a:p>
+            <a:pPr algn="ctr" indent="0" marL="0">
+              <a:buNone/>
+            </a:pPr>
+            <a:r>
+              <a:rPr lang="en-US" sz="1800" b="1" dirty="0">
+                <a:solidFill>
+                  <a:srgbClr val="FFFFFF"/>
+                </a:solidFill>
+                <a:latin typeface="Cambria" pitchFamily="34" charset="0"/>
+                <a:ea typeface="Cambria" pitchFamily="34" charset="-122"/>
+                <a:cs typeface="Cambria" pitchFamily="34" charset="-120"/>
+              </a:rPr>
+              <a:t>6</a:t>
+            </a:r>
+            <a:endParaRPr lang="en-US" sz="1800" dirty="0"/>
+          </a:p>
+        </p:txBody>
+      </p:sp>
+      <p:sp>
+        <p:nvSpPr>
+          <p:cNvPr id="26" name="Text 24"/>
+          <p:cNvSpPr txBox="1"/>
+          <p:nvPr/>
+        </p:nvSpPr>
+        <p:spPr>
+          <a:xfrm>
+            <a:off x="8650224" y="2944368"/>
+            <a:ext cx="2834640" cy="292608"/>
+          </a:xfrm>
+          <a:prstGeom prst="rect">
+            <a:avLst/>
+          </a:prstGeom>
+          <a:noFill/>
+          <a:ln/>
+        </p:spPr>
+        <p:txBody>
+          <a:bodyPr wrap="square" lIns="0" tIns="0" rIns="0" bIns="0" rtlCol="0" anchor="ctr"/>
+          <a:lstStyle/>
+          <a:p>
+            <a:pPr indent="0" marL="0">
+              <a:buNone/>
+            </a:pPr>
+            <a:r>
+              <a:rPr lang="en-US" sz="1450" b="1" dirty="0">
+                <a:solidFill>
+                  <a:srgbClr val="0F2A3F"/>
+                </a:solidFill>
+                <a:latin typeface="Calibri" pitchFamily="34" charset="0"/>
+                <a:ea typeface="Calibri" pitchFamily="34" charset="-122"/>
+                <a:cs typeface="Calibri" pitchFamily="34" charset="-120"/>
+              </a:rPr>
+              <a:t>Meta-analysis</a:t>
+            </a:r>
+            <a:endParaRPr lang="en-US" sz="1450" dirty="0"/>
+          </a:p>
+        </p:txBody>
+      </p:sp>
+      <p:sp>
+        <p:nvSpPr>
+          <p:cNvPr id="27" name="Text 25"/>
+          <p:cNvSpPr txBox="1"/>
+          <p:nvPr/>
+        </p:nvSpPr>
+        <p:spPr>
+          <a:xfrm>
+            <a:off x="8650224" y="3227832"/>
+            <a:ext cx="2834640" cy="292608"/>
+          </a:xfrm>
+          <a:prstGeom prst="rect">
+            <a:avLst/>
+          </a:prstGeom>
+          <a:noFill/>
+          <a:ln/>
+        </p:spPr>
+        <p:txBody>
+          <a:bodyPr wrap="square" lIns="0" tIns="0" rIns="0" bIns="0" rtlCol="0" anchor="ctr"/>
+          <a:lstStyle/>
+          <a:p>
+            <a:pPr indent="0" marL="0">
+              <a:buNone/>
+            </a:pPr>
+            <a:r>
+              <a:rPr lang="en-US" sz="1150" dirty="0">
+                <a:solidFill>
+                  <a:srgbClr val="5C7286"/>
+                </a:solidFill>
+                <a:latin typeface="Calibri" pitchFamily="34" charset="0"/>
+                <a:ea typeface="Calibri" pitchFamily="34" charset="-122"/>
+                <a:cs typeface="Calibri" pitchFamily="34" charset="-120"/>
+              </a:rPr>
+              <a:t>MKDA → brain map</a:t>
+            </a:r>
+            <a:endParaRPr lang="en-US" sz="1150" dirty="0"/>
+          </a:p>
+        </p:txBody>
+      </p:sp>
+      <p:sp>
+        <p:nvSpPr>
+          <p:cNvPr id="28" name="Shape 26"/>
+          <p:cNvSpPr/>
+          <p:nvPr/>
+        </p:nvSpPr>
+        <p:spPr>
+          <a:xfrm>
+            <a:off x="566928" y="4315968"/>
+            <a:ext cx="2572436" cy="1143000"/>
+          </a:xfrm>
+          <a:prstGeom prst="roundRect">
+            <a:avLst>
+              <a:gd name="adj" fmla="val 6400"/>
+            </a:avLst>
+          </a:prstGeom>
+          <a:solidFill>
+            <a:srgbClr val="EEF3F7"/>
+          </a:solidFill>
+          <a:ln w="12700">
+            <a:solidFill>
+              <a:srgbClr val="EEF3F7"/>
+            </a:solidFill>
+            <a:prstDash val="solid"/>
+          </a:ln>
+        </p:spPr>
+      </p:sp>
+      <p:sp>
+        <p:nvSpPr>
+          <p:cNvPr id="29" name="Text 27"/>
+          <p:cNvSpPr txBox="1"/>
+          <p:nvPr/>
+        </p:nvSpPr>
+        <p:spPr>
+          <a:xfrm>
+            <a:off x="676656" y="4407408"/>
+            <a:ext cx="2352980" cy="475488"/>
+          </a:xfrm>
+          <a:prstGeom prst="rect">
+            <a:avLst/>
+          </a:prstGeom>
+          <a:noFill/>
+          <a:ln/>
+        </p:spPr>
+        <p:txBody>
+          <a:bodyPr wrap="square" lIns="0" tIns="0" rIns="0" bIns="0" rtlCol="0" anchor="ctr"/>
+          <a:lstStyle/>
+          <a:p>
+            <a:pPr algn="ctr" indent="0" marL="0">
+              <a:buNone/>
+            </a:pPr>
+            <a:r>
+              <a:rPr lang="en-US" sz="2600" b="1" dirty="0">
+                <a:solidFill>
+                  <a:srgbClr val="0A3D5C"/>
+                </a:solidFill>
+                <a:latin typeface="Cambria" pitchFamily="34" charset="0"/>
+                <a:ea typeface="Cambria" pitchFamily="34" charset="-122"/>
+                <a:cs typeface="Cambria" pitchFamily="34" charset="-120"/>
+              </a:rPr>
+              <a:t>9</a:t>
+            </a:r>
+            <a:endParaRPr lang="en-US" sz="2600" dirty="0"/>
+          </a:p>
+        </p:txBody>
+      </p:sp>
+      <p:sp>
+        <p:nvSpPr>
+          <p:cNvPr id="30" name="Text 28"/>
+          <p:cNvSpPr txBox="1"/>
+          <p:nvPr/>
+        </p:nvSpPr>
+        <p:spPr>
+          <a:xfrm>
+            <a:off x="676656" y="4864608"/>
+            <a:ext cx="2352980" cy="521208"/>
+          </a:xfrm>
+          <a:prstGeom prst="rect">
+            <a:avLst/>
+          </a:prstGeom>
+          <a:noFill/>
+          <a:ln/>
+        </p:spPr>
+        <p:txBody>
+          <a:bodyPr wrap="square" lIns="0" tIns="0" rIns="0" bIns="0" rtlCol="0" anchor="t"/>
+          <a:lstStyle/>
+          <a:p>
+            <a:pPr algn="ctr" indent="0" marL="0">
+              <a:buNone/>
+            </a:pPr>
+            <a:r>
+              <a:rPr lang="en-US" sz="1100" dirty="0">
+                <a:solidFill>
+                  <a:srgbClr val="5C7286"/>
+                </a:solidFill>
+                <a:latin typeface="Calibri" pitchFamily="34" charset="0"/>
+                <a:ea typeface="Calibri" pitchFamily="34" charset="-122"/>
+                <a:cs typeface="Calibri" pitchFamily="34" charset="-120"/>
+              </a:rPr>
+              <a:t>published meta-analyses</a:t>
+            </a:r>
+            <a:endParaRPr lang="en-US" sz="1100" dirty="0"/>
+          </a:p>
+        </p:txBody>
+      </p:sp>
+      <p:sp>
+        <p:nvSpPr>
+          <p:cNvPr id="31" name="Shape 29"/>
+          <p:cNvSpPr/>
+          <p:nvPr/>
+        </p:nvSpPr>
+        <p:spPr>
+          <a:xfrm>
+            <a:off x="3395396" y="4315968"/>
+            <a:ext cx="2572436" cy="1143000"/>
+          </a:xfrm>
+          <a:prstGeom prst="roundRect">
+            <a:avLst>
+              <a:gd name="adj" fmla="val 6400"/>
+            </a:avLst>
+          </a:prstGeom>
+          <a:solidFill>
+            <a:srgbClr val="EEF3F7"/>
+          </a:solidFill>
+          <a:ln w="12700">
+            <a:solidFill>
+              <a:srgbClr val="EEF3F7"/>
+            </a:solidFill>
+            <a:prstDash val="solid"/>
+          </a:ln>
+        </p:spPr>
+      </p:sp>
+      <p:sp>
+        <p:nvSpPr>
+          <p:cNvPr id="32" name="Text 30"/>
+          <p:cNvSpPr txBox="1"/>
+          <p:nvPr/>
+        </p:nvSpPr>
+        <p:spPr>
+          <a:xfrm>
+            <a:off x="3505124" y="4407408"/>
+            <a:ext cx="2352980" cy="475488"/>
+          </a:xfrm>
+          <a:prstGeom prst="rect">
+            <a:avLst/>
+          </a:prstGeom>
+          <a:noFill/>
+          <a:ln/>
+        </p:spPr>
+        <p:txBody>
+          <a:bodyPr wrap="square" lIns="0" tIns="0" rIns="0" bIns="0" rtlCol="0" anchor="ctr"/>
+          <a:lstStyle/>
+          <a:p>
+            <a:pPr algn="ctr" indent="0" marL="0">
+              <a:buNone/>
+            </a:pPr>
+            <a:r>
+              <a:rPr lang="en-US" sz="2600" b="1" dirty="0">
+                <a:solidFill>
+                  <a:srgbClr val="0A3D5C"/>
+                </a:solidFill>
+                <a:latin typeface="Cambria" pitchFamily="34" charset="0"/>
+                <a:ea typeface="Cambria" pitchFamily="34" charset="-122"/>
+                <a:cs typeface="Cambria" pitchFamily="34" charset="-120"/>
+              </a:rPr>
+              <a:t>32</a:t>
+            </a:r>
+            <a:endParaRPr lang="en-US" sz="2600" dirty="0"/>
+          </a:p>
+        </p:txBody>
+      </p:sp>
+      <p:sp>
+        <p:nvSpPr>
+          <p:cNvPr id="33" name="Text 31"/>
+          <p:cNvSpPr txBox="1"/>
+          <p:nvPr/>
+        </p:nvSpPr>
+        <p:spPr>
+          <a:xfrm>
+            <a:off x="3505124" y="4864608"/>
+            <a:ext cx="2352980" cy="521208"/>
+          </a:xfrm>
+          <a:prstGeom prst="rect">
+            <a:avLst/>
+          </a:prstGeom>
+          <a:noFill/>
+          <a:ln/>
+        </p:spPr>
+        <p:txBody>
+          <a:bodyPr wrap="square" lIns="0" tIns="0" rIns="0" bIns="0" rtlCol="0" anchor="t"/>
+          <a:lstStyle/>
+          <a:p>
+            <a:pPr algn="ctr" indent="0" marL="0">
+              <a:buNone/>
+            </a:pPr>
+            <a:r>
+              <a:rPr lang="en-US" sz="1100" dirty="0">
+                <a:solidFill>
+                  <a:srgbClr val="5C7286"/>
+                </a:solidFill>
+                <a:latin typeface="Calibri" pitchFamily="34" charset="0"/>
+                <a:ea typeface="Calibri" pitchFamily="34" charset="-122"/>
+                <a:cs typeface="Calibri" pitchFamily="34" charset="-120"/>
+              </a:rPr>
+              <a:t>benchmark contrasts scored</a:t>
+            </a:r>
+            <a:endParaRPr lang="en-US" sz="1100" dirty="0"/>
+          </a:p>
+        </p:txBody>
+      </p:sp>
+      <p:sp>
+        <p:nvSpPr>
+          <p:cNvPr id="34" name="Shape 32"/>
+          <p:cNvSpPr/>
+          <p:nvPr/>
+        </p:nvSpPr>
+        <p:spPr>
+          <a:xfrm>
+            <a:off x="6223864" y="4315968"/>
+            <a:ext cx="2572436" cy="1143000"/>
+          </a:xfrm>
+          <a:prstGeom prst="roundRect">
+            <a:avLst>
+              <a:gd name="adj" fmla="val 6400"/>
+            </a:avLst>
+          </a:prstGeom>
+          <a:solidFill>
+            <a:srgbClr val="EEF3F7"/>
+          </a:solidFill>
+          <a:ln w="12700">
+            <a:solidFill>
+              <a:srgbClr val="EEF3F7"/>
+            </a:solidFill>
+            <a:prstDash val="solid"/>
+          </a:ln>
+        </p:spPr>
+      </p:sp>
+      <p:sp>
+        <p:nvSpPr>
+          <p:cNvPr id="35" name="Text 33"/>
+          <p:cNvSpPr txBox="1"/>
+          <p:nvPr/>
+        </p:nvSpPr>
+        <p:spPr>
+          <a:xfrm>
+            <a:off x="6333592" y="4407408"/>
+            <a:ext cx="2352980" cy="475488"/>
+          </a:xfrm>
+          <a:prstGeom prst="rect">
+            <a:avLst/>
+          </a:prstGeom>
+          <a:noFill/>
+          <a:ln/>
+        </p:spPr>
+        <p:txBody>
+          <a:bodyPr wrap="square" lIns="0" tIns="0" rIns="0" bIns="0" rtlCol="0" anchor="ctr"/>
+          <a:lstStyle/>
+          <a:p>
+            <a:pPr algn="ctr" indent="0" marL="0">
+              <a:buNone/>
+            </a:pPr>
+            <a:r>
+              <a:rPr lang="en-US" sz="2600" b="1" dirty="0">
+                <a:solidFill>
+                  <a:srgbClr val="0A3D5C"/>
+                </a:solidFill>
+                <a:latin typeface="Cambria" pitchFamily="34" charset="0"/>
+                <a:ea typeface="Cambria" pitchFamily="34" charset="-122"/>
+                <a:cs typeface="Cambria" pitchFamily="34" charset="-120"/>
+              </a:rPr>
+              <a:t>3</a:t>
+            </a:r>
+            <a:endParaRPr lang="en-US" sz="2600" dirty="0"/>
+          </a:p>
+        </p:txBody>
+      </p:sp>
+      <p:sp>
+        <p:nvSpPr>
+          <p:cNvPr id="36" name="Text 34"/>
+          <p:cNvSpPr txBox="1"/>
+          <p:nvPr/>
+        </p:nvSpPr>
+        <p:spPr>
+          <a:xfrm>
+            <a:off x="6333592" y="4864608"/>
+            <a:ext cx="2352980" cy="521208"/>
+          </a:xfrm>
+          <a:prstGeom prst="rect">
+            <a:avLst/>
+          </a:prstGeom>
+          <a:noFill/>
+          <a:ln/>
+        </p:spPr>
+        <p:txBody>
+          <a:bodyPr wrap="square" lIns="0" tIns="0" rIns="0" bIns="0" rtlCol="0" anchor="t"/>
+          <a:lstStyle/>
+          <a:p>
+            <a:pPr algn="ctr" indent="0" marL="0">
+              <a:buNone/>
+            </a:pPr>
+            <a:r>
+              <a:rPr lang="en-US" sz="1100" dirty="0">
+                <a:solidFill>
+                  <a:srgbClr val="5C7286"/>
+                </a:solidFill>
+                <a:latin typeface="Calibri" pitchFamily="34" charset="0"/>
+                <a:ea typeface="Calibri" pitchFamily="34" charset="-122"/>
+                <a:cs typeface="Calibri" pitchFamily="34" charset="-120"/>
+              </a:rPr>
+              <a:t>arms per contrast</a:t>
+            </a:r>
+            <a:endParaRPr lang="en-US" sz="1100" dirty="0"/>
+          </a:p>
+          <a:p>
+            <a:pPr algn="ctr" indent="0" marL="0">
+              <a:buNone/>
+            </a:pPr>
+            <a:r>
+              <a:rPr lang="en-US" sz="1100" dirty="0">
+                <a:solidFill>
+                  <a:srgbClr val="5C7286"/>
+                </a:solidFill>
+                <a:latin typeface="Calibri" pitchFamily="34" charset="0"/>
+                <a:ea typeface="Calibri" pitchFamily="34" charset="-122"/>
+                <a:cs typeface="Calibri" pitchFamily="34" charset="-120"/>
+              </a:rPr>
+              <a:t>(pipeline / search baseline / expert)</a:t>
+            </a:r>
+            <a:endParaRPr lang="en-US" sz="1100" dirty="0"/>
+          </a:p>
+        </p:txBody>
+      </p:sp>
+      <p:sp>
+        <p:nvSpPr>
+          <p:cNvPr id="37" name="Shape 35"/>
+          <p:cNvSpPr/>
+          <p:nvPr/>
+        </p:nvSpPr>
+        <p:spPr>
+          <a:xfrm>
+            <a:off x="9052331" y="4315968"/>
+            <a:ext cx="2572436" cy="1143000"/>
+          </a:xfrm>
+          <a:prstGeom prst="roundRect">
+            <a:avLst>
+              <a:gd name="adj" fmla="val 6400"/>
+            </a:avLst>
+          </a:prstGeom>
+          <a:solidFill>
+            <a:srgbClr val="EEF3F7"/>
+          </a:solidFill>
+          <a:ln w="12700">
+            <a:solidFill>
+              <a:srgbClr val="EEF3F7"/>
+            </a:solidFill>
+            <a:prstDash val="solid"/>
+          </a:ln>
+        </p:spPr>
+      </p:sp>
+      <p:sp>
+        <p:nvSpPr>
+          <p:cNvPr id="38" name="Text 36"/>
+          <p:cNvSpPr txBox="1"/>
+          <p:nvPr/>
+        </p:nvSpPr>
+        <p:spPr>
+          <a:xfrm>
+            <a:off x="9162059" y="4407408"/>
+            <a:ext cx="2352980" cy="475488"/>
+          </a:xfrm>
+          <a:prstGeom prst="rect">
+            <a:avLst/>
+          </a:prstGeom>
+          <a:noFill/>
+          <a:ln/>
+        </p:spPr>
+        <p:txBody>
+          <a:bodyPr wrap="square" lIns="0" tIns="0" rIns="0" bIns="0" rtlCol="0" anchor="ctr"/>
+          <a:lstStyle/>
+          <a:p>
+            <a:pPr algn="ctr" indent="0" marL="0">
+              <a:buNone/>
+            </a:pPr>
+            <a:r>
+              <a:rPr lang="en-US" sz="2600" b="1" dirty="0">
+                <a:solidFill>
+                  <a:srgbClr val="0A3D5C"/>
+                </a:solidFill>
+                <a:latin typeface="Cambria" pitchFamily="34" charset="0"/>
+                <a:ea typeface="Cambria" pitchFamily="34" charset="-122"/>
+                <a:cs typeface="Cambria" pitchFamily="34" charset="-120"/>
+              </a:rPr>
+              <a:t>MKDA</a:t>
+            </a:r>
+            <a:endParaRPr lang="en-US" sz="2600" dirty="0"/>
+          </a:p>
+        </p:txBody>
+      </p:sp>
+      <p:sp>
+        <p:nvSpPr>
+          <p:cNvPr id="39" name="Text 37"/>
+          <p:cNvSpPr txBox="1"/>
+          <p:nvPr/>
+        </p:nvSpPr>
+        <p:spPr>
+          <a:xfrm>
+            <a:off x="9162059" y="4864608"/>
+            <a:ext cx="2352980" cy="521208"/>
+          </a:xfrm>
+          <a:prstGeom prst="rect">
+            <a:avLst/>
+          </a:prstGeom>
+          <a:noFill/>
+          <a:ln/>
+        </p:spPr>
+        <p:txBody>
+          <a:bodyPr wrap="square" lIns="0" tIns="0" rIns="0" bIns="0" rtlCol="0" anchor="t"/>
+          <a:lstStyle/>
+          <a:p>
+            <a:pPr algn="ctr" indent="0" marL="0">
+              <a:buNone/>
+            </a:pPr>
+            <a:r>
+              <a:rPr lang="en-US" sz="1100" dirty="0">
+                <a:solidFill>
+                  <a:srgbClr val="5C7286"/>
+                </a:solidFill>
+                <a:latin typeface="Calibri" pitchFamily="34" charset="0"/>
+                <a:ea typeface="Calibri" pitchFamily="34" charset="-122"/>
+                <a:cs typeface="Calibri" pitchFamily="34" charset="-120"/>
+              </a:rPr>
+              <a:t>one estimator throughout,</a:t>
+            </a:r>
+            <a:endParaRPr lang="en-US" sz="1100" dirty="0"/>
+          </a:p>
+          <a:p>
+            <a:pPr algn="ctr" indent="0" marL="0">
+              <a:buNone/>
+            </a:pPr>
+            <a:r>
+              <a:rPr lang="en-US" sz="1100" dirty="0">
+                <a:solidFill>
+                  <a:srgbClr val="5C7286"/>
+                </a:solidFill>
+                <a:latin typeface="Calibri" pitchFamily="34" charset="0"/>
+                <a:ea typeface="Calibri" pitchFamily="34" charset="-122"/>
+                <a:cs typeface="Calibri" pitchFamily="34" charset="-120"/>
+              </a:rPr>
+              <a:t>for comparability</a:t>
+            </a:r>
+            <a:endParaRPr lang="en-US" sz="1100" dirty="0"/>
+          </a:p>
+        </p:txBody>
+      </p:sp>
+      <p:sp>
+        <p:nvSpPr>
+          <p:cNvPr id="40" name="Text 38"/>
+          <p:cNvSpPr txBox="1"/>
+          <p:nvPr/>
+        </p:nvSpPr>
+        <p:spPr>
+          <a:xfrm>
+            <a:off x="566928" y="6236208"/>
+            <a:ext cx="11057839" cy="310896"/>
+          </a:xfrm>
+          <a:prstGeom prst="rect">
+            <a:avLst/>
+          </a:prstGeom>
+          <a:noFill/>
+          <a:ln/>
+        </p:spPr>
+        <p:txBody>
+          <a:bodyPr wrap="square" lIns="0" tIns="0" rIns="0" bIns="0" rtlCol="0" anchor="ctr"/>
+          <a:lstStyle/>
+          <a:p>
+            <a:pPr indent="0" marL="0">
+              <a:buNone/>
+            </a:pPr>
+            <a:r>
+              <a:rPr lang="en-US" sz="1050" i="1" dirty="0">
+                <a:solidFill>
+                  <a:srgbClr val="5C7286"/>
+                </a:solidFill>
+                <a:latin typeface="Calibri" pitchFamily="34" charset="0"/>
+                <a:ea typeface="Calibri" pitchFamily="34" charset="-122"/>
+                <a:cs typeface="Calibri" pitchFamily="34" charset="-120"/>
+              </a:rPr>
+              <a:t>Each contrast is scored as a brain-map similarity against the published meta-analytic map for that contrast.</a:t>
+            </a:r>
+            <a:endParaRPr lang="en-US" sz="1050" dirty="0"/>
           </a:p>
         </p:txBody>
       </p:sp>
@@ -7710,7 +8685,7 @@
                 <a:ea typeface="Cambria" pitchFamily="34" charset="-122"/>
                 <a:cs typeface="Cambria" pitchFamily="34" charset="-120"/>
               </a:rPr>
-              <a:t>The pipeline and the benchmark</a:t>
+              <a:t>Screening raises precision at little cost to recall</a:t>
             </a:r>
             <a:endParaRPr lang="en-US" sz="3100" dirty="0"/>
           </a:p>
@@ -7749,1333 +8724,39 @@
                 <a:ea typeface="Calibri" pitchFamily="34" charset="-122"/>
                 <a:cs typeface="Calibri" pitchFamily="34" charset="-120"/>
               </a:rPr>
-              <a:t>Six LLM stages end to end, scored against the published result of each meta-analysis.</a:t>
+              <a:t>73% of gold-standard studies survive to the end of the funnel; abstract screening costs a median 1.4 points of them. Mean precision rises 0.10 → 0.32.</a:t>
             </a:r>
             <a:endParaRPr lang="en-US" sz="1500" dirty="0"/>
           </a:p>
         </p:txBody>
       </p:sp>
-      <p:sp>
-        <p:nvSpPr>
-          <p:cNvPr id="4" name="Shape 2"/>
-          <p:cNvSpPr/>
-          <p:nvPr/>
-        </p:nvSpPr>
-        <p:spPr>
-          <a:xfrm>
-            <a:off x="566928" y="1737360"/>
-            <a:ext cx="566928" cy="566928"/>
-          </a:xfrm>
-          <a:prstGeom prst="roundRect">
-            <a:avLst>
-              <a:gd name="adj" fmla="val 16129"/>
-            </a:avLst>
-          </a:prstGeom>
-          <a:solidFill>
-            <a:srgbClr val="1C7293"/>
-          </a:solidFill>
-          <a:ln w="12700">
-            <a:solidFill>
-              <a:srgbClr val="1C7293"/>
-            </a:solidFill>
-            <a:prstDash val="solid"/>
-          </a:ln>
-        </p:spPr>
-      </p:sp>
-      <p:sp>
-        <p:nvSpPr>
-          <p:cNvPr id="5" name="Text 3"/>
-          <p:cNvSpPr txBox="1"/>
-          <p:nvPr/>
-        </p:nvSpPr>
-        <p:spPr>
-          <a:xfrm>
-            <a:off x="566928" y="1737360"/>
-            <a:ext cx="566928" cy="566928"/>
-          </a:xfrm>
-          <a:prstGeom prst="rect">
-            <a:avLst/>
-          </a:prstGeom>
-          <a:noFill/>
-          <a:ln/>
-        </p:spPr>
-        <p:txBody>
-          <a:bodyPr wrap="square" lIns="0" tIns="0" rIns="0" bIns="0" rtlCol="0" anchor="ctr"/>
-          <a:lstStyle/>
-          <a:p>
-            <a:pPr algn="ctr" indent="0" marL="0">
-              <a:buNone/>
-            </a:pPr>
-            <a:r>
-              <a:rPr lang="en-US" sz="1800" b="1" dirty="0">
-                <a:solidFill>
-                  <a:srgbClr val="FFFFFF"/>
-                </a:solidFill>
-                <a:latin typeface="Cambria" pitchFamily="34" charset="0"/>
-                <a:ea typeface="Cambria" pitchFamily="34" charset="-122"/>
-                <a:cs typeface="Cambria" pitchFamily="34" charset="-120"/>
-              </a:rPr>
-              <a:t>1</a:t>
-            </a:r>
-            <a:endParaRPr lang="en-US" sz="1800" dirty="0"/>
-          </a:p>
-        </p:txBody>
-      </p:sp>
-      <p:sp>
-        <p:nvSpPr>
-          <p:cNvPr id="6" name="Text 4"/>
-          <p:cNvSpPr txBox="1"/>
-          <p:nvPr/>
-        </p:nvSpPr>
-        <p:spPr>
-          <a:xfrm>
-            <a:off x="1280160" y="1755648"/>
-            <a:ext cx="2834640" cy="292608"/>
-          </a:xfrm>
-          <a:prstGeom prst="rect">
-            <a:avLst/>
-          </a:prstGeom>
-          <a:noFill/>
-          <a:ln/>
-        </p:spPr>
-        <p:txBody>
-          <a:bodyPr wrap="square" lIns="0" tIns="0" rIns="0" bIns="0" rtlCol="0" anchor="ctr"/>
-          <a:lstStyle/>
-          <a:p>
-            <a:pPr indent="0" marL="0">
-              <a:buNone/>
-            </a:pPr>
-            <a:r>
-              <a:rPr lang="en-US" sz="1450" b="1" dirty="0">
-                <a:solidFill>
-                  <a:srgbClr val="0F2A3F"/>
-                </a:solidFill>
-                <a:latin typeface="Calibri" pitchFamily="34" charset="0"/>
-                <a:ea typeface="Calibri" pitchFamily="34" charset="-122"/>
-                <a:cs typeface="Calibri" pitchFamily="34" charset="-120"/>
-              </a:rPr>
-              <a:t>Search</a:t>
-            </a:r>
-            <a:endParaRPr lang="en-US" sz="1450" dirty="0"/>
-          </a:p>
-        </p:txBody>
-      </p:sp>
-      <p:sp>
-        <p:nvSpPr>
-          <p:cNvPr id="7" name="Text 5"/>
-          <p:cNvSpPr txBox="1"/>
-          <p:nvPr/>
-        </p:nvSpPr>
-        <p:spPr>
-          <a:xfrm>
-            <a:off x="1280160" y="2039112"/>
-            <a:ext cx="2834640" cy="292608"/>
-          </a:xfrm>
-          <a:prstGeom prst="rect">
-            <a:avLst/>
-          </a:prstGeom>
-          <a:noFill/>
-          <a:ln/>
-        </p:spPr>
-        <p:txBody>
-          <a:bodyPr wrap="square" lIns="0" tIns="0" rIns="0" bIns="0" rtlCol="0" anchor="ctr"/>
-          <a:lstStyle/>
-          <a:p>
-            <a:pPr indent="0" marL="0">
-              <a:buNone/>
-            </a:pPr>
-            <a:r>
-              <a:rPr lang="en-US" sz="1150" dirty="0">
-                <a:solidFill>
-                  <a:srgbClr val="5C7286"/>
-                </a:solidFill>
-                <a:latin typeface="Calibri" pitchFamily="34" charset="0"/>
-                <a:ea typeface="Calibri" pitchFamily="34" charset="-122"/>
-                <a:cs typeface="Calibri" pitchFamily="34" charset="-120"/>
-              </a:rPr>
-              <a:t>PubMed query</a:t>
-            </a:r>
-            <a:endParaRPr lang="en-US" sz="1150" dirty="0"/>
-          </a:p>
-        </p:txBody>
-      </p:sp>
-      <p:sp>
-        <p:nvSpPr>
-          <p:cNvPr id="8" name="Shape 6"/>
-          <p:cNvSpPr/>
-          <p:nvPr/>
-        </p:nvSpPr>
-        <p:spPr>
-          <a:xfrm>
-            <a:off x="4251960" y="1737360"/>
-            <a:ext cx="566928" cy="566928"/>
-          </a:xfrm>
-          <a:prstGeom prst="roundRect">
-            <a:avLst>
-              <a:gd name="adj" fmla="val 16129"/>
-            </a:avLst>
-          </a:prstGeom>
-          <a:solidFill>
-            <a:srgbClr val="1C7293"/>
-          </a:solidFill>
-          <a:ln w="12700">
-            <a:solidFill>
-              <a:srgbClr val="1C7293"/>
-            </a:solidFill>
-            <a:prstDash val="solid"/>
-          </a:ln>
-        </p:spPr>
-      </p:sp>
-      <p:sp>
-        <p:nvSpPr>
-          <p:cNvPr id="9" name="Text 7"/>
-          <p:cNvSpPr txBox="1"/>
-          <p:nvPr/>
-        </p:nvSpPr>
-        <p:spPr>
-          <a:xfrm>
-            <a:off x="4251960" y="1737360"/>
-            <a:ext cx="566928" cy="566928"/>
-          </a:xfrm>
-          <a:prstGeom prst="rect">
-            <a:avLst/>
-          </a:prstGeom>
-          <a:noFill/>
-          <a:ln/>
-        </p:spPr>
-        <p:txBody>
-          <a:bodyPr wrap="square" lIns="0" tIns="0" rIns="0" bIns="0" rtlCol="0" anchor="ctr"/>
-          <a:lstStyle/>
-          <a:p>
-            <a:pPr algn="ctr" indent="0" marL="0">
-              <a:buNone/>
-            </a:pPr>
-            <a:r>
-              <a:rPr lang="en-US" sz="1800" b="1" dirty="0">
-                <a:solidFill>
-                  <a:srgbClr val="FFFFFF"/>
-                </a:solidFill>
-                <a:latin typeface="Cambria" pitchFamily="34" charset="0"/>
-                <a:ea typeface="Cambria" pitchFamily="34" charset="-122"/>
-                <a:cs typeface="Cambria" pitchFamily="34" charset="-120"/>
-              </a:rPr>
-              <a:t>2</a:t>
-            </a:r>
-            <a:endParaRPr lang="en-US" sz="1800" dirty="0"/>
-          </a:p>
-        </p:txBody>
-      </p:sp>
-      <p:sp>
-        <p:nvSpPr>
-          <p:cNvPr id="10" name="Text 8"/>
-          <p:cNvSpPr txBox="1"/>
-          <p:nvPr/>
-        </p:nvSpPr>
-        <p:spPr>
-          <a:xfrm>
-            <a:off x="4965192" y="1755648"/>
-            <a:ext cx="2834640" cy="292608"/>
-          </a:xfrm>
-          <a:prstGeom prst="rect">
-            <a:avLst/>
-          </a:prstGeom>
-          <a:noFill/>
-          <a:ln/>
-        </p:spPr>
-        <p:txBody>
-          <a:bodyPr wrap="square" lIns="0" tIns="0" rIns="0" bIns="0" rtlCol="0" anchor="ctr"/>
-          <a:lstStyle/>
-          <a:p>
-            <a:pPr indent="0" marL="0">
-              <a:buNone/>
-            </a:pPr>
-            <a:r>
-              <a:rPr lang="en-US" sz="1450" b="1" dirty="0">
-                <a:solidFill>
-                  <a:srgbClr val="0F2A3F"/>
-                </a:solidFill>
-                <a:latin typeface="Calibri" pitchFamily="34" charset="0"/>
-                <a:ea typeface="Calibri" pitchFamily="34" charset="-122"/>
-                <a:cs typeface="Calibri" pitchFamily="34" charset="-120"/>
-              </a:rPr>
-              <a:t>Abstract screen</a:t>
-            </a:r>
-            <a:endParaRPr lang="en-US" sz="1450" dirty="0"/>
-          </a:p>
-        </p:txBody>
-      </p:sp>
-      <p:sp>
-        <p:nvSpPr>
-          <p:cNvPr id="11" name="Text 9"/>
-          <p:cNvSpPr txBox="1"/>
-          <p:nvPr/>
-        </p:nvSpPr>
-        <p:spPr>
-          <a:xfrm>
-            <a:off x="4965192" y="2039112"/>
-            <a:ext cx="2834640" cy="292608"/>
-          </a:xfrm>
-          <a:prstGeom prst="rect">
-            <a:avLst/>
-          </a:prstGeom>
-          <a:noFill/>
-          <a:ln/>
-        </p:spPr>
-        <p:txBody>
-          <a:bodyPr wrap="square" lIns="0" tIns="0" rIns="0" bIns="0" rtlCol="0" anchor="ctr"/>
-          <a:lstStyle/>
-          <a:p>
-            <a:pPr indent="0" marL="0">
-              <a:buNone/>
-            </a:pPr>
-            <a:r>
-              <a:rPr lang="en-US" sz="1150" dirty="0">
-                <a:solidFill>
-                  <a:srgbClr val="5C7286"/>
-                </a:solidFill>
-                <a:latin typeface="Calibri" pitchFamily="34" charset="0"/>
-                <a:ea typeface="Calibri" pitchFamily="34" charset="-122"/>
-                <a:cs typeface="Calibri" pitchFamily="34" charset="-120"/>
-              </a:rPr>
-              <a:t>LLM, criteria from the paper</a:t>
-            </a:r>
-            <a:endParaRPr lang="en-US" sz="1150" dirty="0"/>
-          </a:p>
-        </p:txBody>
-      </p:sp>
-      <p:sp>
-        <p:nvSpPr>
-          <p:cNvPr id="12" name="Shape 10"/>
-          <p:cNvSpPr/>
-          <p:nvPr/>
-        </p:nvSpPr>
-        <p:spPr>
-          <a:xfrm>
-            <a:off x="7936992" y="1737360"/>
-            <a:ext cx="566928" cy="566928"/>
-          </a:xfrm>
-          <a:prstGeom prst="roundRect">
-            <a:avLst>
-              <a:gd name="adj" fmla="val 16129"/>
-            </a:avLst>
-          </a:prstGeom>
-          <a:solidFill>
-            <a:srgbClr val="1C7293"/>
-          </a:solidFill>
-          <a:ln w="12700">
-            <a:solidFill>
-              <a:srgbClr val="1C7293"/>
-            </a:solidFill>
-            <a:prstDash val="solid"/>
-          </a:ln>
-        </p:spPr>
-      </p:sp>
-      <p:sp>
-        <p:nvSpPr>
-          <p:cNvPr id="13" name="Text 11"/>
-          <p:cNvSpPr txBox="1"/>
-          <p:nvPr/>
-        </p:nvSpPr>
-        <p:spPr>
-          <a:xfrm>
-            <a:off x="7936992" y="1737360"/>
-            <a:ext cx="566928" cy="566928"/>
-          </a:xfrm>
-          <a:prstGeom prst="rect">
-            <a:avLst/>
-          </a:prstGeom>
-          <a:noFill/>
-          <a:ln/>
-        </p:spPr>
-        <p:txBody>
-          <a:bodyPr wrap="square" lIns="0" tIns="0" rIns="0" bIns="0" rtlCol="0" anchor="ctr"/>
-          <a:lstStyle/>
-          <a:p>
-            <a:pPr algn="ctr" indent="0" marL="0">
-              <a:buNone/>
-            </a:pPr>
-            <a:r>
-              <a:rPr lang="en-US" sz="1800" b="1" dirty="0">
-                <a:solidFill>
-                  <a:srgbClr val="FFFFFF"/>
-                </a:solidFill>
-                <a:latin typeface="Cambria" pitchFamily="34" charset="0"/>
-                <a:ea typeface="Cambria" pitchFamily="34" charset="-122"/>
-                <a:cs typeface="Cambria" pitchFamily="34" charset="-120"/>
-              </a:rPr>
-              <a:t>3</a:t>
-            </a:r>
-            <a:endParaRPr lang="en-US" sz="1800" dirty="0"/>
-          </a:p>
-        </p:txBody>
-      </p:sp>
-      <p:sp>
-        <p:nvSpPr>
-          <p:cNvPr id="14" name="Text 12"/>
-          <p:cNvSpPr txBox="1"/>
-          <p:nvPr/>
-        </p:nvSpPr>
-        <p:spPr>
-          <a:xfrm>
-            <a:off x="8650224" y="1755648"/>
-            <a:ext cx="2834640" cy="292608"/>
-          </a:xfrm>
-          <a:prstGeom prst="rect">
-            <a:avLst/>
-          </a:prstGeom>
-          <a:noFill/>
-          <a:ln/>
-        </p:spPr>
-        <p:txBody>
-          <a:bodyPr wrap="square" lIns="0" tIns="0" rIns="0" bIns="0" rtlCol="0" anchor="ctr"/>
-          <a:lstStyle/>
-          <a:p>
-            <a:pPr indent="0" marL="0">
-              <a:buNone/>
-            </a:pPr>
-            <a:r>
-              <a:rPr lang="en-US" sz="1450" b="1" dirty="0">
-                <a:solidFill>
-                  <a:srgbClr val="0F2A3F"/>
-                </a:solidFill>
-                <a:latin typeface="Calibri" pitchFamily="34" charset="0"/>
-                <a:ea typeface="Calibri" pitchFamily="34" charset="-122"/>
-                <a:cs typeface="Calibri" pitchFamily="34" charset="-120"/>
-              </a:rPr>
-              <a:t>Retrieval</a:t>
-            </a:r>
-            <a:endParaRPr lang="en-US" sz="1450" dirty="0"/>
-          </a:p>
-        </p:txBody>
-      </p:sp>
-      <p:sp>
-        <p:nvSpPr>
-          <p:cNvPr id="15" name="Text 13"/>
-          <p:cNvSpPr txBox="1"/>
-          <p:nvPr/>
-        </p:nvSpPr>
-        <p:spPr>
-          <a:xfrm>
-            <a:off x="8650224" y="2039112"/>
-            <a:ext cx="2834640" cy="292608"/>
-          </a:xfrm>
-          <a:prstGeom prst="rect">
-            <a:avLst/>
-          </a:prstGeom>
-          <a:noFill/>
-          <a:ln/>
-        </p:spPr>
-        <p:txBody>
-          <a:bodyPr wrap="square" lIns="0" tIns="0" rIns="0" bIns="0" rtlCol="0" anchor="ctr"/>
-          <a:lstStyle/>
-          <a:p>
-            <a:pPr indent="0" marL="0">
-              <a:buNone/>
-            </a:pPr>
-            <a:r>
-              <a:rPr lang="en-US" sz="1150" dirty="0">
-                <a:solidFill>
-                  <a:srgbClr val="5C7286"/>
-                </a:solidFill>
-                <a:latin typeface="Calibri" pitchFamily="34" charset="0"/>
-                <a:ea typeface="Calibri" pitchFamily="34" charset="-122"/>
-                <a:cs typeface="Calibri" pitchFamily="34" charset="-120"/>
-              </a:rPr>
-              <a:t>full text via pubget</a:t>
-            </a:r>
-            <a:endParaRPr lang="en-US" sz="1150" dirty="0"/>
-          </a:p>
-        </p:txBody>
-      </p:sp>
-      <p:sp>
-        <p:nvSpPr>
-          <p:cNvPr id="16" name="Shape 14"/>
-          <p:cNvSpPr/>
-          <p:nvPr/>
-        </p:nvSpPr>
-        <p:spPr>
-          <a:xfrm>
-            <a:off x="566928" y="2926080"/>
-            <a:ext cx="566928" cy="566928"/>
-          </a:xfrm>
-          <a:prstGeom prst="roundRect">
-            <a:avLst>
-              <a:gd name="adj" fmla="val 16129"/>
-            </a:avLst>
-          </a:prstGeom>
-          <a:solidFill>
-            <a:srgbClr val="1C7293"/>
-          </a:solidFill>
-          <a:ln w="12700">
-            <a:solidFill>
-              <a:srgbClr val="1C7293"/>
-            </a:solidFill>
-            <a:prstDash val="solid"/>
-          </a:ln>
-        </p:spPr>
-      </p:sp>
-      <p:sp>
-        <p:nvSpPr>
-          <p:cNvPr id="17" name="Text 15"/>
-          <p:cNvSpPr txBox="1"/>
-          <p:nvPr/>
-        </p:nvSpPr>
-        <p:spPr>
-          <a:xfrm>
-            <a:off x="566928" y="2926080"/>
-            <a:ext cx="566928" cy="566928"/>
-          </a:xfrm>
-          <a:prstGeom prst="rect">
-            <a:avLst/>
-          </a:prstGeom>
-          <a:noFill/>
-          <a:ln/>
-        </p:spPr>
-        <p:txBody>
-          <a:bodyPr wrap="square" lIns="0" tIns="0" rIns="0" bIns="0" rtlCol="0" anchor="ctr"/>
-          <a:lstStyle/>
-          <a:p>
-            <a:pPr algn="ctr" indent="0" marL="0">
-              <a:buNone/>
-            </a:pPr>
-            <a:r>
-              <a:rPr lang="en-US" sz="1800" b="1" dirty="0">
-                <a:solidFill>
-                  <a:srgbClr val="FFFFFF"/>
-                </a:solidFill>
-                <a:latin typeface="Cambria" pitchFamily="34" charset="0"/>
-                <a:ea typeface="Cambria" pitchFamily="34" charset="-122"/>
-                <a:cs typeface="Cambria" pitchFamily="34" charset="-120"/>
-              </a:rPr>
-              <a:t>4</a:t>
-            </a:r>
-            <a:endParaRPr lang="en-US" sz="1800" dirty="0"/>
-          </a:p>
-        </p:txBody>
-      </p:sp>
-      <p:sp>
-        <p:nvSpPr>
-          <p:cNvPr id="18" name="Text 16"/>
-          <p:cNvSpPr txBox="1"/>
-          <p:nvPr/>
-        </p:nvSpPr>
-        <p:spPr>
-          <a:xfrm>
-            <a:off x="1280160" y="2944368"/>
-            <a:ext cx="2834640" cy="292608"/>
-          </a:xfrm>
-          <a:prstGeom prst="rect">
-            <a:avLst/>
-          </a:prstGeom>
-          <a:noFill/>
-          <a:ln/>
-        </p:spPr>
-        <p:txBody>
-          <a:bodyPr wrap="square" lIns="0" tIns="0" rIns="0" bIns="0" rtlCol="0" anchor="ctr"/>
-          <a:lstStyle/>
-          <a:p>
-            <a:pPr indent="0" marL="0">
-              <a:buNone/>
-            </a:pPr>
-            <a:r>
-              <a:rPr lang="en-US" sz="1450" b="1" dirty="0">
-                <a:solidFill>
-                  <a:srgbClr val="0F2A3F"/>
-                </a:solidFill>
-                <a:latin typeface="Calibri" pitchFamily="34" charset="0"/>
-                <a:ea typeface="Calibri" pitchFamily="34" charset="-122"/>
-                <a:cs typeface="Calibri" pitchFamily="34" charset="-120"/>
-              </a:rPr>
-              <a:t>Parsing</a:t>
-            </a:r>
-            <a:endParaRPr lang="en-US" sz="1450" dirty="0"/>
-          </a:p>
-        </p:txBody>
-      </p:sp>
-      <p:sp>
-        <p:nvSpPr>
-          <p:cNvPr id="19" name="Text 17"/>
-          <p:cNvSpPr txBox="1"/>
-          <p:nvPr/>
-        </p:nvSpPr>
-        <p:spPr>
-          <a:xfrm>
-            <a:off x="1280160" y="3227832"/>
-            <a:ext cx="2834640" cy="292608"/>
-          </a:xfrm>
-          <a:prstGeom prst="rect">
-            <a:avLst/>
-          </a:prstGeom>
-          <a:noFill/>
-          <a:ln/>
-        </p:spPr>
-        <p:txBody>
-          <a:bodyPr wrap="square" lIns="0" tIns="0" rIns="0" bIns="0" rtlCol="0" anchor="ctr"/>
-          <a:lstStyle/>
-          <a:p>
-            <a:pPr indent="0" marL="0">
-              <a:buNone/>
-            </a:pPr>
-            <a:r>
-              <a:rPr lang="en-US" sz="1150" dirty="0">
-                <a:solidFill>
-                  <a:srgbClr val="5C7286"/>
-                </a:solidFill>
-                <a:latin typeface="Calibri" pitchFamily="34" charset="0"/>
-                <a:ea typeface="Calibri" pitchFamily="34" charset="-122"/>
-                <a:cs typeface="Calibri" pitchFamily="34" charset="-120"/>
-              </a:rPr>
-              <a:t>coordinate tables → analyses</a:t>
-            </a:r>
-            <a:endParaRPr lang="en-US" sz="1150" dirty="0"/>
-          </a:p>
-        </p:txBody>
-      </p:sp>
-      <p:sp>
-        <p:nvSpPr>
-          <p:cNvPr id="20" name="Shape 18"/>
-          <p:cNvSpPr/>
-          <p:nvPr/>
-        </p:nvSpPr>
-        <p:spPr>
-          <a:xfrm>
-            <a:off x="4251960" y="2926080"/>
-            <a:ext cx="566928" cy="566928"/>
-          </a:xfrm>
-          <a:prstGeom prst="roundRect">
-            <a:avLst>
-              <a:gd name="adj" fmla="val 16129"/>
-            </a:avLst>
-          </a:prstGeom>
-          <a:solidFill>
-            <a:srgbClr val="1C7293"/>
-          </a:solidFill>
-          <a:ln w="12700">
-            <a:solidFill>
-              <a:srgbClr val="1C7293"/>
-            </a:solidFill>
-            <a:prstDash val="solid"/>
-          </a:ln>
-        </p:spPr>
-      </p:sp>
-      <p:sp>
-        <p:nvSpPr>
-          <p:cNvPr id="21" name="Text 19"/>
-          <p:cNvSpPr txBox="1"/>
-          <p:nvPr/>
-        </p:nvSpPr>
-        <p:spPr>
-          <a:xfrm>
-            <a:off x="4251960" y="2926080"/>
-            <a:ext cx="566928" cy="566928"/>
-          </a:xfrm>
-          <a:prstGeom prst="rect">
-            <a:avLst/>
-          </a:prstGeom>
-          <a:noFill/>
-          <a:ln/>
-        </p:spPr>
-        <p:txBody>
-          <a:bodyPr wrap="square" lIns="0" tIns="0" rIns="0" bIns="0" rtlCol="0" anchor="ctr"/>
-          <a:lstStyle/>
-          <a:p>
-            <a:pPr algn="ctr" indent="0" marL="0">
-              <a:buNone/>
-            </a:pPr>
-            <a:r>
-              <a:rPr lang="en-US" sz="1800" b="1" dirty="0">
-                <a:solidFill>
-                  <a:srgbClr val="FFFFFF"/>
-                </a:solidFill>
-                <a:latin typeface="Cambria" pitchFamily="34" charset="0"/>
-                <a:ea typeface="Cambria" pitchFamily="34" charset="-122"/>
-                <a:cs typeface="Cambria" pitchFamily="34" charset="-120"/>
-              </a:rPr>
-              <a:t>5</a:t>
-            </a:r>
-            <a:endParaRPr lang="en-US" sz="1800" dirty="0"/>
-          </a:p>
-        </p:txBody>
-      </p:sp>
-      <p:sp>
-        <p:nvSpPr>
-          <p:cNvPr id="22" name="Text 20"/>
-          <p:cNvSpPr txBox="1"/>
-          <p:nvPr/>
-        </p:nvSpPr>
-        <p:spPr>
-          <a:xfrm>
-            <a:off x="4965192" y="2944368"/>
-            <a:ext cx="2834640" cy="292608"/>
-          </a:xfrm>
-          <a:prstGeom prst="rect">
-            <a:avLst/>
-          </a:prstGeom>
-          <a:noFill/>
-          <a:ln/>
-        </p:spPr>
-        <p:txBody>
-          <a:bodyPr wrap="square" lIns="0" tIns="0" rIns="0" bIns="0" rtlCol="0" anchor="ctr"/>
-          <a:lstStyle/>
-          <a:p>
-            <a:pPr indent="0" marL="0">
-              <a:buNone/>
-            </a:pPr>
-            <a:r>
-              <a:rPr lang="en-US" sz="1450" b="1" dirty="0">
-                <a:solidFill>
-                  <a:srgbClr val="0F2A3F"/>
-                </a:solidFill>
-                <a:latin typeface="Calibri" pitchFamily="34" charset="0"/>
-                <a:ea typeface="Calibri" pitchFamily="34" charset="-122"/>
-                <a:cs typeface="Calibri" pitchFamily="34" charset="-120"/>
-              </a:rPr>
-              <a:t>Annotation</a:t>
-            </a:r>
-            <a:endParaRPr lang="en-US" sz="1450" dirty="0"/>
-          </a:p>
-        </p:txBody>
-      </p:sp>
-      <p:sp>
-        <p:nvSpPr>
-          <p:cNvPr id="23" name="Text 21"/>
-          <p:cNvSpPr txBox="1"/>
-          <p:nvPr/>
-        </p:nvSpPr>
-        <p:spPr>
-          <a:xfrm>
-            <a:off x="4965192" y="3227832"/>
-            <a:ext cx="2834640" cy="292608"/>
-          </a:xfrm>
-          <a:prstGeom prst="rect">
-            <a:avLst/>
-          </a:prstGeom>
-          <a:noFill/>
-          <a:ln/>
-        </p:spPr>
-        <p:txBody>
-          <a:bodyPr wrap="square" lIns="0" tIns="0" rIns="0" bIns="0" rtlCol="0" anchor="ctr"/>
-          <a:lstStyle/>
-          <a:p>
-            <a:pPr indent="0" marL="0">
-              <a:buNone/>
-            </a:pPr>
-            <a:r>
-              <a:rPr lang="en-US" sz="1150" dirty="0">
-                <a:solidFill>
-                  <a:srgbClr val="5C7286"/>
-                </a:solidFill>
-                <a:latin typeface="Calibri" pitchFamily="34" charset="0"/>
-                <a:ea typeface="Calibri" pitchFamily="34" charset="-122"/>
-                <a:cs typeface="Calibri" pitchFamily="34" charset="-120"/>
-              </a:rPr>
-              <a:t>assign analyses to contrasts</a:t>
-            </a:r>
-            <a:endParaRPr lang="en-US" sz="1150" dirty="0"/>
-          </a:p>
-        </p:txBody>
-      </p:sp>
-      <p:sp>
-        <p:nvSpPr>
-          <p:cNvPr id="24" name="Shape 22"/>
-          <p:cNvSpPr/>
-          <p:nvPr/>
-        </p:nvSpPr>
-        <p:spPr>
-          <a:xfrm>
-            <a:off x="7936992" y="2926080"/>
-            <a:ext cx="566928" cy="566928"/>
-          </a:xfrm>
-          <a:prstGeom prst="roundRect">
-            <a:avLst>
-              <a:gd name="adj" fmla="val 16129"/>
-            </a:avLst>
-          </a:prstGeom>
-          <a:solidFill>
-            <a:srgbClr val="1C7293"/>
-          </a:solidFill>
-          <a:ln w="12700">
-            <a:solidFill>
-              <a:srgbClr val="1C7293"/>
-            </a:solidFill>
-            <a:prstDash val="solid"/>
-          </a:ln>
-        </p:spPr>
-      </p:sp>
-      <p:sp>
-        <p:nvSpPr>
-          <p:cNvPr id="25" name="Text 23"/>
-          <p:cNvSpPr txBox="1"/>
-          <p:nvPr/>
-        </p:nvSpPr>
-        <p:spPr>
-          <a:xfrm>
-            <a:off x="7936992" y="2926080"/>
-            <a:ext cx="566928" cy="566928"/>
-          </a:xfrm>
-          <a:prstGeom prst="rect">
-            <a:avLst/>
-          </a:prstGeom>
-          <a:noFill/>
-          <a:ln/>
-        </p:spPr>
-        <p:txBody>
-          <a:bodyPr wrap="square" lIns="0" tIns="0" rIns="0" bIns="0" rtlCol="0" anchor="ctr"/>
-          <a:lstStyle/>
-          <a:p>
-            <a:pPr algn="ctr" indent="0" marL="0">
-              <a:buNone/>
-            </a:pPr>
-            <a:r>
-              <a:rPr lang="en-US" sz="1800" b="1" dirty="0">
-                <a:solidFill>
-                  <a:srgbClr val="FFFFFF"/>
-                </a:solidFill>
-                <a:latin typeface="Cambria" pitchFamily="34" charset="0"/>
-                <a:ea typeface="Cambria" pitchFamily="34" charset="-122"/>
-                <a:cs typeface="Cambria" pitchFamily="34" charset="-120"/>
-              </a:rPr>
-              <a:t>6</a:t>
-            </a:r>
-            <a:endParaRPr lang="en-US" sz="1800" dirty="0"/>
-          </a:p>
-        </p:txBody>
-      </p:sp>
-      <p:sp>
-        <p:nvSpPr>
-          <p:cNvPr id="26" name="Text 24"/>
-          <p:cNvSpPr txBox="1"/>
-          <p:nvPr/>
-        </p:nvSpPr>
-        <p:spPr>
-          <a:xfrm>
-            <a:off x="8650224" y="2944368"/>
-            <a:ext cx="2834640" cy="292608"/>
-          </a:xfrm>
-          <a:prstGeom prst="rect">
-            <a:avLst/>
-          </a:prstGeom>
-          <a:noFill/>
-          <a:ln/>
-        </p:spPr>
-        <p:txBody>
-          <a:bodyPr wrap="square" lIns="0" tIns="0" rIns="0" bIns="0" rtlCol="0" anchor="ctr"/>
-          <a:lstStyle/>
-          <a:p>
-            <a:pPr indent="0" marL="0">
-              <a:buNone/>
-            </a:pPr>
-            <a:r>
-              <a:rPr lang="en-US" sz="1450" b="1" dirty="0">
-                <a:solidFill>
-                  <a:srgbClr val="0F2A3F"/>
-                </a:solidFill>
-                <a:latin typeface="Calibri" pitchFamily="34" charset="0"/>
-                <a:ea typeface="Calibri" pitchFamily="34" charset="-122"/>
-                <a:cs typeface="Calibri" pitchFamily="34" charset="-120"/>
-              </a:rPr>
-              <a:t>Meta-analysis</a:t>
-            </a:r>
-            <a:endParaRPr lang="en-US" sz="1450" dirty="0"/>
-          </a:p>
-        </p:txBody>
-      </p:sp>
-      <p:sp>
-        <p:nvSpPr>
-          <p:cNvPr id="27" name="Text 25"/>
-          <p:cNvSpPr txBox="1"/>
-          <p:nvPr/>
-        </p:nvSpPr>
-        <p:spPr>
-          <a:xfrm>
-            <a:off x="8650224" y="3227832"/>
-            <a:ext cx="2834640" cy="292608"/>
-          </a:xfrm>
-          <a:prstGeom prst="rect">
-            <a:avLst/>
-          </a:prstGeom>
-          <a:noFill/>
-          <a:ln/>
-        </p:spPr>
-        <p:txBody>
-          <a:bodyPr wrap="square" lIns="0" tIns="0" rIns="0" bIns="0" rtlCol="0" anchor="ctr"/>
-          <a:lstStyle/>
-          <a:p>
-            <a:pPr indent="0" marL="0">
-              <a:buNone/>
-            </a:pPr>
-            <a:r>
-              <a:rPr lang="en-US" sz="1150" dirty="0">
-                <a:solidFill>
-                  <a:srgbClr val="5C7286"/>
-                </a:solidFill>
-                <a:latin typeface="Calibri" pitchFamily="34" charset="0"/>
-                <a:ea typeface="Calibri" pitchFamily="34" charset="-122"/>
-                <a:cs typeface="Calibri" pitchFamily="34" charset="-120"/>
-              </a:rPr>
-              <a:t>MKDA → brain map</a:t>
-            </a:r>
-            <a:endParaRPr lang="en-US" sz="1150" dirty="0"/>
-          </a:p>
-        </p:txBody>
-      </p:sp>
-      <p:sp>
-        <p:nvSpPr>
-          <p:cNvPr id="28" name="Shape 26"/>
-          <p:cNvSpPr/>
-          <p:nvPr/>
-        </p:nvSpPr>
-        <p:spPr>
-          <a:xfrm>
-            <a:off x="566928" y="4315968"/>
-            <a:ext cx="2572436" cy="1143000"/>
-          </a:xfrm>
-          <a:prstGeom prst="roundRect">
-            <a:avLst>
-              <a:gd name="adj" fmla="val 6400"/>
-            </a:avLst>
-          </a:prstGeom>
-          <a:solidFill>
-            <a:srgbClr val="EEF3F7"/>
-          </a:solidFill>
-          <a:ln w="12700">
-            <a:solidFill>
-              <a:srgbClr val="EEF3F7"/>
-            </a:solidFill>
-            <a:prstDash val="solid"/>
-          </a:ln>
-        </p:spPr>
-      </p:sp>
-      <p:sp>
-        <p:nvSpPr>
-          <p:cNvPr id="29" name="Text 27"/>
-          <p:cNvSpPr txBox="1"/>
-          <p:nvPr/>
-        </p:nvSpPr>
-        <p:spPr>
-          <a:xfrm>
-            <a:off x="676656" y="4407408"/>
-            <a:ext cx="2352980" cy="475488"/>
-          </a:xfrm>
-          <a:prstGeom prst="rect">
-            <a:avLst/>
-          </a:prstGeom>
-          <a:noFill/>
-          <a:ln/>
-        </p:spPr>
-        <p:txBody>
-          <a:bodyPr wrap="square" lIns="0" tIns="0" rIns="0" bIns="0" rtlCol="0" anchor="ctr"/>
-          <a:lstStyle/>
-          <a:p>
-            <a:pPr algn="ctr" indent="0" marL="0">
-              <a:buNone/>
-            </a:pPr>
-            <a:r>
-              <a:rPr lang="en-US" sz="2600" b="1" dirty="0">
-                <a:solidFill>
-                  <a:srgbClr val="0A3D5C"/>
-                </a:solidFill>
-                <a:latin typeface="Cambria" pitchFamily="34" charset="0"/>
-                <a:ea typeface="Cambria" pitchFamily="34" charset="-122"/>
-                <a:cs typeface="Cambria" pitchFamily="34" charset="-120"/>
-              </a:rPr>
-              <a:t>9</a:t>
-            </a:r>
-            <a:endParaRPr lang="en-US" sz="2600" dirty="0"/>
-          </a:p>
-        </p:txBody>
-      </p:sp>
-      <p:sp>
-        <p:nvSpPr>
-          <p:cNvPr id="30" name="Text 28"/>
-          <p:cNvSpPr txBox="1"/>
-          <p:nvPr/>
-        </p:nvSpPr>
-        <p:spPr>
-          <a:xfrm>
-            <a:off x="676656" y="4864608"/>
-            <a:ext cx="2352980" cy="521208"/>
-          </a:xfrm>
-          <a:prstGeom prst="rect">
-            <a:avLst/>
-          </a:prstGeom>
-          <a:noFill/>
-          <a:ln/>
-        </p:spPr>
-        <p:txBody>
-          <a:bodyPr wrap="square" lIns="0" tIns="0" rIns="0" bIns="0" rtlCol="0" anchor="t"/>
-          <a:lstStyle/>
-          <a:p>
-            <a:pPr algn="ctr" indent="0" marL="0">
-              <a:buNone/>
-            </a:pPr>
-            <a:r>
-              <a:rPr lang="en-US" sz="1100" dirty="0">
-                <a:solidFill>
-                  <a:srgbClr val="5C7286"/>
-                </a:solidFill>
-                <a:latin typeface="Calibri" pitchFamily="34" charset="0"/>
-                <a:ea typeface="Calibri" pitchFamily="34" charset="-122"/>
-                <a:cs typeface="Calibri" pitchFamily="34" charset="-120"/>
-              </a:rPr>
-              <a:t>published meta-analyses</a:t>
-            </a:r>
-            <a:endParaRPr lang="en-US" sz="1100" dirty="0"/>
-          </a:p>
-        </p:txBody>
-      </p:sp>
-      <p:sp>
-        <p:nvSpPr>
-          <p:cNvPr id="31" name="Shape 29"/>
-          <p:cNvSpPr/>
-          <p:nvPr/>
-        </p:nvSpPr>
-        <p:spPr>
-          <a:xfrm>
-            <a:off x="3395396" y="4315968"/>
-            <a:ext cx="2572436" cy="1143000"/>
-          </a:xfrm>
-          <a:prstGeom prst="roundRect">
-            <a:avLst>
-              <a:gd name="adj" fmla="val 6400"/>
-            </a:avLst>
-          </a:prstGeom>
-          <a:solidFill>
-            <a:srgbClr val="EEF3F7"/>
-          </a:solidFill>
-          <a:ln w="12700">
-            <a:solidFill>
-              <a:srgbClr val="EEF3F7"/>
-            </a:solidFill>
-            <a:prstDash val="solid"/>
-          </a:ln>
-        </p:spPr>
-      </p:sp>
-      <p:sp>
-        <p:nvSpPr>
-          <p:cNvPr id="32" name="Text 30"/>
-          <p:cNvSpPr txBox="1"/>
-          <p:nvPr/>
-        </p:nvSpPr>
-        <p:spPr>
-          <a:xfrm>
-            <a:off x="3505124" y="4407408"/>
-            <a:ext cx="2352980" cy="475488"/>
-          </a:xfrm>
-          <a:prstGeom prst="rect">
-            <a:avLst/>
-          </a:prstGeom>
-          <a:noFill/>
-          <a:ln/>
-        </p:spPr>
-        <p:txBody>
-          <a:bodyPr wrap="square" lIns="0" tIns="0" rIns="0" bIns="0" rtlCol="0" anchor="ctr"/>
-          <a:lstStyle/>
-          <a:p>
-            <a:pPr algn="ctr" indent="0" marL="0">
-              <a:buNone/>
-            </a:pPr>
-            <a:r>
-              <a:rPr lang="en-US" sz="2600" b="1" dirty="0">
-                <a:solidFill>
-                  <a:srgbClr val="0A3D5C"/>
-                </a:solidFill>
-                <a:latin typeface="Cambria" pitchFamily="34" charset="0"/>
-                <a:ea typeface="Cambria" pitchFamily="34" charset="-122"/>
-                <a:cs typeface="Cambria" pitchFamily="34" charset="-120"/>
-              </a:rPr>
-              <a:t>32</a:t>
-            </a:r>
-            <a:endParaRPr lang="en-US" sz="2600" dirty="0"/>
-          </a:p>
-        </p:txBody>
-      </p:sp>
-      <p:sp>
-        <p:nvSpPr>
-          <p:cNvPr id="33" name="Text 31"/>
-          <p:cNvSpPr txBox="1"/>
-          <p:nvPr/>
-        </p:nvSpPr>
-        <p:spPr>
-          <a:xfrm>
-            <a:off x="3505124" y="4864608"/>
-            <a:ext cx="2352980" cy="521208"/>
-          </a:xfrm>
-          <a:prstGeom prst="rect">
-            <a:avLst/>
-          </a:prstGeom>
-          <a:noFill/>
-          <a:ln/>
-        </p:spPr>
-        <p:txBody>
-          <a:bodyPr wrap="square" lIns="0" tIns="0" rIns="0" bIns="0" rtlCol="0" anchor="t"/>
-          <a:lstStyle/>
-          <a:p>
-            <a:pPr algn="ctr" indent="0" marL="0">
-              <a:buNone/>
-            </a:pPr>
-            <a:r>
-              <a:rPr lang="en-US" sz="1100" dirty="0">
-                <a:solidFill>
-                  <a:srgbClr val="5C7286"/>
-                </a:solidFill>
-                <a:latin typeface="Calibri" pitchFamily="34" charset="0"/>
-                <a:ea typeface="Calibri" pitchFamily="34" charset="-122"/>
-                <a:cs typeface="Calibri" pitchFamily="34" charset="-120"/>
-              </a:rPr>
-              <a:t>benchmark contrasts scored</a:t>
-            </a:r>
-            <a:endParaRPr lang="en-US" sz="1100" dirty="0"/>
-          </a:p>
-        </p:txBody>
-      </p:sp>
-      <p:sp>
-        <p:nvSpPr>
-          <p:cNvPr id="34" name="Shape 32"/>
-          <p:cNvSpPr/>
-          <p:nvPr/>
-        </p:nvSpPr>
-        <p:spPr>
-          <a:xfrm>
-            <a:off x="6223864" y="4315968"/>
-            <a:ext cx="2572436" cy="1143000"/>
-          </a:xfrm>
-          <a:prstGeom prst="roundRect">
-            <a:avLst>
-              <a:gd name="adj" fmla="val 6400"/>
-            </a:avLst>
-          </a:prstGeom>
-          <a:solidFill>
-            <a:srgbClr val="EEF3F7"/>
-          </a:solidFill>
-          <a:ln w="12700">
-            <a:solidFill>
-              <a:srgbClr val="EEF3F7"/>
-            </a:solidFill>
-            <a:prstDash val="solid"/>
-          </a:ln>
-        </p:spPr>
-      </p:sp>
-      <p:sp>
-        <p:nvSpPr>
-          <p:cNvPr id="35" name="Text 33"/>
-          <p:cNvSpPr txBox="1"/>
-          <p:nvPr/>
-        </p:nvSpPr>
-        <p:spPr>
-          <a:xfrm>
-            <a:off x="6333592" y="4407408"/>
-            <a:ext cx="2352980" cy="475488"/>
-          </a:xfrm>
-          <a:prstGeom prst="rect">
-            <a:avLst/>
-          </a:prstGeom>
-          <a:noFill/>
-          <a:ln/>
-        </p:spPr>
-        <p:txBody>
-          <a:bodyPr wrap="square" lIns="0" tIns="0" rIns="0" bIns="0" rtlCol="0" anchor="ctr"/>
-          <a:lstStyle/>
-          <a:p>
-            <a:pPr algn="ctr" indent="0" marL="0">
-              <a:buNone/>
-            </a:pPr>
-            <a:r>
-              <a:rPr lang="en-US" sz="2600" b="1" dirty="0">
-                <a:solidFill>
-                  <a:srgbClr val="0A3D5C"/>
-                </a:solidFill>
-                <a:latin typeface="Cambria" pitchFamily="34" charset="0"/>
-                <a:ea typeface="Cambria" pitchFamily="34" charset="-122"/>
-                <a:cs typeface="Cambria" pitchFamily="34" charset="-120"/>
-              </a:rPr>
-              <a:t>3</a:t>
-            </a:r>
-            <a:endParaRPr lang="en-US" sz="2600" dirty="0"/>
-          </a:p>
-        </p:txBody>
-      </p:sp>
-      <p:sp>
-        <p:nvSpPr>
-          <p:cNvPr id="36" name="Text 34"/>
-          <p:cNvSpPr txBox="1"/>
-          <p:nvPr/>
-        </p:nvSpPr>
-        <p:spPr>
-          <a:xfrm>
-            <a:off x="6333592" y="4864608"/>
-            <a:ext cx="2352980" cy="521208"/>
-          </a:xfrm>
-          <a:prstGeom prst="rect">
-            <a:avLst/>
-          </a:prstGeom>
-          <a:noFill/>
-          <a:ln/>
-        </p:spPr>
-        <p:txBody>
-          <a:bodyPr wrap="square" lIns="0" tIns="0" rIns="0" bIns="0" rtlCol="0" anchor="t"/>
-          <a:lstStyle/>
-          <a:p>
-            <a:pPr algn="ctr" indent="0" marL="0">
-              <a:buNone/>
-            </a:pPr>
-            <a:r>
-              <a:rPr lang="en-US" sz="1100" dirty="0">
-                <a:solidFill>
-                  <a:srgbClr val="5C7286"/>
-                </a:solidFill>
-                <a:latin typeface="Calibri" pitchFamily="34" charset="0"/>
-                <a:ea typeface="Calibri" pitchFamily="34" charset="-122"/>
-                <a:cs typeface="Calibri" pitchFamily="34" charset="-120"/>
-              </a:rPr>
-              <a:t>arms per contrast</a:t>
-            </a:r>
-            <a:endParaRPr lang="en-US" sz="1100" dirty="0"/>
-          </a:p>
-          <a:p>
-            <a:pPr algn="ctr" indent="0" marL="0">
-              <a:buNone/>
-            </a:pPr>
-            <a:r>
-              <a:rPr lang="en-US" sz="1100" dirty="0">
-                <a:solidFill>
-                  <a:srgbClr val="5C7286"/>
-                </a:solidFill>
-                <a:latin typeface="Calibri" pitchFamily="34" charset="0"/>
-                <a:ea typeface="Calibri" pitchFamily="34" charset="-122"/>
-                <a:cs typeface="Calibri" pitchFamily="34" charset="-120"/>
-              </a:rPr>
-              <a:t>(pipeline / search baseline / expert)</a:t>
-            </a:r>
-            <a:endParaRPr lang="en-US" sz="1100" dirty="0"/>
-          </a:p>
-        </p:txBody>
-      </p:sp>
-      <p:sp>
-        <p:nvSpPr>
-          <p:cNvPr id="37" name="Shape 35"/>
-          <p:cNvSpPr/>
-          <p:nvPr/>
-        </p:nvSpPr>
-        <p:spPr>
-          <a:xfrm>
-            <a:off x="9052331" y="4315968"/>
-            <a:ext cx="2572436" cy="1143000"/>
-          </a:xfrm>
-          <a:prstGeom prst="roundRect">
-            <a:avLst>
-              <a:gd name="adj" fmla="val 6400"/>
-            </a:avLst>
-          </a:prstGeom>
-          <a:solidFill>
-            <a:srgbClr val="EEF3F7"/>
-          </a:solidFill>
-          <a:ln w="12700">
-            <a:solidFill>
-              <a:srgbClr val="EEF3F7"/>
-            </a:solidFill>
-            <a:prstDash val="solid"/>
-          </a:ln>
-        </p:spPr>
-      </p:sp>
-      <p:sp>
-        <p:nvSpPr>
-          <p:cNvPr id="38" name="Text 36"/>
-          <p:cNvSpPr txBox="1"/>
-          <p:nvPr/>
-        </p:nvSpPr>
-        <p:spPr>
-          <a:xfrm>
-            <a:off x="9162059" y="4407408"/>
-            <a:ext cx="2352980" cy="475488"/>
-          </a:xfrm>
-          <a:prstGeom prst="rect">
-            <a:avLst/>
-          </a:prstGeom>
-          <a:noFill/>
-          <a:ln/>
-        </p:spPr>
-        <p:txBody>
-          <a:bodyPr wrap="square" lIns="0" tIns="0" rIns="0" bIns="0" rtlCol="0" anchor="ctr"/>
-          <a:lstStyle/>
-          <a:p>
-            <a:pPr algn="ctr" indent="0" marL="0">
-              <a:buNone/>
-            </a:pPr>
-            <a:r>
-              <a:rPr lang="en-US" sz="2600" b="1" dirty="0">
-                <a:solidFill>
-                  <a:srgbClr val="0A3D5C"/>
-                </a:solidFill>
-                <a:latin typeface="Cambria" pitchFamily="34" charset="0"/>
-                <a:ea typeface="Cambria" pitchFamily="34" charset="-122"/>
-                <a:cs typeface="Cambria" pitchFamily="34" charset="-120"/>
-              </a:rPr>
-              <a:t>MKDA</a:t>
-            </a:r>
-            <a:endParaRPr lang="en-US" sz="2600" dirty="0"/>
-          </a:p>
-        </p:txBody>
-      </p:sp>
-      <p:sp>
-        <p:nvSpPr>
-          <p:cNvPr id="39" name="Text 37"/>
-          <p:cNvSpPr txBox="1"/>
-          <p:nvPr/>
-        </p:nvSpPr>
-        <p:spPr>
-          <a:xfrm>
-            <a:off x="9162059" y="4864608"/>
-            <a:ext cx="2352980" cy="521208"/>
-          </a:xfrm>
-          <a:prstGeom prst="rect">
-            <a:avLst/>
-          </a:prstGeom>
-          <a:noFill/>
-          <a:ln/>
-        </p:spPr>
-        <p:txBody>
-          <a:bodyPr wrap="square" lIns="0" tIns="0" rIns="0" bIns="0" rtlCol="0" anchor="t"/>
-          <a:lstStyle/>
-          <a:p>
-            <a:pPr algn="ctr" indent="0" marL="0">
-              <a:buNone/>
-            </a:pPr>
-            <a:r>
-              <a:rPr lang="en-US" sz="1100" dirty="0">
-                <a:solidFill>
-                  <a:srgbClr val="5C7286"/>
-                </a:solidFill>
-                <a:latin typeface="Calibri" pitchFamily="34" charset="0"/>
-                <a:ea typeface="Calibri" pitchFamily="34" charset="-122"/>
-                <a:cs typeface="Calibri" pitchFamily="34" charset="-120"/>
-              </a:rPr>
-              <a:t>one estimator throughout,</a:t>
-            </a:r>
-            <a:endParaRPr lang="en-US" sz="1100" dirty="0"/>
-          </a:p>
-          <a:p>
-            <a:pPr algn="ctr" indent="0" marL="0">
-              <a:buNone/>
-            </a:pPr>
-            <a:r>
-              <a:rPr lang="en-US" sz="1100" dirty="0">
-                <a:solidFill>
-                  <a:srgbClr val="5C7286"/>
-                </a:solidFill>
-                <a:latin typeface="Calibri" pitchFamily="34" charset="0"/>
-                <a:ea typeface="Calibri" pitchFamily="34" charset="-122"/>
-                <a:cs typeface="Calibri" pitchFamily="34" charset="-120"/>
-              </a:rPr>
-              <a:t>for comparability</a:t>
-            </a:r>
-            <a:endParaRPr lang="en-US" sz="1100" dirty="0"/>
-          </a:p>
-        </p:txBody>
-      </p:sp>
-      <p:sp>
-        <p:nvSpPr>
-          <p:cNvPr id="40" name="Text 38"/>
+      <p:pic>
+        <p:nvPicPr>
+          <p:cNvPr id="4" name="Image 0" descr="/home/zorro/repos/autonima-results/reports/deck_figures/figure2_gold_retention_and_precision.png">    </p:cNvPr>
+          <p:cNvPicPr>
+            <a:picLocks noChangeAspect="1"/>
+          </p:cNvPicPr>
+          <p:nvPr/>
+        </p:nvPicPr>
+        <p:blipFill>
+          <a:blip r:embed="rId1"/>
+          <a:stretch>
+            <a:fillRect/>
+          </a:stretch>
+        </p:blipFill>
+        <p:spPr>
+          <a:xfrm>
+            <a:off x="1821043" y="1627632"/>
+            <a:ext cx="8549608" cy="4160520"/>
+          </a:xfrm>
+          <a:prstGeom prst="rect">
+            <a:avLst/>
+          </a:prstGeom>
+        </p:spPr>
+      </p:pic>
+      <p:sp>
+        <p:nvSpPr>
+          <p:cNvPr id="5" name="Text 2"/>
           <p:cNvSpPr txBox="1"/>
           <p:nvPr/>
         </p:nvSpPr>
@@ -9106,7 +8787,7 @@
                 <a:ea typeface="Calibri" pitchFamily="34" charset="-122"/>
                 <a:cs typeface="Calibri" pitchFamily="34" charset="-120"/>
               </a:rPr>
-              <a:t>Each contrast is scored as a brain-map similarity against the published meta-analytic map for that contrast.</a:t>
+              <a:t>One line per project, black = mean across all nine. Retrieval is shown as its own stage — losing a full text is a supply problem, not a judgement.</a:t>
             </a:r>
             <a:endParaRPr lang="en-US" sz="1050" dirty="0"/>
           </a:p>
@@ -9170,7 +8851,7 @@
                 <a:ea typeface="Cambria" pitchFamily="34" charset="-122"/>
                 <a:cs typeface="Cambria" pitchFamily="34" charset="-120"/>
               </a:rPr>
-              <a:t>Screening raises precision at little cost to recall</a:t>
+              <a:t>What the precision number was really measuring</a:t>
             </a:r>
             <a:endParaRPr lang="en-US" sz="3100" dirty="0"/>
           </a:p>
@@ -9209,7 +8890,7 @@
                 <a:ea typeface="Calibri" pitchFamily="34" charset="-122"/>
                 <a:cs typeface="Calibri" pitchFamily="34" charset="-120"/>
               </a:rPr>
-              <a:t>73% of gold-standard studies survive to the end of the funnel; abstract screening costs a median 1.4 points of them. Mean precision rises 0.10 → 0.32.</a:t>
+              <a:t>A paper survives annotation if it passed full-text screening AND had at least one analysis assigned to a construct — the pipeline’s own answer to “did this paper yield usable data?”</a:t>
             </a:r>
             <a:endParaRPr lang="en-US" sz="1500" dirty="0"/>
           </a:p>
@@ -9217,7 +8898,7 @@
       </p:sp>
       <p:pic>
         <p:nvPicPr>
-          <p:cNvPr id="4" name="Image 0" descr="/home/zorro/repos/autonima-results/reports/deck_figures/figure2_gold_retention_and_precision.png">    </p:cNvPr>
+          <p:cNvPr id="4" name="Image 0" descr="/home/zorro/repos/autonima-results/reports/deck_figures/figure2alt_with_annotation_stage.png">    </p:cNvPr>
           <p:cNvPicPr>
             <a:picLocks noChangeAspect="1"/>
           </p:cNvPicPr>
@@ -9231,8 +8912,8 @@
         </p:blipFill>
         <p:spPr>
           <a:xfrm>
-            <a:off x="1821043" y="1627632"/>
-            <a:ext cx="8549608" cy="4160520"/>
+            <a:off x="566928" y="0"/>
+            <a:ext cx="11057839" cy="914400"/>
           </a:xfrm>
           <a:prstGeom prst="rect">
             <a:avLst/>
@@ -9272,7 +8953,7 @@
                 <a:ea typeface="Calibri" pitchFamily="34" charset="-122"/>
                 <a:cs typeface="Calibri" pitchFamily="34" charset="-120"/>
               </a:rPr>
-              <a:t>One line per project, black = mean across all nine. Retrieval is shown as its own stage — losing a full text is a supply problem, not a judgement.</a:t>
+              <a:t>Precision +0.147 in 9/9 projects (0.32 → 0.47). But recall falls further, −0.25 in 9/9 — and a gold paper lost here is a parsing or annotation miss, not a paper without data.</a:t>
             </a:r>
             <a:endParaRPr lang="en-US" sz="1050" dirty="0"/>
           </a:p>
@@ -9456,7 +9137,7 @@
                 <a:ea typeface="Calibri" pitchFamily="34" charset="-122"/>
                 <a:cs typeface="Calibri" pitchFamily="34" charset="-120"/>
               </a:rPr>
-              <a:t> (+0.007).</a:t>
+              <a:t> cost (+0.007). The gap persists through the new annotation stage (+0.160).</a:t>
             </a:r>
             <a:endParaRPr lang="en-US" sz="1400" dirty="0"/>
           </a:p>
@@ -9519,7 +9200,7 @@
                 <a:ea typeface="Calibri" pitchFamily="34" charset="-122"/>
                 <a:cs typeface="Calibri" pitchFamily="34" charset="-120"/>
               </a:rPr>
-              <a:t>Three projects have a fixed-pool arm. Panel b is the control: a precision gain bought by discarding borderline true positives would show up as a recall loss, and does not.</a:t>
+              <a:t>Three projects have a fixed-pool arm. Panel b is the control: through screening, a precision gain bought by discarding borderline true positives would show as a recall loss, and does not. Recall falls only at annotation, which is a parsing miss rather than a pool effect.</a:t>
             </a:r>
             <a:endParaRPr lang="en-US" sz="1050" dirty="0"/>
           </a:p>

--- a/autonima_results_deck.pptx
+++ b/autonima_results_deck.pptx
@@ -9200,7 +9200,7 @@
                 <a:ea typeface="Calibri" pitchFamily="34" charset="-122"/>
                 <a:cs typeface="Calibri" pitchFamily="34" charset="-120"/>
               </a:rPr>
-              <a:t>Three projects have a fixed-pool arm. Panel b is the control: through screening, a precision gain bought by discarding borderline true positives would show as a recall loss, and does not. Recall falls only at annotation, which is a parsing miss rather than a pool effect.</a:t>
+              <a:t>Three projects have a fixed-pool arm; panel b is the control — a precision gain bought by discarding true positives would show as a recall loss, and does not. Counted directly, 59% of full-text false positives were never in the researchers’ pool at all (27–69% by project).</a:t>
             </a:r>
             <a:endParaRPr lang="en-US" sz="1050" dirty="0"/>
           </a:p>

--- a/autonima_results_deck.pptx
+++ b/autonima_results_deck.pptx
@@ -9109,7 +9109,7 @@
                 <a:ea typeface="Calibri" pitchFamily="34" charset="-122"/>
                 <a:cs typeface="Calibri" pitchFamily="34" charset="-120"/>
               </a:rPr>
-              <a:t>  attributable to the pool alone at full-text screening (0.349 → 0.491), and it costs </a:t>
+              <a:t>  attributable to the pool alone at full-text screening (0.349 → 0.491), at </a:t>
             </a:r>
             <a:pPr indent="0" marL="0">
               <a:buNone/>

--- a/autonima_results_deck.pptx
+++ b/autonima_results_deck.pptx
@@ -8912,8 +8912,8 @@
         </p:blipFill>
         <p:spPr>
           <a:xfrm>
-            <a:off x="566928" y="0"/>
-            <a:ext cx="11057839" cy="914400"/>
+            <a:off x="1523037" y="1627632"/>
+            <a:ext cx="9145622" cy="4160520"/>
           </a:xfrm>
           <a:prstGeom prst="rect">
             <a:avLst/>
@@ -9272,7 +9272,7 @@
       </p:sp>
       <p:pic>
         <p:nvPicPr>
-          <p:cNvPr id="3" name="Image 0" descr="/home/zorro/repos/autonima-results/reports/deck_figures/figure3_recover_and_select_analyses.png">    </p:cNvPr>
+          <p:cNvPr id="3" name="Image 0" descr="/home/zorro/repos/autonima-results/reports/deck_figures/figure3alt_annotation_roc.png">    </p:cNvPr>
           <p:cNvPicPr>
             <a:picLocks noChangeAspect="1"/>
           </p:cNvPicPr>
@@ -9286,8 +9286,8 @@
         </p:blipFill>
         <p:spPr>
           <a:xfrm>
-            <a:off x="4160520" y="1868712"/>
-            <a:ext cx="7452360" cy="3532056"/>
+            <a:off x="4023360" y="1817877"/>
+            <a:ext cx="7589520" cy="3679446"/>
           </a:xfrm>
           <a:prstGeom prst="rect">
             <a:avLst/>
@@ -9561,7 +9561,7 @@
                 <a:ea typeface="Cambria" pitchFamily="34" charset="-122"/>
                 <a:cs typeface="Cambria" pitchFamily="34" charset="-120"/>
               </a:rPr>
-              <a:t>0.668</a:t>
+              <a:t>0.68</a:t>
             </a:r>
             <a:endParaRPr lang="en-US" sz="3000" dirty="0"/>
           </a:p>
@@ -9600,7 +9600,7 @@
                 <a:ea typeface="Calibri" pitchFamily="34" charset="-122"/>
                 <a:cs typeface="Calibri" pitchFamily="34" charset="-120"/>
               </a:rPr>
-              <a:t>mean annotation F1</a:t>
+              <a:t>mean TPR − FPR in ROC space</a:t>
             </a:r>
             <a:endParaRPr lang="en-US" sz="1300" dirty="0"/>
           </a:p>
@@ -9639,7 +9639,7 @@
                 <a:ea typeface="Calibri" pitchFamily="34" charset="-122"/>
                 <a:cs typeface="Calibri" pitchFamily="34" charset="-120"/>
               </a:rPr>
-              <a:t>assigning analyses to the right contrast</a:t>
+              <a:t>against 0 for a same-size random selection</a:t>
             </a:r>
             <a:endParaRPr lang="en-US" sz="1100" dirty="0"/>
           </a:p>
@@ -9678,7 +9678,7 @@
                 <a:ea typeface="Calibri" pitchFamily="34" charset="-122"/>
                 <a:cs typeface="Calibri" pitchFamily="34" charset="-120"/>
               </a:rPr>
-              <a:t>Two operations that both live below the paper: reconstruct the analyses at all, then decide which belong to the contrast.</a:t>
+              <a:t>Two operations that both live below the paper: reconstruct the analyses at all, then decide which belong to the contrast. In panel b the diagonal is chance and each open marker is that project’s own same-size random selection — one baseline for every project, rather than nine prevalence levels.</a:t>
             </a:r>
             <a:endParaRPr lang="en-US" sz="1050" dirty="0"/>
           </a:p>
